--- a/CHL5250PosterParkinsons.pptx
+++ b/CHL5250PosterParkinsons.pptx
@@ -3116,7 +3116,7 @@
         </p:nvSpPr>
         <p:spPr>
           <a:xfrm>
-            <a:off x="180406" y="25159187"/>
+            <a:off x="180406" y="26530787"/>
             <a:ext cx="6964189" cy="707886"/>
           </a:xfrm>
           <a:prstGeom prst="rect">
@@ -3162,7 +3162,7 @@
         </p:nvSpPr>
         <p:spPr>
           <a:xfrm>
-            <a:off x="189957" y="21067530"/>
+            <a:off x="189957" y="21708451"/>
             <a:ext cx="7489039" cy="3954929"/>
           </a:xfrm>
           <a:prstGeom prst="rect">
@@ -3375,7 +3375,7 @@
         </p:nvSpPr>
         <p:spPr>
           <a:xfrm>
-            <a:off x="8984404" y="15242089"/>
+            <a:off x="8984404" y="20032588"/>
             <a:ext cx="17613482" cy="784830"/>
           </a:xfrm>
           <a:prstGeom prst="rect">
@@ -3418,14 +3418,14 @@
           <p:nvPr>
             <p:extLst>
               <p:ext uri="{D42A27DB-BD31-4B8C-83A1-F6EECF244321}">
-                <p14:modId xmlns:p14="http://schemas.microsoft.com/office/powerpoint/2010/main" val="530435325"/>
+                <p14:modId xmlns:p14="http://schemas.microsoft.com/office/powerpoint/2010/main" val="2328192767"/>
               </p:ext>
             </p:extLst>
           </p:nvPr>
         </p:nvGraphicFramePr>
         <p:xfrm>
-          <a:off x="9784519" y="16332587"/>
-          <a:ext cx="9940250" cy="4174862"/>
+          <a:off x="9114964" y="21067530"/>
+          <a:ext cx="9940250" cy="4595850"/>
         </p:xfrm>
         <a:graphic>
           <a:graphicData uri="http://schemas.openxmlformats.org/drawingml/2006/table">
@@ -3477,7 +3477,7 @@
                   </a:extLst>
                 </a:gridCol>
               </a:tblGrid>
-              <a:tr h="754608">
+              <a:tr h="468953">
                 <a:tc>
                   <a:txBody>
                     <a:bodyPr/>
@@ -3802,7 +3802,7 @@
                   </a:ext>
                 </a:extLst>
               </a:tr>
-              <a:tr h="780330">
+              <a:tr h="484938">
                 <a:tc>
                   <a:txBody>
                     <a:bodyPr/>
@@ -3983,7 +3983,7 @@
                   </a:ext>
                 </a:extLst>
               </a:tr>
-              <a:tr h="628925">
+              <a:tr h="390847">
                 <a:tc>
                   <a:txBody>
                     <a:bodyPr/>
@@ -4098,7 +4098,7 @@
                   </a:ext>
                 </a:extLst>
               </a:tr>
-              <a:tr h="628925">
+              <a:tr h="390847">
                 <a:tc>
                   <a:txBody>
                     <a:bodyPr/>
@@ -4213,7 +4213,7 @@
                   </a:ext>
                 </a:extLst>
               </a:tr>
-              <a:tr h="628925">
+              <a:tr h="390847">
                 <a:tc>
                   <a:txBody>
                     <a:bodyPr/>
@@ -4328,7 +4328,7 @@
                   </a:ext>
                 </a:extLst>
               </a:tr>
-              <a:tr h="753149">
+              <a:tr h="2437419">
                 <a:tc>
                   <a:txBody>
                     <a:bodyPr/>
@@ -4597,7 +4597,7 @@
         </p:nvSpPr>
         <p:spPr>
           <a:xfrm>
-            <a:off x="20771125" y="4916743"/>
+            <a:off x="20889732" y="4783159"/>
             <a:ext cx="17613482" cy="784830"/>
           </a:xfrm>
           <a:prstGeom prst="rect">
@@ -4831,7 +4831,7 @@
         </p:nvSpPr>
         <p:spPr>
           <a:xfrm>
-            <a:off x="142740" y="14986964"/>
+            <a:off x="99504" y="12823509"/>
             <a:ext cx="8443444" cy="784830"/>
           </a:xfrm>
           <a:prstGeom prst="rect">
@@ -4879,7 +4879,7 @@
         </p:nvSpPr>
         <p:spPr>
           <a:xfrm>
-            <a:off x="99504" y="20032588"/>
+            <a:off x="99504" y="20923621"/>
             <a:ext cx="8443444" cy="784830"/>
           </a:xfrm>
           <a:prstGeom prst="rect">
@@ -5104,6 +5104,4073 @@
           </a:extLst>
         </p:spPr>
       </p:pic>
+      <p:graphicFrame>
+        <p:nvGraphicFramePr>
+          <p:cNvPr id="86" name="Table 85">
+            <a:extLst>
+              <a:ext uri="{FF2B5EF4-FFF2-40B4-BE49-F238E27FC236}">
+                <a16:creationId xmlns:a16="http://schemas.microsoft.com/office/drawing/2014/main" id="{913C36AB-F790-865B-B715-42C3B126B891}"/>
+              </a:ext>
+            </a:extLst>
+          </p:cNvPr>
+          <p:cNvGraphicFramePr>
+            <a:graphicFrameLocks noGrp="1"/>
+          </p:cNvGraphicFramePr>
+          <p:nvPr>
+            <p:extLst>
+              <p:ext uri="{D42A27DB-BD31-4B8C-83A1-F6EECF244321}">
+                <p14:modId xmlns:p14="http://schemas.microsoft.com/office/powerpoint/2010/main" val="700837492"/>
+              </p:ext>
+            </p:extLst>
+          </p:nvPr>
+        </p:nvGraphicFramePr>
+        <p:xfrm>
+          <a:off x="8804257" y="5728005"/>
+          <a:ext cx="11966870" cy="13675193"/>
+        </p:xfrm>
+        <a:graphic>
+          <a:graphicData uri="http://schemas.openxmlformats.org/drawingml/2006/table">
+            <a:tbl>
+              <a:tblPr/>
+              <a:tblGrid>
+                <a:gridCol w="3064266">
+                  <a:extLst>
+                    <a:ext uri="{9D8B030D-6E8A-4147-A177-3AD203B41FA5}">
+                      <a16:colId xmlns:a16="http://schemas.microsoft.com/office/drawing/2014/main" val="4094381698"/>
+                    </a:ext>
+                  </a:extLst>
+                </a:gridCol>
+                <a:gridCol w="2225651">
+                  <a:extLst>
+                    <a:ext uri="{9D8B030D-6E8A-4147-A177-3AD203B41FA5}">
+                      <a16:colId xmlns:a16="http://schemas.microsoft.com/office/drawing/2014/main" val="1847911096"/>
+                    </a:ext>
+                  </a:extLst>
+                </a:gridCol>
+                <a:gridCol w="2225651">
+                  <a:extLst>
+                    <a:ext uri="{9D8B030D-6E8A-4147-A177-3AD203B41FA5}">
+                      <a16:colId xmlns:a16="http://schemas.microsoft.com/office/drawing/2014/main" val="3771703843"/>
+                    </a:ext>
+                  </a:extLst>
+                </a:gridCol>
+                <a:gridCol w="2225651">
+                  <a:extLst>
+                    <a:ext uri="{9D8B030D-6E8A-4147-A177-3AD203B41FA5}">
+                      <a16:colId xmlns:a16="http://schemas.microsoft.com/office/drawing/2014/main" val="775947912"/>
+                    </a:ext>
+                  </a:extLst>
+                </a:gridCol>
+                <a:gridCol w="2225651">
+                  <a:extLst>
+                    <a:ext uri="{9D8B030D-6E8A-4147-A177-3AD203B41FA5}">
+                      <a16:colId xmlns:a16="http://schemas.microsoft.com/office/drawing/2014/main" val="2832029413"/>
+                    </a:ext>
+                  </a:extLst>
+                </a:gridCol>
+              </a:tblGrid>
+              <a:tr h="1104596">
+                <a:tc>
+                  <a:txBody>
+                    <a:bodyPr/>
+                    <a:lstStyle/>
+                    <a:p>
+                      <a:pPr algn="r" fontAlgn="ctr"/>
+                      <a:r>
+                        <a:rPr lang="en-US" sz="3600" b="1">
+                          <a:solidFill>
+                            <a:srgbClr val="000000"/>
+                          </a:solidFill>
+                          <a:effectLst/>
+                          <a:latin typeface="Cambria" panose="02040503050406030204" pitchFamily="18" charset="0"/>
+                        </a:rPr>
+                        <a:t> </a:t>
+                      </a:r>
+                    </a:p>
+                  </a:txBody>
+                  <a:tcPr marL="10559" marR="10559" marT="5279" marB="5279" anchor="ctr">
+                    <a:lnL w="9525" cap="flat" cmpd="sng" algn="ctr">
+                      <a:solidFill>
+                        <a:srgbClr val="CCCCCC"/>
+                      </a:solidFill>
+                      <a:prstDash val="solid"/>
+                      <a:round/>
+                      <a:headEnd type="none" w="med" len="med"/>
+                      <a:tailEnd type="none" w="med" len="med"/>
+                    </a:lnL>
+                    <a:lnR w="9525" cap="flat" cmpd="sng" algn="ctr">
+                      <a:solidFill>
+                        <a:srgbClr val="CCCCCC"/>
+                      </a:solidFill>
+                      <a:prstDash val="solid"/>
+                      <a:round/>
+                      <a:headEnd type="none" w="med" len="med"/>
+                      <a:tailEnd type="none" w="med" len="med"/>
+                    </a:lnR>
+                    <a:lnT w="9525" cap="flat" cmpd="sng" algn="ctr">
+                      <a:solidFill>
+                        <a:srgbClr val="CCCCCC"/>
+                      </a:solidFill>
+                      <a:prstDash val="solid"/>
+                      <a:round/>
+                      <a:headEnd type="none" w="med" len="med"/>
+                      <a:tailEnd type="none" w="med" len="med"/>
+                    </a:lnT>
+                    <a:lnB w="9525" cap="flat" cmpd="sng" algn="ctr">
+                      <a:solidFill>
+                        <a:srgbClr val="CCCCCC"/>
+                      </a:solidFill>
+                      <a:prstDash val="solid"/>
+                      <a:round/>
+                      <a:headEnd type="none" w="med" len="med"/>
+                      <a:tailEnd type="none" w="med" len="med"/>
+                    </a:lnB>
+                    <a:solidFill>
+                      <a:srgbClr val="F4F4F4"/>
+                    </a:solidFill>
+                  </a:tcPr>
+                </a:tc>
+                <a:tc>
+                  <a:txBody>
+                    <a:bodyPr/>
+                    <a:lstStyle/>
+                    <a:p>
+                      <a:pPr algn="r" fontAlgn="ctr"/>
+                      <a:r>
+                        <a:rPr lang="en-US" sz="3600" b="1">
+                          <a:solidFill>
+                            <a:srgbClr val="000000"/>
+                          </a:solidFill>
+                          <a:effectLst/>
+                          <a:latin typeface="Cambria" panose="02040503050406030204" pitchFamily="18" charset="0"/>
+                        </a:rPr>
+                        <a:t>Overall</a:t>
+                      </a:r>
+                    </a:p>
+                  </a:txBody>
+                  <a:tcPr marL="10559" marR="10559" marT="5279" marB="5279" anchor="ctr">
+                    <a:lnL w="9525" cap="flat" cmpd="sng" algn="ctr">
+                      <a:solidFill>
+                        <a:srgbClr val="CCCCCC"/>
+                      </a:solidFill>
+                      <a:prstDash val="solid"/>
+                      <a:round/>
+                      <a:headEnd type="none" w="med" len="med"/>
+                      <a:tailEnd type="none" w="med" len="med"/>
+                    </a:lnL>
+                    <a:lnR w="9525" cap="flat" cmpd="sng" algn="ctr">
+                      <a:solidFill>
+                        <a:srgbClr val="CCCCCC"/>
+                      </a:solidFill>
+                      <a:prstDash val="solid"/>
+                      <a:round/>
+                      <a:headEnd type="none" w="med" len="med"/>
+                      <a:tailEnd type="none" w="med" len="med"/>
+                    </a:lnR>
+                    <a:lnT w="9525" cap="flat" cmpd="sng" algn="ctr">
+                      <a:solidFill>
+                        <a:srgbClr val="CCCCCC"/>
+                      </a:solidFill>
+                      <a:prstDash val="solid"/>
+                      <a:round/>
+                      <a:headEnd type="none" w="med" len="med"/>
+                      <a:tailEnd type="none" w="med" len="med"/>
+                    </a:lnT>
+                    <a:lnB w="9525" cap="flat" cmpd="sng" algn="ctr">
+                      <a:solidFill>
+                        <a:srgbClr val="EEEEEE"/>
+                      </a:solidFill>
+                      <a:prstDash val="solid"/>
+                      <a:round/>
+                      <a:headEnd type="none" w="med" len="med"/>
+                      <a:tailEnd type="none" w="med" len="med"/>
+                    </a:lnB>
+                    <a:solidFill>
+                      <a:srgbClr val="F4F4F4"/>
+                    </a:solidFill>
+                  </a:tcPr>
+                </a:tc>
+                <a:tc>
+                  <a:txBody>
+                    <a:bodyPr/>
+                    <a:lstStyle/>
+                    <a:p>
+                      <a:pPr algn="r" fontAlgn="ctr"/>
+                      <a:r>
+                        <a:rPr lang="en-US" sz="3600" b="1" dirty="0">
+                          <a:solidFill>
+                            <a:srgbClr val="000000"/>
+                          </a:solidFill>
+                          <a:effectLst/>
+                          <a:latin typeface="Cambria" panose="02040503050406030204" pitchFamily="18" charset="0"/>
+                        </a:rPr>
+                        <a:t>PD</a:t>
+                      </a:r>
+                    </a:p>
+                  </a:txBody>
+                  <a:tcPr marL="10559" marR="10559" marT="5279" marB="5279" anchor="ctr">
+                    <a:lnL w="9525" cap="flat" cmpd="sng" algn="ctr">
+                      <a:solidFill>
+                        <a:srgbClr val="CCCCCC"/>
+                      </a:solidFill>
+                      <a:prstDash val="solid"/>
+                      <a:round/>
+                      <a:headEnd type="none" w="med" len="med"/>
+                      <a:tailEnd type="none" w="med" len="med"/>
+                    </a:lnL>
+                    <a:lnR w="9525" cap="flat" cmpd="sng" algn="ctr">
+                      <a:solidFill>
+                        <a:srgbClr val="CCCCCC"/>
+                      </a:solidFill>
+                      <a:prstDash val="solid"/>
+                      <a:round/>
+                      <a:headEnd type="none" w="med" len="med"/>
+                      <a:tailEnd type="none" w="med" len="med"/>
+                    </a:lnR>
+                    <a:lnT w="9525" cap="flat" cmpd="sng" algn="ctr">
+                      <a:solidFill>
+                        <a:srgbClr val="CCCCCC"/>
+                      </a:solidFill>
+                      <a:prstDash val="solid"/>
+                      <a:round/>
+                      <a:headEnd type="none" w="med" len="med"/>
+                      <a:tailEnd type="none" w="med" len="med"/>
+                    </a:lnT>
+                    <a:lnB w="9525" cap="flat" cmpd="sng" algn="ctr">
+                      <a:solidFill>
+                        <a:srgbClr val="EEEEEE"/>
+                      </a:solidFill>
+                      <a:prstDash val="solid"/>
+                      <a:round/>
+                      <a:headEnd type="none" w="med" len="med"/>
+                      <a:tailEnd type="none" w="med" len="med"/>
+                    </a:lnB>
+                    <a:solidFill>
+                      <a:srgbClr val="F4F4F4"/>
+                    </a:solidFill>
+                  </a:tcPr>
+                </a:tc>
+                <a:tc>
+                  <a:txBody>
+                    <a:bodyPr/>
+                    <a:lstStyle/>
+                    <a:p>
+                      <a:pPr algn="r" fontAlgn="ctr"/>
+                      <a:r>
+                        <a:rPr lang="en-US" sz="3600" b="1" dirty="0">
+                          <a:solidFill>
+                            <a:srgbClr val="000000"/>
+                          </a:solidFill>
+                          <a:effectLst/>
+                          <a:latin typeface="Cambria" panose="02040503050406030204" pitchFamily="18" charset="0"/>
+                        </a:rPr>
+                        <a:t>Healthy control</a:t>
+                      </a:r>
+                    </a:p>
+                  </a:txBody>
+                  <a:tcPr marL="10559" marR="10559" marT="5279" marB="5279" anchor="ctr">
+                    <a:lnL w="9525" cap="flat" cmpd="sng" algn="ctr">
+                      <a:solidFill>
+                        <a:srgbClr val="CCCCCC"/>
+                      </a:solidFill>
+                      <a:prstDash val="solid"/>
+                      <a:round/>
+                      <a:headEnd type="none" w="med" len="med"/>
+                      <a:tailEnd type="none" w="med" len="med"/>
+                    </a:lnL>
+                    <a:lnR w="9525" cap="flat" cmpd="sng" algn="ctr">
+                      <a:solidFill>
+                        <a:srgbClr val="CCCCCC"/>
+                      </a:solidFill>
+                      <a:prstDash val="solid"/>
+                      <a:round/>
+                      <a:headEnd type="none" w="med" len="med"/>
+                      <a:tailEnd type="none" w="med" len="med"/>
+                    </a:lnR>
+                    <a:lnT w="9525" cap="flat" cmpd="sng" algn="ctr">
+                      <a:solidFill>
+                        <a:srgbClr val="CCCCCC"/>
+                      </a:solidFill>
+                      <a:prstDash val="solid"/>
+                      <a:round/>
+                      <a:headEnd type="none" w="med" len="med"/>
+                      <a:tailEnd type="none" w="med" len="med"/>
+                    </a:lnT>
+                    <a:lnB w="9525" cap="flat" cmpd="sng" algn="ctr">
+                      <a:solidFill>
+                        <a:srgbClr val="EEEEEE"/>
+                      </a:solidFill>
+                      <a:prstDash val="solid"/>
+                      <a:round/>
+                      <a:headEnd type="none" w="med" len="med"/>
+                      <a:tailEnd type="none" w="med" len="med"/>
+                    </a:lnB>
+                    <a:solidFill>
+                      <a:srgbClr val="F4F4F4"/>
+                    </a:solidFill>
+                  </a:tcPr>
+                </a:tc>
+                <a:tc>
+                  <a:txBody>
+                    <a:bodyPr/>
+                    <a:lstStyle/>
+                    <a:p>
+                      <a:pPr algn="r" fontAlgn="ctr"/>
+                      <a:r>
+                        <a:rPr lang="en-US" sz="3600" b="1" dirty="0">
+                          <a:solidFill>
+                            <a:srgbClr val="000000"/>
+                          </a:solidFill>
+                          <a:effectLst/>
+                          <a:latin typeface="Cambria" panose="02040503050406030204" pitchFamily="18" charset="0"/>
+                        </a:rPr>
+                        <a:t>PD-Plus</a:t>
+                      </a:r>
+                    </a:p>
+                  </a:txBody>
+                  <a:tcPr marL="10559" marR="10559" marT="5279" marB="5279" anchor="ctr">
+                    <a:lnL w="9525" cap="flat" cmpd="sng" algn="ctr">
+                      <a:solidFill>
+                        <a:srgbClr val="CCCCCC"/>
+                      </a:solidFill>
+                      <a:prstDash val="solid"/>
+                      <a:round/>
+                      <a:headEnd type="none" w="med" len="med"/>
+                      <a:tailEnd type="none" w="med" len="med"/>
+                    </a:lnL>
+                    <a:lnR w="9525" cap="flat" cmpd="sng" algn="ctr">
+                      <a:solidFill>
+                        <a:srgbClr val="CCCCCC"/>
+                      </a:solidFill>
+                      <a:prstDash val="solid"/>
+                      <a:round/>
+                      <a:headEnd type="none" w="med" len="med"/>
+                      <a:tailEnd type="none" w="med" len="med"/>
+                    </a:lnR>
+                    <a:lnT w="9525" cap="flat" cmpd="sng" algn="ctr">
+                      <a:solidFill>
+                        <a:srgbClr val="CCCCCC"/>
+                      </a:solidFill>
+                      <a:prstDash val="solid"/>
+                      <a:round/>
+                      <a:headEnd type="none" w="med" len="med"/>
+                      <a:tailEnd type="none" w="med" len="med"/>
+                    </a:lnT>
+                    <a:lnB w="9525" cap="flat" cmpd="sng" algn="ctr">
+                      <a:solidFill>
+                        <a:srgbClr val="EEEEEE"/>
+                      </a:solidFill>
+                      <a:prstDash val="solid"/>
+                      <a:round/>
+                      <a:headEnd type="none" w="med" len="med"/>
+                      <a:tailEnd type="none" w="med" len="med"/>
+                    </a:lnB>
+                    <a:solidFill>
+                      <a:srgbClr val="F4F4F4"/>
+                    </a:solidFill>
+                  </a:tcPr>
+                </a:tc>
+                <a:extLst>
+                  <a:ext uri="{0D108BD9-81ED-4DB2-BD59-A6C34878D82A}">
+                    <a16:rowId xmlns:a16="http://schemas.microsoft.com/office/drawing/2014/main" val="1972017271"/>
+                  </a:ext>
+                </a:extLst>
+              </a:tr>
+              <a:tr h="968441">
+                <a:tc>
+                  <a:txBody>
+                    <a:bodyPr/>
+                    <a:lstStyle/>
+                    <a:p>
+                      <a:pPr algn="r" fontAlgn="ctr"/>
+                      <a:r>
+                        <a:rPr lang="en-US" sz="3200" b="1" dirty="0">
+                          <a:solidFill>
+                            <a:srgbClr val="000000"/>
+                          </a:solidFill>
+                          <a:effectLst/>
+                          <a:latin typeface="Cambria" panose="02040503050406030204" pitchFamily="18" charset="0"/>
+                        </a:rPr>
+                        <a:t>Sample Size (n)</a:t>
+                      </a:r>
+                    </a:p>
+                  </a:txBody>
+                  <a:tcPr marL="10559" marR="10559" marT="5279" marB="5279" anchor="ctr">
+                    <a:lnL w="9525" cap="flat" cmpd="sng" algn="ctr">
+                      <a:solidFill>
+                        <a:srgbClr val="CCCCCC"/>
+                      </a:solidFill>
+                      <a:prstDash val="solid"/>
+                      <a:round/>
+                      <a:headEnd type="none" w="med" len="med"/>
+                      <a:tailEnd type="none" w="med" len="med"/>
+                    </a:lnL>
+                    <a:lnR w="9525" cap="flat" cmpd="sng" algn="ctr">
+                      <a:solidFill>
+                        <a:srgbClr val="EEEEEE"/>
+                      </a:solidFill>
+                      <a:prstDash val="solid"/>
+                      <a:round/>
+                      <a:headEnd type="none" w="med" len="med"/>
+                      <a:tailEnd type="none" w="med" len="med"/>
+                    </a:lnR>
+                    <a:lnT w="9525" cap="flat" cmpd="sng" algn="ctr">
+                      <a:solidFill>
+                        <a:srgbClr val="CCCCCC"/>
+                      </a:solidFill>
+                      <a:prstDash val="solid"/>
+                      <a:round/>
+                      <a:headEnd type="none" w="med" len="med"/>
+                      <a:tailEnd type="none" w="med" len="med"/>
+                    </a:lnT>
+                    <a:lnB w="9525" cap="flat" cmpd="sng" algn="ctr">
+                      <a:solidFill>
+                        <a:srgbClr val="CCCCCC"/>
+                      </a:solidFill>
+                      <a:prstDash val="solid"/>
+                      <a:round/>
+                      <a:headEnd type="none" w="med" len="med"/>
+                      <a:tailEnd type="none" w="med" len="med"/>
+                    </a:lnB>
+                    <a:solidFill>
+                      <a:srgbClr val="F4F4F4"/>
+                    </a:solidFill>
+                  </a:tcPr>
+                </a:tc>
+                <a:tc>
+                  <a:txBody>
+                    <a:bodyPr/>
+                    <a:lstStyle/>
+                    <a:p>
+                      <a:r>
+                        <a:rPr lang="en-US" sz="3200" dirty="0">
+                          <a:effectLst/>
+                          <a:latin typeface="Cambria" panose="02040503050406030204" pitchFamily="18" charset="0"/>
+                        </a:rPr>
+                        <a:t>3541</a:t>
+                      </a:r>
+                    </a:p>
+                  </a:txBody>
+                  <a:tcPr marL="10559" marR="10559" marT="10559" marB="10559" anchor="ctr">
+                    <a:lnL w="9525" cap="flat" cmpd="sng" algn="ctr">
+                      <a:solidFill>
+                        <a:srgbClr val="EEEEEE"/>
+                      </a:solidFill>
+                      <a:prstDash val="solid"/>
+                      <a:round/>
+                      <a:headEnd type="none" w="med" len="med"/>
+                      <a:tailEnd type="none" w="med" len="med"/>
+                    </a:lnL>
+                    <a:lnR w="9525" cap="flat" cmpd="sng" algn="ctr">
+                      <a:solidFill>
+                        <a:srgbClr val="EEEEEE"/>
+                      </a:solidFill>
+                      <a:prstDash val="solid"/>
+                      <a:round/>
+                      <a:headEnd type="none" w="med" len="med"/>
+                      <a:tailEnd type="none" w="med" len="med"/>
+                    </a:lnR>
+                    <a:lnT w="9525" cap="flat" cmpd="sng" algn="ctr">
+                      <a:solidFill>
+                        <a:srgbClr val="EEEEEE"/>
+                      </a:solidFill>
+                      <a:prstDash val="solid"/>
+                      <a:round/>
+                      <a:headEnd type="none" w="med" len="med"/>
+                      <a:tailEnd type="none" w="med" len="med"/>
+                    </a:lnT>
+                    <a:lnB w="9525" cap="flat" cmpd="sng" algn="ctr">
+                      <a:solidFill>
+                        <a:srgbClr val="EEEEEE"/>
+                      </a:solidFill>
+                      <a:prstDash val="solid"/>
+                      <a:round/>
+                      <a:headEnd type="none" w="med" len="med"/>
+                      <a:tailEnd type="none" w="med" len="med"/>
+                    </a:lnB>
+                    <a:noFill/>
+                  </a:tcPr>
+                </a:tc>
+                <a:tc>
+                  <a:txBody>
+                    <a:bodyPr/>
+                    <a:lstStyle/>
+                    <a:p>
+                      <a:r>
+                        <a:rPr lang="en-US" sz="3200" dirty="0">
+                          <a:effectLst/>
+                          <a:latin typeface="Cambria" panose="02040503050406030204" pitchFamily="18" charset="0"/>
+                        </a:rPr>
+                        <a:t>2852</a:t>
+                      </a:r>
+                    </a:p>
+                  </a:txBody>
+                  <a:tcPr marL="10559" marR="10559" marT="10559" marB="10559" anchor="ctr">
+                    <a:lnL w="9525" cap="flat" cmpd="sng" algn="ctr">
+                      <a:solidFill>
+                        <a:srgbClr val="EEEEEE"/>
+                      </a:solidFill>
+                      <a:prstDash val="solid"/>
+                      <a:round/>
+                      <a:headEnd type="none" w="med" len="med"/>
+                      <a:tailEnd type="none" w="med" len="med"/>
+                    </a:lnL>
+                    <a:lnR w="9525" cap="flat" cmpd="sng" algn="ctr">
+                      <a:solidFill>
+                        <a:srgbClr val="EEEEEE"/>
+                      </a:solidFill>
+                      <a:prstDash val="solid"/>
+                      <a:round/>
+                      <a:headEnd type="none" w="med" len="med"/>
+                      <a:tailEnd type="none" w="med" len="med"/>
+                    </a:lnR>
+                    <a:lnT w="9525" cap="flat" cmpd="sng" algn="ctr">
+                      <a:solidFill>
+                        <a:srgbClr val="EEEEEE"/>
+                      </a:solidFill>
+                      <a:prstDash val="solid"/>
+                      <a:round/>
+                      <a:headEnd type="none" w="med" len="med"/>
+                      <a:tailEnd type="none" w="med" len="med"/>
+                    </a:lnT>
+                    <a:lnB w="9525" cap="flat" cmpd="sng" algn="ctr">
+                      <a:solidFill>
+                        <a:srgbClr val="EEEEEE"/>
+                      </a:solidFill>
+                      <a:prstDash val="solid"/>
+                      <a:round/>
+                      <a:headEnd type="none" w="med" len="med"/>
+                      <a:tailEnd type="none" w="med" len="med"/>
+                    </a:lnB>
+                    <a:noFill/>
+                  </a:tcPr>
+                </a:tc>
+                <a:tc>
+                  <a:txBody>
+                    <a:bodyPr/>
+                    <a:lstStyle/>
+                    <a:p>
+                      <a:r>
+                        <a:rPr lang="en-US" sz="3200" dirty="0">
+                          <a:effectLst/>
+                          <a:latin typeface="Cambria" panose="02040503050406030204" pitchFamily="18" charset="0"/>
+                        </a:rPr>
+                        <a:t>410</a:t>
+                      </a:r>
+                    </a:p>
+                  </a:txBody>
+                  <a:tcPr marL="10559" marR="10559" marT="10559" marB="10559" anchor="ctr">
+                    <a:lnL w="9525" cap="flat" cmpd="sng" algn="ctr">
+                      <a:solidFill>
+                        <a:srgbClr val="EEEEEE"/>
+                      </a:solidFill>
+                      <a:prstDash val="solid"/>
+                      <a:round/>
+                      <a:headEnd type="none" w="med" len="med"/>
+                      <a:tailEnd type="none" w="med" len="med"/>
+                    </a:lnL>
+                    <a:lnR w="9525" cap="flat" cmpd="sng" algn="ctr">
+                      <a:solidFill>
+                        <a:srgbClr val="EEEEEE"/>
+                      </a:solidFill>
+                      <a:prstDash val="solid"/>
+                      <a:round/>
+                      <a:headEnd type="none" w="med" len="med"/>
+                      <a:tailEnd type="none" w="med" len="med"/>
+                    </a:lnR>
+                    <a:lnT w="9525" cap="flat" cmpd="sng" algn="ctr">
+                      <a:solidFill>
+                        <a:srgbClr val="EEEEEE"/>
+                      </a:solidFill>
+                      <a:prstDash val="solid"/>
+                      <a:round/>
+                      <a:headEnd type="none" w="med" len="med"/>
+                      <a:tailEnd type="none" w="med" len="med"/>
+                    </a:lnT>
+                    <a:lnB w="9525" cap="flat" cmpd="sng" algn="ctr">
+                      <a:solidFill>
+                        <a:srgbClr val="EEEEEE"/>
+                      </a:solidFill>
+                      <a:prstDash val="solid"/>
+                      <a:round/>
+                      <a:headEnd type="none" w="med" len="med"/>
+                      <a:tailEnd type="none" w="med" len="med"/>
+                    </a:lnB>
+                    <a:noFill/>
+                  </a:tcPr>
+                </a:tc>
+                <a:tc>
+                  <a:txBody>
+                    <a:bodyPr/>
+                    <a:lstStyle/>
+                    <a:p>
+                      <a:r>
+                        <a:rPr lang="en-US" sz="3200" dirty="0">
+                          <a:effectLst/>
+                          <a:latin typeface="Cambria" panose="02040503050406030204" pitchFamily="18" charset="0"/>
+                        </a:rPr>
+                        <a:t>171</a:t>
+                      </a:r>
+                    </a:p>
+                  </a:txBody>
+                  <a:tcPr marL="10559" marR="10559" marT="10559" marB="10559" anchor="ctr">
+                    <a:lnL w="9525" cap="flat" cmpd="sng" algn="ctr">
+                      <a:solidFill>
+                        <a:srgbClr val="EEEEEE"/>
+                      </a:solidFill>
+                      <a:prstDash val="solid"/>
+                      <a:round/>
+                      <a:headEnd type="none" w="med" len="med"/>
+                      <a:tailEnd type="none" w="med" len="med"/>
+                    </a:lnL>
+                    <a:lnR w="9525" cap="flat" cmpd="sng" algn="ctr">
+                      <a:solidFill>
+                        <a:srgbClr val="EEEEEE"/>
+                      </a:solidFill>
+                      <a:prstDash val="solid"/>
+                      <a:round/>
+                      <a:headEnd type="none" w="med" len="med"/>
+                      <a:tailEnd type="none" w="med" len="med"/>
+                    </a:lnR>
+                    <a:lnT w="9525" cap="flat" cmpd="sng" algn="ctr">
+                      <a:solidFill>
+                        <a:srgbClr val="EEEEEE"/>
+                      </a:solidFill>
+                      <a:prstDash val="solid"/>
+                      <a:round/>
+                      <a:headEnd type="none" w="med" len="med"/>
+                      <a:tailEnd type="none" w="med" len="med"/>
+                    </a:lnT>
+                    <a:lnB w="9525" cap="flat" cmpd="sng" algn="ctr">
+                      <a:solidFill>
+                        <a:srgbClr val="EEEEEE"/>
+                      </a:solidFill>
+                      <a:prstDash val="solid"/>
+                      <a:round/>
+                      <a:headEnd type="none" w="med" len="med"/>
+                      <a:tailEnd type="none" w="med" len="med"/>
+                    </a:lnB>
+                    <a:noFill/>
+                  </a:tcPr>
+                </a:tc>
+                <a:extLst>
+                  <a:ext uri="{0D108BD9-81ED-4DB2-BD59-A6C34878D82A}">
+                    <a16:rowId xmlns:a16="http://schemas.microsoft.com/office/drawing/2014/main" val="486077693"/>
+                  </a:ext>
+                </a:extLst>
+              </a:tr>
+              <a:tr h="979000">
+                <a:tc>
+                  <a:txBody>
+                    <a:bodyPr/>
+                    <a:lstStyle/>
+                    <a:p>
+                      <a:pPr algn="r" fontAlgn="ctr"/>
+                      <a:r>
+                        <a:rPr lang="en-US" sz="3200" b="1" dirty="0">
+                          <a:solidFill>
+                            <a:srgbClr val="000000"/>
+                          </a:solidFill>
+                          <a:effectLst/>
+                          <a:latin typeface="Cambria" panose="02040503050406030204" pitchFamily="18" charset="0"/>
+                        </a:rPr>
+                        <a:t>Current Age</a:t>
+                      </a:r>
+                    </a:p>
+                  </a:txBody>
+                  <a:tcPr marL="10559" marR="10559" marT="5279" marB="5279" anchor="ctr">
+                    <a:lnL w="9525" cap="flat" cmpd="sng" algn="ctr">
+                      <a:solidFill>
+                        <a:srgbClr val="CCCCCC"/>
+                      </a:solidFill>
+                      <a:prstDash val="solid"/>
+                      <a:round/>
+                      <a:headEnd type="none" w="med" len="med"/>
+                      <a:tailEnd type="none" w="med" len="med"/>
+                    </a:lnL>
+                    <a:lnR w="9525" cap="flat" cmpd="sng" algn="ctr">
+                      <a:solidFill>
+                        <a:srgbClr val="EEEEEE"/>
+                      </a:solidFill>
+                      <a:prstDash val="solid"/>
+                      <a:round/>
+                      <a:headEnd type="none" w="med" len="med"/>
+                      <a:tailEnd type="none" w="med" len="med"/>
+                    </a:lnR>
+                    <a:lnT w="9525" cap="flat" cmpd="sng" algn="ctr">
+                      <a:solidFill>
+                        <a:srgbClr val="CCCCCC"/>
+                      </a:solidFill>
+                      <a:prstDash val="solid"/>
+                      <a:round/>
+                      <a:headEnd type="none" w="med" len="med"/>
+                      <a:tailEnd type="none" w="med" len="med"/>
+                    </a:lnT>
+                    <a:lnB w="9525" cap="flat" cmpd="sng" algn="ctr">
+                      <a:solidFill>
+                        <a:srgbClr val="CCCCCC"/>
+                      </a:solidFill>
+                      <a:prstDash val="solid"/>
+                      <a:round/>
+                      <a:headEnd type="none" w="med" len="med"/>
+                      <a:tailEnd type="none" w="med" len="med"/>
+                    </a:lnB>
+                    <a:solidFill>
+                      <a:srgbClr val="F4F4F4"/>
+                    </a:solidFill>
+                  </a:tcPr>
+                </a:tc>
+                <a:tc>
+                  <a:txBody>
+                    <a:bodyPr/>
+                    <a:lstStyle/>
+                    <a:p>
+                      <a:r>
+                        <a:rPr lang="en-US" sz="3200">
+                          <a:effectLst/>
+                          <a:latin typeface="Cambria" panose="02040503050406030204" pitchFamily="18" charset="0"/>
+                        </a:rPr>
+                        <a:t>66.20 (10.04)</a:t>
+                      </a:r>
+                    </a:p>
+                  </a:txBody>
+                  <a:tcPr marL="10559" marR="10559" marT="10559" marB="10559" anchor="ctr">
+                    <a:lnL w="9525" cap="flat" cmpd="sng" algn="ctr">
+                      <a:solidFill>
+                        <a:srgbClr val="EEEEEE"/>
+                      </a:solidFill>
+                      <a:prstDash val="solid"/>
+                      <a:round/>
+                      <a:headEnd type="none" w="med" len="med"/>
+                      <a:tailEnd type="none" w="med" len="med"/>
+                    </a:lnL>
+                    <a:lnR w="9525" cap="flat" cmpd="sng" algn="ctr">
+                      <a:solidFill>
+                        <a:srgbClr val="EEEEEE"/>
+                      </a:solidFill>
+                      <a:prstDash val="solid"/>
+                      <a:round/>
+                      <a:headEnd type="none" w="med" len="med"/>
+                      <a:tailEnd type="none" w="med" len="med"/>
+                    </a:lnR>
+                    <a:lnT w="9525" cap="flat" cmpd="sng" algn="ctr">
+                      <a:solidFill>
+                        <a:srgbClr val="EEEEEE"/>
+                      </a:solidFill>
+                      <a:prstDash val="solid"/>
+                      <a:round/>
+                      <a:headEnd type="none" w="med" len="med"/>
+                      <a:tailEnd type="none" w="med" len="med"/>
+                    </a:lnT>
+                    <a:lnB w="9525" cap="flat" cmpd="sng" algn="ctr">
+                      <a:solidFill>
+                        <a:srgbClr val="EEEEEE"/>
+                      </a:solidFill>
+                      <a:prstDash val="solid"/>
+                      <a:round/>
+                      <a:headEnd type="none" w="med" len="med"/>
+                      <a:tailEnd type="none" w="med" len="med"/>
+                    </a:lnB>
+                    <a:noFill/>
+                  </a:tcPr>
+                </a:tc>
+                <a:tc>
+                  <a:txBody>
+                    <a:bodyPr/>
+                    <a:lstStyle/>
+                    <a:p>
+                      <a:r>
+                        <a:rPr lang="en-US" sz="3200">
+                          <a:effectLst/>
+                          <a:latin typeface="Cambria" panose="02040503050406030204" pitchFamily="18" charset="0"/>
+                        </a:rPr>
+                        <a:t>66.59 (9.59)</a:t>
+                      </a:r>
+                    </a:p>
+                  </a:txBody>
+                  <a:tcPr marL="10559" marR="10559" marT="10559" marB="10559" anchor="ctr">
+                    <a:lnL w="9525" cap="flat" cmpd="sng" algn="ctr">
+                      <a:solidFill>
+                        <a:srgbClr val="EEEEEE"/>
+                      </a:solidFill>
+                      <a:prstDash val="solid"/>
+                      <a:round/>
+                      <a:headEnd type="none" w="med" len="med"/>
+                      <a:tailEnd type="none" w="med" len="med"/>
+                    </a:lnL>
+                    <a:lnR w="9525" cap="flat" cmpd="sng" algn="ctr">
+                      <a:solidFill>
+                        <a:srgbClr val="EEEEEE"/>
+                      </a:solidFill>
+                      <a:prstDash val="solid"/>
+                      <a:round/>
+                      <a:headEnd type="none" w="med" len="med"/>
+                      <a:tailEnd type="none" w="med" len="med"/>
+                    </a:lnR>
+                    <a:lnT w="9525" cap="flat" cmpd="sng" algn="ctr">
+                      <a:solidFill>
+                        <a:srgbClr val="EEEEEE"/>
+                      </a:solidFill>
+                      <a:prstDash val="solid"/>
+                      <a:round/>
+                      <a:headEnd type="none" w="med" len="med"/>
+                      <a:tailEnd type="none" w="med" len="med"/>
+                    </a:lnT>
+                    <a:lnB w="9525" cap="flat" cmpd="sng" algn="ctr">
+                      <a:solidFill>
+                        <a:srgbClr val="EEEEEE"/>
+                      </a:solidFill>
+                      <a:prstDash val="solid"/>
+                      <a:round/>
+                      <a:headEnd type="none" w="med" len="med"/>
+                      <a:tailEnd type="none" w="med" len="med"/>
+                    </a:lnB>
+                    <a:noFill/>
+                  </a:tcPr>
+                </a:tc>
+                <a:tc>
+                  <a:txBody>
+                    <a:bodyPr/>
+                    <a:lstStyle/>
+                    <a:p>
+                      <a:r>
+                        <a:rPr lang="en-US" sz="3200">
+                          <a:effectLst/>
+                          <a:latin typeface="Cambria" panose="02040503050406030204" pitchFamily="18" charset="0"/>
+                        </a:rPr>
+                        <a:t>62.54 (12.22)</a:t>
+                      </a:r>
+                    </a:p>
+                  </a:txBody>
+                  <a:tcPr marL="10559" marR="10559" marT="10559" marB="10559" anchor="ctr">
+                    <a:lnL w="9525" cap="flat" cmpd="sng" algn="ctr">
+                      <a:solidFill>
+                        <a:srgbClr val="EEEEEE"/>
+                      </a:solidFill>
+                      <a:prstDash val="solid"/>
+                      <a:round/>
+                      <a:headEnd type="none" w="med" len="med"/>
+                      <a:tailEnd type="none" w="med" len="med"/>
+                    </a:lnL>
+                    <a:lnR w="9525" cap="flat" cmpd="sng" algn="ctr">
+                      <a:solidFill>
+                        <a:srgbClr val="EEEEEE"/>
+                      </a:solidFill>
+                      <a:prstDash val="solid"/>
+                      <a:round/>
+                      <a:headEnd type="none" w="med" len="med"/>
+                      <a:tailEnd type="none" w="med" len="med"/>
+                    </a:lnR>
+                    <a:lnT w="9525" cap="flat" cmpd="sng" algn="ctr">
+                      <a:solidFill>
+                        <a:srgbClr val="EEEEEE"/>
+                      </a:solidFill>
+                      <a:prstDash val="solid"/>
+                      <a:round/>
+                      <a:headEnd type="none" w="med" len="med"/>
+                      <a:tailEnd type="none" w="med" len="med"/>
+                    </a:lnT>
+                    <a:lnB w="9525" cap="flat" cmpd="sng" algn="ctr">
+                      <a:solidFill>
+                        <a:srgbClr val="EEEEEE"/>
+                      </a:solidFill>
+                      <a:prstDash val="solid"/>
+                      <a:round/>
+                      <a:headEnd type="none" w="med" len="med"/>
+                      <a:tailEnd type="none" w="med" len="med"/>
+                    </a:lnB>
+                    <a:noFill/>
+                  </a:tcPr>
+                </a:tc>
+                <a:tc>
+                  <a:txBody>
+                    <a:bodyPr/>
+                    <a:lstStyle/>
+                    <a:p>
+                      <a:r>
+                        <a:rPr lang="en-US" sz="3200">
+                          <a:effectLst/>
+                          <a:latin typeface="Cambria" panose="02040503050406030204" pitchFamily="18" charset="0"/>
+                        </a:rPr>
+                        <a:t>66.64 (11.71)</a:t>
+                      </a:r>
+                    </a:p>
+                  </a:txBody>
+                  <a:tcPr marL="10559" marR="10559" marT="10559" marB="10559" anchor="ctr">
+                    <a:lnL w="9525" cap="flat" cmpd="sng" algn="ctr">
+                      <a:solidFill>
+                        <a:srgbClr val="EEEEEE"/>
+                      </a:solidFill>
+                      <a:prstDash val="solid"/>
+                      <a:round/>
+                      <a:headEnd type="none" w="med" len="med"/>
+                      <a:tailEnd type="none" w="med" len="med"/>
+                    </a:lnL>
+                    <a:lnR w="9525" cap="flat" cmpd="sng" algn="ctr">
+                      <a:solidFill>
+                        <a:srgbClr val="EEEEEE"/>
+                      </a:solidFill>
+                      <a:prstDash val="solid"/>
+                      <a:round/>
+                      <a:headEnd type="none" w="med" len="med"/>
+                      <a:tailEnd type="none" w="med" len="med"/>
+                    </a:lnR>
+                    <a:lnT w="9525" cap="flat" cmpd="sng" algn="ctr">
+                      <a:solidFill>
+                        <a:srgbClr val="EEEEEE"/>
+                      </a:solidFill>
+                      <a:prstDash val="solid"/>
+                      <a:round/>
+                      <a:headEnd type="none" w="med" len="med"/>
+                      <a:tailEnd type="none" w="med" len="med"/>
+                    </a:lnT>
+                    <a:lnB w="9525" cap="flat" cmpd="sng" algn="ctr">
+                      <a:solidFill>
+                        <a:srgbClr val="EEEEEE"/>
+                      </a:solidFill>
+                      <a:prstDash val="solid"/>
+                      <a:round/>
+                      <a:headEnd type="none" w="med" len="med"/>
+                      <a:tailEnd type="none" w="med" len="med"/>
+                    </a:lnB>
+                    <a:noFill/>
+                  </a:tcPr>
+                </a:tc>
+                <a:extLst>
+                  <a:ext uri="{0D108BD9-81ED-4DB2-BD59-A6C34878D82A}">
+                    <a16:rowId xmlns:a16="http://schemas.microsoft.com/office/drawing/2014/main" val="629620280"/>
+                  </a:ext>
+                </a:extLst>
+              </a:tr>
+              <a:tr h="979000">
+                <a:tc>
+                  <a:txBody>
+                    <a:bodyPr/>
+                    <a:lstStyle/>
+                    <a:p>
+                      <a:pPr algn="r" fontAlgn="ctr"/>
+                      <a:r>
+                        <a:rPr lang="en-US" sz="3200" b="1" dirty="0">
+                          <a:solidFill>
+                            <a:srgbClr val="000000"/>
+                          </a:solidFill>
+                          <a:effectLst/>
+                          <a:latin typeface="Cambria" panose="02040503050406030204" pitchFamily="18" charset="0"/>
+                        </a:rPr>
+                        <a:t>Number of Males</a:t>
+                      </a:r>
+                    </a:p>
+                  </a:txBody>
+                  <a:tcPr marL="10559" marR="10559" marT="5279" marB="5279" anchor="ctr">
+                    <a:lnL w="9525" cap="flat" cmpd="sng" algn="ctr">
+                      <a:solidFill>
+                        <a:srgbClr val="CCCCCC"/>
+                      </a:solidFill>
+                      <a:prstDash val="solid"/>
+                      <a:round/>
+                      <a:headEnd type="none" w="med" len="med"/>
+                      <a:tailEnd type="none" w="med" len="med"/>
+                    </a:lnL>
+                    <a:lnR w="9525" cap="flat" cmpd="sng" algn="ctr">
+                      <a:solidFill>
+                        <a:srgbClr val="EEEEEE"/>
+                      </a:solidFill>
+                      <a:prstDash val="solid"/>
+                      <a:round/>
+                      <a:headEnd type="none" w="med" len="med"/>
+                      <a:tailEnd type="none" w="med" len="med"/>
+                    </a:lnR>
+                    <a:lnT w="9525" cap="flat" cmpd="sng" algn="ctr">
+                      <a:solidFill>
+                        <a:srgbClr val="CCCCCC"/>
+                      </a:solidFill>
+                      <a:prstDash val="solid"/>
+                      <a:round/>
+                      <a:headEnd type="none" w="med" len="med"/>
+                      <a:tailEnd type="none" w="med" len="med"/>
+                    </a:lnT>
+                    <a:lnB w="9525" cap="flat" cmpd="sng" algn="ctr">
+                      <a:solidFill>
+                        <a:srgbClr val="CCCCCC"/>
+                      </a:solidFill>
+                      <a:prstDash val="solid"/>
+                      <a:round/>
+                      <a:headEnd type="none" w="med" len="med"/>
+                      <a:tailEnd type="none" w="med" len="med"/>
+                    </a:lnB>
+                    <a:solidFill>
+                      <a:srgbClr val="F4F4F4"/>
+                    </a:solidFill>
+                  </a:tcPr>
+                </a:tc>
+                <a:tc>
+                  <a:txBody>
+                    <a:bodyPr/>
+                    <a:lstStyle/>
+                    <a:p>
+                      <a:r>
+                        <a:rPr lang="en-US" sz="3200" dirty="0">
+                          <a:effectLst/>
+                          <a:latin typeface="Cambria" panose="02040503050406030204" pitchFamily="18" charset="0"/>
+                        </a:rPr>
+                        <a:t>1804 (50.9%)</a:t>
+                      </a:r>
+                    </a:p>
+                  </a:txBody>
+                  <a:tcPr marL="10559" marR="10559" marT="10559" marB="10559" anchor="ctr">
+                    <a:lnL w="9525" cap="flat" cmpd="sng" algn="ctr">
+                      <a:solidFill>
+                        <a:srgbClr val="EEEEEE"/>
+                      </a:solidFill>
+                      <a:prstDash val="solid"/>
+                      <a:round/>
+                      <a:headEnd type="none" w="med" len="med"/>
+                      <a:tailEnd type="none" w="med" len="med"/>
+                    </a:lnL>
+                    <a:lnR w="9525" cap="flat" cmpd="sng" algn="ctr">
+                      <a:solidFill>
+                        <a:srgbClr val="EEEEEE"/>
+                      </a:solidFill>
+                      <a:prstDash val="solid"/>
+                      <a:round/>
+                      <a:headEnd type="none" w="med" len="med"/>
+                      <a:tailEnd type="none" w="med" len="med"/>
+                    </a:lnR>
+                    <a:lnT w="9525" cap="flat" cmpd="sng" algn="ctr">
+                      <a:solidFill>
+                        <a:srgbClr val="EEEEEE"/>
+                      </a:solidFill>
+                      <a:prstDash val="solid"/>
+                      <a:round/>
+                      <a:headEnd type="none" w="med" len="med"/>
+                      <a:tailEnd type="none" w="med" len="med"/>
+                    </a:lnT>
+                    <a:lnB w="9525" cap="flat" cmpd="sng" algn="ctr">
+                      <a:solidFill>
+                        <a:srgbClr val="EEEEEE"/>
+                      </a:solidFill>
+                      <a:prstDash val="solid"/>
+                      <a:round/>
+                      <a:headEnd type="none" w="med" len="med"/>
+                      <a:tailEnd type="none" w="med" len="med"/>
+                    </a:lnB>
+                    <a:noFill/>
+                  </a:tcPr>
+                </a:tc>
+                <a:tc>
+                  <a:txBody>
+                    <a:bodyPr/>
+                    <a:lstStyle/>
+                    <a:p>
+                      <a:r>
+                        <a:rPr lang="en-US" sz="3200" dirty="0">
+                          <a:effectLst/>
+                          <a:latin typeface="Cambria" panose="02040503050406030204" pitchFamily="18" charset="0"/>
+                        </a:rPr>
+                        <a:t>1612 (56.5%)</a:t>
+                      </a:r>
+                    </a:p>
+                  </a:txBody>
+                  <a:tcPr marL="10559" marR="10559" marT="10559" marB="10559" anchor="ctr">
+                    <a:lnL w="9525" cap="flat" cmpd="sng" algn="ctr">
+                      <a:solidFill>
+                        <a:srgbClr val="EEEEEE"/>
+                      </a:solidFill>
+                      <a:prstDash val="solid"/>
+                      <a:round/>
+                      <a:headEnd type="none" w="med" len="med"/>
+                      <a:tailEnd type="none" w="med" len="med"/>
+                    </a:lnL>
+                    <a:lnR w="9525" cap="flat" cmpd="sng" algn="ctr">
+                      <a:solidFill>
+                        <a:srgbClr val="EEEEEE"/>
+                      </a:solidFill>
+                      <a:prstDash val="solid"/>
+                      <a:round/>
+                      <a:headEnd type="none" w="med" len="med"/>
+                      <a:tailEnd type="none" w="med" len="med"/>
+                    </a:lnR>
+                    <a:lnT w="9525" cap="flat" cmpd="sng" algn="ctr">
+                      <a:solidFill>
+                        <a:srgbClr val="EEEEEE"/>
+                      </a:solidFill>
+                      <a:prstDash val="solid"/>
+                      <a:round/>
+                      <a:headEnd type="none" w="med" len="med"/>
+                      <a:tailEnd type="none" w="med" len="med"/>
+                    </a:lnT>
+                    <a:lnB w="9525" cap="flat" cmpd="sng" algn="ctr">
+                      <a:solidFill>
+                        <a:srgbClr val="EEEEEE"/>
+                      </a:solidFill>
+                      <a:prstDash val="solid"/>
+                      <a:round/>
+                      <a:headEnd type="none" w="med" len="med"/>
+                      <a:tailEnd type="none" w="med" len="med"/>
+                    </a:lnB>
+                    <a:noFill/>
+                  </a:tcPr>
+                </a:tc>
+                <a:tc>
+                  <a:txBody>
+                    <a:bodyPr/>
+                    <a:lstStyle/>
+                    <a:p>
+                      <a:r>
+                        <a:rPr lang="en-US" sz="3200" dirty="0">
+                          <a:effectLst/>
+                          <a:latin typeface="Cambria" panose="02040503050406030204" pitchFamily="18" charset="0"/>
+                        </a:rPr>
+                        <a:t>181 (44.1%)</a:t>
+                      </a:r>
+                    </a:p>
+                  </a:txBody>
+                  <a:tcPr marL="10559" marR="10559" marT="10559" marB="10559" anchor="ctr">
+                    <a:lnL w="9525" cap="flat" cmpd="sng" algn="ctr">
+                      <a:solidFill>
+                        <a:srgbClr val="EEEEEE"/>
+                      </a:solidFill>
+                      <a:prstDash val="solid"/>
+                      <a:round/>
+                      <a:headEnd type="none" w="med" len="med"/>
+                      <a:tailEnd type="none" w="med" len="med"/>
+                    </a:lnL>
+                    <a:lnR w="9525" cap="flat" cmpd="sng" algn="ctr">
+                      <a:solidFill>
+                        <a:srgbClr val="EEEEEE"/>
+                      </a:solidFill>
+                      <a:prstDash val="solid"/>
+                      <a:round/>
+                      <a:headEnd type="none" w="med" len="med"/>
+                      <a:tailEnd type="none" w="med" len="med"/>
+                    </a:lnR>
+                    <a:lnT w="9525" cap="flat" cmpd="sng" algn="ctr">
+                      <a:solidFill>
+                        <a:srgbClr val="EEEEEE"/>
+                      </a:solidFill>
+                      <a:prstDash val="solid"/>
+                      <a:round/>
+                      <a:headEnd type="none" w="med" len="med"/>
+                      <a:tailEnd type="none" w="med" len="med"/>
+                    </a:lnT>
+                    <a:lnB w="9525" cap="flat" cmpd="sng" algn="ctr">
+                      <a:solidFill>
+                        <a:srgbClr val="EEEEEE"/>
+                      </a:solidFill>
+                      <a:prstDash val="solid"/>
+                      <a:round/>
+                      <a:headEnd type="none" w="med" len="med"/>
+                      <a:tailEnd type="none" w="med" len="med"/>
+                    </a:lnB>
+                    <a:noFill/>
+                  </a:tcPr>
+                </a:tc>
+                <a:tc>
+                  <a:txBody>
+                    <a:bodyPr/>
+                    <a:lstStyle/>
+                    <a:p>
+                      <a:r>
+                        <a:rPr lang="en-US" sz="3200" dirty="0">
+                          <a:effectLst/>
+                          <a:latin typeface="Cambria" panose="02040503050406030204" pitchFamily="18" charset="0"/>
+                        </a:rPr>
+                        <a:t>78 (45.6%)</a:t>
+                      </a:r>
+                    </a:p>
+                  </a:txBody>
+                  <a:tcPr marL="10559" marR="10559" marT="10559" marB="10559" anchor="ctr">
+                    <a:lnL w="9525" cap="flat" cmpd="sng" algn="ctr">
+                      <a:solidFill>
+                        <a:srgbClr val="EEEEEE"/>
+                      </a:solidFill>
+                      <a:prstDash val="solid"/>
+                      <a:round/>
+                      <a:headEnd type="none" w="med" len="med"/>
+                      <a:tailEnd type="none" w="med" len="med"/>
+                    </a:lnL>
+                    <a:lnR w="9525" cap="flat" cmpd="sng" algn="ctr">
+                      <a:solidFill>
+                        <a:srgbClr val="EEEEEE"/>
+                      </a:solidFill>
+                      <a:prstDash val="solid"/>
+                      <a:round/>
+                      <a:headEnd type="none" w="med" len="med"/>
+                      <a:tailEnd type="none" w="med" len="med"/>
+                    </a:lnR>
+                    <a:lnT w="9525" cap="flat" cmpd="sng" algn="ctr">
+                      <a:solidFill>
+                        <a:srgbClr val="EEEEEE"/>
+                      </a:solidFill>
+                      <a:prstDash val="solid"/>
+                      <a:round/>
+                      <a:headEnd type="none" w="med" len="med"/>
+                      <a:tailEnd type="none" w="med" len="med"/>
+                    </a:lnT>
+                    <a:lnB w="9525" cap="flat" cmpd="sng" algn="ctr">
+                      <a:solidFill>
+                        <a:srgbClr val="EEEEEE"/>
+                      </a:solidFill>
+                      <a:prstDash val="solid"/>
+                      <a:round/>
+                      <a:headEnd type="none" w="med" len="med"/>
+                      <a:tailEnd type="none" w="med" len="med"/>
+                    </a:lnB>
+                    <a:noFill/>
+                  </a:tcPr>
+                </a:tc>
+                <a:extLst>
+                  <a:ext uri="{0D108BD9-81ED-4DB2-BD59-A6C34878D82A}">
+                    <a16:rowId xmlns:a16="http://schemas.microsoft.com/office/drawing/2014/main" val="4188399457"/>
+                  </a:ext>
+                </a:extLst>
+              </a:tr>
+              <a:tr h="1105282">
+                <a:tc>
+                  <a:txBody>
+                    <a:bodyPr/>
+                    <a:lstStyle/>
+                    <a:p>
+                      <a:pPr algn="r" fontAlgn="ctr"/>
+                      <a:r>
+                        <a:rPr lang="en-US" sz="3200" b="1" dirty="0">
+                          <a:solidFill>
+                            <a:srgbClr val="000000"/>
+                          </a:solidFill>
+                          <a:effectLst/>
+                          <a:latin typeface="Cambria" panose="02040503050406030204" pitchFamily="18" charset="0"/>
+                        </a:rPr>
+                        <a:t>Disease Duration</a:t>
+                      </a:r>
+                    </a:p>
+                  </a:txBody>
+                  <a:tcPr marL="10559" marR="10559" marT="5279" marB="5279" anchor="ctr">
+                    <a:lnL w="9525" cap="flat" cmpd="sng" algn="ctr">
+                      <a:solidFill>
+                        <a:srgbClr val="CCCCCC"/>
+                      </a:solidFill>
+                      <a:prstDash val="solid"/>
+                      <a:round/>
+                      <a:headEnd type="none" w="med" len="med"/>
+                      <a:tailEnd type="none" w="med" len="med"/>
+                    </a:lnL>
+                    <a:lnR w="9525" cap="flat" cmpd="sng" algn="ctr">
+                      <a:solidFill>
+                        <a:srgbClr val="EEEEEE"/>
+                      </a:solidFill>
+                      <a:prstDash val="solid"/>
+                      <a:round/>
+                      <a:headEnd type="none" w="med" len="med"/>
+                      <a:tailEnd type="none" w="med" len="med"/>
+                    </a:lnR>
+                    <a:lnT w="9525" cap="flat" cmpd="sng" algn="ctr">
+                      <a:solidFill>
+                        <a:srgbClr val="CCCCCC"/>
+                      </a:solidFill>
+                      <a:prstDash val="solid"/>
+                      <a:round/>
+                      <a:headEnd type="none" w="med" len="med"/>
+                      <a:tailEnd type="none" w="med" len="med"/>
+                    </a:lnT>
+                    <a:lnB w="9525" cap="flat" cmpd="sng" algn="ctr">
+                      <a:solidFill>
+                        <a:srgbClr val="CCCCCC"/>
+                      </a:solidFill>
+                      <a:prstDash val="solid"/>
+                      <a:round/>
+                      <a:headEnd type="none" w="med" len="med"/>
+                      <a:tailEnd type="none" w="med" len="med"/>
+                    </a:lnB>
+                    <a:solidFill>
+                      <a:srgbClr val="F4F4F4"/>
+                    </a:solidFill>
+                  </a:tcPr>
+                </a:tc>
+                <a:tc>
+                  <a:txBody>
+                    <a:bodyPr/>
+                    <a:lstStyle/>
+                    <a:p>
+                      <a:r>
+                        <a:rPr lang="en-US" sz="3200" dirty="0">
+                          <a:effectLst/>
+                          <a:latin typeface="Cambria" panose="02040503050406030204" pitchFamily="18" charset="0"/>
+                        </a:rPr>
+                        <a:t>9.64 (6.01)</a:t>
+                      </a:r>
+                    </a:p>
+                  </a:txBody>
+                  <a:tcPr marL="10559" marR="10559" marT="10559" marB="10559" anchor="ctr">
+                    <a:lnL w="9525" cap="flat" cmpd="sng" algn="ctr">
+                      <a:solidFill>
+                        <a:srgbClr val="EEEEEE"/>
+                      </a:solidFill>
+                      <a:prstDash val="solid"/>
+                      <a:round/>
+                      <a:headEnd type="none" w="med" len="med"/>
+                      <a:tailEnd type="none" w="med" len="med"/>
+                    </a:lnL>
+                    <a:lnR w="9525" cap="flat" cmpd="sng" algn="ctr">
+                      <a:solidFill>
+                        <a:srgbClr val="EEEEEE"/>
+                      </a:solidFill>
+                      <a:prstDash val="solid"/>
+                      <a:round/>
+                      <a:headEnd type="none" w="med" len="med"/>
+                      <a:tailEnd type="none" w="med" len="med"/>
+                    </a:lnR>
+                    <a:lnT w="9525" cap="flat" cmpd="sng" algn="ctr">
+                      <a:solidFill>
+                        <a:srgbClr val="EEEEEE"/>
+                      </a:solidFill>
+                      <a:prstDash val="solid"/>
+                      <a:round/>
+                      <a:headEnd type="none" w="med" len="med"/>
+                      <a:tailEnd type="none" w="med" len="med"/>
+                    </a:lnT>
+                    <a:lnB w="9525" cap="flat" cmpd="sng" algn="ctr">
+                      <a:solidFill>
+                        <a:srgbClr val="EEEEEE"/>
+                      </a:solidFill>
+                      <a:prstDash val="solid"/>
+                      <a:round/>
+                      <a:headEnd type="none" w="med" len="med"/>
+                      <a:tailEnd type="none" w="med" len="med"/>
+                    </a:lnB>
+                    <a:noFill/>
+                  </a:tcPr>
+                </a:tc>
+                <a:tc>
+                  <a:txBody>
+                    <a:bodyPr/>
+                    <a:lstStyle/>
+                    <a:p>
+                      <a:r>
+                        <a:rPr lang="en-US" sz="3200">
+                          <a:effectLst/>
+                          <a:latin typeface="Cambria" panose="02040503050406030204" pitchFamily="18" charset="0"/>
+                        </a:rPr>
+                        <a:t>9.83 (5.98)</a:t>
+                      </a:r>
+                    </a:p>
+                  </a:txBody>
+                  <a:tcPr marL="10559" marR="10559" marT="10559" marB="10559" anchor="ctr">
+                    <a:lnL w="9525" cap="flat" cmpd="sng" algn="ctr">
+                      <a:solidFill>
+                        <a:srgbClr val="EEEEEE"/>
+                      </a:solidFill>
+                      <a:prstDash val="solid"/>
+                      <a:round/>
+                      <a:headEnd type="none" w="med" len="med"/>
+                      <a:tailEnd type="none" w="med" len="med"/>
+                    </a:lnL>
+                    <a:lnR w="9525" cap="flat" cmpd="sng" algn="ctr">
+                      <a:solidFill>
+                        <a:srgbClr val="EEEEEE"/>
+                      </a:solidFill>
+                      <a:prstDash val="solid"/>
+                      <a:round/>
+                      <a:headEnd type="none" w="med" len="med"/>
+                      <a:tailEnd type="none" w="med" len="med"/>
+                    </a:lnR>
+                    <a:lnT w="9525" cap="flat" cmpd="sng" algn="ctr">
+                      <a:solidFill>
+                        <a:srgbClr val="EEEEEE"/>
+                      </a:solidFill>
+                      <a:prstDash val="solid"/>
+                      <a:round/>
+                      <a:headEnd type="none" w="med" len="med"/>
+                      <a:tailEnd type="none" w="med" len="med"/>
+                    </a:lnT>
+                    <a:lnB w="9525" cap="flat" cmpd="sng" algn="ctr">
+                      <a:solidFill>
+                        <a:srgbClr val="EEEEEE"/>
+                      </a:solidFill>
+                      <a:prstDash val="solid"/>
+                      <a:round/>
+                      <a:headEnd type="none" w="med" len="med"/>
+                      <a:tailEnd type="none" w="med" len="med"/>
+                    </a:lnB>
+                    <a:noFill/>
+                  </a:tcPr>
+                </a:tc>
+                <a:tc>
+                  <a:txBody>
+                    <a:bodyPr/>
+                    <a:lstStyle/>
+                    <a:p>
+                      <a:r>
+                        <a:rPr lang="en-US" sz="3200" dirty="0">
+                          <a:effectLst/>
+                          <a:latin typeface="Cambria" panose="02040503050406030204" pitchFamily="18" charset="0"/>
+                        </a:rPr>
+                        <a:t>---</a:t>
+                      </a:r>
+                    </a:p>
+                  </a:txBody>
+                  <a:tcPr marL="10559" marR="10559" marT="10559" marB="10559" anchor="ctr">
+                    <a:lnL w="9525" cap="flat" cmpd="sng" algn="ctr">
+                      <a:solidFill>
+                        <a:srgbClr val="EEEEEE"/>
+                      </a:solidFill>
+                      <a:prstDash val="solid"/>
+                      <a:round/>
+                      <a:headEnd type="none" w="med" len="med"/>
+                      <a:tailEnd type="none" w="med" len="med"/>
+                    </a:lnL>
+                    <a:lnR w="9525" cap="flat" cmpd="sng" algn="ctr">
+                      <a:solidFill>
+                        <a:srgbClr val="EEEEEE"/>
+                      </a:solidFill>
+                      <a:prstDash val="solid"/>
+                      <a:round/>
+                      <a:headEnd type="none" w="med" len="med"/>
+                      <a:tailEnd type="none" w="med" len="med"/>
+                    </a:lnR>
+                    <a:lnT w="9525" cap="flat" cmpd="sng" algn="ctr">
+                      <a:solidFill>
+                        <a:srgbClr val="EEEEEE"/>
+                      </a:solidFill>
+                      <a:prstDash val="solid"/>
+                      <a:round/>
+                      <a:headEnd type="none" w="med" len="med"/>
+                      <a:tailEnd type="none" w="med" len="med"/>
+                    </a:lnT>
+                    <a:lnB w="9525" cap="flat" cmpd="sng" algn="ctr">
+                      <a:solidFill>
+                        <a:srgbClr val="EEEEEE"/>
+                      </a:solidFill>
+                      <a:prstDash val="solid"/>
+                      <a:round/>
+                      <a:headEnd type="none" w="med" len="med"/>
+                      <a:tailEnd type="none" w="med" len="med"/>
+                    </a:lnB>
+                    <a:noFill/>
+                  </a:tcPr>
+                </a:tc>
+                <a:tc>
+                  <a:txBody>
+                    <a:bodyPr/>
+                    <a:lstStyle/>
+                    <a:p>
+                      <a:r>
+                        <a:rPr lang="en-US" sz="3200" dirty="0">
+                          <a:effectLst/>
+                          <a:latin typeface="Cambria" panose="02040503050406030204" pitchFamily="18" charset="0"/>
+                        </a:rPr>
+                        <a:t>6.05 (5.50)</a:t>
+                      </a:r>
+                    </a:p>
+                  </a:txBody>
+                  <a:tcPr marL="10559" marR="10559" marT="10559" marB="10559" anchor="ctr">
+                    <a:lnL w="9525" cap="flat" cmpd="sng" algn="ctr">
+                      <a:solidFill>
+                        <a:srgbClr val="EEEEEE"/>
+                      </a:solidFill>
+                      <a:prstDash val="solid"/>
+                      <a:round/>
+                      <a:headEnd type="none" w="med" len="med"/>
+                      <a:tailEnd type="none" w="med" len="med"/>
+                    </a:lnL>
+                    <a:lnR w="9525" cap="flat" cmpd="sng" algn="ctr">
+                      <a:solidFill>
+                        <a:srgbClr val="EEEEEE"/>
+                      </a:solidFill>
+                      <a:prstDash val="solid"/>
+                      <a:round/>
+                      <a:headEnd type="none" w="med" len="med"/>
+                      <a:tailEnd type="none" w="med" len="med"/>
+                    </a:lnR>
+                    <a:lnT w="9525" cap="flat" cmpd="sng" algn="ctr">
+                      <a:solidFill>
+                        <a:srgbClr val="EEEEEE"/>
+                      </a:solidFill>
+                      <a:prstDash val="solid"/>
+                      <a:round/>
+                      <a:headEnd type="none" w="med" len="med"/>
+                      <a:tailEnd type="none" w="med" len="med"/>
+                    </a:lnT>
+                    <a:lnB w="9525" cap="flat" cmpd="sng" algn="ctr">
+                      <a:solidFill>
+                        <a:srgbClr val="EEEEEE"/>
+                      </a:solidFill>
+                      <a:prstDash val="solid"/>
+                      <a:round/>
+                      <a:headEnd type="none" w="med" len="med"/>
+                      <a:tailEnd type="none" w="med" len="med"/>
+                    </a:lnB>
+                    <a:noFill/>
+                  </a:tcPr>
+                </a:tc>
+                <a:extLst>
+                  <a:ext uri="{0D108BD9-81ED-4DB2-BD59-A6C34878D82A}">
+                    <a16:rowId xmlns:a16="http://schemas.microsoft.com/office/drawing/2014/main" val="1189675502"/>
+                  </a:ext>
+                </a:extLst>
+              </a:tr>
+              <a:tr h="842159">
+                <a:tc>
+                  <a:txBody>
+                    <a:bodyPr/>
+                    <a:lstStyle/>
+                    <a:p>
+                      <a:pPr algn="r" fontAlgn="ctr"/>
+                      <a:r>
+                        <a:rPr lang="en-US" sz="3200" b="1" dirty="0">
+                          <a:solidFill>
+                            <a:srgbClr val="000000"/>
+                          </a:solidFill>
+                          <a:effectLst/>
+                          <a:latin typeface="Cambria" panose="02040503050406030204" pitchFamily="18" charset="0"/>
+                        </a:rPr>
+                        <a:t>MoCA Score</a:t>
+                      </a:r>
+                    </a:p>
+                  </a:txBody>
+                  <a:tcPr marL="10559" marR="10559" marT="5279" marB="5279" anchor="ctr">
+                    <a:lnL w="9525" cap="flat" cmpd="sng" algn="ctr">
+                      <a:solidFill>
+                        <a:srgbClr val="CCCCCC"/>
+                      </a:solidFill>
+                      <a:prstDash val="solid"/>
+                      <a:round/>
+                      <a:headEnd type="none" w="med" len="med"/>
+                      <a:tailEnd type="none" w="med" len="med"/>
+                    </a:lnL>
+                    <a:lnR w="9525" cap="flat" cmpd="sng" algn="ctr">
+                      <a:solidFill>
+                        <a:srgbClr val="EEEEEE"/>
+                      </a:solidFill>
+                      <a:prstDash val="solid"/>
+                      <a:round/>
+                      <a:headEnd type="none" w="med" len="med"/>
+                      <a:tailEnd type="none" w="med" len="med"/>
+                    </a:lnR>
+                    <a:lnT w="9525" cap="flat" cmpd="sng" algn="ctr">
+                      <a:solidFill>
+                        <a:srgbClr val="CCCCCC"/>
+                      </a:solidFill>
+                      <a:prstDash val="solid"/>
+                      <a:round/>
+                      <a:headEnd type="none" w="med" len="med"/>
+                      <a:tailEnd type="none" w="med" len="med"/>
+                    </a:lnT>
+                    <a:lnB w="9525" cap="flat" cmpd="sng" algn="ctr">
+                      <a:solidFill>
+                        <a:srgbClr val="CCCCCC"/>
+                      </a:solidFill>
+                      <a:prstDash val="solid"/>
+                      <a:round/>
+                      <a:headEnd type="none" w="med" len="med"/>
+                      <a:tailEnd type="none" w="med" len="med"/>
+                    </a:lnB>
+                    <a:solidFill>
+                      <a:srgbClr val="F4F4F4"/>
+                    </a:solidFill>
+                  </a:tcPr>
+                </a:tc>
+                <a:tc>
+                  <a:txBody>
+                    <a:bodyPr/>
+                    <a:lstStyle/>
+                    <a:p>
+                      <a:r>
+                        <a:rPr lang="en-US" sz="3200">
+                          <a:effectLst/>
+                          <a:latin typeface="Cambria" panose="02040503050406030204" pitchFamily="18" charset="0"/>
+                        </a:rPr>
+                        <a:t>26.70 (2.71)</a:t>
+                      </a:r>
+                    </a:p>
+                  </a:txBody>
+                  <a:tcPr marL="10559" marR="10559" marT="10559" marB="10559" anchor="ctr">
+                    <a:lnL w="9525" cap="flat" cmpd="sng" algn="ctr">
+                      <a:solidFill>
+                        <a:srgbClr val="EEEEEE"/>
+                      </a:solidFill>
+                      <a:prstDash val="solid"/>
+                      <a:round/>
+                      <a:headEnd type="none" w="med" len="med"/>
+                      <a:tailEnd type="none" w="med" len="med"/>
+                    </a:lnL>
+                    <a:lnR w="9525" cap="flat" cmpd="sng" algn="ctr">
+                      <a:solidFill>
+                        <a:srgbClr val="EEEEEE"/>
+                      </a:solidFill>
+                      <a:prstDash val="solid"/>
+                      <a:round/>
+                      <a:headEnd type="none" w="med" len="med"/>
+                      <a:tailEnd type="none" w="med" len="med"/>
+                    </a:lnR>
+                    <a:lnT w="9525" cap="flat" cmpd="sng" algn="ctr">
+                      <a:solidFill>
+                        <a:srgbClr val="EEEEEE"/>
+                      </a:solidFill>
+                      <a:prstDash val="solid"/>
+                      <a:round/>
+                      <a:headEnd type="none" w="med" len="med"/>
+                      <a:tailEnd type="none" w="med" len="med"/>
+                    </a:lnT>
+                    <a:lnB w="9525" cap="flat" cmpd="sng" algn="ctr">
+                      <a:solidFill>
+                        <a:srgbClr val="EEEEEE"/>
+                      </a:solidFill>
+                      <a:prstDash val="solid"/>
+                      <a:round/>
+                      <a:headEnd type="none" w="med" len="med"/>
+                      <a:tailEnd type="none" w="med" len="med"/>
+                    </a:lnB>
+                    <a:noFill/>
+                  </a:tcPr>
+                </a:tc>
+                <a:tc>
+                  <a:txBody>
+                    <a:bodyPr/>
+                    <a:lstStyle/>
+                    <a:p>
+                      <a:r>
+                        <a:rPr lang="en-US" sz="3200">
+                          <a:effectLst/>
+                          <a:latin typeface="Cambria" panose="02040503050406030204" pitchFamily="18" charset="0"/>
+                        </a:rPr>
+                        <a:t>26.58 (2.53)</a:t>
+                      </a:r>
+                    </a:p>
+                  </a:txBody>
+                  <a:tcPr marL="10559" marR="10559" marT="10559" marB="10559" anchor="ctr">
+                    <a:lnL w="9525" cap="flat" cmpd="sng" algn="ctr">
+                      <a:solidFill>
+                        <a:srgbClr val="EEEEEE"/>
+                      </a:solidFill>
+                      <a:prstDash val="solid"/>
+                      <a:round/>
+                      <a:headEnd type="none" w="med" len="med"/>
+                      <a:tailEnd type="none" w="med" len="med"/>
+                    </a:lnL>
+                    <a:lnR w="9525" cap="flat" cmpd="sng" algn="ctr">
+                      <a:solidFill>
+                        <a:srgbClr val="EEEEEE"/>
+                      </a:solidFill>
+                      <a:prstDash val="solid"/>
+                      <a:round/>
+                      <a:headEnd type="none" w="med" len="med"/>
+                      <a:tailEnd type="none" w="med" len="med"/>
+                    </a:lnR>
+                    <a:lnT w="9525" cap="flat" cmpd="sng" algn="ctr">
+                      <a:solidFill>
+                        <a:srgbClr val="EEEEEE"/>
+                      </a:solidFill>
+                      <a:prstDash val="solid"/>
+                      <a:round/>
+                      <a:headEnd type="none" w="med" len="med"/>
+                      <a:tailEnd type="none" w="med" len="med"/>
+                    </a:lnT>
+                    <a:lnB w="9525" cap="flat" cmpd="sng" algn="ctr">
+                      <a:solidFill>
+                        <a:srgbClr val="EEEEEE"/>
+                      </a:solidFill>
+                      <a:prstDash val="solid"/>
+                      <a:round/>
+                      <a:headEnd type="none" w="med" len="med"/>
+                      <a:tailEnd type="none" w="med" len="med"/>
+                    </a:lnB>
+                    <a:noFill/>
+                  </a:tcPr>
+                </a:tc>
+                <a:tc>
+                  <a:txBody>
+                    <a:bodyPr/>
+                    <a:lstStyle/>
+                    <a:p>
+                      <a:r>
+                        <a:rPr lang="en-US" sz="3200">
+                          <a:effectLst/>
+                          <a:latin typeface="Cambria" panose="02040503050406030204" pitchFamily="18" charset="0"/>
+                        </a:rPr>
+                        <a:t>27.78 (3.15)</a:t>
+                      </a:r>
+                    </a:p>
+                  </a:txBody>
+                  <a:tcPr marL="10559" marR="10559" marT="10559" marB="10559" anchor="ctr">
+                    <a:lnL w="9525" cap="flat" cmpd="sng" algn="ctr">
+                      <a:solidFill>
+                        <a:srgbClr val="EEEEEE"/>
+                      </a:solidFill>
+                      <a:prstDash val="solid"/>
+                      <a:round/>
+                      <a:headEnd type="none" w="med" len="med"/>
+                      <a:tailEnd type="none" w="med" len="med"/>
+                    </a:lnL>
+                    <a:lnR w="9525" cap="flat" cmpd="sng" algn="ctr">
+                      <a:solidFill>
+                        <a:srgbClr val="EEEEEE"/>
+                      </a:solidFill>
+                      <a:prstDash val="solid"/>
+                      <a:round/>
+                      <a:headEnd type="none" w="med" len="med"/>
+                      <a:tailEnd type="none" w="med" len="med"/>
+                    </a:lnR>
+                    <a:lnT w="9525" cap="flat" cmpd="sng" algn="ctr">
+                      <a:solidFill>
+                        <a:srgbClr val="EEEEEE"/>
+                      </a:solidFill>
+                      <a:prstDash val="solid"/>
+                      <a:round/>
+                      <a:headEnd type="none" w="med" len="med"/>
+                      <a:tailEnd type="none" w="med" len="med"/>
+                    </a:lnT>
+                    <a:lnB w="9525" cap="flat" cmpd="sng" algn="ctr">
+                      <a:solidFill>
+                        <a:srgbClr val="EEEEEE"/>
+                      </a:solidFill>
+                      <a:prstDash val="solid"/>
+                      <a:round/>
+                      <a:headEnd type="none" w="med" len="med"/>
+                      <a:tailEnd type="none" w="med" len="med"/>
+                    </a:lnB>
+                    <a:noFill/>
+                  </a:tcPr>
+                </a:tc>
+                <a:tc>
+                  <a:txBody>
+                    <a:bodyPr/>
+                    <a:lstStyle/>
+                    <a:p>
+                      <a:r>
+                        <a:rPr lang="en-US" sz="3200">
+                          <a:effectLst/>
+                          <a:latin typeface="Cambria" panose="02040503050406030204" pitchFamily="18" charset="0"/>
+                        </a:rPr>
+                        <a:t>22.00 (nan)</a:t>
+                      </a:r>
+                    </a:p>
+                  </a:txBody>
+                  <a:tcPr marL="10559" marR="10559" marT="10559" marB="10559" anchor="ctr">
+                    <a:lnL w="9525" cap="flat" cmpd="sng" algn="ctr">
+                      <a:solidFill>
+                        <a:srgbClr val="EEEEEE"/>
+                      </a:solidFill>
+                      <a:prstDash val="solid"/>
+                      <a:round/>
+                      <a:headEnd type="none" w="med" len="med"/>
+                      <a:tailEnd type="none" w="med" len="med"/>
+                    </a:lnL>
+                    <a:lnR w="9525" cap="flat" cmpd="sng" algn="ctr">
+                      <a:solidFill>
+                        <a:srgbClr val="EEEEEE"/>
+                      </a:solidFill>
+                      <a:prstDash val="solid"/>
+                      <a:round/>
+                      <a:headEnd type="none" w="med" len="med"/>
+                      <a:tailEnd type="none" w="med" len="med"/>
+                    </a:lnR>
+                    <a:lnT w="9525" cap="flat" cmpd="sng" algn="ctr">
+                      <a:solidFill>
+                        <a:srgbClr val="EEEEEE"/>
+                      </a:solidFill>
+                      <a:prstDash val="solid"/>
+                      <a:round/>
+                      <a:headEnd type="none" w="med" len="med"/>
+                      <a:tailEnd type="none" w="med" len="med"/>
+                    </a:lnT>
+                    <a:lnB w="9525" cap="flat" cmpd="sng" algn="ctr">
+                      <a:solidFill>
+                        <a:srgbClr val="EEEEEE"/>
+                      </a:solidFill>
+                      <a:prstDash val="solid"/>
+                      <a:round/>
+                      <a:headEnd type="none" w="med" len="med"/>
+                      <a:tailEnd type="none" w="med" len="med"/>
+                    </a:lnB>
+                    <a:noFill/>
+                  </a:tcPr>
+                </a:tc>
+                <a:extLst>
+                  <a:ext uri="{0D108BD9-81ED-4DB2-BD59-A6C34878D82A}">
+                    <a16:rowId xmlns:a16="http://schemas.microsoft.com/office/drawing/2014/main" val="1668567550"/>
+                  </a:ext>
+                </a:extLst>
+              </a:tr>
+              <a:tr h="979000">
+                <a:tc>
+                  <a:txBody>
+                    <a:bodyPr/>
+                    <a:lstStyle/>
+                    <a:p>
+                      <a:pPr algn="r" fontAlgn="ctr"/>
+                      <a:r>
+                        <a:rPr lang="en-US" sz="3200" b="1" dirty="0">
+                          <a:solidFill>
+                            <a:srgbClr val="000000"/>
+                          </a:solidFill>
+                          <a:effectLst/>
+                          <a:latin typeface="Cambria" panose="02040503050406030204" pitchFamily="18" charset="0"/>
+                        </a:rPr>
+                        <a:t>BDI Score</a:t>
+                      </a:r>
+                    </a:p>
+                  </a:txBody>
+                  <a:tcPr marL="10559" marR="10559" marT="5279" marB="5279" anchor="ctr">
+                    <a:lnL w="9525" cap="flat" cmpd="sng" algn="ctr">
+                      <a:solidFill>
+                        <a:srgbClr val="CCCCCC"/>
+                      </a:solidFill>
+                      <a:prstDash val="solid"/>
+                      <a:round/>
+                      <a:headEnd type="none" w="med" len="med"/>
+                      <a:tailEnd type="none" w="med" len="med"/>
+                    </a:lnL>
+                    <a:lnR w="9525" cap="flat" cmpd="sng" algn="ctr">
+                      <a:solidFill>
+                        <a:srgbClr val="EEEEEE"/>
+                      </a:solidFill>
+                      <a:prstDash val="solid"/>
+                      <a:round/>
+                      <a:headEnd type="none" w="med" len="med"/>
+                      <a:tailEnd type="none" w="med" len="med"/>
+                    </a:lnR>
+                    <a:lnT w="9525" cap="flat" cmpd="sng" algn="ctr">
+                      <a:solidFill>
+                        <a:srgbClr val="CCCCCC"/>
+                      </a:solidFill>
+                      <a:prstDash val="solid"/>
+                      <a:round/>
+                      <a:headEnd type="none" w="med" len="med"/>
+                      <a:tailEnd type="none" w="med" len="med"/>
+                    </a:lnT>
+                    <a:lnB w="9525" cap="flat" cmpd="sng" algn="ctr">
+                      <a:solidFill>
+                        <a:srgbClr val="CCCCCC"/>
+                      </a:solidFill>
+                      <a:prstDash val="solid"/>
+                      <a:round/>
+                      <a:headEnd type="none" w="med" len="med"/>
+                      <a:tailEnd type="none" w="med" len="med"/>
+                    </a:lnB>
+                    <a:solidFill>
+                      <a:srgbClr val="F4F4F4"/>
+                    </a:solidFill>
+                  </a:tcPr>
+                </a:tc>
+                <a:tc>
+                  <a:txBody>
+                    <a:bodyPr/>
+                    <a:lstStyle/>
+                    <a:p>
+                      <a:r>
+                        <a:rPr lang="en-US" sz="3200" dirty="0">
+                          <a:effectLst/>
+                          <a:latin typeface="Cambria" panose="02040503050406030204" pitchFamily="18" charset="0"/>
+                        </a:rPr>
+                        <a:t>9.65 (7.53)</a:t>
+                      </a:r>
+                    </a:p>
+                  </a:txBody>
+                  <a:tcPr marL="10559" marR="10559" marT="10559" marB="10559" anchor="ctr">
+                    <a:lnL w="9525" cap="flat" cmpd="sng" algn="ctr">
+                      <a:solidFill>
+                        <a:srgbClr val="EEEEEE"/>
+                      </a:solidFill>
+                      <a:prstDash val="solid"/>
+                      <a:round/>
+                      <a:headEnd type="none" w="med" len="med"/>
+                      <a:tailEnd type="none" w="med" len="med"/>
+                    </a:lnL>
+                    <a:lnR w="9525" cap="flat" cmpd="sng" algn="ctr">
+                      <a:solidFill>
+                        <a:srgbClr val="EEEEEE"/>
+                      </a:solidFill>
+                      <a:prstDash val="solid"/>
+                      <a:round/>
+                      <a:headEnd type="none" w="med" len="med"/>
+                      <a:tailEnd type="none" w="med" len="med"/>
+                    </a:lnR>
+                    <a:lnT w="9525" cap="flat" cmpd="sng" algn="ctr">
+                      <a:solidFill>
+                        <a:srgbClr val="EEEEEE"/>
+                      </a:solidFill>
+                      <a:prstDash val="solid"/>
+                      <a:round/>
+                      <a:headEnd type="none" w="med" len="med"/>
+                      <a:tailEnd type="none" w="med" len="med"/>
+                    </a:lnT>
+                    <a:lnB w="9525" cap="flat" cmpd="sng" algn="ctr">
+                      <a:solidFill>
+                        <a:srgbClr val="EEEEEE"/>
+                      </a:solidFill>
+                      <a:prstDash val="solid"/>
+                      <a:round/>
+                      <a:headEnd type="none" w="med" len="med"/>
+                      <a:tailEnd type="none" w="med" len="med"/>
+                    </a:lnB>
+                    <a:noFill/>
+                  </a:tcPr>
+                </a:tc>
+                <a:tc>
+                  <a:txBody>
+                    <a:bodyPr/>
+                    <a:lstStyle/>
+                    <a:p>
+                      <a:r>
+                        <a:rPr lang="en-US" sz="3200" dirty="0">
+                          <a:effectLst/>
+                          <a:latin typeface="Cambria" panose="02040503050406030204" pitchFamily="18" charset="0"/>
+                        </a:rPr>
+                        <a:t>9.66 (7.35)</a:t>
+                      </a:r>
+                    </a:p>
+                  </a:txBody>
+                  <a:tcPr marL="10559" marR="10559" marT="10559" marB="10559" anchor="ctr">
+                    <a:lnL w="9525" cap="flat" cmpd="sng" algn="ctr">
+                      <a:solidFill>
+                        <a:srgbClr val="EEEEEE"/>
+                      </a:solidFill>
+                      <a:prstDash val="solid"/>
+                      <a:round/>
+                      <a:headEnd type="none" w="med" len="med"/>
+                      <a:tailEnd type="none" w="med" len="med"/>
+                    </a:lnL>
+                    <a:lnR w="9525" cap="flat" cmpd="sng" algn="ctr">
+                      <a:solidFill>
+                        <a:srgbClr val="EEEEEE"/>
+                      </a:solidFill>
+                      <a:prstDash val="solid"/>
+                      <a:round/>
+                      <a:headEnd type="none" w="med" len="med"/>
+                      <a:tailEnd type="none" w="med" len="med"/>
+                    </a:lnR>
+                    <a:lnT w="9525" cap="flat" cmpd="sng" algn="ctr">
+                      <a:solidFill>
+                        <a:srgbClr val="EEEEEE"/>
+                      </a:solidFill>
+                      <a:prstDash val="solid"/>
+                      <a:round/>
+                      <a:headEnd type="none" w="med" len="med"/>
+                      <a:tailEnd type="none" w="med" len="med"/>
+                    </a:lnT>
+                    <a:lnB w="9525" cap="flat" cmpd="sng" algn="ctr">
+                      <a:solidFill>
+                        <a:srgbClr val="EEEEEE"/>
+                      </a:solidFill>
+                      <a:prstDash val="solid"/>
+                      <a:round/>
+                      <a:headEnd type="none" w="med" len="med"/>
+                      <a:tailEnd type="none" w="med" len="med"/>
+                    </a:lnB>
+                    <a:noFill/>
+                  </a:tcPr>
+                </a:tc>
+                <a:tc>
+                  <a:txBody>
+                    <a:bodyPr/>
+                    <a:lstStyle/>
+                    <a:p>
+                      <a:r>
+                        <a:rPr lang="en-US" sz="3200">
+                          <a:effectLst/>
+                          <a:latin typeface="Cambria" panose="02040503050406030204" pitchFamily="18" charset="0"/>
+                        </a:rPr>
+                        <a:t>6.24 (5.93)</a:t>
+                      </a:r>
+                    </a:p>
+                  </a:txBody>
+                  <a:tcPr marL="10559" marR="10559" marT="10559" marB="10559" anchor="ctr">
+                    <a:lnL w="9525" cap="flat" cmpd="sng" algn="ctr">
+                      <a:solidFill>
+                        <a:srgbClr val="EEEEEE"/>
+                      </a:solidFill>
+                      <a:prstDash val="solid"/>
+                      <a:round/>
+                      <a:headEnd type="none" w="med" len="med"/>
+                      <a:tailEnd type="none" w="med" len="med"/>
+                    </a:lnL>
+                    <a:lnR w="9525" cap="flat" cmpd="sng" algn="ctr">
+                      <a:solidFill>
+                        <a:srgbClr val="EEEEEE"/>
+                      </a:solidFill>
+                      <a:prstDash val="solid"/>
+                      <a:round/>
+                      <a:headEnd type="none" w="med" len="med"/>
+                      <a:tailEnd type="none" w="med" len="med"/>
+                    </a:lnR>
+                    <a:lnT w="9525" cap="flat" cmpd="sng" algn="ctr">
+                      <a:solidFill>
+                        <a:srgbClr val="EEEEEE"/>
+                      </a:solidFill>
+                      <a:prstDash val="solid"/>
+                      <a:round/>
+                      <a:headEnd type="none" w="med" len="med"/>
+                      <a:tailEnd type="none" w="med" len="med"/>
+                    </a:lnT>
+                    <a:lnB w="9525" cap="flat" cmpd="sng" algn="ctr">
+                      <a:solidFill>
+                        <a:srgbClr val="EEEEEE"/>
+                      </a:solidFill>
+                      <a:prstDash val="solid"/>
+                      <a:round/>
+                      <a:headEnd type="none" w="med" len="med"/>
+                      <a:tailEnd type="none" w="med" len="med"/>
+                    </a:lnB>
+                    <a:noFill/>
+                  </a:tcPr>
+                </a:tc>
+                <a:tc>
+                  <a:txBody>
+                    <a:bodyPr/>
+                    <a:lstStyle/>
+                    <a:p>
+                      <a:r>
+                        <a:rPr lang="en-US" sz="3200">
+                          <a:effectLst/>
+                          <a:latin typeface="Cambria" panose="02040503050406030204" pitchFamily="18" charset="0"/>
+                        </a:rPr>
+                        <a:t>16.76 (10.45)</a:t>
+                      </a:r>
+                    </a:p>
+                  </a:txBody>
+                  <a:tcPr marL="10559" marR="10559" marT="10559" marB="10559" anchor="ctr">
+                    <a:lnL w="9525" cap="flat" cmpd="sng" algn="ctr">
+                      <a:solidFill>
+                        <a:srgbClr val="EEEEEE"/>
+                      </a:solidFill>
+                      <a:prstDash val="solid"/>
+                      <a:round/>
+                      <a:headEnd type="none" w="med" len="med"/>
+                      <a:tailEnd type="none" w="med" len="med"/>
+                    </a:lnL>
+                    <a:lnR w="9525" cap="flat" cmpd="sng" algn="ctr">
+                      <a:solidFill>
+                        <a:srgbClr val="EEEEEE"/>
+                      </a:solidFill>
+                      <a:prstDash val="solid"/>
+                      <a:round/>
+                      <a:headEnd type="none" w="med" len="med"/>
+                      <a:tailEnd type="none" w="med" len="med"/>
+                    </a:lnR>
+                    <a:lnT w="9525" cap="flat" cmpd="sng" algn="ctr">
+                      <a:solidFill>
+                        <a:srgbClr val="EEEEEE"/>
+                      </a:solidFill>
+                      <a:prstDash val="solid"/>
+                      <a:round/>
+                      <a:headEnd type="none" w="med" len="med"/>
+                      <a:tailEnd type="none" w="med" len="med"/>
+                    </a:lnT>
+                    <a:lnB w="9525" cap="flat" cmpd="sng" algn="ctr">
+                      <a:solidFill>
+                        <a:srgbClr val="EEEEEE"/>
+                      </a:solidFill>
+                      <a:prstDash val="solid"/>
+                      <a:round/>
+                      <a:headEnd type="none" w="med" len="med"/>
+                      <a:tailEnd type="none" w="med" len="med"/>
+                    </a:lnB>
+                    <a:noFill/>
+                  </a:tcPr>
+                </a:tc>
+                <a:extLst>
+                  <a:ext uri="{0D108BD9-81ED-4DB2-BD59-A6C34878D82A}">
+                    <a16:rowId xmlns:a16="http://schemas.microsoft.com/office/drawing/2014/main" val="627051941"/>
+                  </a:ext>
+                </a:extLst>
+              </a:tr>
+              <a:tr h="705319">
+                <a:tc>
+                  <a:txBody>
+                    <a:bodyPr/>
+                    <a:lstStyle/>
+                    <a:p>
+                      <a:pPr algn="r" fontAlgn="ctr"/>
+                      <a:r>
+                        <a:rPr lang="en-US" sz="3200" b="1" dirty="0">
+                          <a:solidFill>
+                            <a:srgbClr val="000000"/>
+                          </a:solidFill>
+                          <a:effectLst/>
+                          <a:latin typeface="Cambria" panose="02040503050406030204" pitchFamily="18" charset="0"/>
+                        </a:rPr>
+                        <a:t>MBI Score</a:t>
+                      </a:r>
+                    </a:p>
+                  </a:txBody>
+                  <a:tcPr marL="10559" marR="10559" marT="5279" marB="5279" anchor="ctr">
+                    <a:lnL w="9525" cap="flat" cmpd="sng" algn="ctr">
+                      <a:solidFill>
+                        <a:srgbClr val="CCCCCC"/>
+                      </a:solidFill>
+                      <a:prstDash val="solid"/>
+                      <a:round/>
+                      <a:headEnd type="none" w="med" len="med"/>
+                      <a:tailEnd type="none" w="med" len="med"/>
+                    </a:lnL>
+                    <a:lnR w="9525" cap="flat" cmpd="sng" algn="ctr">
+                      <a:solidFill>
+                        <a:srgbClr val="EEEEEE"/>
+                      </a:solidFill>
+                      <a:prstDash val="solid"/>
+                      <a:round/>
+                      <a:headEnd type="none" w="med" len="med"/>
+                      <a:tailEnd type="none" w="med" len="med"/>
+                    </a:lnR>
+                    <a:lnT w="9525" cap="flat" cmpd="sng" algn="ctr">
+                      <a:solidFill>
+                        <a:srgbClr val="CCCCCC"/>
+                      </a:solidFill>
+                      <a:prstDash val="solid"/>
+                      <a:round/>
+                      <a:headEnd type="none" w="med" len="med"/>
+                      <a:tailEnd type="none" w="med" len="med"/>
+                    </a:lnT>
+                    <a:lnB w="9525" cap="flat" cmpd="sng" algn="ctr">
+                      <a:solidFill>
+                        <a:srgbClr val="CCCCCC"/>
+                      </a:solidFill>
+                      <a:prstDash val="solid"/>
+                      <a:round/>
+                      <a:headEnd type="none" w="med" len="med"/>
+                      <a:tailEnd type="none" w="med" len="med"/>
+                    </a:lnB>
+                    <a:solidFill>
+                      <a:srgbClr val="F4F4F4"/>
+                    </a:solidFill>
+                  </a:tcPr>
+                </a:tc>
+                <a:tc>
+                  <a:txBody>
+                    <a:bodyPr/>
+                    <a:lstStyle/>
+                    <a:p>
+                      <a:r>
+                        <a:rPr lang="en-US" sz="3200">
+                          <a:effectLst/>
+                          <a:latin typeface="Cambria" panose="02040503050406030204" pitchFamily="18" charset="0"/>
+                        </a:rPr>
+                        <a:t>0.94 (4.22)</a:t>
+                      </a:r>
+                    </a:p>
+                  </a:txBody>
+                  <a:tcPr marL="10559" marR="10559" marT="10559" marB="10559" anchor="ctr">
+                    <a:lnL w="9525" cap="flat" cmpd="sng" algn="ctr">
+                      <a:solidFill>
+                        <a:srgbClr val="EEEEEE"/>
+                      </a:solidFill>
+                      <a:prstDash val="solid"/>
+                      <a:round/>
+                      <a:headEnd type="none" w="med" len="med"/>
+                      <a:tailEnd type="none" w="med" len="med"/>
+                    </a:lnL>
+                    <a:lnR w="9525" cap="flat" cmpd="sng" algn="ctr">
+                      <a:solidFill>
+                        <a:srgbClr val="EEEEEE"/>
+                      </a:solidFill>
+                      <a:prstDash val="solid"/>
+                      <a:round/>
+                      <a:headEnd type="none" w="med" len="med"/>
+                      <a:tailEnd type="none" w="med" len="med"/>
+                    </a:lnR>
+                    <a:lnT w="9525" cap="flat" cmpd="sng" algn="ctr">
+                      <a:solidFill>
+                        <a:srgbClr val="EEEEEE"/>
+                      </a:solidFill>
+                      <a:prstDash val="solid"/>
+                      <a:round/>
+                      <a:headEnd type="none" w="med" len="med"/>
+                      <a:tailEnd type="none" w="med" len="med"/>
+                    </a:lnT>
+                    <a:lnB w="9525" cap="flat" cmpd="sng" algn="ctr">
+                      <a:solidFill>
+                        <a:srgbClr val="EEEEEE"/>
+                      </a:solidFill>
+                      <a:prstDash val="solid"/>
+                      <a:round/>
+                      <a:headEnd type="none" w="med" len="med"/>
+                      <a:tailEnd type="none" w="med" len="med"/>
+                    </a:lnB>
+                    <a:noFill/>
+                  </a:tcPr>
+                </a:tc>
+                <a:tc>
+                  <a:txBody>
+                    <a:bodyPr/>
+                    <a:lstStyle/>
+                    <a:p>
+                      <a:r>
+                        <a:rPr lang="en-US" sz="3200" dirty="0">
+                          <a:effectLst/>
+                          <a:latin typeface="Cambria" panose="02040503050406030204" pitchFamily="18" charset="0"/>
+                        </a:rPr>
+                        <a:t>0.93 (4.09)</a:t>
+                      </a:r>
+                    </a:p>
+                  </a:txBody>
+                  <a:tcPr marL="10559" marR="10559" marT="10559" marB="10559" anchor="ctr">
+                    <a:lnL w="9525" cap="flat" cmpd="sng" algn="ctr">
+                      <a:solidFill>
+                        <a:srgbClr val="EEEEEE"/>
+                      </a:solidFill>
+                      <a:prstDash val="solid"/>
+                      <a:round/>
+                      <a:headEnd type="none" w="med" len="med"/>
+                      <a:tailEnd type="none" w="med" len="med"/>
+                    </a:lnL>
+                    <a:lnR w="9525" cap="flat" cmpd="sng" algn="ctr">
+                      <a:solidFill>
+                        <a:srgbClr val="EEEEEE"/>
+                      </a:solidFill>
+                      <a:prstDash val="solid"/>
+                      <a:round/>
+                      <a:headEnd type="none" w="med" len="med"/>
+                      <a:tailEnd type="none" w="med" len="med"/>
+                    </a:lnR>
+                    <a:lnT w="9525" cap="flat" cmpd="sng" algn="ctr">
+                      <a:solidFill>
+                        <a:srgbClr val="EEEEEE"/>
+                      </a:solidFill>
+                      <a:prstDash val="solid"/>
+                      <a:round/>
+                      <a:headEnd type="none" w="med" len="med"/>
+                      <a:tailEnd type="none" w="med" len="med"/>
+                    </a:lnT>
+                    <a:lnB w="9525" cap="flat" cmpd="sng" algn="ctr">
+                      <a:solidFill>
+                        <a:srgbClr val="EEEEEE"/>
+                      </a:solidFill>
+                      <a:prstDash val="solid"/>
+                      <a:round/>
+                      <a:headEnd type="none" w="med" len="med"/>
+                      <a:tailEnd type="none" w="med" len="med"/>
+                    </a:lnB>
+                    <a:noFill/>
+                  </a:tcPr>
+                </a:tc>
+                <a:tc>
+                  <a:txBody>
+                    <a:bodyPr/>
+                    <a:lstStyle/>
+                    <a:p>
+                      <a:r>
+                        <a:rPr lang="en-US" sz="3200" dirty="0">
+                          <a:effectLst/>
+                          <a:latin typeface="Cambria" panose="02040503050406030204" pitchFamily="18" charset="0"/>
+                        </a:rPr>
+                        <a:t>0.33 (2.01)</a:t>
+                      </a:r>
+                    </a:p>
+                  </a:txBody>
+                  <a:tcPr marL="10559" marR="10559" marT="10559" marB="10559" anchor="ctr">
+                    <a:lnL w="9525" cap="flat" cmpd="sng" algn="ctr">
+                      <a:solidFill>
+                        <a:srgbClr val="EEEEEE"/>
+                      </a:solidFill>
+                      <a:prstDash val="solid"/>
+                      <a:round/>
+                      <a:headEnd type="none" w="med" len="med"/>
+                      <a:tailEnd type="none" w="med" len="med"/>
+                    </a:lnL>
+                    <a:lnR w="9525" cap="flat" cmpd="sng" algn="ctr">
+                      <a:solidFill>
+                        <a:srgbClr val="EEEEEE"/>
+                      </a:solidFill>
+                      <a:prstDash val="solid"/>
+                      <a:round/>
+                      <a:headEnd type="none" w="med" len="med"/>
+                      <a:tailEnd type="none" w="med" len="med"/>
+                    </a:lnR>
+                    <a:lnT w="9525" cap="flat" cmpd="sng" algn="ctr">
+                      <a:solidFill>
+                        <a:srgbClr val="EEEEEE"/>
+                      </a:solidFill>
+                      <a:prstDash val="solid"/>
+                      <a:round/>
+                      <a:headEnd type="none" w="med" len="med"/>
+                      <a:tailEnd type="none" w="med" len="med"/>
+                    </a:lnT>
+                    <a:lnB w="9525" cap="flat" cmpd="sng" algn="ctr">
+                      <a:solidFill>
+                        <a:srgbClr val="EEEEEE"/>
+                      </a:solidFill>
+                      <a:prstDash val="solid"/>
+                      <a:round/>
+                      <a:headEnd type="none" w="med" len="med"/>
+                      <a:tailEnd type="none" w="med" len="med"/>
+                    </a:lnB>
+                    <a:noFill/>
+                  </a:tcPr>
+                </a:tc>
+                <a:tc>
+                  <a:txBody>
+                    <a:bodyPr/>
+                    <a:lstStyle/>
+                    <a:p>
+                      <a:r>
+                        <a:rPr lang="en-US" sz="3200">
+                          <a:effectLst/>
+                          <a:latin typeface="Cambria" panose="02040503050406030204" pitchFamily="18" charset="0"/>
+                        </a:rPr>
+                        <a:t>3.24 (8.62)</a:t>
+                      </a:r>
+                    </a:p>
+                  </a:txBody>
+                  <a:tcPr marL="10559" marR="10559" marT="10559" marB="10559" anchor="ctr">
+                    <a:lnL w="9525" cap="flat" cmpd="sng" algn="ctr">
+                      <a:solidFill>
+                        <a:srgbClr val="EEEEEE"/>
+                      </a:solidFill>
+                      <a:prstDash val="solid"/>
+                      <a:round/>
+                      <a:headEnd type="none" w="med" len="med"/>
+                      <a:tailEnd type="none" w="med" len="med"/>
+                    </a:lnL>
+                    <a:lnR w="9525" cap="flat" cmpd="sng" algn="ctr">
+                      <a:solidFill>
+                        <a:srgbClr val="EEEEEE"/>
+                      </a:solidFill>
+                      <a:prstDash val="solid"/>
+                      <a:round/>
+                      <a:headEnd type="none" w="med" len="med"/>
+                      <a:tailEnd type="none" w="med" len="med"/>
+                    </a:lnR>
+                    <a:lnT w="9525" cap="flat" cmpd="sng" algn="ctr">
+                      <a:solidFill>
+                        <a:srgbClr val="EEEEEE"/>
+                      </a:solidFill>
+                      <a:prstDash val="solid"/>
+                      <a:round/>
+                      <a:headEnd type="none" w="med" len="med"/>
+                      <a:tailEnd type="none" w="med" len="med"/>
+                    </a:lnT>
+                    <a:lnB w="9525" cap="flat" cmpd="sng" algn="ctr">
+                      <a:solidFill>
+                        <a:srgbClr val="EEEEEE"/>
+                      </a:solidFill>
+                      <a:prstDash val="solid"/>
+                      <a:round/>
+                      <a:headEnd type="none" w="med" len="med"/>
+                      <a:tailEnd type="none" w="med" len="med"/>
+                    </a:lnB>
+                    <a:noFill/>
+                  </a:tcPr>
+                </a:tc>
+                <a:extLst>
+                  <a:ext uri="{0D108BD9-81ED-4DB2-BD59-A6C34878D82A}">
+                    <a16:rowId xmlns:a16="http://schemas.microsoft.com/office/drawing/2014/main" val="2104066010"/>
+                  </a:ext>
+                </a:extLst>
+              </a:tr>
+              <a:tr h="705319">
+                <a:tc>
+                  <a:txBody>
+                    <a:bodyPr/>
+                    <a:lstStyle/>
+                    <a:p>
+                      <a:pPr algn="r" fontAlgn="ctr"/>
+                      <a:r>
+                        <a:rPr lang="en-US" sz="3200" b="1" dirty="0">
+                          <a:solidFill>
+                            <a:srgbClr val="000000"/>
+                          </a:solidFill>
+                          <a:effectLst/>
+                          <a:latin typeface="Cambria" panose="02040503050406030204" pitchFamily="18" charset="0"/>
+                        </a:rPr>
+                        <a:t>EHI Score</a:t>
+                      </a:r>
+                    </a:p>
+                  </a:txBody>
+                  <a:tcPr marL="10559" marR="10559" marT="5279" marB="5279" anchor="ctr">
+                    <a:lnL w="9525" cap="flat" cmpd="sng" algn="ctr">
+                      <a:solidFill>
+                        <a:srgbClr val="CCCCCC"/>
+                      </a:solidFill>
+                      <a:prstDash val="solid"/>
+                      <a:round/>
+                      <a:headEnd type="none" w="med" len="med"/>
+                      <a:tailEnd type="none" w="med" len="med"/>
+                    </a:lnL>
+                    <a:lnR w="9525" cap="flat" cmpd="sng" algn="ctr">
+                      <a:solidFill>
+                        <a:srgbClr val="EEEEEE"/>
+                      </a:solidFill>
+                      <a:prstDash val="solid"/>
+                      <a:round/>
+                      <a:headEnd type="none" w="med" len="med"/>
+                      <a:tailEnd type="none" w="med" len="med"/>
+                    </a:lnR>
+                    <a:lnT w="9525" cap="flat" cmpd="sng" algn="ctr">
+                      <a:solidFill>
+                        <a:srgbClr val="CCCCCC"/>
+                      </a:solidFill>
+                      <a:prstDash val="solid"/>
+                      <a:round/>
+                      <a:headEnd type="none" w="med" len="med"/>
+                      <a:tailEnd type="none" w="med" len="med"/>
+                    </a:lnT>
+                    <a:lnB w="9525" cap="flat" cmpd="sng" algn="ctr">
+                      <a:solidFill>
+                        <a:srgbClr val="CCCCCC"/>
+                      </a:solidFill>
+                      <a:prstDash val="solid"/>
+                      <a:round/>
+                      <a:headEnd type="none" w="med" len="med"/>
+                      <a:tailEnd type="none" w="med" len="med"/>
+                    </a:lnB>
+                    <a:solidFill>
+                      <a:srgbClr val="F4F4F4"/>
+                    </a:solidFill>
+                  </a:tcPr>
+                </a:tc>
+                <a:tc>
+                  <a:txBody>
+                    <a:bodyPr/>
+                    <a:lstStyle/>
+                    <a:p>
+                      <a:r>
+                        <a:rPr lang="en-US" sz="3200">
+                          <a:effectLst/>
+                          <a:latin typeface="Cambria" panose="02040503050406030204" pitchFamily="18" charset="0"/>
+                        </a:rPr>
+                        <a:t>0.71 (0.46)</a:t>
+                      </a:r>
+                    </a:p>
+                  </a:txBody>
+                  <a:tcPr marL="10559" marR="10559" marT="10559" marB="10559" anchor="ctr">
+                    <a:lnL w="9525" cap="flat" cmpd="sng" algn="ctr">
+                      <a:solidFill>
+                        <a:srgbClr val="EEEEEE"/>
+                      </a:solidFill>
+                      <a:prstDash val="solid"/>
+                      <a:round/>
+                      <a:headEnd type="none" w="med" len="med"/>
+                      <a:tailEnd type="none" w="med" len="med"/>
+                    </a:lnL>
+                    <a:lnR w="9525" cap="flat" cmpd="sng" algn="ctr">
+                      <a:solidFill>
+                        <a:srgbClr val="EEEEEE"/>
+                      </a:solidFill>
+                      <a:prstDash val="solid"/>
+                      <a:round/>
+                      <a:headEnd type="none" w="med" len="med"/>
+                      <a:tailEnd type="none" w="med" len="med"/>
+                    </a:lnR>
+                    <a:lnT w="9525" cap="flat" cmpd="sng" algn="ctr">
+                      <a:solidFill>
+                        <a:srgbClr val="EEEEEE"/>
+                      </a:solidFill>
+                      <a:prstDash val="solid"/>
+                      <a:round/>
+                      <a:headEnd type="none" w="med" len="med"/>
+                      <a:tailEnd type="none" w="med" len="med"/>
+                    </a:lnT>
+                    <a:lnB w="9525" cap="flat" cmpd="sng" algn="ctr">
+                      <a:solidFill>
+                        <a:srgbClr val="EEEEEE"/>
+                      </a:solidFill>
+                      <a:prstDash val="solid"/>
+                      <a:round/>
+                      <a:headEnd type="none" w="med" len="med"/>
+                      <a:tailEnd type="none" w="med" len="med"/>
+                    </a:lnB>
+                    <a:noFill/>
+                  </a:tcPr>
+                </a:tc>
+                <a:tc>
+                  <a:txBody>
+                    <a:bodyPr/>
+                    <a:lstStyle/>
+                    <a:p>
+                      <a:r>
+                        <a:rPr lang="en-US" sz="3200" dirty="0">
+                          <a:effectLst/>
+                          <a:latin typeface="Cambria" panose="02040503050406030204" pitchFamily="18" charset="0"/>
+                        </a:rPr>
+                        <a:t>0.72 (0.44)</a:t>
+                      </a:r>
+                    </a:p>
+                  </a:txBody>
+                  <a:tcPr marL="10559" marR="10559" marT="10559" marB="10559" anchor="ctr">
+                    <a:lnL w="9525" cap="flat" cmpd="sng" algn="ctr">
+                      <a:solidFill>
+                        <a:srgbClr val="EEEEEE"/>
+                      </a:solidFill>
+                      <a:prstDash val="solid"/>
+                      <a:round/>
+                      <a:headEnd type="none" w="med" len="med"/>
+                      <a:tailEnd type="none" w="med" len="med"/>
+                    </a:lnL>
+                    <a:lnR w="9525" cap="flat" cmpd="sng" algn="ctr">
+                      <a:solidFill>
+                        <a:srgbClr val="EEEEEE"/>
+                      </a:solidFill>
+                      <a:prstDash val="solid"/>
+                      <a:round/>
+                      <a:headEnd type="none" w="med" len="med"/>
+                      <a:tailEnd type="none" w="med" len="med"/>
+                    </a:lnR>
+                    <a:lnT w="9525" cap="flat" cmpd="sng" algn="ctr">
+                      <a:solidFill>
+                        <a:srgbClr val="EEEEEE"/>
+                      </a:solidFill>
+                      <a:prstDash val="solid"/>
+                      <a:round/>
+                      <a:headEnd type="none" w="med" len="med"/>
+                      <a:tailEnd type="none" w="med" len="med"/>
+                    </a:lnT>
+                    <a:lnB w="9525" cap="flat" cmpd="sng" algn="ctr">
+                      <a:solidFill>
+                        <a:srgbClr val="EEEEEE"/>
+                      </a:solidFill>
+                      <a:prstDash val="solid"/>
+                      <a:round/>
+                      <a:headEnd type="none" w="med" len="med"/>
+                      <a:tailEnd type="none" w="med" len="med"/>
+                    </a:lnB>
+                    <a:noFill/>
+                  </a:tcPr>
+                </a:tc>
+                <a:tc>
+                  <a:txBody>
+                    <a:bodyPr/>
+                    <a:lstStyle/>
+                    <a:p>
+                      <a:r>
+                        <a:rPr lang="en-US" sz="3200" dirty="0">
+                          <a:effectLst/>
+                          <a:latin typeface="Cambria" panose="02040503050406030204" pitchFamily="18" charset="0"/>
+                        </a:rPr>
+                        <a:t>0.66 (0.56)</a:t>
+                      </a:r>
+                    </a:p>
+                  </a:txBody>
+                  <a:tcPr marL="10559" marR="10559" marT="10559" marB="10559" anchor="ctr">
+                    <a:lnL w="9525" cap="flat" cmpd="sng" algn="ctr">
+                      <a:solidFill>
+                        <a:srgbClr val="EEEEEE"/>
+                      </a:solidFill>
+                      <a:prstDash val="solid"/>
+                      <a:round/>
+                      <a:headEnd type="none" w="med" len="med"/>
+                      <a:tailEnd type="none" w="med" len="med"/>
+                    </a:lnL>
+                    <a:lnR w="9525" cap="flat" cmpd="sng" algn="ctr">
+                      <a:solidFill>
+                        <a:srgbClr val="EEEEEE"/>
+                      </a:solidFill>
+                      <a:prstDash val="solid"/>
+                      <a:round/>
+                      <a:headEnd type="none" w="med" len="med"/>
+                      <a:tailEnd type="none" w="med" len="med"/>
+                    </a:lnR>
+                    <a:lnT w="9525" cap="flat" cmpd="sng" algn="ctr">
+                      <a:solidFill>
+                        <a:srgbClr val="EEEEEE"/>
+                      </a:solidFill>
+                      <a:prstDash val="solid"/>
+                      <a:round/>
+                      <a:headEnd type="none" w="med" len="med"/>
+                      <a:tailEnd type="none" w="med" len="med"/>
+                    </a:lnT>
+                    <a:lnB w="9525" cap="flat" cmpd="sng" algn="ctr">
+                      <a:solidFill>
+                        <a:srgbClr val="EEEEEE"/>
+                      </a:solidFill>
+                      <a:prstDash val="solid"/>
+                      <a:round/>
+                      <a:headEnd type="none" w="med" len="med"/>
+                      <a:tailEnd type="none" w="med" len="med"/>
+                    </a:lnB>
+                    <a:noFill/>
+                  </a:tcPr>
+                </a:tc>
+                <a:tc>
+                  <a:txBody>
+                    <a:bodyPr/>
+                    <a:lstStyle/>
+                    <a:p>
+                      <a:r>
+                        <a:rPr lang="en-US" sz="3200" dirty="0">
+                          <a:effectLst/>
+                          <a:latin typeface="Cambria" panose="02040503050406030204" pitchFamily="18" charset="0"/>
+                        </a:rPr>
+                        <a:t>0.72 (0.50)</a:t>
+                      </a:r>
+                    </a:p>
+                  </a:txBody>
+                  <a:tcPr marL="10559" marR="10559" marT="10559" marB="10559" anchor="ctr">
+                    <a:lnL w="9525" cap="flat" cmpd="sng" algn="ctr">
+                      <a:solidFill>
+                        <a:srgbClr val="EEEEEE"/>
+                      </a:solidFill>
+                      <a:prstDash val="solid"/>
+                      <a:round/>
+                      <a:headEnd type="none" w="med" len="med"/>
+                      <a:tailEnd type="none" w="med" len="med"/>
+                    </a:lnL>
+                    <a:lnR w="9525" cap="flat" cmpd="sng" algn="ctr">
+                      <a:solidFill>
+                        <a:srgbClr val="EEEEEE"/>
+                      </a:solidFill>
+                      <a:prstDash val="solid"/>
+                      <a:round/>
+                      <a:headEnd type="none" w="med" len="med"/>
+                      <a:tailEnd type="none" w="med" len="med"/>
+                    </a:lnR>
+                    <a:lnT w="9525" cap="flat" cmpd="sng" algn="ctr">
+                      <a:solidFill>
+                        <a:srgbClr val="EEEEEE"/>
+                      </a:solidFill>
+                      <a:prstDash val="solid"/>
+                      <a:round/>
+                      <a:headEnd type="none" w="med" len="med"/>
+                      <a:tailEnd type="none" w="med" len="med"/>
+                    </a:lnT>
+                    <a:lnB w="9525" cap="flat" cmpd="sng" algn="ctr">
+                      <a:solidFill>
+                        <a:srgbClr val="EEEEEE"/>
+                      </a:solidFill>
+                      <a:prstDash val="solid"/>
+                      <a:round/>
+                      <a:headEnd type="none" w="med" len="med"/>
+                      <a:tailEnd type="none" w="med" len="med"/>
+                    </a:lnB>
+                    <a:noFill/>
+                  </a:tcPr>
+                </a:tc>
+                <a:extLst>
+                  <a:ext uri="{0D108BD9-81ED-4DB2-BD59-A6C34878D82A}">
+                    <a16:rowId xmlns:a16="http://schemas.microsoft.com/office/drawing/2014/main" val="91321582"/>
+                  </a:ext>
+                </a:extLst>
+              </a:tr>
+              <a:tr h="1515803">
+                <a:tc>
+                  <a:txBody>
+                    <a:bodyPr/>
+                    <a:lstStyle/>
+                    <a:p>
+                      <a:pPr algn="r" fontAlgn="ctr"/>
+                      <a:r>
+                        <a:rPr lang="en-US" sz="3200" b="1" dirty="0">
+                          <a:solidFill>
+                            <a:srgbClr val="000000"/>
+                          </a:solidFill>
+                          <a:effectLst/>
+                          <a:latin typeface="Cambria" panose="02040503050406030204" pitchFamily="18" charset="0"/>
+                        </a:rPr>
+                        <a:t>Loss of Smell</a:t>
+                      </a:r>
+                    </a:p>
+                  </a:txBody>
+                  <a:tcPr marL="10559" marR="10559" marT="5279" marB="5279" anchor="ctr">
+                    <a:lnL w="9525" cap="flat" cmpd="sng" algn="ctr">
+                      <a:solidFill>
+                        <a:srgbClr val="CCCCCC"/>
+                      </a:solidFill>
+                      <a:prstDash val="solid"/>
+                      <a:round/>
+                      <a:headEnd type="none" w="med" len="med"/>
+                      <a:tailEnd type="none" w="med" len="med"/>
+                    </a:lnL>
+                    <a:lnR w="9525" cap="flat" cmpd="sng" algn="ctr">
+                      <a:solidFill>
+                        <a:srgbClr val="EEEEEE"/>
+                      </a:solidFill>
+                      <a:prstDash val="solid"/>
+                      <a:round/>
+                      <a:headEnd type="none" w="med" len="med"/>
+                      <a:tailEnd type="none" w="med" len="med"/>
+                    </a:lnR>
+                    <a:lnT w="9525" cap="flat" cmpd="sng" algn="ctr">
+                      <a:solidFill>
+                        <a:srgbClr val="CCCCCC"/>
+                      </a:solidFill>
+                      <a:prstDash val="solid"/>
+                      <a:round/>
+                      <a:headEnd type="none" w="med" len="med"/>
+                      <a:tailEnd type="none" w="med" len="med"/>
+                    </a:lnT>
+                    <a:lnB w="9525" cap="flat" cmpd="sng" algn="ctr">
+                      <a:solidFill>
+                        <a:srgbClr val="CCCCCC"/>
+                      </a:solidFill>
+                      <a:prstDash val="solid"/>
+                      <a:round/>
+                      <a:headEnd type="none" w="med" len="med"/>
+                      <a:tailEnd type="none" w="med" len="med"/>
+                    </a:lnB>
+                    <a:solidFill>
+                      <a:srgbClr val="F4F4F4"/>
+                    </a:solidFill>
+                  </a:tcPr>
+                </a:tc>
+                <a:tc>
+                  <a:txBody>
+                    <a:bodyPr/>
+                    <a:lstStyle/>
+                    <a:p>
+                      <a:r>
+                        <a:rPr lang="en-US" sz="3200" dirty="0">
+                          <a:effectLst/>
+                          <a:latin typeface="Cambria" panose="02040503050406030204" pitchFamily="18" charset="0"/>
+                        </a:rPr>
+                        <a:t>2537 (72.6%)</a:t>
+                      </a:r>
+                    </a:p>
+                  </a:txBody>
+                  <a:tcPr marL="10559" marR="10559" marT="10559" marB="10559" anchor="ctr">
+                    <a:lnL w="9525" cap="flat" cmpd="sng" algn="ctr">
+                      <a:solidFill>
+                        <a:srgbClr val="EEEEEE"/>
+                      </a:solidFill>
+                      <a:prstDash val="solid"/>
+                      <a:round/>
+                      <a:headEnd type="none" w="med" len="med"/>
+                      <a:tailEnd type="none" w="med" len="med"/>
+                    </a:lnL>
+                    <a:lnR w="9525" cap="flat" cmpd="sng" algn="ctr">
+                      <a:solidFill>
+                        <a:srgbClr val="EEEEEE"/>
+                      </a:solidFill>
+                      <a:prstDash val="solid"/>
+                      <a:round/>
+                      <a:headEnd type="none" w="med" len="med"/>
+                      <a:tailEnd type="none" w="med" len="med"/>
+                    </a:lnR>
+                    <a:lnT w="9525" cap="flat" cmpd="sng" algn="ctr">
+                      <a:solidFill>
+                        <a:srgbClr val="EEEEEE"/>
+                      </a:solidFill>
+                      <a:prstDash val="solid"/>
+                      <a:round/>
+                      <a:headEnd type="none" w="med" len="med"/>
+                      <a:tailEnd type="none" w="med" len="med"/>
+                    </a:lnT>
+                    <a:lnB w="9525" cap="flat" cmpd="sng" algn="ctr">
+                      <a:solidFill>
+                        <a:srgbClr val="EEEEEE"/>
+                      </a:solidFill>
+                      <a:prstDash val="solid"/>
+                      <a:round/>
+                      <a:headEnd type="none" w="med" len="med"/>
+                      <a:tailEnd type="none" w="med" len="med"/>
+                    </a:lnB>
+                    <a:noFill/>
+                  </a:tcPr>
+                </a:tc>
+                <a:tc>
+                  <a:txBody>
+                    <a:bodyPr/>
+                    <a:lstStyle/>
+                    <a:p>
+                      <a:r>
+                        <a:rPr lang="en-US" sz="3200" dirty="0">
+                          <a:effectLst/>
+                          <a:latin typeface="Cambria" panose="02040503050406030204" pitchFamily="18" charset="0"/>
+                        </a:rPr>
+                        <a:t>2090 (73.3%)</a:t>
+                      </a:r>
+                    </a:p>
+                  </a:txBody>
+                  <a:tcPr marL="10559" marR="10559" marT="10559" marB="10559" anchor="ctr">
+                    <a:lnL w="9525" cap="flat" cmpd="sng" algn="ctr">
+                      <a:solidFill>
+                        <a:srgbClr val="EEEEEE"/>
+                      </a:solidFill>
+                      <a:prstDash val="solid"/>
+                      <a:round/>
+                      <a:headEnd type="none" w="med" len="med"/>
+                      <a:tailEnd type="none" w="med" len="med"/>
+                    </a:lnL>
+                    <a:lnR w="9525" cap="flat" cmpd="sng" algn="ctr">
+                      <a:solidFill>
+                        <a:srgbClr val="EEEEEE"/>
+                      </a:solidFill>
+                      <a:prstDash val="solid"/>
+                      <a:round/>
+                      <a:headEnd type="none" w="med" len="med"/>
+                      <a:tailEnd type="none" w="med" len="med"/>
+                    </a:lnR>
+                    <a:lnT w="9525" cap="flat" cmpd="sng" algn="ctr">
+                      <a:solidFill>
+                        <a:srgbClr val="EEEEEE"/>
+                      </a:solidFill>
+                      <a:prstDash val="solid"/>
+                      <a:round/>
+                      <a:headEnd type="none" w="med" len="med"/>
+                      <a:tailEnd type="none" w="med" len="med"/>
+                    </a:lnT>
+                    <a:lnB w="9525" cap="flat" cmpd="sng" algn="ctr">
+                      <a:solidFill>
+                        <a:srgbClr val="EEEEEE"/>
+                      </a:solidFill>
+                      <a:prstDash val="solid"/>
+                      <a:round/>
+                      <a:headEnd type="none" w="med" len="med"/>
+                      <a:tailEnd type="none" w="med" len="med"/>
+                    </a:lnB>
+                    <a:noFill/>
+                  </a:tcPr>
+                </a:tc>
+                <a:tc>
+                  <a:txBody>
+                    <a:bodyPr/>
+                    <a:lstStyle/>
+                    <a:p>
+                      <a:r>
+                        <a:rPr lang="en-US" sz="3200" dirty="0">
+                          <a:effectLst/>
+                          <a:latin typeface="Cambria" panose="02040503050406030204" pitchFamily="18" charset="0"/>
+                        </a:rPr>
+                        <a:t>240 (58.5%)</a:t>
+                      </a:r>
+                    </a:p>
+                  </a:txBody>
+                  <a:tcPr marL="10559" marR="10559" marT="10559" marB="10559" anchor="ctr">
+                    <a:lnL w="9525" cap="flat" cmpd="sng" algn="ctr">
+                      <a:solidFill>
+                        <a:srgbClr val="EEEEEE"/>
+                      </a:solidFill>
+                      <a:prstDash val="solid"/>
+                      <a:round/>
+                      <a:headEnd type="none" w="med" len="med"/>
+                      <a:tailEnd type="none" w="med" len="med"/>
+                    </a:lnL>
+                    <a:lnR w="9525" cap="flat" cmpd="sng" algn="ctr">
+                      <a:solidFill>
+                        <a:srgbClr val="EEEEEE"/>
+                      </a:solidFill>
+                      <a:prstDash val="solid"/>
+                      <a:round/>
+                      <a:headEnd type="none" w="med" len="med"/>
+                      <a:tailEnd type="none" w="med" len="med"/>
+                    </a:lnR>
+                    <a:lnT w="9525" cap="flat" cmpd="sng" algn="ctr">
+                      <a:solidFill>
+                        <a:srgbClr val="EEEEEE"/>
+                      </a:solidFill>
+                      <a:prstDash val="solid"/>
+                      <a:round/>
+                      <a:headEnd type="none" w="med" len="med"/>
+                      <a:tailEnd type="none" w="med" len="med"/>
+                    </a:lnT>
+                    <a:lnB w="9525" cap="flat" cmpd="sng" algn="ctr">
+                      <a:solidFill>
+                        <a:srgbClr val="EEEEEE"/>
+                      </a:solidFill>
+                      <a:prstDash val="solid"/>
+                      <a:round/>
+                      <a:headEnd type="none" w="med" len="med"/>
+                      <a:tailEnd type="none" w="med" len="med"/>
+                    </a:lnB>
+                    <a:noFill/>
+                  </a:tcPr>
+                </a:tc>
+                <a:tc>
+                  <a:txBody>
+                    <a:bodyPr/>
+                    <a:lstStyle/>
+                    <a:p>
+                      <a:r>
+                        <a:rPr lang="en-US" sz="3200" dirty="0">
+                          <a:effectLst/>
+                          <a:latin typeface="Cambria" panose="02040503050406030204" pitchFamily="18" charset="0"/>
+                        </a:rPr>
+                        <a:t>101 (59.1%)</a:t>
+                      </a:r>
+                    </a:p>
+                  </a:txBody>
+                  <a:tcPr marL="10559" marR="10559" marT="10559" marB="10559" anchor="ctr">
+                    <a:lnL w="9525" cap="flat" cmpd="sng" algn="ctr">
+                      <a:solidFill>
+                        <a:srgbClr val="EEEEEE"/>
+                      </a:solidFill>
+                      <a:prstDash val="solid"/>
+                      <a:round/>
+                      <a:headEnd type="none" w="med" len="med"/>
+                      <a:tailEnd type="none" w="med" len="med"/>
+                    </a:lnL>
+                    <a:lnR w="9525" cap="flat" cmpd="sng" algn="ctr">
+                      <a:solidFill>
+                        <a:srgbClr val="EEEEEE"/>
+                      </a:solidFill>
+                      <a:prstDash val="solid"/>
+                      <a:round/>
+                      <a:headEnd type="none" w="med" len="med"/>
+                      <a:tailEnd type="none" w="med" len="med"/>
+                    </a:lnR>
+                    <a:lnT w="9525" cap="flat" cmpd="sng" algn="ctr">
+                      <a:solidFill>
+                        <a:srgbClr val="EEEEEE"/>
+                      </a:solidFill>
+                      <a:prstDash val="solid"/>
+                      <a:round/>
+                      <a:headEnd type="none" w="med" len="med"/>
+                      <a:tailEnd type="none" w="med" len="med"/>
+                    </a:lnT>
+                    <a:lnB w="9525" cap="flat" cmpd="sng" algn="ctr">
+                      <a:solidFill>
+                        <a:srgbClr val="EEEEEE"/>
+                      </a:solidFill>
+                      <a:prstDash val="solid"/>
+                      <a:round/>
+                      <a:headEnd type="none" w="med" len="med"/>
+                      <a:tailEnd type="none" w="med" len="med"/>
+                    </a:lnB>
+                    <a:noFill/>
+                  </a:tcPr>
+                </a:tc>
+                <a:extLst>
+                  <a:ext uri="{0D108BD9-81ED-4DB2-BD59-A6C34878D82A}">
+                    <a16:rowId xmlns:a16="http://schemas.microsoft.com/office/drawing/2014/main" val="338824190"/>
+                  </a:ext>
+                </a:extLst>
+              </a:tr>
+              <a:tr h="1114513">
+                <a:tc>
+                  <a:txBody>
+                    <a:bodyPr/>
+                    <a:lstStyle/>
+                    <a:p>
+                      <a:pPr algn="r" fontAlgn="ctr"/>
+                      <a:r>
+                        <a:rPr lang="en-US" sz="3200" b="1" dirty="0">
+                          <a:solidFill>
+                            <a:srgbClr val="000000"/>
+                          </a:solidFill>
+                          <a:effectLst/>
+                          <a:latin typeface="Cambria" panose="02040503050406030204" pitchFamily="18" charset="0"/>
+                        </a:rPr>
+                        <a:t>Right Hand Dominant</a:t>
+                      </a:r>
+                    </a:p>
+                  </a:txBody>
+                  <a:tcPr marL="10559" marR="10559" marT="5279" marB="5279" anchor="ctr">
+                    <a:lnL w="9525" cap="flat" cmpd="sng" algn="ctr">
+                      <a:solidFill>
+                        <a:srgbClr val="CCCCCC"/>
+                      </a:solidFill>
+                      <a:prstDash val="solid"/>
+                      <a:round/>
+                      <a:headEnd type="none" w="med" len="med"/>
+                      <a:tailEnd type="none" w="med" len="med"/>
+                    </a:lnL>
+                    <a:lnR w="9525" cap="flat" cmpd="sng" algn="ctr">
+                      <a:solidFill>
+                        <a:srgbClr val="EEEEEE"/>
+                      </a:solidFill>
+                      <a:prstDash val="solid"/>
+                      <a:round/>
+                      <a:headEnd type="none" w="med" len="med"/>
+                      <a:tailEnd type="none" w="med" len="med"/>
+                    </a:lnR>
+                    <a:lnT w="9525" cap="flat" cmpd="sng" algn="ctr">
+                      <a:solidFill>
+                        <a:srgbClr val="CCCCCC"/>
+                      </a:solidFill>
+                      <a:prstDash val="solid"/>
+                      <a:round/>
+                      <a:headEnd type="none" w="med" len="med"/>
+                      <a:tailEnd type="none" w="med" len="med"/>
+                    </a:lnT>
+                    <a:lnB w="9525" cap="flat" cmpd="sng" algn="ctr">
+                      <a:solidFill>
+                        <a:srgbClr val="CCCCCC"/>
+                      </a:solidFill>
+                      <a:prstDash val="solid"/>
+                      <a:round/>
+                      <a:headEnd type="none" w="med" len="med"/>
+                      <a:tailEnd type="none" w="med" len="med"/>
+                    </a:lnB>
+                    <a:solidFill>
+                      <a:srgbClr val="F4F4F4"/>
+                    </a:solidFill>
+                  </a:tcPr>
+                </a:tc>
+                <a:tc>
+                  <a:txBody>
+                    <a:bodyPr/>
+                    <a:lstStyle/>
+                    <a:p>
+                      <a:r>
+                        <a:rPr lang="en-US" sz="3200">
+                          <a:effectLst/>
+                          <a:latin typeface="Cambria" panose="02040503050406030204" pitchFamily="18" charset="0"/>
+                        </a:rPr>
+                        <a:t>1888 (53.3%)</a:t>
+                      </a:r>
+                    </a:p>
+                  </a:txBody>
+                  <a:tcPr marL="10559" marR="10559" marT="10559" marB="10559" anchor="ctr">
+                    <a:lnL w="9525" cap="flat" cmpd="sng" algn="ctr">
+                      <a:solidFill>
+                        <a:srgbClr val="EEEEEE"/>
+                      </a:solidFill>
+                      <a:prstDash val="solid"/>
+                      <a:round/>
+                      <a:headEnd type="none" w="med" len="med"/>
+                      <a:tailEnd type="none" w="med" len="med"/>
+                    </a:lnL>
+                    <a:lnR w="9525" cap="flat" cmpd="sng" algn="ctr">
+                      <a:solidFill>
+                        <a:srgbClr val="EEEEEE"/>
+                      </a:solidFill>
+                      <a:prstDash val="solid"/>
+                      <a:round/>
+                      <a:headEnd type="none" w="med" len="med"/>
+                      <a:tailEnd type="none" w="med" len="med"/>
+                    </a:lnR>
+                    <a:lnT w="9525" cap="flat" cmpd="sng" algn="ctr">
+                      <a:solidFill>
+                        <a:srgbClr val="EEEEEE"/>
+                      </a:solidFill>
+                      <a:prstDash val="solid"/>
+                      <a:round/>
+                      <a:headEnd type="none" w="med" len="med"/>
+                      <a:tailEnd type="none" w="med" len="med"/>
+                    </a:lnT>
+                    <a:lnB w="9525" cap="flat" cmpd="sng" algn="ctr">
+                      <a:solidFill>
+                        <a:srgbClr val="EEEEEE"/>
+                      </a:solidFill>
+                      <a:prstDash val="solid"/>
+                      <a:round/>
+                      <a:headEnd type="none" w="med" len="med"/>
+                      <a:tailEnd type="none" w="med" len="med"/>
+                    </a:lnB>
+                    <a:noFill/>
+                  </a:tcPr>
+                </a:tc>
+                <a:tc>
+                  <a:txBody>
+                    <a:bodyPr/>
+                    <a:lstStyle/>
+                    <a:p>
+                      <a:r>
+                        <a:rPr lang="en-US" sz="3200">
+                          <a:effectLst/>
+                          <a:latin typeface="Cambria" panose="02040503050406030204" pitchFamily="18" charset="0"/>
+                        </a:rPr>
+                        <a:t>1765 (61.9%)</a:t>
+                      </a:r>
+                    </a:p>
+                  </a:txBody>
+                  <a:tcPr marL="10559" marR="10559" marT="10559" marB="10559" anchor="ctr">
+                    <a:lnL w="9525" cap="flat" cmpd="sng" algn="ctr">
+                      <a:solidFill>
+                        <a:srgbClr val="EEEEEE"/>
+                      </a:solidFill>
+                      <a:prstDash val="solid"/>
+                      <a:round/>
+                      <a:headEnd type="none" w="med" len="med"/>
+                      <a:tailEnd type="none" w="med" len="med"/>
+                    </a:lnL>
+                    <a:lnR w="9525" cap="flat" cmpd="sng" algn="ctr">
+                      <a:solidFill>
+                        <a:srgbClr val="EEEEEE"/>
+                      </a:solidFill>
+                      <a:prstDash val="solid"/>
+                      <a:round/>
+                      <a:headEnd type="none" w="med" len="med"/>
+                      <a:tailEnd type="none" w="med" len="med"/>
+                    </a:lnR>
+                    <a:lnT w="9525" cap="flat" cmpd="sng" algn="ctr">
+                      <a:solidFill>
+                        <a:srgbClr val="EEEEEE"/>
+                      </a:solidFill>
+                      <a:prstDash val="solid"/>
+                      <a:round/>
+                      <a:headEnd type="none" w="med" len="med"/>
+                      <a:tailEnd type="none" w="med" len="med"/>
+                    </a:lnT>
+                    <a:lnB w="9525" cap="flat" cmpd="sng" algn="ctr">
+                      <a:solidFill>
+                        <a:srgbClr val="EEEEEE"/>
+                      </a:solidFill>
+                      <a:prstDash val="solid"/>
+                      <a:round/>
+                      <a:headEnd type="none" w="med" len="med"/>
+                      <a:tailEnd type="none" w="med" len="med"/>
+                    </a:lnB>
+                    <a:noFill/>
+                  </a:tcPr>
+                </a:tc>
+                <a:tc>
+                  <a:txBody>
+                    <a:bodyPr/>
+                    <a:lstStyle/>
+                    <a:p>
+                      <a:r>
+                        <a:rPr lang="en-US" sz="3200">
+                          <a:effectLst/>
+                          <a:latin typeface="Cambria" panose="02040503050406030204" pitchFamily="18" charset="0"/>
+                        </a:rPr>
+                        <a:t>20 (4.9%)</a:t>
+                      </a:r>
+                    </a:p>
+                  </a:txBody>
+                  <a:tcPr marL="10559" marR="10559" marT="10559" marB="10559" anchor="ctr">
+                    <a:lnL w="9525" cap="flat" cmpd="sng" algn="ctr">
+                      <a:solidFill>
+                        <a:srgbClr val="EEEEEE"/>
+                      </a:solidFill>
+                      <a:prstDash val="solid"/>
+                      <a:round/>
+                      <a:headEnd type="none" w="med" len="med"/>
+                      <a:tailEnd type="none" w="med" len="med"/>
+                    </a:lnL>
+                    <a:lnR w="9525" cap="flat" cmpd="sng" algn="ctr">
+                      <a:solidFill>
+                        <a:srgbClr val="EEEEEE"/>
+                      </a:solidFill>
+                      <a:prstDash val="solid"/>
+                      <a:round/>
+                      <a:headEnd type="none" w="med" len="med"/>
+                      <a:tailEnd type="none" w="med" len="med"/>
+                    </a:lnR>
+                    <a:lnT w="9525" cap="flat" cmpd="sng" algn="ctr">
+                      <a:solidFill>
+                        <a:srgbClr val="EEEEEE"/>
+                      </a:solidFill>
+                      <a:prstDash val="solid"/>
+                      <a:round/>
+                      <a:headEnd type="none" w="med" len="med"/>
+                      <a:tailEnd type="none" w="med" len="med"/>
+                    </a:lnT>
+                    <a:lnB w="9525" cap="flat" cmpd="sng" algn="ctr">
+                      <a:solidFill>
+                        <a:srgbClr val="EEEEEE"/>
+                      </a:solidFill>
+                      <a:prstDash val="solid"/>
+                      <a:round/>
+                      <a:headEnd type="none" w="med" len="med"/>
+                      <a:tailEnd type="none" w="med" len="med"/>
+                    </a:lnB>
+                    <a:noFill/>
+                  </a:tcPr>
+                </a:tc>
+                <a:tc>
+                  <a:txBody>
+                    <a:bodyPr/>
+                    <a:lstStyle/>
+                    <a:p>
+                      <a:r>
+                        <a:rPr lang="en-US" sz="3200" dirty="0">
+                          <a:effectLst/>
+                          <a:latin typeface="Cambria" panose="02040503050406030204" pitchFamily="18" charset="0"/>
+                        </a:rPr>
+                        <a:t>102 (59.6%)</a:t>
+                      </a:r>
+                    </a:p>
+                  </a:txBody>
+                  <a:tcPr marL="10559" marR="10559" marT="10559" marB="10559" anchor="ctr">
+                    <a:lnL w="9525" cap="flat" cmpd="sng" algn="ctr">
+                      <a:solidFill>
+                        <a:srgbClr val="EEEEEE"/>
+                      </a:solidFill>
+                      <a:prstDash val="solid"/>
+                      <a:round/>
+                      <a:headEnd type="none" w="med" len="med"/>
+                      <a:tailEnd type="none" w="med" len="med"/>
+                    </a:lnL>
+                    <a:lnR w="9525" cap="flat" cmpd="sng" algn="ctr">
+                      <a:solidFill>
+                        <a:srgbClr val="EEEEEE"/>
+                      </a:solidFill>
+                      <a:prstDash val="solid"/>
+                      <a:round/>
+                      <a:headEnd type="none" w="med" len="med"/>
+                      <a:tailEnd type="none" w="med" len="med"/>
+                    </a:lnR>
+                    <a:lnT w="9525" cap="flat" cmpd="sng" algn="ctr">
+                      <a:solidFill>
+                        <a:srgbClr val="EEEEEE"/>
+                      </a:solidFill>
+                      <a:prstDash val="solid"/>
+                      <a:round/>
+                      <a:headEnd type="none" w="med" len="med"/>
+                      <a:tailEnd type="none" w="med" len="med"/>
+                    </a:lnT>
+                    <a:lnB w="9525" cap="flat" cmpd="sng" algn="ctr">
+                      <a:solidFill>
+                        <a:srgbClr val="EEEEEE"/>
+                      </a:solidFill>
+                      <a:prstDash val="solid"/>
+                      <a:round/>
+                      <a:headEnd type="none" w="med" len="med"/>
+                      <a:tailEnd type="none" w="med" len="med"/>
+                    </a:lnB>
+                    <a:noFill/>
+                  </a:tcPr>
+                </a:tc>
+                <a:extLst>
+                  <a:ext uri="{0D108BD9-81ED-4DB2-BD59-A6C34878D82A}">
+                    <a16:rowId xmlns:a16="http://schemas.microsoft.com/office/drawing/2014/main" val="668067186"/>
+                  </a:ext>
+                </a:extLst>
+              </a:tr>
+              <a:tr h="1105282">
+                <a:tc>
+                  <a:txBody>
+                    <a:bodyPr/>
+                    <a:lstStyle/>
+                    <a:p>
+                      <a:pPr algn="r" fontAlgn="ctr"/>
+                      <a:r>
+                        <a:rPr lang="en-US" sz="3200" b="1" dirty="0">
+                          <a:solidFill>
+                            <a:srgbClr val="000000"/>
+                          </a:solidFill>
+                          <a:effectLst/>
+                          <a:latin typeface="Cambria" panose="02040503050406030204" pitchFamily="18" charset="0"/>
+                        </a:rPr>
+                        <a:t>Regular Exercise</a:t>
+                      </a:r>
+                    </a:p>
+                  </a:txBody>
+                  <a:tcPr marL="10559" marR="10559" marT="5279" marB="5279" anchor="ctr">
+                    <a:lnL w="9525" cap="flat" cmpd="sng" algn="ctr">
+                      <a:solidFill>
+                        <a:srgbClr val="CCCCCC"/>
+                      </a:solidFill>
+                      <a:prstDash val="solid"/>
+                      <a:round/>
+                      <a:headEnd type="none" w="med" len="med"/>
+                      <a:tailEnd type="none" w="med" len="med"/>
+                    </a:lnL>
+                    <a:lnR w="9525" cap="flat" cmpd="sng" algn="ctr">
+                      <a:solidFill>
+                        <a:srgbClr val="EEEEEE"/>
+                      </a:solidFill>
+                      <a:prstDash val="solid"/>
+                      <a:round/>
+                      <a:headEnd type="none" w="med" len="med"/>
+                      <a:tailEnd type="none" w="med" len="med"/>
+                    </a:lnR>
+                    <a:lnT w="9525" cap="flat" cmpd="sng" algn="ctr">
+                      <a:solidFill>
+                        <a:srgbClr val="CCCCCC"/>
+                      </a:solidFill>
+                      <a:prstDash val="solid"/>
+                      <a:round/>
+                      <a:headEnd type="none" w="med" len="med"/>
+                      <a:tailEnd type="none" w="med" len="med"/>
+                    </a:lnT>
+                    <a:lnB w="9525" cap="flat" cmpd="sng" algn="ctr">
+                      <a:solidFill>
+                        <a:srgbClr val="CCCCCC"/>
+                      </a:solidFill>
+                      <a:prstDash val="solid"/>
+                      <a:round/>
+                      <a:headEnd type="none" w="med" len="med"/>
+                      <a:tailEnd type="none" w="med" len="med"/>
+                    </a:lnB>
+                    <a:solidFill>
+                      <a:srgbClr val="F4F4F4"/>
+                    </a:solidFill>
+                  </a:tcPr>
+                </a:tc>
+                <a:tc>
+                  <a:txBody>
+                    <a:bodyPr/>
+                    <a:lstStyle/>
+                    <a:p>
+                      <a:r>
+                        <a:rPr lang="en-US" sz="3200" dirty="0">
+                          <a:effectLst/>
+                          <a:latin typeface="Cambria" panose="02040503050406030204" pitchFamily="18" charset="0"/>
+                        </a:rPr>
+                        <a:t>1795 (50.7%)</a:t>
+                      </a:r>
+                    </a:p>
+                  </a:txBody>
+                  <a:tcPr marL="10559" marR="10559" marT="10559" marB="10559" anchor="ctr">
+                    <a:lnL w="9525" cap="flat" cmpd="sng" algn="ctr">
+                      <a:solidFill>
+                        <a:srgbClr val="EEEEEE"/>
+                      </a:solidFill>
+                      <a:prstDash val="solid"/>
+                      <a:round/>
+                      <a:headEnd type="none" w="med" len="med"/>
+                      <a:tailEnd type="none" w="med" len="med"/>
+                    </a:lnL>
+                    <a:lnR w="9525" cap="flat" cmpd="sng" algn="ctr">
+                      <a:solidFill>
+                        <a:srgbClr val="EEEEEE"/>
+                      </a:solidFill>
+                      <a:prstDash val="solid"/>
+                      <a:round/>
+                      <a:headEnd type="none" w="med" len="med"/>
+                      <a:tailEnd type="none" w="med" len="med"/>
+                    </a:lnR>
+                    <a:lnT w="9525" cap="flat" cmpd="sng" algn="ctr">
+                      <a:solidFill>
+                        <a:srgbClr val="EEEEEE"/>
+                      </a:solidFill>
+                      <a:prstDash val="solid"/>
+                      <a:round/>
+                      <a:headEnd type="none" w="med" len="med"/>
+                      <a:tailEnd type="none" w="med" len="med"/>
+                    </a:lnT>
+                    <a:lnB w="9525" cap="flat" cmpd="sng" algn="ctr">
+                      <a:solidFill>
+                        <a:srgbClr val="EEEEEE"/>
+                      </a:solidFill>
+                      <a:prstDash val="solid"/>
+                      <a:round/>
+                      <a:headEnd type="none" w="med" len="med"/>
+                      <a:tailEnd type="none" w="med" len="med"/>
+                    </a:lnB>
+                    <a:noFill/>
+                  </a:tcPr>
+                </a:tc>
+                <a:tc>
+                  <a:txBody>
+                    <a:bodyPr/>
+                    <a:lstStyle/>
+                    <a:p>
+                      <a:r>
+                        <a:rPr lang="en-US" sz="3200" dirty="0">
+                          <a:effectLst/>
+                          <a:latin typeface="Cambria" panose="02040503050406030204" pitchFamily="18" charset="0"/>
+                        </a:rPr>
+                        <a:t>1555 (54.5%)</a:t>
+                      </a:r>
+                    </a:p>
+                  </a:txBody>
+                  <a:tcPr marL="10559" marR="10559" marT="10559" marB="10559" anchor="ctr">
+                    <a:lnL w="9525" cap="flat" cmpd="sng" algn="ctr">
+                      <a:solidFill>
+                        <a:srgbClr val="EEEEEE"/>
+                      </a:solidFill>
+                      <a:prstDash val="solid"/>
+                      <a:round/>
+                      <a:headEnd type="none" w="med" len="med"/>
+                      <a:tailEnd type="none" w="med" len="med"/>
+                    </a:lnL>
+                    <a:lnR w="9525" cap="flat" cmpd="sng" algn="ctr">
+                      <a:solidFill>
+                        <a:srgbClr val="EEEEEE"/>
+                      </a:solidFill>
+                      <a:prstDash val="solid"/>
+                      <a:round/>
+                      <a:headEnd type="none" w="med" len="med"/>
+                      <a:tailEnd type="none" w="med" len="med"/>
+                    </a:lnR>
+                    <a:lnT w="9525" cap="flat" cmpd="sng" algn="ctr">
+                      <a:solidFill>
+                        <a:srgbClr val="EEEEEE"/>
+                      </a:solidFill>
+                      <a:prstDash val="solid"/>
+                      <a:round/>
+                      <a:headEnd type="none" w="med" len="med"/>
+                      <a:tailEnd type="none" w="med" len="med"/>
+                    </a:lnT>
+                    <a:lnB w="9525" cap="flat" cmpd="sng" algn="ctr">
+                      <a:solidFill>
+                        <a:srgbClr val="EEEEEE"/>
+                      </a:solidFill>
+                      <a:prstDash val="solid"/>
+                      <a:round/>
+                      <a:headEnd type="none" w="med" len="med"/>
+                      <a:tailEnd type="none" w="med" len="med"/>
+                    </a:lnB>
+                    <a:noFill/>
+                  </a:tcPr>
+                </a:tc>
+                <a:tc>
+                  <a:txBody>
+                    <a:bodyPr/>
+                    <a:lstStyle/>
+                    <a:p>
+                      <a:r>
+                        <a:rPr lang="en-US" sz="3200" dirty="0">
+                          <a:effectLst/>
+                          <a:latin typeface="Cambria" panose="02040503050406030204" pitchFamily="18" charset="0"/>
+                        </a:rPr>
+                        <a:t>162 (39.5%)</a:t>
+                      </a:r>
+                    </a:p>
+                  </a:txBody>
+                  <a:tcPr marL="10559" marR="10559" marT="10559" marB="10559" anchor="ctr">
+                    <a:lnL w="9525" cap="flat" cmpd="sng" algn="ctr">
+                      <a:solidFill>
+                        <a:srgbClr val="EEEEEE"/>
+                      </a:solidFill>
+                      <a:prstDash val="solid"/>
+                      <a:round/>
+                      <a:headEnd type="none" w="med" len="med"/>
+                      <a:tailEnd type="none" w="med" len="med"/>
+                    </a:lnL>
+                    <a:lnR w="9525" cap="flat" cmpd="sng" algn="ctr">
+                      <a:solidFill>
+                        <a:srgbClr val="EEEEEE"/>
+                      </a:solidFill>
+                      <a:prstDash val="solid"/>
+                      <a:round/>
+                      <a:headEnd type="none" w="med" len="med"/>
+                      <a:tailEnd type="none" w="med" len="med"/>
+                    </a:lnR>
+                    <a:lnT w="9525" cap="flat" cmpd="sng" algn="ctr">
+                      <a:solidFill>
+                        <a:srgbClr val="EEEEEE"/>
+                      </a:solidFill>
+                      <a:prstDash val="solid"/>
+                      <a:round/>
+                      <a:headEnd type="none" w="med" len="med"/>
+                      <a:tailEnd type="none" w="med" len="med"/>
+                    </a:lnT>
+                    <a:lnB w="9525" cap="flat" cmpd="sng" algn="ctr">
+                      <a:solidFill>
+                        <a:srgbClr val="EEEEEE"/>
+                      </a:solidFill>
+                      <a:prstDash val="solid"/>
+                      <a:round/>
+                      <a:headEnd type="none" w="med" len="med"/>
+                      <a:tailEnd type="none" w="med" len="med"/>
+                    </a:lnB>
+                    <a:noFill/>
+                  </a:tcPr>
+                </a:tc>
+                <a:tc>
+                  <a:txBody>
+                    <a:bodyPr/>
+                    <a:lstStyle/>
+                    <a:p>
+                      <a:r>
+                        <a:rPr lang="en-US" sz="3200" dirty="0">
+                          <a:effectLst/>
+                          <a:latin typeface="Cambria" panose="02040503050406030204" pitchFamily="18" charset="0"/>
+                        </a:rPr>
+                        <a:t>72 (42.1%)</a:t>
+                      </a:r>
+                    </a:p>
+                  </a:txBody>
+                  <a:tcPr marL="10559" marR="10559" marT="10559" marB="10559" anchor="ctr">
+                    <a:lnL w="9525" cap="flat" cmpd="sng" algn="ctr">
+                      <a:solidFill>
+                        <a:srgbClr val="EEEEEE"/>
+                      </a:solidFill>
+                      <a:prstDash val="solid"/>
+                      <a:round/>
+                      <a:headEnd type="none" w="med" len="med"/>
+                      <a:tailEnd type="none" w="med" len="med"/>
+                    </a:lnL>
+                    <a:lnR w="9525" cap="flat" cmpd="sng" algn="ctr">
+                      <a:solidFill>
+                        <a:srgbClr val="EEEEEE"/>
+                      </a:solidFill>
+                      <a:prstDash val="solid"/>
+                      <a:round/>
+                      <a:headEnd type="none" w="med" len="med"/>
+                      <a:tailEnd type="none" w="med" len="med"/>
+                    </a:lnR>
+                    <a:lnT w="9525" cap="flat" cmpd="sng" algn="ctr">
+                      <a:solidFill>
+                        <a:srgbClr val="EEEEEE"/>
+                      </a:solidFill>
+                      <a:prstDash val="solid"/>
+                      <a:round/>
+                      <a:headEnd type="none" w="med" len="med"/>
+                      <a:tailEnd type="none" w="med" len="med"/>
+                    </a:lnT>
+                    <a:lnB w="9525" cap="flat" cmpd="sng" algn="ctr">
+                      <a:solidFill>
+                        <a:srgbClr val="EEEEEE"/>
+                      </a:solidFill>
+                      <a:prstDash val="solid"/>
+                      <a:round/>
+                      <a:headEnd type="none" w="med" len="med"/>
+                      <a:tailEnd type="none" w="med" len="med"/>
+                    </a:lnB>
+                    <a:noFill/>
+                  </a:tcPr>
+                </a:tc>
+                <a:extLst>
+                  <a:ext uri="{0D108BD9-81ED-4DB2-BD59-A6C34878D82A}">
+                    <a16:rowId xmlns:a16="http://schemas.microsoft.com/office/drawing/2014/main" val="1293256907"/>
+                  </a:ext>
+                </a:extLst>
+              </a:tr>
+              <a:tr h="1515803">
+                <a:tc>
+                  <a:txBody>
+                    <a:bodyPr/>
+                    <a:lstStyle/>
+                    <a:p>
+                      <a:pPr algn="r" fontAlgn="ctr"/>
+                      <a:r>
+                        <a:rPr lang="en-US" sz="3200" b="1" dirty="0">
+                          <a:solidFill>
+                            <a:srgbClr val="000000"/>
+                          </a:solidFill>
+                          <a:effectLst/>
+                          <a:latin typeface="Cambria" panose="02040503050406030204" pitchFamily="18" charset="0"/>
+                        </a:rPr>
+                        <a:t>Coffee Drinker</a:t>
+                      </a:r>
+                    </a:p>
+                  </a:txBody>
+                  <a:tcPr marL="10559" marR="10559" marT="5279" marB="5279" anchor="ctr">
+                    <a:lnL w="9525" cap="flat" cmpd="sng" algn="ctr">
+                      <a:solidFill>
+                        <a:srgbClr val="CCCCCC"/>
+                      </a:solidFill>
+                      <a:prstDash val="solid"/>
+                      <a:round/>
+                      <a:headEnd type="none" w="med" len="med"/>
+                      <a:tailEnd type="none" w="med" len="med"/>
+                    </a:lnL>
+                    <a:lnR w="9525" cap="flat" cmpd="sng" algn="ctr">
+                      <a:solidFill>
+                        <a:srgbClr val="EEEEEE"/>
+                      </a:solidFill>
+                      <a:prstDash val="solid"/>
+                      <a:round/>
+                      <a:headEnd type="none" w="med" len="med"/>
+                      <a:tailEnd type="none" w="med" len="med"/>
+                    </a:lnR>
+                    <a:lnT w="9525" cap="flat" cmpd="sng" algn="ctr">
+                      <a:solidFill>
+                        <a:srgbClr val="CCCCCC"/>
+                      </a:solidFill>
+                      <a:prstDash val="solid"/>
+                      <a:round/>
+                      <a:headEnd type="none" w="med" len="med"/>
+                      <a:tailEnd type="none" w="med" len="med"/>
+                    </a:lnT>
+                    <a:lnB w="9525" cap="flat" cmpd="sng" algn="ctr">
+                      <a:solidFill>
+                        <a:srgbClr val="CCCCCC"/>
+                      </a:solidFill>
+                      <a:prstDash val="solid"/>
+                      <a:round/>
+                      <a:headEnd type="none" w="med" len="med"/>
+                      <a:tailEnd type="none" w="med" len="med"/>
+                    </a:lnB>
+                    <a:solidFill>
+                      <a:srgbClr val="F4F4F4"/>
+                    </a:solidFill>
+                  </a:tcPr>
+                </a:tc>
+                <a:tc>
+                  <a:txBody>
+                    <a:bodyPr/>
+                    <a:lstStyle/>
+                    <a:p>
+                      <a:r>
+                        <a:rPr lang="en-US" sz="3200">
+                          <a:effectLst/>
+                          <a:latin typeface="Cambria" panose="02040503050406030204" pitchFamily="18" charset="0"/>
+                        </a:rPr>
+                        <a:t>1735 (49.0%)</a:t>
+                      </a:r>
+                    </a:p>
+                  </a:txBody>
+                  <a:tcPr marL="10559" marR="10559" marT="10559" marB="10559" anchor="ctr">
+                    <a:lnL w="9525" cap="flat" cmpd="sng" algn="ctr">
+                      <a:solidFill>
+                        <a:srgbClr val="EEEEEE"/>
+                      </a:solidFill>
+                      <a:prstDash val="solid"/>
+                      <a:round/>
+                      <a:headEnd type="none" w="med" len="med"/>
+                      <a:tailEnd type="none" w="med" len="med"/>
+                    </a:lnL>
+                    <a:lnR w="9525" cap="flat" cmpd="sng" algn="ctr">
+                      <a:solidFill>
+                        <a:srgbClr val="EEEEEE"/>
+                      </a:solidFill>
+                      <a:prstDash val="solid"/>
+                      <a:round/>
+                      <a:headEnd type="none" w="med" len="med"/>
+                      <a:tailEnd type="none" w="med" len="med"/>
+                    </a:lnR>
+                    <a:lnT w="9525" cap="flat" cmpd="sng" algn="ctr">
+                      <a:solidFill>
+                        <a:srgbClr val="EEEEEE"/>
+                      </a:solidFill>
+                      <a:prstDash val="solid"/>
+                      <a:round/>
+                      <a:headEnd type="none" w="med" len="med"/>
+                      <a:tailEnd type="none" w="med" len="med"/>
+                    </a:lnT>
+                    <a:lnB w="9525" cap="flat" cmpd="sng" algn="ctr">
+                      <a:solidFill>
+                        <a:srgbClr val="EEEEEE"/>
+                      </a:solidFill>
+                      <a:prstDash val="solid"/>
+                      <a:round/>
+                      <a:headEnd type="none" w="med" len="med"/>
+                      <a:tailEnd type="none" w="med" len="med"/>
+                    </a:lnB>
+                    <a:noFill/>
+                  </a:tcPr>
+                </a:tc>
+                <a:tc>
+                  <a:txBody>
+                    <a:bodyPr/>
+                    <a:lstStyle/>
+                    <a:p>
+                      <a:r>
+                        <a:rPr lang="en-US" sz="3200">
+                          <a:effectLst/>
+                          <a:latin typeface="Cambria" panose="02040503050406030204" pitchFamily="18" charset="0"/>
+                        </a:rPr>
+                        <a:t>1480 (51.9%)</a:t>
+                      </a:r>
+                    </a:p>
+                  </a:txBody>
+                  <a:tcPr marL="10559" marR="10559" marT="10559" marB="10559" anchor="ctr">
+                    <a:lnL w="9525" cap="flat" cmpd="sng" algn="ctr">
+                      <a:solidFill>
+                        <a:srgbClr val="EEEEEE"/>
+                      </a:solidFill>
+                      <a:prstDash val="solid"/>
+                      <a:round/>
+                      <a:headEnd type="none" w="med" len="med"/>
+                      <a:tailEnd type="none" w="med" len="med"/>
+                    </a:lnL>
+                    <a:lnR w="9525" cap="flat" cmpd="sng" algn="ctr">
+                      <a:solidFill>
+                        <a:srgbClr val="EEEEEE"/>
+                      </a:solidFill>
+                      <a:prstDash val="solid"/>
+                      <a:round/>
+                      <a:headEnd type="none" w="med" len="med"/>
+                      <a:tailEnd type="none" w="med" len="med"/>
+                    </a:lnR>
+                    <a:lnT w="9525" cap="flat" cmpd="sng" algn="ctr">
+                      <a:solidFill>
+                        <a:srgbClr val="EEEEEE"/>
+                      </a:solidFill>
+                      <a:prstDash val="solid"/>
+                      <a:round/>
+                      <a:headEnd type="none" w="med" len="med"/>
+                      <a:tailEnd type="none" w="med" len="med"/>
+                    </a:lnT>
+                    <a:lnB w="9525" cap="flat" cmpd="sng" algn="ctr">
+                      <a:solidFill>
+                        <a:srgbClr val="EEEEEE"/>
+                      </a:solidFill>
+                      <a:prstDash val="solid"/>
+                      <a:round/>
+                      <a:headEnd type="none" w="med" len="med"/>
+                      <a:tailEnd type="none" w="med" len="med"/>
+                    </a:lnB>
+                    <a:noFill/>
+                  </a:tcPr>
+                </a:tc>
+                <a:tc>
+                  <a:txBody>
+                    <a:bodyPr/>
+                    <a:lstStyle/>
+                    <a:p>
+                      <a:r>
+                        <a:rPr lang="en-US" sz="3200">
+                          <a:effectLst/>
+                          <a:latin typeface="Cambria" panose="02040503050406030204" pitchFamily="18" charset="0"/>
+                        </a:rPr>
+                        <a:t>160 (39.0%)</a:t>
+                      </a:r>
+                    </a:p>
+                  </a:txBody>
+                  <a:tcPr marL="10559" marR="10559" marT="10559" marB="10559" anchor="ctr">
+                    <a:lnL w="9525" cap="flat" cmpd="sng" algn="ctr">
+                      <a:solidFill>
+                        <a:srgbClr val="EEEEEE"/>
+                      </a:solidFill>
+                      <a:prstDash val="solid"/>
+                      <a:round/>
+                      <a:headEnd type="none" w="med" len="med"/>
+                      <a:tailEnd type="none" w="med" len="med"/>
+                    </a:lnL>
+                    <a:lnR w="9525" cap="flat" cmpd="sng" algn="ctr">
+                      <a:solidFill>
+                        <a:srgbClr val="EEEEEE"/>
+                      </a:solidFill>
+                      <a:prstDash val="solid"/>
+                      <a:round/>
+                      <a:headEnd type="none" w="med" len="med"/>
+                      <a:tailEnd type="none" w="med" len="med"/>
+                    </a:lnR>
+                    <a:lnT w="9525" cap="flat" cmpd="sng" algn="ctr">
+                      <a:solidFill>
+                        <a:srgbClr val="EEEEEE"/>
+                      </a:solidFill>
+                      <a:prstDash val="solid"/>
+                      <a:round/>
+                      <a:headEnd type="none" w="med" len="med"/>
+                      <a:tailEnd type="none" w="med" len="med"/>
+                    </a:lnT>
+                    <a:lnB w="9525" cap="flat" cmpd="sng" algn="ctr">
+                      <a:solidFill>
+                        <a:srgbClr val="EEEEEE"/>
+                      </a:solidFill>
+                      <a:prstDash val="solid"/>
+                      <a:round/>
+                      <a:headEnd type="none" w="med" len="med"/>
+                      <a:tailEnd type="none" w="med" len="med"/>
+                    </a:lnB>
+                    <a:noFill/>
+                  </a:tcPr>
+                </a:tc>
+                <a:tc>
+                  <a:txBody>
+                    <a:bodyPr/>
+                    <a:lstStyle/>
+                    <a:p>
+                      <a:r>
+                        <a:rPr lang="en-US" sz="3200" dirty="0">
+                          <a:effectLst/>
+                          <a:latin typeface="Cambria" panose="02040503050406030204" pitchFamily="18" charset="0"/>
+                        </a:rPr>
+                        <a:t>90 (52.6%)</a:t>
+                      </a:r>
+                    </a:p>
+                  </a:txBody>
+                  <a:tcPr marL="10559" marR="10559" marT="10559" marB="10559" anchor="ctr">
+                    <a:lnL w="9525" cap="flat" cmpd="sng" algn="ctr">
+                      <a:solidFill>
+                        <a:srgbClr val="EEEEEE"/>
+                      </a:solidFill>
+                      <a:prstDash val="solid"/>
+                      <a:round/>
+                      <a:headEnd type="none" w="med" len="med"/>
+                      <a:tailEnd type="none" w="med" len="med"/>
+                    </a:lnL>
+                    <a:lnR w="9525" cap="flat" cmpd="sng" algn="ctr">
+                      <a:solidFill>
+                        <a:srgbClr val="EEEEEE"/>
+                      </a:solidFill>
+                      <a:prstDash val="solid"/>
+                      <a:round/>
+                      <a:headEnd type="none" w="med" len="med"/>
+                      <a:tailEnd type="none" w="med" len="med"/>
+                    </a:lnR>
+                    <a:lnT w="9525" cap="flat" cmpd="sng" algn="ctr">
+                      <a:solidFill>
+                        <a:srgbClr val="EEEEEE"/>
+                      </a:solidFill>
+                      <a:prstDash val="solid"/>
+                      <a:round/>
+                      <a:headEnd type="none" w="med" len="med"/>
+                      <a:tailEnd type="none" w="med" len="med"/>
+                    </a:lnT>
+                    <a:lnB w="9525" cap="flat" cmpd="sng" algn="ctr">
+                      <a:solidFill>
+                        <a:srgbClr val="EEEEEE"/>
+                      </a:solidFill>
+                      <a:prstDash val="solid"/>
+                      <a:round/>
+                      <a:headEnd type="none" w="med" len="med"/>
+                      <a:tailEnd type="none" w="med" len="med"/>
+                    </a:lnB>
+                    <a:noFill/>
+                  </a:tcPr>
+                </a:tc>
+                <a:extLst>
+                  <a:ext uri="{0D108BD9-81ED-4DB2-BD59-A6C34878D82A}">
+                    <a16:rowId xmlns:a16="http://schemas.microsoft.com/office/drawing/2014/main" val="3210427101"/>
+                  </a:ext>
+                </a:extLst>
+              </a:tr>
+            </a:tbl>
+          </a:graphicData>
+        </a:graphic>
+      </p:graphicFrame>
+      <p:sp>
+        <p:nvSpPr>
+          <p:cNvPr id="87" name="Rectangle 5">
+            <a:extLst>
+              <a:ext uri="{FF2B5EF4-FFF2-40B4-BE49-F238E27FC236}">
+                <a16:creationId xmlns:a16="http://schemas.microsoft.com/office/drawing/2014/main" id="{17343BF4-91F3-1764-1A69-25CA4891C27A}"/>
+              </a:ext>
+            </a:extLst>
+          </p:cNvPr>
+          <p:cNvSpPr>
+            <a:spLocks noChangeArrowheads="1"/>
+          </p:cNvSpPr>
+          <p:nvPr/>
+        </p:nvSpPr>
+        <p:spPr bwMode="auto">
+          <a:xfrm>
+            <a:off x="9981891" y="3241616"/>
+            <a:ext cx="369619404" cy="646331"/>
+          </a:xfrm>
+          <a:prstGeom prst="rect">
+            <a:avLst/>
+          </a:prstGeom>
+          <a:noFill/>
+          <a:ln>
+            <a:noFill/>
+          </a:ln>
+          <a:effectLst/>
+          <a:extLst>
+            <a:ext uri="{909E8E84-426E-40DD-AFC4-6F175D3DCCD1}">
+              <a14:hiddenFill xmlns:a14="http://schemas.microsoft.com/office/drawing/2010/main">
+                <a:solidFill>
+                  <a:schemeClr val="accent1"/>
+                </a:solidFill>
+              </a14:hiddenFill>
+            </a:ext>
+            <a:ext uri="{91240B29-F687-4F45-9708-019B960494DF}">
+              <a14:hiddenLine xmlns:a14="http://schemas.microsoft.com/office/drawing/2010/main" w="9525">
+                <a:solidFill>
+                  <a:schemeClr val="tx1"/>
+                </a:solidFill>
+                <a:miter lim="800000"/>
+                <a:headEnd/>
+                <a:tailEnd/>
+              </a14:hiddenLine>
+            </a:ext>
+            <a:ext uri="{AF507438-7753-43E0-B8FC-AC1667EBCBE1}">
+              <a14:hiddenEffects xmlns:a14="http://schemas.microsoft.com/office/drawing/2010/main">
+                <a:effectLst>
+                  <a:outerShdw dist="35921" dir="2700000" algn="ctr" rotWithShape="0">
+                    <a:schemeClr val="bg2"/>
+                  </a:outerShdw>
+                </a:effectLst>
+              </a14:hiddenEffects>
+            </a:ext>
+          </a:extLst>
+        </p:spPr>
+        <p:txBody>
+          <a:bodyPr vert="horz" wrap="square" lIns="91440" tIns="45720" rIns="91440" bIns="45720" numCol="1" anchor="ctr" anchorCtr="0" compatLnSpc="1">
+            <a:prstTxWarp prst="textNoShape">
+              <a:avLst/>
+            </a:prstTxWarp>
+            <a:spAutoFit/>
+          </a:bodyPr>
+          <a:lstStyle/>
+          <a:p>
+            <a:pPr marL="0" marR="0" lvl="0" indent="0" algn="l" defTabSz="914400" rtl="0" eaLnBrk="0" fontAlgn="base" latinLnBrk="0" hangingPunct="0">
+              <a:lnSpc>
+                <a:spcPct val="100000"/>
+              </a:lnSpc>
+              <a:spcBef>
+                <a:spcPct val="0"/>
+              </a:spcBef>
+              <a:spcAft>
+                <a:spcPct val="0"/>
+              </a:spcAft>
+              <a:buClrTx/>
+              <a:buSzTx/>
+              <a:buFontTx/>
+              <a:buNone/>
+              <a:tabLst/>
+            </a:pPr>
+            <a:br>
+              <a:rPr kumimoji="0" lang="en-US" altLang="en-US" sz="1800" b="0" i="0" u="none" strike="noStrike" cap="none" normalizeH="0" baseline="0">
+                <a:ln>
+                  <a:noFill/>
+                </a:ln>
+                <a:solidFill>
+                  <a:schemeClr val="tx1"/>
+                </a:solidFill>
+                <a:effectLst/>
+                <a:latin typeface="Arial" panose="020B0604020202020204" pitchFamily="34" charset="0"/>
+              </a:rPr>
+            </a:br>
+            <a:endParaRPr kumimoji="0" lang="en-US" altLang="en-US" sz="1800" b="0" i="0" u="none" strike="noStrike" cap="none" normalizeH="0" baseline="0">
+              <a:ln>
+                <a:noFill/>
+              </a:ln>
+              <a:solidFill>
+                <a:schemeClr val="tx1"/>
+              </a:solidFill>
+              <a:effectLst/>
+              <a:latin typeface="Arial" panose="020B0604020202020204" pitchFamily="34" charset="0"/>
+            </a:endParaRPr>
+          </a:p>
+        </p:txBody>
+      </p:sp>
+      <p:sp>
+        <p:nvSpPr>
+          <p:cNvPr id="88" name="TextBox 87">
+            <a:extLst>
+              <a:ext uri="{FF2B5EF4-FFF2-40B4-BE49-F238E27FC236}">
+                <a16:creationId xmlns:a16="http://schemas.microsoft.com/office/drawing/2014/main" id="{800242B9-5919-FD19-5086-C257ACA8AC9D}"/>
+              </a:ext>
+            </a:extLst>
+          </p:cNvPr>
+          <p:cNvSpPr txBox="1"/>
+          <p:nvPr/>
+        </p:nvSpPr>
+        <p:spPr>
+          <a:xfrm>
+            <a:off x="99504" y="17754733"/>
+            <a:ext cx="8443444" cy="784830"/>
+          </a:xfrm>
+          <a:prstGeom prst="rect">
+            <a:avLst/>
+          </a:prstGeom>
+          <a:solidFill>
+            <a:schemeClr val="tx2"/>
+          </a:solidFill>
+        </p:spPr>
+        <p:txBody>
+          <a:bodyPr wrap="square">
+            <a:spAutoFit/>
+          </a:bodyPr>
+          <a:lstStyle/>
+          <a:p>
+            <a:r>
+              <a:rPr lang="en-US" sz="4500" b="1" spc="-112" dirty="0">
+                <a:solidFill>
+                  <a:schemeClr val="bg1"/>
+                </a:solidFill>
+                <a:latin typeface="Century Gothic" panose="020B0502020202020204" pitchFamily="34" charset="0"/>
+                <a:cs typeface="Segoe UI" panose="020B0502040204020203" pitchFamily="34" charset="0"/>
+              </a:rPr>
+              <a:t>Measures</a:t>
+            </a:r>
+            <a:endParaRPr lang="en-US" sz="4500" dirty="0">
+              <a:solidFill>
+                <a:schemeClr val="bg1"/>
+              </a:solidFill>
+            </a:endParaRPr>
+          </a:p>
+        </p:txBody>
+      </p:sp>
+      <p:sp>
+        <p:nvSpPr>
+          <p:cNvPr id="89" name="TextBox 88">
+            <a:extLst>
+              <a:ext uri="{FF2B5EF4-FFF2-40B4-BE49-F238E27FC236}">
+                <a16:creationId xmlns:a16="http://schemas.microsoft.com/office/drawing/2014/main" id="{4E5D93F4-1FF8-C9BB-316B-436004596A35}"/>
+              </a:ext>
+            </a:extLst>
+          </p:cNvPr>
+          <p:cNvSpPr txBox="1"/>
+          <p:nvPr/>
+        </p:nvSpPr>
+        <p:spPr>
+          <a:xfrm>
+            <a:off x="20889732" y="14771692"/>
+            <a:ext cx="17613482" cy="784830"/>
+          </a:xfrm>
+          <a:prstGeom prst="rect">
+            <a:avLst/>
+          </a:prstGeom>
+          <a:noFill/>
+        </p:spPr>
+        <p:txBody>
+          <a:bodyPr wrap="square">
+            <a:spAutoFit/>
+          </a:bodyPr>
+          <a:lstStyle/>
+          <a:p>
+            <a:r>
+              <a:rPr lang="en-US" sz="4500" b="1" spc="-112" dirty="0">
+                <a:solidFill>
+                  <a:schemeClr val="tx2"/>
+                </a:solidFill>
+                <a:latin typeface="Century Gothic" panose="020B0502020202020204" pitchFamily="34" charset="0"/>
+                <a:cs typeface="Segoe UI" panose="020B0502040204020203" pitchFamily="34" charset="0"/>
+              </a:rPr>
+              <a:t>Risk Drivers of Predictions</a:t>
+            </a:r>
+            <a:endParaRPr lang="en-US" sz="4500" dirty="0"/>
+          </a:p>
+        </p:txBody>
+      </p:sp>
+      <p:sp>
+        <p:nvSpPr>
+          <p:cNvPr id="90" name="TextBox 89">
+            <a:extLst>
+              <a:ext uri="{FF2B5EF4-FFF2-40B4-BE49-F238E27FC236}">
+                <a16:creationId xmlns:a16="http://schemas.microsoft.com/office/drawing/2014/main" id="{DB094DC2-D6CB-BB9E-BF96-CB596A963E10}"/>
+              </a:ext>
+            </a:extLst>
+          </p:cNvPr>
+          <p:cNvSpPr txBox="1"/>
+          <p:nvPr/>
+        </p:nvSpPr>
+        <p:spPr>
+          <a:xfrm>
+            <a:off x="99504" y="13745067"/>
+            <a:ext cx="8443444" cy="4108817"/>
+          </a:xfrm>
+          <a:prstGeom prst="rect">
+            <a:avLst/>
+          </a:prstGeom>
+          <a:noFill/>
+        </p:spPr>
+        <p:txBody>
+          <a:bodyPr wrap="square">
+            <a:spAutoFit/>
+          </a:bodyPr>
+          <a:lstStyle/>
+          <a:p>
+            <a:pPr marL="527050" marR="102235" indent="-514350">
+              <a:lnSpc>
+                <a:spcPct val="100000"/>
+              </a:lnSpc>
+              <a:spcBef>
+                <a:spcPts val="290"/>
+              </a:spcBef>
+              <a:buFont typeface="+mj-lt"/>
+              <a:buAutoNum type="arabicPeriod"/>
+            </a:pPr>
+            <a:r>
+              <a:rPr lang="en-US" sz="3200" spc="-20" dirty="0">
+                <a:solidFill>
+                  <a:schemeClr val="tx1"/>
+                </a:solidFill>
+                <a:latin typeface="Cambria" panose="02040503050406030204" pitchFamily="18" charset="0"/>
+                <a:cs typeface="Tahoma"/>
+              </a:rPr>
+              <a:t>Evaluate and compare the efficacy of various models in differentiating healthy controls from PD cases.</a:t>
+            </a:r>
+          </a:p>
+          <a:p>
+            <a:pPr marL="527050" marR="102235" indent="-514350">
+              <a:lnSpc>
+                <a:spcPct val="100000"/>
+              </a:lnSpc>
+              <a:spcBef>
+                <a:spcPts val="290"/>
+              </a:spcBef>
+              <a:buFont typeface="+mj-lt"/>
+              <a:buAutoNum type="arabicPeriod"/>
+            </a:pPr>
+            <a:r>
+              <a:rPr lang="en-US" sz="3200" spc="-20" dirty="0">
+                <a:solidFill>
+                  <a:schemeClr val="tx1"/>
+                </a:solidFill>
+                <a:latin typeface="Cambria" panose="02040503050406030204" pitchFamily="18" charset="0"/>
+                <a:cs typeface="Tahoma"/>
+              </a:rPr>
+              <a:t>Deploy the optimal model to further categorize PD cases into PD and PD-plus subgroups.</a:t>
+            </a:r>
+          </a:p>
+          <a:p>
+            <a:pPr marL="527050" marR="102235" indent="-514350">
+              <a:lnSpc>
+                <a:spcPct val="100000"/>
+              </a:lnSpc>
+              <a:spcBef>
+                <a:spcPts val="290"/>
+              </a:spcBef>
+              <a:buFont typeface="+mj-lt"/>
+              <a:buAutoNum type="arabicPeriod"/>
+            </a:pPr>
+            <a:r>
+              <a:rPr lang="en-US" sz="3200" spc="-20" dirty="0">
+                <a:solidFill>
+                  <a:schemeClr val="tx1"/>
+                </a:solidFill>
+                <a:latin typeface="Cambria" panose="02040503050406030204" pitchFamily="18" charset="0"/>
+                <a:cs typeface="Tahoma"/>
+              </a:rPr>
+              <a:t>Interpret individual predictions and identify key risk drivers through SHAP analysis.</a:t>
+            </a:r>
+            <a:endParaRPr lang="en-US" sz="3200" spc="-20" dirty="0">
+              <a:latin typeface="Cambria" panose="02040503050406030204" pitchFamily="18" charset="0"/>
+              <a:cs typeface="Tahoma"/>
+            </a:endParaRPr>
+          </a:p>
+        </p:txBody>
+      </p:sp>
     </p:spTree>
     <p:extLst>
       <p:ext uri="{BB962C8B-B14F-4D97-AF65-F5344CB8AC3E}">

--- a/CHL5250PosterParkinsons.pptx
+++ b/CHL5250PosterParkinsons.pptx
@@ -1,11 +1,14 @@
 
 <file path=ppt/presentation.xml><?xml version="1.0" encoding="utf-8"?>
-<p:presentation xmlns:a="http://schemas.openxmlformats.org/drawingml/2006/main" xmlns:r="http://schemas.openxmlformats.org/officeDocument/2006/relationships" xmlns:p="http://schemas.openxmlformats.org/presentationml/2006/main" saveSubsetFonts="1" autoCompressPictures="0">
+<p:presentation xmlns:a="http://schemas.openxmlformats.org/drawingml/2006/main" xmlns:r="http://schemas.openxmlformats.org/officeDocument/2006/relationships" xmlns:p="http://schemas.openxmlformats.org/presentationml/2006/main" autoCompressPictures="0">
   <p:sldMasterIdLst>
-    <p:sldMasterId id="2147483660" r:id="rId1"/>
+    <p:sldMasterId id="2147483648" r:id="rId1"/>
   </p:sldMasterIdLst>
+  <p:notesMasterIdLst>
+    <p:notesMasterId r:id="rId4"/>
+  </p:notesMasterIdLst>
   <p:sldIdLst>
-    <p:sldId id="256" r:id="rId2"/>
+    <p:sldId id="256" r:id="rId3"/>
   </p:sldIdLst>
   <p:sldSz cx="32918400" cy="32918400"/>
   <p:notesSz cx="6858000" cy="9144000"/>
@@ -104,12 +107,402 @@
       </a:defRPr>
     </a:lvl9pPr>
   </p:defaultTextStyle>
-  <p:extLst>
-    <p:ext uri="{EFAFB233-063F-42B5-8137-9DF3F51BA10A}">
-      <p15:sldGuideLst xmlns:p15="http://schemas.microsoft.com/office/powerpoint/2012/main"/>
-    </p:ext>
-  </p:extLst>
 </p:presentation>
+</file>
+
+<file path=ppt/notesMasters/notesMaster1.xml><?xml version="1.0" encoding="utf-8"?>
+<p:notesMaster xmlns:a="http://schemas.openxmlformats.org/drawingml/2006/main" xmlns:r="http://schemas.openxmlformats.org/officeDocument/2006/relationships" xmlns:p="http://schemas.openxmlformats.org/presentationml/2006/main">
+  <p:cSld>
+    <p:bg>
+      <p:bgRef idx="1001">
+        <a:schemeClr val="bg1"/>
+      </p:bgRef>
+    </p:bg>
+    <p:spTree>
+      <p:nvGrpSpPr>
+        <p:cNvPr id="1" name=""/>
+        <p:cNvGrpSpPr/>
+        <p:nvPr/>
+      </p:nvGrpSpPr>
+      <p:grpSpPr>
+        <a:xfrm>
+          <a:off x="0" y="0"/>
+          <a:ext cx="0" cy="0"/>
+          <a:chOff x="0" y="0"/>
+          <a:chExt cx="0" cy="0"/>
+        </a:xfrm>
+      </p:grpSpPr>
+      <p:sp>
+        <p:nvSpPr>
+          <p:cNvPr id="2" name="页眉占位符 1"/>
+          <p:cNvSpPr>
+            <a:spLocks noGrp="1"/>
+          </p:cNvSpPr>
+          <p:nvPr>
+            <p:ph type="hdr" sz="quarter"/>
+          </p:nvPr>
+        </p:nvSpPr>
+        <p:spPr>
+          <a:xfrm>
+            <a:off x="0" y="0"/>
+            <a:ext cx="2971800" cy="458788"/>
+          </a:xfrm>
+          <a:prstGeom prst="rect">
+            <a:avLst/>
+          </a:prstGeom>
+        </p:spPr>
+        <p:txBody>
+          <a:bodyPr vert="horz" lIns="91440" tIns="45720" rIns="91440" bIns="45720" rtlCol="0"/>
+          <a:lstStyle>
+            <a:lvl1pPr algn="l">
+              <a:defRPr sz="1200"/>
+            </a:lvl1pPr>
+          </a:lstStyle>
+          <a:p>
+            <a:endParaRPr lang="zh-CN" altLang="en-US"/>
+          </a:p>
+        </p:txBody>
+      </p:sp>
+      <p:sp>
+        <p:nvSpPr>
+          <p:cNvPr id="3" name="日期占位符 2"/>
+          <p:cNvSpPr>
+            <a:spLocks noGrp="1"/>
+          </p:cNvSpPr>
+          <p:nvPr>
+            <p:ph type="dt" idx="1"/>
+          </p:nvPr>
+        </p:nvSpPr>
+        <p:spPr>
+          <a:xfrm>
+            <a:off x="3884613" y="0"/>
+            <a:ext cx="2971800" cy="458788"/>
+          </a:xfrm>
+          <a:prstGeom prst="rect">
+            <a:avLst/>
+          </a:prstGeom>
+        </p:spPr>
+        <p:txBody>
+          <a:bodyPr vert="horz" lIns="91440" tIns="45720" rIns="91440" bIns="45720" rtlCol="0"/>
+          <a:lstStyle>
+            <a:lvl1pPr algn="r">
+              <a:defRPr sz="1200"/>
+            </a:lvl1pPr>
+          </a:lstStyle>
+          <a:p>
+            <a:fld id="{D2A48B96-639E-45A3-A0BA-2464DFDB1FAA}" type="datetimeFigureOut">
+              <a:rPr lang="zh-CN" altLang="en-US" smtClean="0"/>
+            </a:fld>
+            <a:endParaRPr lang="zh-CN" altLang="en-US"/>
+          </a:p>
+        </p:txBody>
+      </p:sp>
+      <p:sp>
+        <p:nvSpPr>
+          <p:cNvPr id="4" name="幻灯片图像占位符 3"/>
+          <p:cNvSpPr>
+            <a:spLocks noGrp="1" noRot="1" noChangeAspect="1"/>
+          </p:cNvSpPr>
+          <p:nvPr>
+            <p:ph type="sldImg" idx="2"/>
+          </p:nvPr>
+        </p:nvSpPr>
+        <p:spPr>
+          <a:xfrm>
+            <a:off x="1885950" y="1143000"/>
+            <a:ext cx="3086100" cy="3086100"/>
+          </a:xfrm>
+          <a:prstGeom prst="rect">
+            <a:avLst/>
+          </a:prstGeom>
+          <a:noFill/>
+          <a:ln w="12700">
+            <a:solidFill>
+              <a:prstClr val="black"/>
+            </a:solidFill>
+          </a:ln>
+        </p:spPr>
+        <p:txBody>
+          <a:bodyPr vert="horz" lIns="91440" tIns="45720" rIns="91440" bIns="45720" rtlCol="0" anchor="ctr"/>
+          <a:lstStyle/>
+          <a:p>
+            <a:endParaRPr lang="zh-CN" altLang="en-US"/>
+          </a:p>
+        </p:txBody>
+      </p:sp>
+      <p:sp>
+        <p:nvSpPr>
+          <p:cNvPr id="5" name="备注占位符 4"/>
+          <p:cNvSpPr>
+            <a:spLocks noGrp="1"/>
+          </p:cNvSpPr>
+          <p:nvPr>
+            <p:ph type="body" sz="quarter" idx="3"/>
+          </p:nvPr>
+        </p:nvSpPr>
+        <p:spPr>
+          <a:xfrm>
+            <a:off x="685800" y="4400550"/>
+            <a:ext cx="5486400" cy="3600450"/>
+          </a:xfrm>
+          <a:prstGeom prst="rect">
+            <a:avLst/>
+          </a:prstGeom>
+        </p:spPr>
+        <p:txBody>
+          <a:bodyPr vert="horz" lIns="91440" tIns="45720" rIns="91440" bIns="45720" rtlCol="0"/>
+          <a:lstStyle/>
+          <a:p>
+            <a:pPr lvl="0"/>
+            <a:r>
+              <a:rPr lang="zh-CN" altLang="en-US" smtClean="0"/>
+              <a:t>单击此处编辑母版文本样式</a:t>
+            </a:r>
+            <a:endParaRPr lang="zh-CN" altLang="en-US" smtClean="0"/>
+          </a:p>
+          <a:p>
+            <a:pPr lvl="1"/>
+            <a:r>
+              <a:rPr lang="zh-CN" altLang="en-US" smtClean="0"/>
+              <a:t>第二级</a:t>
+            </a:r>
+            <a:endParaRPr lang="zh-CN" altLang="en-US" smtClean="0"/>
+          </a:p>
+          <a:p>
+            <a:pPr lvl="2"/>
+            <a:r>
+              <a:rPr lang="zh-CN" altLang="en-US" smtClean="0"/>
+              <a:t>第三级</a:t>
+            </a:r>
+            <a:endParaRPr lang="zh-CN" altLang="en-US" smtClean="0"/>
+          </a:p>
+          <a:p>
+            <a:pPr lvl="3"/>
+            <a:r>
+              <a:rPr lang="zh-CN" altLang="en-US" smtClean="0"/>
+              <a:t>第四级</a:t>
+            </a:r>
+            <a:endParaRPr lang="zh-CN" altLang="en-US" smtClean="0"/>
+          </a:p>
+          <a:p>
+            <a:pPr lvl="4"/>
+            <a:r>
+              <a:rPr lang="zh-CN" altLang="en-US" smtClean="0"/>
+              <a:t>第五级</a:t>
+            </a:r>
+            <a:endParaRPr lang="zh-CN" altLang="en-US"/>
+          </a:p>
+        </p:txBody>
+      </p:sp>
+      <p:sp>
+        <p:nvSpPr>
+          <p:cNvPr id="6" name="页脚占位符 5"/>
+          <p:cNvSpPr>
+            <a:spLocks noGrp="1"/>
+          </p:cNvSpPr>
+          <p:nvPr>
+            <p:ph type="ftr" sz="quarter" idx="4"/>
+          </p:nvPr>
+        </p:nvSpPr>
+        <p:spPr>
+          <a:xfrm>
+            <a:off x="0" y="8685213"/>
+            <a:ext cx="2971800" cy="458787"/>
+          </a:xfrm>
+          <a:prstGeom prst="rect">
+            <a:avLst/>
+          </a:prstGeom>
+        </p:spPr>
+        <p:txBody>
+          <a:bodyPr vert="horz" lIns="91440" tIns="45720" rIns="91440" bIns="45720" rtlCol="0" anchor="b"/>
+          <a:lstStyle>
+            <a:lvl1pPr algn="l">
+              <a:defRPr sz="1200"/>
+            </a:lvl1pPr>
+          </a:lstStyle>
+          <a:p>
+            <a:endParaRPr lang="zh-CN" altLang="en-US"/>
+          </a:p>
+        </p:txBody>
+      </p:sp>
+      <p:sp>
+        <p:nvSpPr>
+          <p:cNvPr id="7" name="灯片编号占位符 6"/>
+          <p:cNvSpPr>
+            <a:spLocks noGrp="1"/>
+          </p:cNvSpPr>
+          <p:nvPr>
+            <p:ph type="sldNum" sz="quarter" idx="5"/>
+          </p:nvPr>
+        </p:nvSpPr>
+        <p:spPr>
+          <a:xfrm>
+            <a:off x="3884613" y="8685213"/>
+            <a:ext cx="2971800" cy="458787"/>
+          </a:xfrm>
+          <a:prstGeom prst="rect">
+            <a:avLst/>
+          </a:prstGeom>
+        </p:spPr>
+        <p:txBody>
+          <a:bodyPr vert="horz" lIns="91440" tIns="45720" rIns="91440" bIns="45720" rtlCol="0" anchor="b"/>
+          <a:lstStyle>
+            <a:lvl1pPr algn="r">
+              <a:defRPr sz="1200"/>
+            </a:lvl1pPr>
+          </a:lstStyle>
+          <a:p>
+            <a:fld id="{A6837353-30EB-4A48-80EB-173D804AEFBD}" type="slidenum">
+              <a:rPr lang="zh-CN" altLang="en-US" smtClean="0"/>
+            </a:fld>
+            <a:endParaRPr lang="zh-CN" altLang="en-US"/>
+          </a:p>
+        </p:txBody>
+      </p:sp>
+    </p:spTree>
+  </p:cSld>
+  <p:clrMap bg1="lt1" tx1="dk1" bg2="lt2" tx2="dk2" accent1="accent1" accent2="accent2" accent3="accent3" accent4="accent4" accent5="accent5" accent6="accent6" hlink="hlink" folHlink="folHlink"/>
+  <p:notesStyle>
+    <a:lvl1pPr marL="0" algn="l" defTabSz="914400" rtl="0" eaLnBrk="1" latinLnBrk="0" hangingPunct="1">
+      <a:defRPr sz="1200" kern="1200">
+        <a:solidFill>
+          <a:schemeClr val="tx1"/>
+        </a:solidFill>
+        <a:latin typeface="+mn-lt"/>
+        <a:ea typeface="+mn-ea"/>
+        <a:cs typeface="+mn-cs"/>
+      </a:defRPr>
+    </a:lvl1pPr>
+    <a:lvl2pPr marL="457200" algn="l" defTabSz="914400" rtl="0" eaLnBrk="1" latinLnBrk="0" hangingPunct="1">
+      <a:defRPr sz="1200" kern="1200">
+        <a:solidFill>
+          <a:schemeClr val="tx1"/>
+        </a:solidFill>
+        <a:latin typeface="+mn-lt"/>
+        <a:ea typeface="+mn-ea"/>
+        <a:cs typeface="+mn-cs"/>
+      </a:defRPr>
+    </a:lvl2pPr>
+    <a:lvl3pPr marL="914400" algn="l" defTabSz="914400" rtl="0" eaLnBrk="1" latinLnBrk="0" hangingPunct="1">
+      <a:defRPr sz="1200" kern="1200">
+        <a:solidFill>
+          <a:schemeClr val="tx1"/>
+        </a:solidFill>
+        <a:latin typeface="+mn-lt"/>
+        <a:ea typeface="+mn-ea"/>
+        <a:cs typeface="+mn-cs"/>
+      </a:defRPr>
+    </a:lvl3pPr>
+    <a:lvl4pPr marL="1371600" algn="l" defTabSz="914400" rtl="0" eaLnBrk="1" latinLnBrk="0" hangingPunct="1">
+      <a:defRPr sz="1200" kern="1200">
+        <a:solidFill>
+          <a:schemeClr val="tx1"/>
+        </a:solidFill>
+        <a:latin typeface="+mn-lt"/>
+        <a:ea typeface="+mn-ea"/>
+        <a:cs typeface="+mn-cs"/>
+      </a:defRPr>
+    </a:lvl4pPr>
+    <a:lvl5pPr marL="1828800" algn="l" defTabSz="914400" rtl="0" eaLnBrk="1" latinLnBrk="0" hangingPunct="1">
+      <a:defRPr sz="1200" kern="1200">
+        <a:solidFill>
+          <a:schemeClr val="tx1"/>
+        </a:solidFill>
+        <a:latin typeface="+mn-lt"/>
+        <a:ea typeface="+mn-ea"/>
+        <a:cs typeface="+mn-cs"/>
+      </a:defRPr>
+    </a:lvl5pPr>
+    <a:lvl6pPr marL="2286000" algn="l" defTabSz="914400" rtl="0" eaLnBrk="1" latinLnBrk="0" hangingPunct="1">
+      <a:defRPr sz="1200" kern="1200">
+        <a:solidFill>
+          <a:schemeClr val="tx1"/>
+        </a:solidFill>
+        <a:latin typeface="+mn-lt"/>
+        <a:ea typeface="+mn-ea"/>
+        <a:cs typeface="+mn-cs"/>
+      </a:defRPr>
+    </a:lvl6pPr>
+    <a:lvl7pPr marL="2743200" algn="l" defTabSz="914400" rtl="0" eaLnBrk="1" latinLnBrk="0" hangingPunct="1">
+      <a:defRPr sz="1200" kern="1200">
+        <a:solidFill>
+          <a:schemeClr val="tx1"/>
+        </a:solidFill>
+        <a:latin typeface="+mn-lt"/>
+        <a:ea typeface="+mn-ea"/>
+        <a:cs typeface="+mn-cs"/>
+      </a:defRPr>
+    </a:lvl7pPr>
+    <a:lvl8pPr marL="3200400" algn="l" defTabSz="914400" rtl="0" eaLnBrk="1" latinLnBrk="0" hangingPunct="1">
+      <a:defRPr sz="1200" kern="1200">
+        <a:solidFill>
+          <a:schemeClr val="tx1"/>
+        </a:solidFill>
+        <a:latin typeface="+mn-lt"/>
+        <a:ea typeface="+mn-ea"/>
+        <a:cs typeface="+mn-cs"/>
+      </a:defRPr>
+    </a:lvl8pPr>
+    <a:lvl9pPr marL="3657600" algn="l" defTabSz="914400" rtl="0" eaLnBrk="1" latinLnBrk="0" hangingPunct="1">
+      <a:defRPr sz="1200" kern="1200">
+        <a:solidFill>
+          <a:schemeClr val="tx1"/>
+        </a:solidFill>
+        <a:latin typeface="+mn-lt"/>
+        <a:ea typeface="+mn-ea"/>
+        <a:cs typeface="+mn-cs"/>
+      </a:defRPr>
+    </a:lvl9pPr>
+  </p:notesStyle>
+</p:notesMaster>
+</file>
+
+<file path=ppt/notesSlides/notesSlide1.xml><?xml version="1.0" encoding="utf-8"?>
+<p:notes xmlns:a="http://schemas.openxmlformats.org/drawingml/2006/main" xmlns:r="http://schemas.openxmlformats.org/officeDocument/2006/relationships" xmlns:p="http://schemas.openxmlformats.org/presentationml/2006/main">
+  <p:cSld>
+    <p:spTree>
+      <p:nvGrpSpPr>
+        <p:cNvPr id="1" name=""/>
+        <p:cNvGrpSpPr/>
+        <p:nvPr/>
+      </p:nvGrpSpPr>
+      <p:grpSpPr/>
+      <p:sp>
+        <p:nvSpPr>
+          <p:cNvPr id="2" name="幻灯片图像占位符 1"/>
+          <p:cNvSpPr>
+            <a:spLocks noGrp="1"/>
+          </p:cNvSpPr>
+          <p:nvPr>
+            <p:ph type="sldImg" idx="2"/>
+          </p:nvPr>
+        </p:nvSpPr>
+        <p:spPr/>
+      </p:sp>
+      <p:sp>
+        <p:nvSpPr>
+          <p:cNvPr id="3" name="文本占位符 2"/>
+          <p:cNvSpPr>
+            <a:spLocks noGrp="1"/>
+          </p:cNvSpPr>
+          <p:nvPr>
+            <p:ph type="body" idx="3"/>
+          </p:nvPr>
+        </p:nvSpPr>
+        <p:spPr/>
+        <p:txBody>
+          <a:bodyPr/>
+          <a:p>
+            <a:endParaRPr lang="zh-CN" altLang="en-US"/>
+          </a:p>
+        </p:txBody>
+      </p:sp>
+    </p:spTree>
+  </p:cSld>
+  <p:clrMapOvr>
+    <a:masterClrMapping/>
+  </p:clrMapOvr>
+</p:notes>
 </file>
 
 <file path=ppt/slideLayouts/slideLayout1.xml><?xml version="1.0" encoding="utf-8"?>
@@ -243,7 +636,6 @@
           <a:p>
             <a:fld id="{B17E097D-BF14-0048-A1F1-91A4B3DB23CE}" type="datetimeFigureOut">
               <a:rPr lang="en-US" smtClean="0"/>
-              <a:t>4/10/26</a:t>
             </a:fld>
             <a:endParaRPr lang="en-US"/>
           </a:p>
@@ -285,18 +677,12 @@
           <a:p>
             <a:fld id="{2F29E7E3-3D05-DC41-B909-139336B5BB98}" type="slidenum">
               <a:rPr lang="en-US" smtClean="0"/>
-              <a:t>‹#›</a:t>
             </a:fld>
             <a:endParaRPr lang="en-US"/>
           </a:p>
         </p:txBody>
       </p:sp>
     </p:spTree>
-    <p:extLst>
-      <p:ext uri="{BB962C8B-B14F-4D97-AF65-F5344CB8AC3E}">
-        <p14:creationId xmlns:p14="http://schemas.microsoft.com/office/powerpoint/2010/main" val="401962718"/>
-      </p:ext>
-    </p:extLst>
   </p:cSld>
   <p:clrMapOvr>
     <a:masterClrMapping/>
@@ -364,6 +750,7 @@
               <a:rPr lang="en-US"/>
               <a:t>Click to edit Master text styles</a:t>
             </a:r>
+            <a:endParaRPr lang="en-US"/>
           </a:p>
           <a:p>
             <a:pPr lvl="1"/>
@@ -371,6 +758,7 @@
               <a:rPr lang="en-US"/>
               <a:t>Second level</a:t>
             </a:r>
+            <a:endParaRPr lang="en-US"/>
           </a:p>
           <a:p>
             <a:pPr lvl="2"/>
@@ -378,6 +766,7 @@
               <a:rPr lang="en-US"/>
               <a:t>Third level</a:t>
             </a:r>
+            <a:endParaRPr lang="en-US"/>
           </a:p>
           <a:p>
             <a:pPr lvl="3"/>
@@ -385,6 +774,7 @@
               <a:rPr lang="en-US"/>
               <a:t>Fourth level</a:t>
             </a:r>
+            <a:endParaRPr lang="en-US"/>
           </a:p>
           <a:p>
             <a:pPr lvl="4"/>
@@ -413,7 +803,6 @@
           <a:p>
             <a:fld id="{B17E097D-BF14-0048-A1F1-91A4B3DB23CE}" type="datetimeFigureOut">
               <a:rPr lang="en-US" smtClean="0"/>
-              <a:t>4/10/26</a:t>
             </a:fld>
             <a:endParaRPr lang="en-US"/>
           </a:p>
@@ -455,18 +844,12 @@
           <a:p>
             <a:fld id="{2F29E7E3-3D05-DC41-B909-139336B5BB98}" type="slidenum">
               <a:rPr lang="en-US" smtClean="0"/>
-              <a:t>‹#›</a:t>
             </a:fld>
             <a:endParaRPr lang="en-US"/>
           </a:p>
         </p:txBody>
       </p:sp>
     </p:spTree>
-    <p:extLst>
-      <p:ext uri="{BB962C8B-B14F-4D97-AF65-F5344CB8AC3E}">
-        <p14:creationId xmlns:p14="http://schemas.microsoft.com/office/powerpoint/2010/main" val="808499956"/>
-      </p:ext>
-    </p:extLst>
   </p:cSld>
   <p:clrMapOvr>
     <a:masterClrMapping/>
@@ -544,6 +927,7 @@
               <a:rPr lang="en-US"/>
               <a:t>Click to edit Master text styles</a:t>
             </a:r>
+            <a:endParaRPr lang="en-US"/>
           </a:p>
           <a:p>
             <a:pPr lvl="1"/>
@@ -551,6 +935,7 @@
               <a:rPr lang="en-US"/>
               <a:t>Second level</a:t>
             </a:r>
+            <a:endParaRPr lang="en-US"/>
           </a:p>
           <a:p>
             <a:pPr lvl="2"/>
@@ -558,6 +943,7 @@
               <a:rPr lang="en-US"/>
               <a:t>Third level</a:t>
             </a:r>
+            <a:endParaRPr lang="en-US"/>
           </a:p>
           <a:p>
             <a:pPr lvl="3"/>
@@ -565,6 +951,7 @@
               <a:rPr lang="en-US"/>
               <a:t>Fourth level</a:t>
             </a:r>
+            <a:endParaRPr lang="en-US"/>
           </a:p>
           <a:p>
             <a:pPr lvl="4"/>
@@ -593,7 +980,6 @@
           <a:p>
             <a:fld id="{B17E097D-BF14-0048-A1F1-91A4B3DB23CE}" type="datetimeFigureOut">
               <a:rPr lang="en-US" smtClean="0"/>
-              <a:t>4/10/26</a:t>
             </a:fld>
             <a:endParaRPr lang="en-US"/>
           </a:p>
@@ -635,18 +1021,12 @@
           <a:p>
             <a:fld id="{2F29E7E3-3D05-DC41-B909-139336B5BB98}" type="slidenum">
               <a:rPr lang="en-US" smtClean="0"/>
-              <a:t>‹#›</a:t>
             </a:fld>
             <a:endParaRPr lang="en-US"/>
           </a:p>
         </p:txBody>
       </p:sp>
     </p:spTree>
-    <p:extLst>
-      <p:ext uri="{BB962C8B-B14F-4D97-AF65-F5344CB8AC3E}">
-        <p14:creationId xmlns:p14="http://schemas.microsoft.com/office/powerpoint/2010/main" val="2632478752"/>
-      </p:ext>
-    </p:extLst>
   </p:cSld>
   <p:clrMapOvr>
     <a:masterClrMapping/>
@@ -714,6 +1094,7 @@
               <a:rPr lang="en-US"/>
               <a:t>Click to edit Master text styles</a:t>
             </a:r>
+            <a:endParaRPr lang="en-US"/>
           </a:p>
           <a:p>
             <a:pPr lvl="1"/>
@@ -721,6 +1102,7 @@
               <a:rPr lang="en-US"/>
               <a:t>Second level</a:t>
             </a:r>
+            <a:endParaRPr lang="en-US"/>
           </a:p>
           <a:p>
             <a:pPr lvl="2"/>
@@ -728,6 +1110,7 @@
               <a:rPr lang="en-US"/>
               <a:t>Third level</a:t>
             </a:r>
+            <a:endParaRPr lang="en-US"/>
           </a:p>
           <a:p>
             <a:pPr lvl="3"/>
@@ -735,6 +1118,7 @@
               <a:rPr lang="en-US"/>
               <a:t>Fourth level</a:t>
             </a:r>
+            <a:endParaRPr lang="en-US"/>
           </a:p>
           <a:p>
             <a:pPr lvl="4"/>
@@ -763,7 +1147,6 @@
           <a:p>
             <a:fld id="{B17E097D-BF14-0048-A1F1-91A4B3DB23CE}" type="datetimeFigureOut">
               <a:rPr lang="en-US" smtClean="0"/>
-              <a:t>4/10/26</a:t>
             </a:fld>
             <a:endParaRPr lang="en-US"/>
           </a:p>
@@ -805,18 +1188,12 @@
           <a:p>
             <a:fld id="{2F29E7E3-3D05-DC41-B909-139336B5BB98}" type="slidenum">
               <a:rPr lang="en-US" smtClean="0"/>
-              <a:t>‹#›</a:t>
             </a:fld>
             <a:endParaRPr lang="en-US"/>
           </a:p>
         </p:txBody>
       </p:sp>
     </p:spTree>
-    <p:extLst>
-      <p:ext uri="{BB962C8B-B14F-4D97-AF65-F5344CB8AC3E}">
-        <p14:creationId xmlns:p14="http://schemas.microsoft.com/office/powerpoint/2010/main" val="707741707"/>
-      </p:ext>
-    </p:extLst>
   </p:cSld>
   <p:clrMapOvr>
     <a:masterClrMapping/>
@@ -989,6 +1366,7 @@
               <a:rPr lang="en-US"/>
               <a:t>Click to edit Master text styles</a:t>
             </a:r>
+            <a:endParaRPr lang="en-US"/>
           </a:p>
         </p:txBody>
       </p:sp>
@@ -1009,7 +1387,6 @@
           <a:p>
             <a:fld id="{B17E097D-BF14-0048-A1F1-91A4B3DB23CE}" type="datetimeFigureOut">
               <a:rPr lang="en-US" smtClean="0"/>
-              <a:t>4/10/26</a:t>
             </a:fld>
             <a:endParaRPr lang="en-US"/>
           </a:p>
@@ -1051,18 +1428,12 @@
           <a:p>
             <a:fld id="{2F29E7E3-3D05-DC41-B909-139336B5BB98}" type="slidenum">
               <a:rPr lang="en-US" smtClean="0"/>
-              <a:t>‹#›</a:t>
             </a:fld>
             <a:endParaRPr lang="en-US"/>
           </a:p>
         </p:txBody>
       </p:sp>
     </p:spTree>
-    <p:extLst>
-      <p:ext uri="{BB962C8B-B14F-4D97-AF65-F5344CB8AC3E}">
-        <p14:creationId xmlns:p14="http://schemas.microsoft.com/office/powerpoint/2010/main" val="1455258771"/>
-      </p:ext>
-    </p:extLst>
   </p:cSld>
   <p:clrMapOvr>
     <a:masterClrMapping/>
@@ -1135,6 +1506,7 @@
               <a:rPr lang="en-US"/>
               <a:t>Click to edit Master text styles</a:t>
             </a:r>
+            <a:endParaRPr lang="en-US"/>
           </a:p>
           <a:p>
             <a:pPr lvl="1"/>
@@ -1142,6 +1514,7 @@
               <a:rPr lang="en-US"/>
               <a:t>Second level</a:t>
             </a:r>
+            <a:endParaRPr lang="en-US"/>
           </a:p>
           <a:p>
             <a:pPr lvl="2"/>
@@ -1149,6 +1522,7 @@
               <a:rPr lang="en-US"/>
               <a:t>Third level</a:t>
             </a:r>
+            <a:endParaRPr lang="en-US"/>
           </a:p>
           <a:p>
             <a:pPr lvl="3"/>
@@ -1156,6 +1530,7 @@
               <a:rPr lang="en-US"/>
               <a:t>Fourth level</a:t>
             </a:r>
+            <a:endParaRPr lang="en-US"/>
           </a:p>
           <a:p>
             <a:pPr lvl="4"/>
@@ -1192,6 +1567,7 @@
               <a:rPr lang="en-US"/>
               <a:t>Click to edit Master text styles</a:t>
             </a:r>
+            <a:endParaRPr lang="en-US"/>
           </a:p>
           <a:p>
             <a:pPr lvl="1"/>
@@ -1199,6 +1575,7 @@
               <a:rPr lang="en-US"/>
               <a:t>Second level</a:t>
             </a:r>
+            <a:endParaRPr lang="en-US"/>
           </a:p>
           <a:p>
             <a:pPr lvl="2"/>
@@ -1206,6 +1583,7 @@
               <a:rPr lang="en-US"/>
               <a:t>Third level</a:t>
             </a:r>
+            <a:endParaRPr lang="en-US"/>
           </a:p>
           <a:p>
             <a:pPr lvl="3"/>
@@ -1213,6 +1591,7 @@
               <a:rPr lang="en-US"/>
               <a:t>Fourth level</a:t>
             </a:r>
+            <a:endParaRPr lang="en-US"/>
           </a:p>
           <a:p>
             <a:pPr lvl="4"/>
@@ -1241,7 +1620,6 @@
           <a:p>
             <a:fld id="{B17E097D-BF14-0048-A1F1-91A4B3DB23CE}" type="datetimeFigureOut">
               <a:rPr lang="en-US" smtClean="0"/>
-              <a:t>4/10/26</a:t>
             </a:fld>
             <a:endParaRPr lang="en-US"/>
           </a:p>
@@ -1283,18 +1661,12 @@
           <a:p>
             <a:fld id="{2F29E7E3-3D05-DC41-B909-139336B5BB98}" type="slidenum">
               <a:rPr lang="en-US" smtClean="0"/>
-              <a:t>‹#›</a:t>
             </a:fld>
             <a:endParaRPr lang="en-US"/>
           </a:p>
         </p:txBody>
       </p:sp>
     </p:spTree>
-    <p:extLst>
-      <p:ext uri="{BB962C8B-B14F-4D97-AF65-F5344CB8AC3E}">
-        <p14:creationId xmlns:p14="http://schemas.microsoft.com/office/powerpoint/2010/main" val="795736644"/>
-      </p:ext>
-    </p:extLst>
   </p:cSld>
   <p:clrMapOvr>
     <a:masterClrMapping/>
@@ -1409,6 +1781,7 @@
               <a:rPr lang="en-US"/>
               <a:t>Click to edit Master text styles</a:t>
             </a:r>
+            <a:endParaRPr lang="en-US"/>
           </a:p>
         </p:txBody>
       </p:sp>
@@ -1437,6 +1810,7 @@
               <a:rPr lang="en-US"/>
               <a:t>Click to edit Master text styles</a:t>
             </a:r>
+            <a:endParaRPr lang="en-US"/>
           </a:p>
           <a:p>
             <a:pPr lvl="1"/>
@@ -1444,6 +1818,7 @@
               <a:rPr lang="en-US"/>
               <a:t>Second level</a:t>
             </a:r>
+            <a:endParaRPr lang="en-US"/>
           </a:p>
           <a:p>
             <a:pPr lvl="2"/>
@@ -1451,6 +1826,7 @@
               <a:rPr lang="en-US"/>
               <a:t>Third level</a:t>
             </a:r>
+            <a:endParaRPr lang="en-US"/>
           </a:p>
           <a:p>
             <a:pPr lvl="3"/>
@@ -1458,6 +1834,7 @@
               <a:rPr lang="en-US"/>
               <a:t>Fourth level</a:t>
             </a:r>
+            <a:endParaRPr lang="en-US"/>
           </a:p>
           <a:p>
             <a:pPr lvl="4"/>
@@ -1531,6 +1908,7 @@
               <a:rPr lang="en-US"/>
               <a:t>Click to edit Master text styles</a:t>
             </a:r>
+            <a:endParaRPr lang="en-US"/>
           </a:p>
         </p:txBody>
       </p:sp>
@@ -1559,6 +1937,7 @@
               <a:rPr lang="en-US"/>
               <a:t>Click to edit Master text styles</a:t>
             </a:r>
+            <a:endParaRPr lang="en-US"/>
           </a:p>
           <a:p>
             <a:pPr lvl="1"/>
@@ -1566,6 +1945,7 @@
               <a:rPr lang="en-US"/>
               <a:t>Second level</a:t>
             </a:r>
+            <a:endParaRPr lang="en-US"/>
           </a:p>
           <a:p>
             <a:pPr lvl="2"/>
@@ -1573,6 +1953,7 @@
               <a:rPr lang="en-US"/>
               <a:t>Third level</a:t>
             </a:r>
+            <a:endParaRPr lang="en-US"/>
           </a:p>
           <a:p>
             <a:pPr lvl="3"/>
@@ -1580,6 +1961,7 @@
               <a:rPr lang="en-US"/>
               <a:t>Fourth level</a:t>
             </a:r>
+            <a:endParaRPr lang="en-US"/>
           </a:p>
           <a:p>
             <a:pPr lvl="4"/>
@@ -1608,7 +1990,6 @@
           <a:p>
             <a:fld id="{B17E097D-BF14-0048-A1F1-91A4B3DB23CE}" type="datetimeFigureOut">
               <a:rPr lang="en-US" smtClean="0"/>
-              <a:t>4/10/26</a:t>
             </a:fld>
             <a:endParaRPr lang="en-US"/>
           </a:p>
@@ -1650,18 +2031,12 @@
           <a:p>
             <a:fld id="{2F29E7E3-3D05-DC41-B909-139336B5BB98}" type="slidenum">
               <a:rPr lang="en-US" smtClean="0"/>
-              <a:t>‹#›</a:t>
             </a:fld>
             <a:endParaRPr lang="en-US"/>
           </a:p>
         </p:txBody>
       </p:sp>
     </p:spTree>
-    <p:extLst>
-      <p:ext uri="{BB962C8B-B14F-4D97-AF65-F5344CB8AC3E}">
-        <p14:creationId xmlns:p14="http://schemas.microsoft.com/office/powerpoint/2010/main" val="1029174855"/>
-      </p:ext>
-    </p:extLst>
   </p:cSld>
   <p:clrMapOvr>
     <a:masterClrMapping/>
@@ -1726,7 +2101,6 @@
           <a:p>
             <a:fld id="{B17E097D-BF14-0048-A1F1-91A4B3DB23CE}" type="datetimeFigureOut">
               <a:rPr lang="en-US" smtClean="0"/>
-              <a:t>4/10/26</a:t>
             </a:fld>
             <a:endParaRPr lang="en-US"/>
           </a:p>
@@ -1768,18 +2142,12 @@
           <a:p>
             <a:fld id="{2F29E7E3-3D05-DC41-B909-139336B5BB98}" type="slidenum">
               <a:rPr lang="en-US" smtClean="0"/>
-              <a:t>‹#›</a:t>
             </a:fld>
             <a:endParaRPr lang="en-US"/>
           </a:p>
         </p:txBody>
       </p:sp>
     </p:spTree>
-    <p:extLst>
-      <p:ext uri="{BB962C8B-B14F-4D97-AF65-F5344CB8AC3E}">
-        <p14:creationId xmlns:p14="http://schemas.microsoft.com/office/powerpoint/2010/main" val="3554003852"/>
-      </p:ext>
-    </p:extLst>
   </p:cSld>
   <p:clrMapOvr>
     <a:masterClrMapping/>
@@ -1821,7 +2189,6 @@
           <a:p>
             <a:fld id="{B17E097D-BF14-0048-A1F1-91A4B3DB23CE}" type="datetimeFigureOut">
               <a:rPr lang="en-US" smtClean="0"/>
-              <a:t>4/10/26</a:t>
             </a:fld>
             <a:endParaRPr lang="en-US"/>
           </a:p>
@@ -1863,18 +2230,12 @@
           <a:p>
             <a:fld id="{2F29E7E3-3D05-DC41-B909-139336B5BB98}" type="slidenum">
               <a:rPr lang="en-US" smtClean="0"/>
-              <a:t>‹#›</a:t>
             </a:fld>
             <a:endParaRPr lang="en-US"/>
           </a:p>
         </p:txBody>
       </p:sp>
     </p:spTree>
-    <p:extLst>
-      <p:ext uri="{BB962C8B-B14F-4D97-AF65-F5344CB8AC3E}">
-        <p14:creationId xmlns:p14="http://schemas.microsoft.com/office/powerpoint/2010/main" val="4000975326"/>
-      </p:ext>
-    </p:extLst>
   </p:cSld>
   <p:clrMapOvr>
     <a:masterClrMapping/>
@@ -1984,6 +2345,7 @@
               <a:rPr lang="en-US"/>
               <a:t>Click to edit Master text styles</a:t>
             </a:r>
+            <a:endParaRPr lang="en-US"/>
           </a:p>
           <a:p>
             <a:pPr lvl="1"/>
@@ -1991,6 +2353,7 @@
               <a:rPr lang="en-US"/>
               <a:t>Second level</a:t>
             </a:r>
+            <a:endParaRPr lang="en-US"/>
           </a:p>
           <a:p>
             <a:pPr lvl="2"/>
@@ -1998,6 +2361,7 @@
               <a:rPr lang="en-US"/>
               <a:t>Third level</a:t>
             </a:r>
+            <a:endParaRPr lang="en-US"/>
           </a:p>
           <a:p>
             <a:pPr lvl="3"/>
@@ -2005,6 +2369,7 @@
               <a:rPr lang="en-US"/>
               <a:t>Fourth level</a:t>
             </a:r>
+            <a:endParaRPr lang="en-US"/>
           </a:p>
           <a:p>
             <a:pPr lvl="4"/>
@@ -2078,6 +2443,7 @@
               <a:rPr lang="en-US"/>
               <a:t>Click to edit Master text styles</a:t>
             </a:r>
+            <a:endParaRPr lang="en-US"/>
           </a:p>
         </p:txBody>
       </p:sp>
@@ -2098,7 +2464,6 @@
           <a:p>
             <a:fld id="{B17E097D-BF14-0048-A1F1-91A4B3DB23CE}" type="datetimeFigureOut">
               <a:rPr lang="en-US" smtClean="0"/>
-              <a:t>4/10/26</a:t>
             </a:fld>
             <a:endParaRPr lang="en-US"/>
           </a:p>
@@ -2140,18 +2505,12 @@
           <a:p>
             <a:fld id="{2F29E7E3-3D05-DC41-B909-139336B5BB98}" type="slidenum">
               <a:rPr lang="en-US" smtClean="0"/>
-              <a:t>‹#›</a:t>
             </a:fld>
             <a:endParaRPr lang="en-US"/>
           </a:p>
         </p:txBody>
       </p:sp>
     </p:spTree>
-    <p:extLst>
-      <p:ext uri="{BB962C8B-B14F-4D97-AF65-F5344CB8AC3E}">
-        <p14:creationId xmlns:p14="http://schemas.microsoft.com/office/powerpoint/2010/main" val="701729256"/>
-      </p:ext>
-    </p:extLst>
   </p:cSld>
   <p:clrMapOvr>
     <a:masterClrMapping/>
@@ -2335,6 +2694,7 @@
               <a:rPr lang="en-US"/>
               <a:t>Click to edit Master text styles</a:t>
             </a:r>
+            <a:endParaRPr lang="en-US"/>
           </a:p>
         </p:txBody>
       </p:sp>
@@ -2355,7 +2715,6 @@
           <a:p>
             <a:fld id="{B17E097D-BF14-0048-A1F1-91A4B3DB23CE}" type="datetimeFigureOut">
               <a:rPr lang="en-US" smtClean="0"/>
-              <a:t>4/10/26</a:t>
             </a:fld>
             <a:endParaRPr lang="en-US"/>
           </a:p>
@@ -2397,18 +2756,12 @@
           <a:p>
             <a:fld id="{2F29E7E3-3D05-DC41-B909-139336B5BB98}" type="slidenum">
               <a:rPr lang="en-US" smtClean="0"/>
-              <a:t>‹#›</a:t>
             </a:fld>
             <a:endParaRPr lang="en-US"/>
           </a:p>
         </p:txBody>
       </p:sp>
     </p:spTree>
-    <p:extLst>
-      <p:ext uri="{BB962C8B-B14F-4D97-AF65-F5344CB8AC3E}">
-        <p14:creationId xmlns:p14="http://schemas.microsoft.com/office/powerpoint/2010/main" val="2614900805"/>
-      </p:ext>
-    </p:extLst>
   </p:cSld>
   <p:clrMapOvr>
     <a:masterClrMapping/>
@@ -2501,6 +2854,7 @@
               <a:rPr lang="en-US"/>
               <a:t>Click to edit Master text styles</a:t>
             </a:r>
+            <a:endParaRPr lang="en-US"/>
           </a:p>
           <a:p>
             <a:pPr lvl="1"/>
@@ -2508,6 +2862,7 @@
               <a:rPr lang="en-US"/>
               <a:t>Second level</a:t>
             </a:r>
+            <a:endParaRPr lang="en-US"/>
           </a:p>
           <a:p>
             <a:pPr lvl="2"/>
@@ -2515,6 +2870,7 @@
               <a:rPr lang="en-US"/>
               <a:t>Third level</a:t>
             </a:r>
+            <a:endParaRPr lang="en-US"/>
           </a:p>
           <a:p>
             <a:pPr lvl="3"/>
@@ -2522,6 +2878,7 @@
               <a:rPr lang="en-US"/>
               <a:t>Fourth level</a:t>
             </a:r>
+            <a:endParaRPr lang="en-US"/>
           </a:p>
           <a:p>
             <a:pPr lvl="4"/>
@@ -2568,7 +2925,6 @@
           <a:p>
             <a:fld id="{B17E097D-BF14-0048-A1F1-91A4B3DB23CE}" type="datetimeFigureOut">
               <a:rPr lang="en-US" smtClean="0"/>
-              <a:t>4/10/26</a:t>
             </a:fld>
             <a:endParaRPr lang="en-US"/>
           </a:p>
@@ -2646,32 +3002,26 @@
           <a:p>
             <a:fld id="{2F29E7E3-3D05-DC41-B909-139336B5BB98}" type="slidenum">
               <a:rPr lang="en-US" smtClean="0"/>
-              <a:t>‹#›</a:t>
             </a:fld>
             <a:endParaRPr lang="en-US"/>
           </a:p>
         </p:txBody>
       </p:sp>
     </p:spTree>
-    <p:extLst>
-      <p:ext uri="{BB962C8B-B14F-4D97-AF65-F5344CB8AC3E}">
-        <p14:creationId xmlns:p14="http://schemas.microsoft.com/office/powerpoint/2010/main" val="2035931842"/>
-      </p:ext>
-    </p:extLst>
   </p:cSld>
   <p:clrMap bg1="lt1" tx1="dk1" bg2="lt2" tx2="dk2" accent1="accent1" accent2="accent2" accent3="accent3" accent4="accent4" accent5="accent5" accent6="accent6" hlink="hlink" folHlink="folHlink"/>
   <p:sldLayoutIdLst>
-    <p:sldLayoutId id="2147483661" r:id="rId1"/>
-    <p:sldLayoutId id="2147483662" r:id="rId2"/>
-    <p:sldLayoutId id="2147483663" r:id="rId3"/>
-    <p:sldLayoutId id="2147483664" r:id="rId4"/>
-    <p:sldLayoutId id="2147483665" r:id="rId5"/>
-    <p:sldLayoutId id="2147483666" r:id="rId6"/>
-    <p:sldLayoutId id="2147483667" r:id="rId7"/>
-    <p:sldLayoutId id="2147483668" r:id="rId8"/>
-    <p:sldLayoutId id="2147483669" r:id="rId9"/>
-    <p:sldLayoutId id="2147483670" r:id="rId10"/>
-    <p:sldLayoutId id="2147483671" r:id="rId11"/>
+    <p:sldLayoutId id="2147483649" r:id="rId1"/>
+    <p:sldLayoutId id="2147483650" r:id="rId2"/>
+    <p:sldLayoutId id="2147483651" r:id="rId3"/>
+    <p:sldLayoutId id="2147483652" r:id="rId4"/>
+    <p:sldLayoutId id="2147483653" r:id="rId5"/>
+    <p:sldLayoutId id="2147483654" r:id="rId6"/>
+    <p:sldLayoutId id="2147483655" r:id="rId7"/>
+    <p:sldLayoutId id="2147483656" r:id="rId8"/>
+    <p:sldLayoutId id="2147483657" r:id="rId9"/>
+    <p:sldLayoutId id="2147483658" r:id="rId10"/>
+    <p:sldLayoutId id="2147483659" r:id="rId11"/>
   </p:sldLayoutIdLst>
   <p:txStyles>
     <p:titleStyle>
@@ -2701,7 +3051,7 @@
         <a:spcBef>
           <a:spcPts val="3600"/>
         </a:spcBef>
-        <a:buFont typeface="Arial" panose="020B0604020202020204" pitchFamily="34" charset="0"/>
+        <a:buFont typeface="Arial" panose="020B0604020202090204" pitchFamily="34" charset="0"/>
         <a:buChar char="•"/>
         <a:defRPr sz="10080" kern="1200">
           <a:solidFill>
@@ -2719,7 +3069,7 @@
         <a:spcBef>
           <a:spcPts val="1800"/>
         </a:spcBef>
-        <a:buFont typeface="Arial" panose="020B0604020202020204" pitchFamily="34" charset="0"/>
+        <a:buFont typeface="Arial" panose="020B0604020202090204" pitchFamily="34" charset="0"/>
         <a:buChar char="•"/>
         <a:defRPr sz="8640" kern="1200">
           <a:solidFill>
@@ -2737,7 +3087,7 @@
         <a:spcBef>
           <a:spcPts val="1800"/>
         </a:spcBef>
-        <a:buFont typeface="Arial" panose="020B0604020202020204" pitchFamily="34" charset="0"/>
+        <a:buFont typeface="Arial" panose="020B0604020202090204" pitchFamily="34" charset="0"/>
         <a:buChar char="•"/>
         <a:defRPr sz="7200" kern="1200">
           <a:solidFill>
@@ -2755,7 +3105,7 @@
         <a:spcBef>
           <a:spcPts val="1800"/>
         </a:spcBef>
-        <a:buFont typeface="Arial" panose="020B0604020202020204" pitchFamily="34" charset="0"/>
+        <a:buFont typeface="Arial" panose="020B0604020202090204" pitchFamily="34" charset="0"/>
         <a:buChar char="•"/>
         <a:defRPr sz="6480" kern="1200">
           <a:solidFill>
@@ -2773,7 +3123,7 @@
         <a:spcBef>
           <a:spcPts val="1800"/>
         </a:spcBef>
-        <a:buFont typeface="Arial" panose="020B0604020202020204" pitchFamily="34" charset="0"/>
+        <a:buFont typeface="Arial" panose="020B0604020202090204" pitchFamily="34" charset="0"/>
         <a:buChar char="•"/>
         <a:defRPr sz="6480" kern="1200">
           <a:solidFill>
@@ -2791,7 +3141,7 @@
         <a:spcBef>
           <a:spcPts val="1800"/>
         </a:spcBef>
-        <a:buFont typeface="Arial" panose="020B0604020202020204" pitchFamily="34" charset="0"/>
+        <a:buFont typeface="Arial" panose="020B0604020202090204" pitchFamily="34" charset="0"/>
         <a:buChar char="•"/>
         <a:defRPr sz="6480" kern="1200">
           <a:solidFill>
@@ -2809,7 +3159,7 @@
         <a:spcBef>
           <a:spcPts val="1800"/>
         </a:spcBef>
-        <a:buFont typeface="Arial" panose="020B0604020202020204" pitchFamily="34" charset="0"/>
+        <a:buFont typeface="Arial" panose="020B0604020202090204" pitchFamily="34" charset="0"/>
         <a:buChar char="•"/>
         <a:defRPr sz="6480" kern="1200">
           <a:solidFill>
@@ -2827,7 +3177,7 @@
         <a:spcBef>
           <a:spcPts val="1800"/>
         </a:spcBef>
-        <a:buFont typeface="Arial" panose="020B0604020202020204" pitchFamily="34" charset="0"/>
+        <a:buFont typeface="Arial" panose="020B0604020202090204" pitchFamily="34" charset="0"/>
         <a:buChar char="•"/>
         <a:defRPr sz="6480" kern="1200">
           <a:solidFill>
@@ -2845,7 +3195,7 @@
         <a:spcBef>
           <a:spcPts val="1800"/>
         </a:spcBef>
-        <a:buFont typeface="Arial" panose="020B0604020202020204" pitchFamily="34" charset="0"/>
+        <a:buFont typeface="Arial" panose="020B0604020202090204" pitchFamily="34" charset="0"/>
         <a:buChar char="•"/>
         <a:defRPr sz="6480" kern="1200">
           <a:solidFill>
@@ -2975,13 +3325,7 @@
       </p:grpSpPr>
       <p:sp>
         <p:nvSpPr>
-          <p:cNvPr id="2" name="Rectangle 1">
-            <a:extLst>
-              <a:ext uri="{FF2B5EF4-FFF2-40B4-BE49-F238E27FC236}">
-                <a16:creationId xmlns:a16="http://schemas.microsoft.com/office/drawing/2014/main" id="{130DDE03-7E2E-3057-8652-82D963F12450}"/>
-              </a:ext>
-            </a:extLst>
-          </p:cNvPr>
+          <p:cNvPr id="2" name="Rectangle 1"/>
           <p:cNvSpPr/>
           <p:nvPr/>
         </p:nvSpPr>
@@ -3024,13 +3368,7 @@
       </p:sp>
       <p:sp>
         <p:nvSpPr>
-          <p:cNvPr id="3" name="TextBox 2">
-            <a:extLst>
-              <a:ext uri="{FF2B5EF4-FFF2-40B4-BE49-F238E27FC236}">
-                <a16:creationId xmlns:a16="http://schemas.microsoft.com/office/drawing/2014/main" id="{D98152C7-9E05-DA6E-4A0C-41CC30C2BC5A}"/>
-              </a:ext>
-            </a:extLst>
-          </p:cNvPr>
+          <p:cNvPr id="3" name="TextBox 2"/>
           <p:cNvSpPr txBox="1"/>
           <p:nvPr/>
         </p:nvSpPr>
@@ -3052,7 +3390,7 @@
           <a:p>
             <a:pPr marL="12065" marR="5080" algn="ctr">
               <a:lnSpc>
-                <a:spcPct val="106700"/>
+                <a:spcPct val="107000"/>
               </a:lnSpc>
               <a:spcBef>
                 <a:spcPts val="20"/>
@@ -3069,11 +3407,19 @@
               </a:rPr>
               <a:t>Differential Diagnosis across the Parkinsonian Spectrum</a:t>
             </a:r>
+            <a:endParaRPr lang="en-US" sz="5400" b="1" kern="1200" dirty="0">
+              <a:solidFill>
+                <a:schemeClr val="bg1"/>
+              </a:solidFill>
+              <a:latin typeface="Century Gothic" panose="020B0502020202020204" pitchFamily="34" charset="0"/>
+              <a:ea typeface="+mn-ea"/>
+              <a:cs typeface="Segoe UI" panose="020B0502040204020203" pitchFamily="34" charset="0"/>
+            </a:endParaRPr>
           </a:p>
           <a:p>
             <a:pPr marL="12065" marR="5080" algn="ctr">
               <a:lnSpc>
-                <a:spcPct val="106700"/>
+                <a:spcPct val="107000"/>
               </a:lnSpc>
               <a:spcBef>
                 <a:spcPts val="20"/>
@@ -3104,20 +3450,14 @@
       </p:sp>
       <p:sp>
         <p:nvSpPr>
-          <p:cNvPr id="15" name="TextBox 14">
-            <a:extLst>
-              <a:ext uri="{FF2B5EF4-FFF2-40B4-BE49-F238E27FC236}">
-                <a16:creationId xmlns:a16="http://schemas.microsoft.com/office/drawing/2014/main" id="{D3D3D4EC-8253-4407-F3F0-641A9BC9C3F8}"/>
-              </a:ext>
-            </a:extLst>
-          </p:cNvPr>
+          <p:cNvPr id="18" name="TextBox 17"/>
           <p:cNvSpPr txBox="1"/>
           <p:nvPr/>
         </p:nvSpPr>
         <p:spPr>
           <a:xfrm>
-            <a:off x="180406" y="26530787"/>
-            <a:ext cx="6964189" cy="707886"/>
+            <a:off x="133350" y="17668240"/>
+            <a:ext cx="8225155" cy="14799945"/>
           </a:xfrm>
           <a:prstGeom prst="rect">
             <a:avLst/>
@@ -3126,53 +3466,7 @@
         </p:spPr>
         <p:txBody>
           <a:bodyPr wrap="square">
-            <a:spAutoFit/>
-          </a:bodyPr>
-          <a:lstStyle/>
-          <a:p>
-            <a:pPr marL="12700">
-              <a:spcBef>
-                <a:spcPts val="395"/>
-              </a:spcBef>
-            </a:pPr>
-            <a:r>
-              <a:rPr lang="en-US" sz="4000" b="1" spc="-10" dirty="0">
-                <a:solidFill>
-                  <a:srgbClr val="0070C0"/>
-                </a:solidFill>
-                <a:latin typeface="Cambria" panose="02040503050406030204" pitchFamily="18" charset="0"/>
-                <a:cs typeface="Tahoma"/>
-              </a:rPr>
-              <a:t>Modelling Diagnosis</a:t>
-            </a:r>
-          </a:p>
-        </p:txBody>
-      </p:sp>
-      <p:sp>
-        <p:nvSpPr>
-          <p:cNvPr id="18" name="TextBox 17">
-            <a:extLst>
-              <a:ext uri="{FF2B5EF4-FFF2-40B4-BE49-F238E27FC236}">
-                <a16:creationId xmlns:a16="http://schemas.microsoft.com/office/drawing/2014/main" id="{F5D5BFD0-085A-5267-CBC6-0AAD0FEFD36D}"/>
-              </a:ext>
-            </a:extLst>
-          </p:cNvPr>
-          <p:cNvSpPr txBox="1"/>
-          <p:nvPr/>
-        </p:nvSpPr>
-        <p:spPr>
-          <a:xfrm>
-            <a:off x="189957" y="21708451"/>
-            <a:ext cx="7489039" cy="3954929"/>
-          </a:xfrm>
-          <a:prstGeom prst="rect">
-            <a:avLst/>
-          </a:prstGeom>
-          <a:noFill/>
-        </p:spPr>
-        <p:txBody>
-          <a:bodyPr wrap="square">
-            <a:spAutoFit/>
+            <a:noAutofit/>
           </a:bodyPr>
           <a:lstStyle/>
           <a:p>
@@ -3185,197 +3479,513 @@
               </a:spcBef>
             </a:pPr>
             <a:r>
-              <a:rPr lang="en-US" sz="4000" b="1" spc="-10" dirty="0">
+              <a:rPr lang="en-US" sz="3200" spc="-10" dirty="0">
                 <a:solidFill>
                   <a:srgbClr val="0070C0"/>
                 </a:solidFill>
-                <a:latin typeface="Cambria" panose="02040503050406030204" pitchFamily="18" charset="0"/>
-                <a:cs typeface="Tahoma"/>
+                <a:latin typeface="Times New Roman" panose="02020503050405090304" charset="0"/>
+                <a:cs typeface="Times New Roman" panose="02020503050405090304" charset="0"/>
+                <a:sym typeface="+mn-ea"/>
               </a:rPr>
-              <a:t>Candidate Models</a:t>
-            </a:r>
-          </a:p>
-          <a:p>
-            <a:pPr marL="174625" marR="102235" indent="-161925">
+              <a:t>Variables: </a:t>
+            </a:r>
+            <a:endParaRPr lang="en-US" sz="3200" spc="-10" dirty="0">
+              <a:solidFill>
+                <a:srgbClr val="0070C0"/>
+              </a:solidFill>
+              <a:latin typeface="Times New Roman" panose="02020503050405090304" charset="0"/>
+              <a:cs typeface="Times New Roman" panose="02020503050405090304" charset="0"/>
+            </a:endParaRPr>
+          </a:p>
+          <a:p>
+            <a:pPr marL="584200" indent="-571500">
               <a:lnSpc>
                 <a:spcPct val="100000"/>
               </a:lnSpc>
               <a:spcBef>
-                <a:spcPts val="290"/>
+                <a:spcPts val="395"/>
               </a:spcBef>
-              <a:buFont typeface="Courier New" panose="02070309020205020404" pitchFamily="49" charset="0"/>
-              <a:buChar char="o"/>
+              <a:buFont typeface="Arial" panose="020B0604020202090204" pitchFamily="34" charset="0"/>
+              <a:buChar char="•"/>
             </a:pPr>
             <a:r>
-              <a:rPr lang="en-US" sz="3200" spc="-20" dirty="0">
-                <a:solidFill>
-                  <a:schemeClr val="tx1"/>
-                </a:solidFill>
-                <a:latin typeface="Cambria" panose="02040503050406030204" pitchFamily="18" charset="0"/>
-                <a:cs typeface="Tahoma"/>
+              <a:rPr lang="en-US" sz="3200" spc="-10" dirty="0">
+                <a:latin typeface="Times New Roman" panose="02020503050405090304" charset="0"/>
+                <a:cs typeface="Times New Roman" panose="02020503050405090304" charset="0"/>
+                <a:sym typeface="+mn-ea"/>
               </a:rPr>
-              <a:t>Random</a:t>
-            </a:r>
-            <a:r>
-              <a:rPr lang="en-US" sz="3200" spc="-15" dirty="0">
-                <a:solidFill>
-                  <a:schemeClr val="tx1"/>
-                </a:solidFill>
-                <a:latin typeface="Cambria" panose="02040503050406030204" pitchFamily="18" charset="0"/>
-                <a:cs typeface="Tahoma"/>
-              </a:rPr>
-              <a:t> </a:t>
-            </a:r>
-            <a:r>
-              <a:rPr lang="en-US" sz="3200" spc="-10" dirty="0">
-                <a:solidFill>
-                  <a:schemeClr val="tx1"/>
-                </a:solidFill>
-                <a:latin typeface="Cambria" panose="02040503050406030204" pitchFamily="18" charset="0"/>
-                <a:cs typeface="Tahoma"/>
-              </a:rPr>
-              <a:t>Forest (</a:t>
-            </a:r>
-            <a:r>
-              <a:rPr lang="en-US" sz="3200" dirty="0">
-                <a:solidFill>
-                  <a:schemeClr val="tx1"/>
-                </a:solidFill>
-                <a:latin typeface="Cambria" panose="02040503050406030204" pitchFamily="18" charset="0"/>
-                <a:cs typeface="Tahoma"/>
-              </a:rPr>
-              <a:t>RF)</a:t>
-            </a:r>
-          </a:p>
-          <a:p>
-            <a:pPr marL="174625" marR="55244" indent="-161925">
+              <a:t>Demographics: Age at visit, Gender</a:t>
+            </a:r>
+            <a:endParaRPr lang="en-US" sz="3200" spc="-10" dirty="0">
+              <a:solidFill>
+                <a:schemeClr val="tx1"/>
+              </a:solidFill>
+              <a:latin typeface="Times New Roman" panose="02020503050405090304" charset="0"/>
+              <a:cs typeface="Times New Roman" panose="02020503050405090304" charset="0"/>
+            </a:endParaRPr>
+          </a:p>
+          <a:p>
+            <a:pPr marL="584200" indent="-571500">
               <a:lnSpc>
                 <a:spcPct val="100000"/>
               </a:lnSpc>
               <a:spcBef>
-                <a:spcPts val="284"/>
+                <a:spcPts val="395"/>
               </a:spcBef>
-              <a:buFont typeface="Courier New" panose="02070309020205020404" pitchFamily="49" charset="0"/>
-              <a:buChar char="o"/>
+              <a:buFont typeface="Arial" panose="020B0604020202090204" pitchFamily="34" charset="0"/>
+              <a:buChar char="•"/>
             </a:pPr>
             <a:r>
-              <a:rPr lang="en-US" sz="3200" spc="-10" dirty="0">
-                <a:solidFill>
-                  <a:schemeClr val="tx1"/>
-                </a:solidFill>
-                <a:latin typeface="Cambria" panose="02040503050406030204" pitchFamily="18" charset="0"/>
-                <a:cs typeface="Tahoma"/>
+              <a:rPr lang="en-US" altLang="zh-CN" sz="3200" spc="-10" dirty="0">
+                <a:latin typeface="Times New Roman" panose="02020503050405090304" charset="0"/>
+                <a:cs typeface="Times New Roman" panose="02020503050405090304" charset="0"/>
+                <a:sym typeface="+mn-ea"/>
               </a:rPr>
-              <a:t>Logistic</a:t>
-            </a:r>
-            <a:r>
-              <a:rPr lang="en-US" sz="3200" spc="-5" dirty="0">
-                <a:solidFill>
-                  <a:schemeClr val="tx1"/>
-                </a:solidFill>
-                <a:latin typeface="Cambria" panose="02040503050406030204" pitchFamily="18" charset="0"/>
-                <a:cs typeface="Tahoma"/>
-              </a:rPr>
-              <a:t> </a:t>
-            </a:r>
-            <a:r>
-              <a:rPr lang="en-US" sz="3200" spc="-35" dirty="0">
-                <a:solidFill>
-                  <a:schemeClr val="tx1"/>
-                </a:solidFill>
-                <a:latin typeface="Cambria" panose="02040503050406030204" pitchFamily="18" charset="0"/>
-                <a:cs typeface="Tahoma"/>
-              </a:rPr>
-              <a:t>Regression</a:t>
-            </a:r>
-          </a:p>
-          <a:p>
-            <a:pPr marL="174625" marR="102235" indent="-161925" algn="just">
-              <a:spcBef>
-                <a:spcPts val="290"/>
-              </a:spcBef>
-              <a:buFont typeface="Courier New" panose="02070309020205020404" pitchFamily="49" charset="0"/>
-              <a:buChar char="o"/>
-            </a:pPr>
-            <a:r>
-              <a:rPr lang="en-US" sz="3200" spc="-20" dirty="0">
-                <a:solidFill>
-                  <a:schemeClr val="tx1"/>
-                </a:solidFill>
-                <a:latin typeface="Cambria" panose="02040503050406030204" pitchFamily="18" charset="0"/>
-                <a:cs typeface="Tahoma"/>
-              </a:rPr>
-              <a:t>Support Vector Machine (SVM)</a:t>
-            </a:r>
-          </a:p>
-          <a:p>
-            <a:pPr marL="174625" marR="102235" indent="-161925">
-              <a:spcBef>
-                <a:spcPts val="290"/>
-              </a:spcBef>
-              <a:buFont typeface="Courier New" panose="02070309020205020404" pitchFamily="49" charset="0"/>
-              <a:buChar char="o"/>
-            </a:pPr>
-            <a:r>
-              <a:rPr lang="en-US" sz="3200" spc="-20" dirty="0">
-                <a:latin typeface="Cambria" panose="02040503050406030204" pitchFamily="18" charset="0"/>
-                <a:cs typeface="Tahoma"/>
-              </a:rPr>
-              <a:t>Gradient Boosting</a:t>
-            </a:r>
-          </a:p>
-          <a:p>
-            <a:pPr marL="174625" marR="102235" indent="-161925">
-              <a:spcBef>
-                <a:spcPts val="290"/>
-              </a:spcBef>
-              <a:buFont typeface="Courier New" panose="02070309020205020404" pitchFamily="49" charset="0"/>
-              <a:buChar char="o"/>
-            </a:pPr>
-            <a:r>
-              <a:rPr lang="en-US" sz="3200" spc="-20" dirty="0">
-                <a:solidFill>
-                  <a:schemeClr val="tx1"/>
-                </a:solidFill>
-                <a:latin typeface="Cambria" panose="02040503050406030204" pitchFamily="18" charset="0"/>
-                <a:cs typeface="Tahoma"/>
-              </a:rPr>
-              <a:t>K Nearest Neighbors (KNN)</a:t>
-            </a:r>
-          </a:p>
-          <a:p>
-            <a:pPr marL="174625" marR="55244" indent="-161925">
+              <a:t>Clinical: disease duration, age at diagnosis, current symptoms, symptom laterality, loss of smell, dominant hand, exercise, coffee intake</a:t>
+            </a:r>
+            <a:endParaRPr lang="en-US" altLang="zh-CN" sz="3200" spc="-10" dirty="0">
+              <a:solidFill>
+                <a:schemeClr val="tx1"/>
+              </a:solidFill>
+              <a:latin typeface="Times New Roman" panose="02020503050405090304" charset="0"/>
+              <a:cs typeface="Times New Roman" panose="02020503050405090304" charset="0"/>
+            </a:endParaRPr>
+          </a:p>
+          <a:p>
+            <a:pPr marL="584200" indent="-571500">
               <a:lnSpc>
                 <a:spcPct val="100000"/>
               </a:lnSpc>
               <a:spcBef>
-                <a:spcPts val="284"/>
+                <a:spcPts val="395"/>
               </a:spcBef>
-              <a:buFont typeface="Courier New" panose="02070309020205020404" pitchFamily="49" charset="0"/>
-              <a:buChar char="o"/>
+              <a:buFont typeface="Arial" panose="020B0604020202090204" pitchFamily="34" charset="0"/>
+              <a:buChar char="•"/>
             </a:pPr>
-            <a:endParaRPr lang="en-US" sz="3600" b="1" spc="-25" dirty="0">
-              <a:latin typeface="Arial"/>
-              <a:cs typeface="Arial"/>
+            <a:r>
+              <a:rPr lang="en-US" altLang="zh-CN" sz="3200" spc="-10" dirty="0">
+                <a:latin typeface="Times New Roman" panose="02020503050405090304" charset="0"/>
+                <a:cs typeface="Times New Roman" panose="02020503050405090304" charset="0"/>
+                <a:sym typeface="+mn-ea"/>
+              </a:rPr>
+              <a:t>Behavioural: MBI-C, BDI-II, MoCA, EHI score</a:t>
+            </a:r>
+            <a:endParaRPr lang="en-US" altLang="zh-CN" sz="3200" spc="-10" dirty="0">
+              <a:solidFill>
+                <a:schemeClr val="tx1"/>
+              </a:solidFill>
+              <a:latin typeface="Times New Roman" panose="02020503050405090304" charset="0"/>
+              <a:cs typeface="Times New Roman" panose="02020503050405090304" charset="0"/>
+            </a:endParaRPr>
+          </a:p>
+          <a:p>
+            <a:pPr marL="12700" indent="0">
+              <a:lnSpc>
+                <a:spcPct val="100000"/>
+              </a:lnSpc>
+              <a:spcBef>
+                <a:spcPts val="395"/>
+              </a:spcBef>
+              <a:buFont typeface="Arial" panose="020B0604020202090204" pitchFamily="34" charset="0"/>
+              <a:buNone/>
+            </a:pPr>
+            <a:r>
+              <a:rPr lang="en-US" altLang="zh-CN" sz="3200" spc="-10" dirty="0">
+                <a:solidFill>
+                  <a:srgbClr val="0070C0"/>
+                </a:solidFill>
+                <a:latin typeface="Times New Roman" panose="02020503050405090304" charset="0"/>
+                <a:cs typeface="Times New Roman" panose="02020503050405090304" charset="0"/>
+                <a:sym typeface="+mn-ea"/>
+              </a:rPr>
+              <a:t>Preprocessing:</a:t>
+            </a:r>
+            <a:endParaRPr lang="en-US" altLang="zh-CN" sz="3200" spc="-10" dirty="0">
+              <a:solidFill>
+                <a:srgbClr val="0070C0"/>
+              </a:solidFill>
+              <a:latin typeface="Times New Roman" panose="02020503050405090304" charset="0"/>
+              <a:cs typeface="Times New Roman" panose="02020503050405090304" charset="0"/>
+            </a:endParaRPr>
+          </a:p>
+          <a:p>
+            <a:pPr marL="527050" indent="-514350">
+              <a:lnSpc>
+                <a:spcPct val="100000"/>
+              </a:lnSpc>
+              <a:spcBef>
+                <a:spcPts val="395"/>
+              </a:spcBef>
+              <a:buFont typeface="Arial" panose="020B0604020202090204" pitchFamily="34" charset="0"/>
+              <a:buAutoNum type="arabicPeriod"/>
+            </a:pPr>
+            <a:r>
+              <a:rPr lang="en-US" altLang="zh-CN" sz="3200" spc="-10" dirty="0">
+                <a:latin typeface="Times New Roman" panose="02020503050405090304" charset="0"/>
+                <a:cs typeface="Times New Roman" panose="02020503050405090304" charset="0"/>
+                <a:sym typeface="+mn-ea"/>
+              </a:rPr>
+              <a:t>Median imputation for continuous variables; constant "missing" imputation for categorical variables to handle high missingness rates.</a:t>
+            </a:r>
+            <a:endParaRPr lang="en-US" altLang="zh-CN" sz="3200" spc="-10" dirty="0">
+              <a:latin typeface="Times New Roman" panose="02020503050405090304" charset="0"/>
+              <a:cs typeface="Times New Roman" panose="02020503050405090304" charset="0"/>
+              <a:sym typeface="+mn-ea"/>
+            </a:endParaRPr>
+          </a:p>
+          <a:p>
+            <a:pPr marL="527050" indent="-514350">
+              <a:lnSpc>
+                <a:spcPct val="100000"/>
+              </a:lnSpc>
+              <a:spcBef>
+                <a:spcPts val="395"/>
+              </a:spcBef>
+              <a:buFont typeface="Arial" panose="020B0604020202090204" pitchFamily="34" charset="0"/>
+              <a:buAutoNum type="arabicPeriod"/>
+            </a:pPr>
+            <a:r>
+              <a:rPr lang="en-US" altLang="zh-CN" sz="3200" spc="-10" dirty="0">
+                <a:latin typeface="Times New Roman" panose="02020503050405090304" charset="0"/>
+                <a:cs typeface="Times New Roman" panose="02020503050405090304" charset="0"/>
+                <a:sym typeface="+mn-ea"/>
+              </a:rPr>
+              <a:t>StandardScaler for continuous variables; one-hot encoding for categorical variables</a:t>
+            </a:r>
+            <a:endParaRPr lang="en-US" altLang="zh-CN" sz="3200" spc="-10" dirty="0">
+              <a:solidFill>
+                <a:schemeClr val="tx1"/>
+              </a:solidFill>
+              <a:latin typeface="Times New Roman" panose="02020503050405090304" charset="0"/>
+              <a:cs typeface="Times New Roman" panose="02020503050405090304" charset="0"/>
+            </a:endParaRPr>
+          </a:p>
+          <a:p>
+            <a:pPr marL="527050" indent="-514350">
+              <a:lnSpc>
+                <a:spcPct val="100000"/>
+              </a:lnSpc>
+              <a:spcBef>
+                <a:spcPts val="395"/>
+              </a:spcBef>
+              <a:buFont typeface="Arial" panose="020B0604020202090204" pitchFamily="34" charset="0"/>
+              <a:buAutoNum type="arabicPeriod"/>
+            </a:pPr>
+            <a:r>
+              <a:rPr lang="en-US" altLang="zh-CN" sz="3200" spc="-10" dirty="0">
+                <a:latin typeface="Times New Roman" panose="02020503050405090304" charset="0"/>
+                <a:cs typeface="Times New Roman" panose="02020503050405090304" charset="0"/>
+                <a:sym typeface="+mn-ea"/>
+              </a:rPr>
+              <a:t>SMOTE applied to address class imbalance.</a:t>
+            </a:r>
+            <a:endParaRPr lang="en-US" altLang="zh-CN" sz="3200" spc="-10" dirty="0">
+              <a:latin typeface="Times New Roman" panose="02020503050405090304" charset="0"/>
+              <a:cs typeface="Times New Roman" panose="02020503050405090304" charset="0"/>
+              <a:sym typeface="+mn-ea"/>
+            </a:endParaRPr>
+          </a:p>
+          <a:p>
+            <a:pPr marL="12700" indent="0">
+              <a:lnSpc>
+                <a:spcPct val="100000"/>
+              </a:lnSpc>
+              <a:spcBef>
+                <a:spcPts val="395"/>
+              </a:spcBef>
+              <a:buFont typeface="Arial" panose="020B0604020202090204" pitchFamily="34" charset="0"/>
+              <a:buNone/>
+            </a:pPr>
+            <a:r>
+              <a:rPr lang="en-US" altLang="zh-CN" sz="3200" spc="-10" dirty="0">
+                <a:solidFill>
+                  <a:srgbClr val="0070C0"/>
+                </a:solidFill>
+                <a:latin typeface="Times New Roman" panose="02020503050405090304" charset="0"/>
+                <a:cs typeface="Times New Roman" panose="02020503050405090304" charset="0"/>
+              </a:rPr>
+              <a:t>5 Candidate Models: </a:t>
+            </a:r>
+            <a:endParaRPr lang="en-US" altLang="zh-CN" sz="3200" spc="-10" dirty="0">
+              <a:solidFill>
+                <a:srgbClr val="0070C0"/>
+              </a:solidFill>
+              <a:latin typeface="Times New Roman" panose="02020503050405090304" charset="0"/>
+              <a:cs typeface="Times New Roman" panose="02020503050405090304" charset="0"/>
+            </a:endParaRPr>
+          </a:p>
+          <a:p>
+            <a:pPr marL="12700" indent="0">
+              <a:lnSpc>
+                <a:spcPct val="100000"/>
+              </a:lnSpc>
+              <a:spcBef>
+                <a:spcPts val="395"/>
+              </a:spcBef>
+              <a:buFont typeface="Arial" panose="020B0604020202090204" pitchFamily="34" charset="0"/>
+              <a:buNone/>
+            </a:pPr>
+            <a:r>
+              <a:rPr lang="en-US" altLang="zh-CN" sz="3200" spc="-10" dirty="0">
+                <a:solidFill>
+                  <a:schemeClr val="tx1"/>
+                </a:solidFill>
+                <a:latin typeface="Times New Roman" panose="02020503050405090304" charset="0"/>
+                <a:cs typeface="Times New Roman" panose="02020503050405090304" charset="0"/>
+              </a:rPr>
+              <a:t>Logistic Regression, Random Forest, SVM, Gradient Boosting, K-Nearest Neighbors (KNN)</a:t>
+            </a:r>
+            <a:endParaRPr lang="en-US" altLang="zh-CN" sz="3200" spc="-10" dirty="0">
+              <a:solidFill>
+                <a:schemeClr val="tx1"/>
+              </a:solidFill>
+              <a:latin typeface="Times New Roman" panose="02020503050405090304" charset="0"/>
+              <a:cs typeface="Times New Roman" panose="02020503050405090304" charset="0"/>
+            </a:endParaRPr>
+          </a:p>
+          <a:p>
+            <a:pPr marL="12700" indent="0">
+              <a:lnSpc>
+                <a:spcPct val="100000"/>
+              </a:lnSpc>
+              <a:spcBef>
+                <a:spcPts val="395"/>
+              </a:spcBef>
+              <a:buFont typeface="Arial" panose="020B0604020202090204" pitchFamily="34" charset="0"/>
+              <a:buNone/>
+            </a:pPr>
+            <a:r>
+              <a:rPr lang="en-US" altLang="zh-CN" sz="3200" spc="-10" dirty="0">
+                <a:solidFill>
+                  <a:srgbClr val="0070C0"/>
+                </a:solidFill>
+                <a:latin typeface="Times New Roman" panose="02020503050405090304" charset="0"/>
+                <a:cs typeface="Times New Roman" panose="02020503050405090304" charset="0"/>
+              </a:rPr>
+              <a:t>Model Selection:</a:t>
+            </a:r>
+            <a:endParaRPr lang="en-US" altLang="zh-CN" sz="3200" spc="-10" dirty="0">
+              <a:solidFill>
+                <a:srgbClr val="0070C0"/>
+              </a:solidFill>
+              <a:latin typeface="Times New Roman" panose="02020503050405090304" charset="0"/>
+              <a:cs typeface="Times New Roman" panose="02020503050405090304" charset="0"/>
+            </a:endParaRPr>
+          </a:p>
+          <a:p>
+            <a:pPr marL="469900" indent="-457200">
+              <a:lnSpc>
+                <a:spcPct val="100000"/>
+              </a:lnSpc>
+              <a:spcBef>
+                <a:spcPts val="395"/>
+              </a:spcBef>
+              <a:buFont typeface="Arial" panose="020B0604020202090204" pitchFamily="34" charset="0"/>
+              <a:buChar char="•"/>
+            </a:pPr>
+            <a:r>
+              <a:rPr lang="en-US" altLang="zh-CN" sz="3200" spc="-10" dirty="0">
+                <a:solidFill>
+                  <a:schemeClr val="tx1"/>
+                </a:solidFill>
+                <a:latin typeface="Times New Roman" panose="02020503050405090304" charset="0"/>
+                <a:cs typeface="Times New Roman" panose="02020503050405090304" charset="0"/>
+              </a:rPr>
+              <a:t>5-fold cross-validation optimized on Macro F1</a:t>
+            </a:r>
+            <a:endParaRPr lang="en-US" altLang="zh-CN" sz="3200" spc="-10" dirty="0">
+              <a:solidFill>
+                <a:schemeClr val="tx1"/>
+              </a:solidFill>
+              <a:latin typeface="Times New Roman" panose="02020503050405090304" charset="0"/>
+              <a:cs typeface="Times New Roman" panose="02020503050405090304" charset="0"/>
+            </a:endParaRPr>
+          </a:p>
+          <a:p>
+            <a:pPr marL="469900" indent="-457200">
+              <a:lnSpc>
+                <a:spcPct val="100000"/>
+              </a:lnSpc>
+              <a:spcBef>
+                <a:spcPts val="395"/>
+              </a:spcBef>
+              <a:buFont typeface="Arial" panose="020B0604020202090204" pitchFamily="34" charset="0"/>
+              <a:buChar char="•"/>
+            </a:pPr>
+            <a:r>
+              <a:rPr lang="en-US" altLang="zh-CN" sz="3200" spc="-10" dirty="0">
+                <a:solidFill>
+                  <a:schemeClr val="tx1"/>
+                </a:solidFill>
+                <a:latin typeface="Times New Roman" panose="02020503050405090304" charset="0"/>
+                <a:cs typeface="Times New Roman" panose="02020503050405090304" charset="0"/>
+              </a:rPr>
+              <a:t>Hyperparameter tuning via GridSearchCV</a:t>
+            </a:r>
+            <a:endParaRPr lang="en-US" altLang="zh-CN" sz="3200" spc="-10" dirty="0">
+              <a:solidFill>
+                <a:schemeClr val="tx1"/>
+              </a:solidFill>
+              <a:latin typeface="Times New Roman" panose="02020503050405090304" charset="0"/>
+              <a:cs typeface="Times New Roman" panose="02020503050405090304" charset="0"/>
+            </a:endParaRPr>
+          </a:p>
+          <a:p>
+            <a:pPr marL="469900" indent="-457200" algn="l">
+              <a:lnSpc>
+                <a:spcPct val="100000"/>
+              </a:lnSpc>
+              <a:spcBef>
+                <a:spcPts val="395"/>
+              </a:spcBef>
+              <a:buFont typeface="Arial" panose="020B0604020202090204" pitchFamily="34" charset="0"/>
+              <a:buChar char="•"/>
+            </a:pPr>
+            <a:r>
+              <a:rPr lang="en-US" altLang="zh-CN" sz="3200" spc="-10" dirty="0">
+                <a:solidFill>
+                  <a:schemeClr val="tx1"/>
+                </a:solidFill>
+                <a:latin typeface="Times New Roman" panose="02020503050405090304" charset="0"/>
+                <a:cs typeface="Times New Roman" panose="02020503050405090304" charset="0"/>
+              </a:rPr>
+              <a:t>Final model selected based on highest Macro F1 score on a stratified held-out test set (20%)</a:t>
+            </a:r>
+            <a:endParaRPr lang="en-US" altLang="zh-CN" sz="3200" spc="-10" dirty="0">
+              <a:solidFill>
+                <a:schemeClr val="tx1"/>
+              </a:solidFill>
+              <a:latin typeface="Times New Roman" panose="02020503050405090304" charset="0"/>
+              <a:cs typeface="Times New Roman" panose="02020503050405090304" charset="0"/>
+            </a:endParaRPr>
+          </a:p>
+          <a:p>
+            <a:pPr marL="12700" indent="0" algn="l">
+              <a:lnSpc>
+                <a:spcPct val="100000"/>
+              </a:lnSpc>
+              <a:spcBef>
+                <a:spcPts val="395"/>
+              </a:spcBef>
+              <a:buFont typeface="Arial" panose="020B0604020202090204" pitchFamily="34" charset="0"/>
+              <a:buNone/>
+            </a:pPr>
+            <a:r>
+              <a:rPr lang="en-US" altLang="zh-CN" sz="3200" spc="-10" dirty="0">
+                <a:solidFill>
+                  <a:srgbClr val="0070C0"/>
+                </a:solidFill>
+                <a:latin typeface="Times New Roman" panose="02020503050405090304" charset="0"/>
+                <a:cs typeface="Times New Roman" panose="02020503050405090304" charset="0"/>
+              </a:rPr>
+              <a:t>Modelling Diagnosis:</a:t>
+            </a:r>
+            <a:endParaRPr lang="en-US" altLang="zh-CN" sz="3200" spc="-10" dirty="0">
+              <a:solidFill>
+                <a:srgbClr val="0070C0"/>
+              </a:solidFill>
+              <a:latin typeface="Times New Roman" panose="02020503050405090304" charset="0"/>
+              <a:cs typeface="Times New Roman" panose="02020503050405090304" charset="0"/>
+            </a:endParaRPr>
+          </a:p>
+          <a:p>
+            <a:pPr marL="469900" indent="-457200">
+              <a:lnSpc>
+                <a:spcPct val="100000"/>
+              </a:lnSpc>
+              <a:spcBef>
+                <a:spcPts val="395"/>
+              </a:spcBef>
+              <a:buFont typeface="Arial" panose="020B0604020202090204" pitchFamily="34" charset="0"/>
+              <a:buChar char="•"/>
+            </a:pPr>
+            <a:r>
+              <a:rPr lang="en-US" altLang="zh-CN" sz="3200" spc="-10" dirty="0">
+                <a:solidFill>
+                  <a:schemeClr val="tx1"/>
+                </a:solidFill>
+                <a:latin typeface="Times New Roman" panose="02020503050405090304" charset="0"/>
+                <a:cs typeface="Times New Roman" panose="02020503050405090304" charset="0"/>
+              </a:rPr>
+              <a:t>Stage 1: Classify all participants as Healthy Control vs. Parkinsonism</a:t>
+            </a:r>
+            <a:endParaRPr lang="en-US" altLang="zh-CN" sz="3200" spc="-10" dirty="0">
+              <a:solidFill>
+                <a:schemeClr val="tx1"/>
+              </a:solidFill>
+              <a:latin typeface="Times New Roman" panose="02020503050405090304" charset="0"/>
+              <a:cs typeface="Times New Roman" panose="02020503050405090304" charset="0"/>
+            </a:endParaRPr>
+          </a:p>
+          <a:p>
+            <a:pPr marL="469900" indent="-457200">
+              <a:lnSpc>
+                <a:spcPct val="100000"/>
+              </a:lnSpc>
+              <a:spcBef>
+                <a:spcPts val="395"/>
+              </a:spcBef>
+              <a:buFont typeface="Arial" panose="020B0604020202090204" pitchFamily="34" charset="0"/>
+              <a:buChar char="•"/>
+            </a:pPr>
+            <a:r>
+              <a:rPr lang="en-US" altLang="zh-CN" sz="3200" spc="-10" dirty="0">
+                <a:solidFill>
+                  <a:schemeClr val="tx1"/>
+                </a:solidFill>
+                <a:latin typeface="Times New Roman" panose="02020503050405090304" charset="0"/>
+                <a:cs typeface="Times New Roman" panose="02020503050405090304" charset="0"/>
+              </a:rPr>
+              <a:t>Stage 2: Among identified parkinsonism cases, further classify as PD vs. PD-plus.</a:t>
+            </a:r>
+            <a:endParaRPr lang="en-US" altLang="zh-CN" sz="3200" spc="-10" dirty="0">
+              <a:solidFill>
+                <a:schemeClr val="tx1"/>
+              </a:solidFill>
+              <a:latin typeface="Times New Roman" panose="02020503050405090304" charset="0"/>
+              <a:cs typeface="Times New Roman" panose="02020503050405090304" charset="0"/>
+            </a:endParaRPr>
+          </a:p>
+          <a:p>
+            <a:pPr marL="469900" indent="-457200">
+              <a:lnSpc>
+                <a:spcPct val="100000"/>
+              </a:lnSpc>
+              <a:spcBef>
+                <a:spcPts val="395"/>
+              </a:spcBef>
+              <a:buFont typeface="Arial" panose="020B0604020202090204" pitchFamily="34" charset="0"/>
+              <a:buChar char="•"/>
+            </a:pPr>
+            <a:r>
+              <a:rPr lang="en-US" altLang="zh-CN" sz="3200" spc="-10" dirty="0">
+                <a:solidFill>
+                  <a:schemeClr val="tx1"/>
+                </a:solidFill>
+                <a:latin typeface="Times New Roman" panose="02020503050405090304" charset="0"/>
+                <a:cs typeface="Times New Roman" panose="02020503050405090304" charset="0"/>
+              </a:rPr>
+              <a:t>All five models applied independently at each stage using the same preprocessing pipeline.</a:t>
+            </a:r>
+            <a:endParaRPr lang="en-US" altLang="zh-CN" sz="3200" spc="-10" dirty="0">
+              <a:solidFill>
+                <a:schemeClr val="tx1"/>
+              </a:solidFill>
+              <a:latin typeface="Times New Roman" panose="02020503050405090304" charset="0"/>
+              <a:cs typeface="Times New Roman" panose="02020503050405090304" charset="0"/>
             </a:endParaRPr>
           </a:p>
         </p:txBody>
       </p:sp>
       <p:sp>
         <p:nvSpPr>
-          <p:cNvPr id="19" name="TextBox 18">
-            <a:extLst>
-              <a:ext uri="{FF2B5EF4-FFF2-40B4-BE49-F238E27FC236}">
-                <a16:creationId xmlns:a16="http://schemas.microsoft.com/office/drawing/2014/main" id="{82F6A96D-3B53-BF34-5CFB-23E876ED3618}"/>
-              </a:ext>
-            </a:extLst>
-          </p:cNvPr>
+          <p:cNvPr id="19" name="TextBox 18"/>
           <p:cNvSpPr txBox="1"/>
           <p:nvPr/>
         </p:nvSpPr>
         <p:spPr>
           <a:xfrm>
-            <a:off x="8984404" y="20032588"/>
+            <a:off x="8803429" y="17836123"/>
             <a:ext cx="17613482" cy="784830"/>
           </a:xfrm>
           <a:prstGeom prst="rect">
@@ -3403,1107 +4013,15 @@
           </a:p>
         </p:txBody>
       </p:sp>
-      <p:graphicFrame>
-        <p:nvGraphicFramePr>
-          <p:cNvPr id="22" name="object 4">
-            <a:extLst>
-              <a:ext uri="{FF2B5EF4-FFF2-40B4-BE49-F238E27FC236}">
-                <a16:creationId xmlns:a16="http://schemas.microsoft.com/office/drawing/2014/main" id="{62EDA4B7-933D-24F9-C4F4-6B5996D33E2A}"/>
-              </a:ext>
-            </a:extLst>
-          </p:cNvPr>
-          <p:cNvGraphicFramePr>
-            <a:graphicFrameLocks noGrp="1"/>
-          </p:cNvGraphicFramePr>
-          <p:nvPr>
-            <p:extLst>
-              <p:ext uri="{D42A27DB-BD31-4B8C-83A1-F6EECF244321}">
-                <p14:modId xmlns:p14="http://schemas.microsoft.com/office/powerpoint/2010/main" val="2328192767"/>
-              </p:ext>
-            </p:extLst>
-          </p:nvPr>
-        </p:nvGraphicFramePr>
-        <p:xfrm>
-          <a:off x="9114964" y="21067530"/>
-          <a:ext cx="9940250" cy="4595850"/>
-        </p:xfrm>
-        <a:graphic>
-          <a:graphicData uri="http://schemas.openxmlformats.org/drawingml/2006/table">
-            <a:tbl>
-              <a:tblPr firstRow="1" bandRow="1">
-                <a:tableStyleId>{2D5ABB26-0587-4C30-8999-92F81FD0307C}</a:tableStyleId>
-              </a:tblPr>
-              <a:tblGrid>
-                <a:gridCol w="1029958">
-                  <a:extLst>
-                    <a:ext uri="{9D8B030D-6E8A-4147-A177-3AD203B41FA5}">
-                      <a16:colId xmlns:a16="http://schemas.microsoft.com/office/drawing/2014/main" val="20000"/>
-                    </a:ext>
-                  </a:extLst>
-                </a:gridCol>
-                <a:gridCol w="1768825">
-                  <a:extLst>
-                    <a:ext uri="{9D8B030D-6E8A-4147-A177-3AD203B41FA5}">
-                      <a16:colId xmlns:a16="http://schemas.microsoft.com/office/drawing/2014/main" val="20001"/>
-                    </a:ext>
-                  </a:extLst>
-                </a:gridCol>
-                <a:gridCol w="1612554">
-                  <a:extLst>
-                    <a:ext uri="{9D8B030D-6E8A-4147-A177-3AD203B41FA5}">
-                      <a16:colId xmlns:a16="http://schemas.microsoft.com/office/drawing/2014/main" val="20002"/>
-                    </a:ext>
-                  </a:extLst>
-                </a:gridCol>
-                <a:gridCol w="1843075">
-                  <a:extLst>
-                    <a:ext uri="{9D8B030D-6E8A-4147-A177-3AD203B41FA5}">
-                      <a16:colId xmlns:a16="http://schemas.microsoft.com/office/drawing/2014/main" val="20003"/>
-                    </a:ext>
-                  </a:extLst>
-                </a:gridCol>
-                <a:gridCol w="1842919">
-                  <a:extLst>
-                    <a:ext uri="{9D8B030D-6E8A-4147-A177-3AD203B41FA5}">
-                      <a16:colId xmlns:a16="http://schemas.microsoft.com/office/drawing/2014/main" val="20005"/>
-                    </a:ext>
-                  </a:extLst>
-                </a:gridCol>
-                <a:gridCol w="1842919">
-                  <a:extLst>
-                    <a:ext uri="{9D8B030D-6E8A-4147-A177-3AD203B41FA5}">
-                      <a16:colId xmlns:a16="http://schemas.microsoft.com/office/drawing/2014/main" val="20006"/>
-                    </a:ext>
-                  </a:extLst>
-                </a:gridCol>
-              </a:tblGrid>
-              <a:tr h="468953">
-                <a:tc>
-                  <a:txBody>
-                    <a:bodyPr/>
-                    <a:lstStyle/>
-                    <a:p>
-                      <a:pPr>
-                        <a:lnSpc>
-                          <a:spcPct val="150000"/>
-                        </a:lnSpc>
-                      </a:pPr>
-                      <a:r>
-                        <a:rPr sz="2500" b="1" spc="-10" dirty="0">
-                          <a:solidFill>
-                            <a:schemeClr val="tx2"/>
-                          </a:solidFill>
-                          <a:latin typeface="Arial"/>
-                          <a:cs typeface="Arial"/>
-                        </a:rPr>
-                        <a:t>Model</a:t>
-                      </a:r>
-                      <a:endParaRPr sz="2500" dirty="0">
-                        <a:solidFill>
-                          <a:schemeClr val="tx2"/>
-                        </a:solidFill>
-                        <a:latin typeface="Arial"/>
-                        <a:cs typeface="Arial"/>
-                      </a:endParaRPr>
-                    </a:p>
-                  </a:txBody>
-                  <a:tcPr marL="0" marR="0" marT="0" marB="0">
-                    <a:lnT w="12700" cap="flat" cmpd="sng" algn="ctr">
-                      <a:solidFill>
-                        <a:schemeClr val="tx1"/>
-                      </a:solidFill>
-                      <a:prstDash val="solid"/>
-                      <a:round/>
-                      <a:headEnd type="none" w="med" len="med"/>
-                      <a:tailEnd type="none" w="med" len="med"/>
-                    </a:lnT>
-                    <a:lnB w="12700" cap="flat" cmpd="sng" algn="ctr">
-                      <a:noFill/>
-                      <a:prstDash val="solid"/>
-                      <a:round/>
-                      <a:headEnd type="none" w="med" len="med"/>
-                      <a:tailEnd type="none" w="med" len="med"/>
-                    </a:lnB>
-                  </a:tcPr>
-                </a:tc>
-                <a:tc>
-                  <a:txBody>
-                    <a:bodyPr/>
-                    <a:lstStyle/>
-                    <a:p>
-                      <a:pPr algn="ctr">
-                        <a:lnSpc>
-                          <a:spcPct val="150000"/>
-                        </a:lnSpc>
-                      </a:pPr>
-                      <a:r>
-                        <a:rPr sz="2500" b="1" dirty="0">
-                          <a:solidFill>
-                            <a:schemeClr val="tx2"/>
-                          </a:solidFill>
-                          <a:latin typeface="Arial"/>
-                          <a:cs typeface="Arial"/>
-                        </a:rPr>
-                        <a:t>C-</a:t>
-                      </a:r>
-                      <a:r>
-                        <a:rPr sz="2500" b="1" spc="-10" dirty="0">
-                          <a:solidFill>
-                            <a:schemeClr val="tx2"/>
-                          </a:solidFill>
-                          <a:latin typeface="Arial"/>
-                          <a:cs typeface="Arial"/>
-                        </a:rPr>
-                        <a:t>Index</a:t>
-                      </a:r>
-                      <a:endParaRPr sz="2500" dirty="0">
-                        <a:solidFill>
-                          <a:schemeClr val="tx2"/>
-                        </a:solidFill>
-                        <a:latin typeface="Arial"/>
-                        <a:cs typeface="Arial"/>
-                      </a:endParaRPr>
-                    </a:p>
-                  </a:txBody>
-                  <a:tcPr marL="0" marR="0" marT="0" marB="0">
-                    <a:lnT w="12700" cap="flat" cmpd="sng" algn="ctr">
-                      <a:solidFill>
-                        <a:schemeClr val="tx1"/>
-                      </a:solidFill>
-                      <a:prstDash val="solid"/>
-                      <a:round/>
-                      <a:headEnd type="none" w="med" len="med"/>
-                      <a:tailEnd type="none" w="med" len="med"/>
-                    </a:lnT>
-                    <a:lnB w="12700" cap="flat" cmpd="sng" algn="ctr">
-                      <a:noFill/>
-                      <a:prstDash val="solid"/>
-                      <a:round/>
-                      <a:headEnd type="none" w="med" len="med"/>
-                      <a:tailEnd type="none" w="med" len="med"/>
-                    </a:lnB>
-                  </a:tcPr>
-                </a:tc>
-                <a:tc>
-                  <a:txBody>
-                    <a:bodyPr/>
-                    <a:lstStyle/>
-                    <a:p>
-                      <a:pPr algn="ctr">
-                        <a:lnSpc>
-                          <a:spcPct val="150000"/>
-                        </a:lnSpc>
-                      </a:pPr>
-                      <a:r>
-                        <a:rPr sz="2500" b="1" spc="-10" dirty="0">
-                          <a:solidFill>
-                            <a:schemeClr val="tx2"/>
-                          </a:solidFill>
-                          <a:latin typeface="Arial"/>
-                          <a:cs typeface="Arial"/>
-                        </a:rPr>
-                        <a:t>Sens</a:t>
-                      </a:r>
-                      <a:r>
-                        <a:rPr lang="es-ES" sz="2500" b="1" spc="-10" dirty="0" err="1">
-                          <a:solidFill>
-                            <a:schemeClr val="tx2"/>
-                          </a:solidFill>
-                          <a:latin typeface="Arial"/>
-                          <a:cs typeface="Arial"/>
-                        </a:rPr>
-                        <a:t>itivity</a:t>
-                      </a:r>
-                      <a:endParaRPr sz="2500" dirty="0">
-                        <a:solidFill>
-                          <a:schemeClr val="tx2"/>
-                        </a:solidFill>
-                        <a:latin typeface="Arial"/>
-                        <a:cs typeface="Arial"/>
-                      </a:endParaRPr>
-                    </a:p>
-                  </a:txBody>
-                  <a:tcPr marL="0" marR="0" marT="0" marB="0">
-                    <a:lnT w="12700" cap="flat" cmpd="sng" algn="ctr">
-                      <a:solidFill>
-                        <a:schemeClr val="tx1"/>
-                      </a:solidFill>
-                      <a:prstDash val="solid"/>
-                      <a:round/>
-                      <a:headEnd type="none" w="med" len="med"/>
-                      <a:tailEnd type="none" w="med" len="med"/>
-                    </a:lnT>
-                    <a:lnB w="12700" cap="flat" cmpd="sng" algn="ctr">
-                      <a:noFill/>
-                      <a:prstDash val="solid"/>
-                      <a:round/>
-                      <a:headEnd type="none" w="med" len="med"/>
-                      <a:tailEnd type="none" w="med" len="med"/>
-                    </a:lnB>
-                  </a:tcPr>
-                </a:tc>
-                <a:tc>
-                  <a:txBody>
-                    <a:bodyPr/>
-                    <a:lstStyle/>
-                    <a:p>
-                      <a:pPr algn="ctr">
-                        <a:lnSpc>
-                          <a:spcPct val="150000"/>
-                        </a:lnSpc>
-                      </a:pPr>
-                      <a:r>
-                        <a:rPr sz="2500" b="1" spc="-10" dirty="0">
-                          <a:solidFill>
-                            <a:schemeClr val="tx2"/>
-                          </a:solidFill>
-                          <a:latin typeface="Arial"/>
-                          <a:cs typeface="Arial"/>
-                        </a:rPr>
-                        <a:t>Spec</a:t>
-                      </a:r>
-                      <a:r>
-                        <a:rPr lang="es-ES" sz="2500" b="1" spc="-10" dirty="0" err="1">
-                          <a:solidFill>
-                            <a:schemeClr val="tx2"/>
-                          </a:solidFill>
-                          <a:latin typeface="Arial"/>
-                          <a:cs typeface="Arial"/>
-                        </a:rPr>
-                        <a:t>ificity</a:t>
-                      </a:r>
-                      <a:endParaRPr sz="2500" dirty="0">
-                        <a:solidFill>
-                          <a:schemeClr val="tx2"/>
-                        </a:solidFill>
-                        <a:latin typeface="Arial"/>
-                        <a:cs typeface="Arial"/>
-                      </a:endParaRPr>
-                    </a:p>
-                  </a:txBody>
-                  <a:tcPr marL="0" marR="0" marT="0" marB="0">
-                    <a:lnT w="12700" cap="flat" cmpd="sng" algn="ctr">
-                      <a:solidFill>
-                        <a:schemeClr val="tx1"/>
-                      </a:solidFill>
-                      <a:prstDash val="solid"/>
-                      <a:round/>
-                      <a:headEnd type="none" w="med" len="med"/>
-                      <a:tailEnd type="none" w="med" len="med"/>
-                    </a:lnT>
-                    <a:lnB w="12700" cap="flat" cmpd="sng" algn="ctr">
-                      <a:noFill/>
-                      <a:prstDash val="solid"/>
-                      <a:round/>
-                      <a:headEnd type="none" w="med" len="med"/>
-                      <a:tailEnd type="none" w="med" len="med"/>
-                    </a:lnB>
-                  </a:tcPr>
-                </a:tc>
-                <a:tc>
-                  <a:txBody>
-                    <a:bodyPr/>
-                    <a:lstStyle/>
-                    <a:p>
-                      <a:pPr algn="ctr">
-                        <a:lnSpc>
-                          <a:spcPct val="150000"/>
-                        </a:lnSpc>
-                      </a:pPr>
-                      <a:r>
-                        <a:rPr sz="2500" b="1" spc="-25" dirty="0">
-                          <a:solidFill>
-                            <a:schemeClr val="tx2"/>
-                          </a:solidFill>
-                          <a:latin typeface="Arial"/>
-                          <a:cs typeface="Arial"/>
-                        </a:rPr>
-                        <a:t>PPV</a:t>
-                      </a:r>
-                      <a:endParaRPr sz="2500" dirty="0">
-                        <a:solidFill>
-                          <a:schemeClr val="tx2"/>
-                        </a:solidFill>
-                        <a:latin typeface="Arial"/>
-                        <a:cs typeface="Arial"/>
-                      </a:endParaRPr>
-                    </a:p>
-                  </a:txBody>
-                  <a:tcPr marL="0" marR="0" marT="0" marB="0">
-                    <a:lnT w="12700" cap="flat" cmpd="sng" algn="ctr">
-                      <a:solidFill>
-                        <a:schemeClr val="tx1"/>
-                      </a:solidFill>
-                      <a:prstDash val="solid"/>
-                      <a:round/>
-                      <a:headEnd type="none" w="med" len="med"/>
-                      <a:tailEnd type="none" w="med" len="med"/>
-                    </a:lnT>
-                    <a:lnB w="12700" cap="flat" cmpd="sng" algn="ctr">
-                      <a:noFill/>
-                      <a:prstDash val="solid"/>
-                      <a:round/>
-                      <a:headEnd type="none" w="med" len="med"/>
-                      <a:tailEnd type="none" w="med" len="med"/>
-                    </a:lnB>
-                  </a:tcPr>
-                </a:tc>
-                <a:tc>
-                  <a:txBody>
-                    <a:bodyPr/>
-                    <a:lstStyle/>
-                    <a:p>
-                      <a:pPr algn="ctr">
-                        <a:lnSpc>
-                          <a:spcPct val="150000"/>
-                        </a:lnSpc>
-                      </a:pPr>
-                      <a:r>
-                        <a:rPr sz="2500" b="1" spc="-25" dirty="0">
-                          <a:solidFill>
-                            <a:schemeClr val="tx2"/>
-                          </a:solidFill>
-                          <a:latin typeface="Arial"/>
-                          <a:cs typeface="Arial"/>
-                        </a:rPr>
-                        <a:t>NPV</a:t>
-                      </a:r>
-                      <a:endParaRPr sz="2500" dirty="0">
-                        <a:solidFill>
-                          <a:schemeClr val="tx2"/>
-                        </a:solidFill>
-                        <a:latin typeface="Arial"/>
-                        <a:cs typeface="Arial"/>
-                      </a:endParaRPr>
-                    </a:p>
-                  </a:txBody>
-                  <a:tcPr marL="0" marR="0" marT="0" marB="0">
-                    <a:lnT w="12700" cap="flat" cmpd="sng" algn="ctr">
-                      <a:solidFill>
-                        <a:schemeClr val="tx1"/>
-                      </a:solidFill>
-                      <a:prstDash val="solid"/>
-                      <a:round/>
-                      <a:headEnd type="none" w="med" len="med"/>
-                      <a:tailEnd type="none" w="med" len="med"/>
-                    </a:lnT>
-                    <a:lnB w="12700" cap="flat" cmpd="sng" algn="ctr">
-                      <a:noFill/>
-                      <a:prstDash val="solid"/>
-                      <a:round/>
-                      <a:headEnd type="none" w="med" len="med"/>
-                      <a:tailEnd type="none" w="med" len="med"/>
-                    </a:lnB>
-                  </a:tcPr>
-                </a:tc>
-                <a:extLst>
-                  <a:ext uri="{0D108BD9-81ED-4DB2-BD59-A6C34878D82A}">
-                    <a16:rowId xmlns:a16="http://schemas.microsoft.com/office/drawing/2014/main" val="10000"/>
-                  </a:ext>
-                </a:extLst>
-              </a:tr>
-              <a:tr h="484938">
-                <a:tc>
-                  <a:txBody>
-                    <a:bodyPr/>
-                    <a:lstStyle/>
-                    <a:p>
-                      <a:pPr>
-                        <a:lnSpc>
-                          <a:spcPts val="775"/>
-                        </a:lnSpc>
-                        <a:spcBef>
-                          <a:spcPts val="130"/>
-                        </a:spcBef>
-                      </a:pPr>
-                      <a:endParaRPr sz="2500" dirty="0">
-                        <a:latin typeface="Tahoma"/>
-                        <a:cs typeface="Tahoma"/>
-                      </a:endParaRPr>
-                    </a:p>
-                  </a:txBody>
-                  <a:tcPr marL="0" marR="0" marT="16510" marB="0">
-                    <a:lnT w="12700" cap="flat" cmpd="sng" algn="ctr">
-                      <a:noFill/>
-                      <a:prstDash val="solid"/>
-                      <a:round/>
-                      <a:headEnd type="none" w="med" len="med"/>
-                      <a:tailEnd type="none" w="med" len="med"/>
-                    </a:lnT>
-                  </a:tcPr>
-                </a:tc>
-                <a:tc>
-                  <a:txBody>
-                    <a:bodyPr/>
-                    <a:lstStyle/>
-                    <a:p>
-                      <a:pPr marL="71120">
-                        <a:lnSpc>
-                          <a:spcPts val="775"/>
-                        </a:lnSpc>
-                        <a:spcBef>
-                          <a:spcPts val="130"/>
-                        </a:spcBef>
-                      </a:pPr>
-                      <a:endParaRPr sz="2500" dirty="0">
-                        <a:latin typeface="Tahoma"/>
-                        <a:cs typeface="Tahoma"/>
-                      </a:endParaRPr>
-                    </a:p>
-                  </a:txBody>
-                  <a:tcPr marL="0" marR="0" marT="16510" marB="0">
-                    <a:lnT w="12700" cap="flat" cmpd="sng" algn="ctr">
-                      <a:noFill/>
-                      <a:prstDash val="solid"/>
-                      <a:round/>
-                      <a:headEnd type="none" w="med" len="med"/>
-                      <a:tailEnd type="none" w="med" len="med"/>
-                    </a:lnT>
-                  </a:tcPr>
-                </a:tc>
-                <a:tc>
-                  <a:txBody>
-                    <a:bodyPr/>
-                    <a:lstStyle/>
-                    <a:p>
-                      <a:pPr algn="ctr">
-                        <a:lnSpc>
-                          <a:spcPts val="775"/>
-                        </a:lnSpc>
-                        <a:spcBef>
-                          <a:spcPts val="130"/>
-                        </a:spcBef>
-                      </a:pPr>
-                      <a:endParaRPr sz="2500" dirty="0">
-                        <a:latin typeface="Arial"/>
-                        <a:cs typeface="Arial"/>
-                      </a:endParaRPr>
-                    </a:p>
-                  </a:txBody>
-                  <a:tcPr marL="0" marR="0" marT="16510" marB="0">
-                    <a:lnT w="12700" cap="flat" cmpd="sng" algn="ctr">
-                      <a:noFill/>
-                      <a:prstDash val="solid"/>
-                      <a:round/>
-                      <a:headEnd type="none" w="med" len="med"/>
-                      <a:tailEnd type="none" w="med" len="med"/>
-                    </a:lnT>
-                  </a:tcPr>
-                </a:tc>
-                <a:tc>
-                  <a:txBody>
-                    <a:bodyPr/>
-                    <a:lstStyle/>
-                    <a:p>
-                      <a:pPr marL="71120">
-                        <a:lnSpc>
-                          <a:spcPts val="775"/>
-                        </a:lnSpc>
-                        <a:spcBef>
-                          <a:spcPts val="130"/>
-                        </a:spcBef>
-                      </a:pPr>
-                      <a:endParaRPr sz="2500" dirty="0">
-                        <a:latin typeface="Tahoma"/>
-                        <a:cs typeface="Tahoma"/>
-                      </a:endParaRPr>
-                    </a:p>
-                  </a:txBody>
-                  <a:tcPr marL="0" marR="0" marT="16510" marB="0">
-                    <a:lnT w="12700" cap="flat" cmpd="sng" algn="ctr">
-                      <a:noFill/>
-                      <a:prstDash val="solid"/>
-                      <a:round/>
-                      <a:headEnd type="none" w="med" len="med"/>
-                      <a:tailEnd type="none" w="med" len="med"/>
-                    </a:lnT>
-                  </a:tcPr>
-                </a:tc>
-                <a:tc>
-                  <a:txBody>
-                    <a:bodyPr/>
-                    <a:lstStyle/>
-                    <a:p>
-                      <a:pPr marL="71120">
-                        <a:lnSpc>
-                          <a:spcPts val="775"/>
-                        </a:lnSpc>
-                        <a:spcBef>
-                          <a:spcPts val="130"/>
-                        </a:spcBef>
-                      </a:pPr>
-                      <a:endParaRPr sz="2500" dirty="0">
-                        <a:latin typeface="Tahoma"/>
-                        <a:cs typeface="Tahoma"/>
-                      </a:endParaRPr>
-                    </a:p>
-                  </a:txBody>
-                  <a:tcPr marL="0" marR="0" marT="16510" marB="0">
-                    <a:lnT w="12700" cap="flat" cmpd="sng" algn="ctr">
-                      <a:noFill/>
-                      <a:prstDash val="solid"/>
-                      <a:round/>
-                      <a:headEnd type="none" w="med" len="med"/>
-                      <a:tailEnd type="none" w="med" len="med"/>
-                    </a:lnT>
-                  </a:tcPr>
-                </a:tc>
-                <a:tc>
-                  <a:txBody>
-                    <a:bodyPr/>
-                    <a:lstStyle/>
-                    <a:p>
-                      <a:pPr marL="51435">
-                        <a:lnSpc>
-                          <a:spcPts val="775"/>
-                        </a:lnSpc>
-                        <a:spcBef>
-                          <a:spcPts val="130"/>
-                        </a:spcBef>
-                      </a:pPr>
-                      <a:endParaRPr sz="2500" dirty="0">
-                        <a:latin typeface="Tahoma"/>
-                        <a:cs typeface="Tahoma"/>
-                      </a:endParaRPr>
-                    </a:p>
-                  </a:txBody>
-                  <a:tcPr marL="0" marR="0" marT="16510" marB="0">
-                    <a:lnT w="12700" cap="flat" cmpd="sng" algn="ctr">
-                      <a:noFill/>
-                      <a:prstDash val="solid"/>
-                      <a:round/>
-                      <a:headEnd type="none" w="med" len="med"/>
-                      <a:tailEnd type="none" w="med" len="med"/>
-                    </a:lnT>
-                  </a:tcPr>
-                </a:tc>
-                <a:extLst>
-                  <a:ext uri="{0D108BD9-81ED-4DB2-BD59-A6C34878D82A}">
-                    <a16:rowId xmlns:a16="http://schemas.microsoft.com/office/drawing/2014/main" val="10001"/>
-                  </a:ext>
-                </a:extLst>
-              </a:tr>
-              <a:tr h="390847">
-                <a:tc>
-                  <a:txBody>
-                    <a:bodyPr/>
-                    <a:lstStyle/>
-                    <a:p>
-                      <a:pPr>
-                        <a:lnSpc>
-                          <a:spcPts val="710"/>
-                        </a:lnSpc>
-                      </a:pPr>
-                      <a:endParaRPr sz="2500">
-                        <a:latin typeface="Tahoma"/>
-                        <a:cs typeface="Tahoma"/>
-                      </a:endParaRPr>
-                    </a:p>
-                  </a:txBody>
-                  <a:tcPr marL="0" marR="0" marT="0" marB="0"/>
-                </a:tc>
-                <a:tc>
-                  <a:txBody>
-                    <a:bodyPr/>
-                    <a:lstStyle/>
-                    <a:p>
-                      <a:pPr marL="71120">
-                        <a:lnSpc>
-                          <a:spcPts val="710"/>
-                        </a:lnSpc>
-                      </a:pPr>
-                      <a:endParaRPr sz="2500">
-                        <a:latin typeface="Tahoma"/>
-                        <a:cs typeface="Tahoma"/>
-                      </a:endParaRPr>
-                    </a:p>
-                  </a:txBody>
-                  <a:tcPr marL="0" marR="0" marT="0" marB="0"/>
-                </a:tc>
-                <a:tc>
-                  <a:txBody>
-                    <a:bodyPr/>
-                    <a:lstStyle/>
-                    <a:p>
-                      <a:pPr algn="ctr">
-                        <a:lnSpc>
-                          <a:spcPts val="710"/>
-                        </a:lnSpc>
-                      </a:pPr>
-                      <a:endParaRPr sz="2500">
-                        <a:latin typeface="Arial"/>
-                        <a:cs typeface="Arial"/>
-                      </a:endParaRPr>
-                    </a:p>
-                  </a:txBody>
-                  <a:tcPr marL="0" marR="0" marT="0" marB="0"/>
-                </a:tc>
-                <a:tc>
-                  <a:txBody>
-                    <a:bodyPr/>
-                    <a:lstStyle/>
-                    <a:p>
-                      <a:pPr marL="71120">
-                        <a:lnSpc>
-                          <a:spcPts val="710"/>
-                        </a:lnSpc>
-                      </a:pPr>
-                      <a:endParaRPr sz="2500" dirty="0">
-                        <a:latin typeface="Tahoma"/>
-                        <a:cs typeface="Tahoma"/>
-                      </a:endParaRPr>
-                    </a:p>
-                  </a:txBody>
-                  <a:tcPr marL="0" marR="0" marT="0" marB="0"/>
-                </a:tc>
-                <a:tc>
-                  <a:txBody>
-                    <a:bodyPr/>
-                    <a:lstStyle/>
-                    <a:p>
-                      <a:pPr marL="71120">
-                        <a:lnSpc>
-                          <a:spcPts val="710"/>
-                        </a:lnSpc>
-                      </a:pPr>
-                      <a:endParaRPr sz="2500">
-                        <a:latin typeface="Tahoma"/>
-                        <a:cs typeface="Tahoma"/>
-                      </a:endParaRPr>
-                    </a:p>
-                  </a:txBody>
-                  <a:tcPr marL="0" marR="0" marT="0" marB="0"/>
-                </a:tc>
-                <a:tc>
-                  <a:txBody>
-                    <a:bodyPr/>
-                    <a:lstStyle/>
-                    <a:p>
-                      <a:pPr marL="51435">
-                        <a:lnSpc>
-                          <a:spcPts val="710"/>
-                        </a:lnSpc>
-                      </a:pPr>
-                      <a:endParaRPr sz="2500">
-                        <a:latin typeface="Tahoma"/>
-                        <a:cs typeface="Tahoma"/>
-                      </a:endParaRPr>
-                    </a:p>
-                  </a:txBody>
-                  <a:tcPr marL="0" marR="0" marT="0" marB="0"/>
-                </a:tc>
-                <a:extLst>
-                  <a:ext uri="{0D108BD9-81ED-4DB2-BD59-A6C34878D82A}">
-                    <a16:rowId xmlns:a16="http://schemas.microsoft.com/office/drawing/2014/main" val="10002"/>
-                  </a:ext>
-                </a:extLst>
-              </a:tr>
-              <a:tr h="390847">
-                <a:tc>
-                  <a:txBody>
-                    <a:bodyPr/>
-                    <a:lstStyle/>
-                    <a:p>
-                      <a:pPr>
-                        <a:lnSpc>
-                          <a:spcPts val="710"/>
-                        </a:lnSpc>
-                      </a:pPr>
-                      <a:endParaRPr sz="2500">
-                        <a:latin typeface="Tahoma"/>
-                        <a:cs typeface="Tahoma"/>
-                      </a:endParaRPr>
-                    </a:p>
-                  </a:txBody>
-                  <a:tcPr marL="0" marR="0" marT="0" marB="0"/>
-                </a:tc>
-                <a:tc>
-                  <a:txBody>
-                    <a:bodyPr/>
-                    <a:lstStyle/>
-                    <a:p>
-                      <a:pPr marL="51435">
-                        <a:lnSpc>
-                          <a:spcPts val="710"/>
-                        </a:lnSpc>
-                      </a:pPr>
-                      <a:endParaRPr sz="2500" dirty="0">
-                        <a:latin typeface="Arial"/>
-                        <a:cs typeface="Arial"/>
-                      </a:endParaRPr>
-                    </a:p>
-                  </a:txBody>
-                  <a:tcPr marL="0" marR="0" marT="0" marB="0"/>
-                </a:tc>
-                <a:tc>
-                  <a:txBody>
-                    <a:bodyPr/>
-                    <a:lstStyle/>
-                    <a:p>
-                      <a:pPr algn="ctr">
-                        <a:lnSpc>
-                          <a:spcPts val="710"/>
-                        </a:lnSpc>
-                      </a:pPr>
-                      <a:endParaRPr sz="2500">
-                        <a:latin typeface="Arial"/>
-                        <a:cs typeface="Arial"/>
-                      </a:endParaRPr>
-                    </a:p>
-                  </a:txBody>
-                  <a:tcPr marL="0" marR="0" marT="0" marB="0"/>
-                </a:tc>
-                <a:tc>
-                  <a:txBody>
-                    <a:bodyPr/>
-                    <a:lstStyle/>
-                    <a:p>
-                      <a:pPr marL="71120">
-                        <a:lnSpc>
-                          <a:spcPts val="710"/>
-                        </a:lnSpc>
-                      </a:pPr>
-                      <a:endParaRPr sz="2500">
-                        <a:latin typeface="Tahoma"/>
-                        <a:cs typeface="Tahoma"/>
-                      </a:endParaRPr>
-                    </a:p>
-                  </a:txBody>
-                  <a:tcPr marL="0" marR="0" marT="0" marB="0"/>
-                </a:tc>
-                <a:tc>
-                  <a:txBody>
-                    <a:bodyPr/>
-                    <a:lstStyle/>
-                    <a:p>
-                      <a:pPr marL="71120">
-                        <a:lnSpc>
-                          <a:spcPts val="710"/>
-                        </a:lnSpc>
-                      </a:pPr>
-                      <a:endParaRPr sz="2500" dirty="0">
-                        <a:latin typeface="Tahoma"/>
-                        <a:cs typeface="Tahoma"/>
-                      </a:endParaRPr>
-                    </a:p>
-                  </a:txBody>
-                  <a:tcPr marL="0" marR="0" marT="0" marB="0"/>
-                </a:tc>
-                <a:tc>
-                  <a:txBody>
-                    <a:bodyPr/>
-                    <a:lstStyle/>
-                    <a:p>
-                      <a:pPr algn="ctr">
-                        <a:lnSpc>
-                          <a:spcPts val="710"/>
-                        </a:lnSpc>
-                      </a:pPr>
-                      <a:endParaRPr sz="2500" dirty="0">
-                        <a:latin typeface="Arial"/>
-                        <a:cs typeface="Arial"/>
-                      </a:endParaRPr>
-                    </a:p>
-                  </a:txBody>
-                  <a:tcPr marL="0" marR="0" marT="0" marB="0"/>
-                </a:tc>
-                <a:extLst>
-                  <a:ext uri="{0D108BD9-81ED-4DB2-BD59-A6C34878D82A}">
-                    <a16:rowId xmlns:a16="http://schemas.microsoft.com/office/drawing/2014/main" val="10003"/>
-                  </a:ext>
-                </a:extLst>
-              </a:tr>
-              <a:tr h="390847">
-                <a:tc>
-                  <a:txBody>
-                    <a:bodyPr/>
-                    <a:lstStyle/>
-                    <a:p>
-                      <a:pPr>
-                        <a:lnSpc>
-                          <a:spcPts val="710"/>
-                        </a:lnSpc>
-                      </a:pPr>
-                      <a:endParaRPr sz="2500">
-                        <a:latin typeface="Arial"/>
-                        <a:cs typeface="Arial"/>
-                      </a:endParaRPr>
-                    </a:p>
-                  </a:txBody>
-                  <a:tcPr marL="0" marR="0" marT="0" marB="0"/>
-                </a:tc>
-                <a:tc>
-                  <a:txBody>
-                    <a:bodyPr/>
-                    <a:lstStyle/>
-                    <a:p>
-                      <a:pPr marL="51435">
-                        <a:lnSpc>
-                          <a:spcPts val="710"/>
-                        </a:lnSpc>
-                      </a:pPr>
-                      <a:endParaRPr sz="2500">
-                        <a:latin typeface="Arial"/>
-                        <a:cs typeface="Arial"/>
-                      </a:endParaRPr>
-                    </a:p>
-                  </a:txBody>
-                  <a:tcPr marL="0" marR="0" marT="0" marB="0"/>
-                </a:tc>
-                <a:tc>
-                  <a:txBody>
-                    <a:bodyPr/>
-                    <a:lstStyle/>
-                    <a:p>
-                      <a:pPr algn="ctr">
-                        <a:lnSpc>
-                          <a:spcPts val="710"/>
-                        </a:lnSpc>
-                      </a:pPr>
-                      <a:endParaRPr sz="2500">
-                        <a:latin typeface="Arial"/>
-                        <a:cs typeface="Arial"/>
-                      </a:endParaRPr>
-                    </a:p>
-                  </a:txBody>
-                  <a:tcPr marL="0" marR="0" marT="0" marB="0"/>
-                </a:tc>
-                <a:tc>
-                  <a:txBody>
-                    <a:bodyPr/>
-                    <a:lstStyle/>
-                    <a:p>
-                      <a:pPr marL="51435">
-                        <a:lnSpc>
-                          <a:spcPts val="710"/>
-                        </a:lnSpc>
-                      </a:pPr>
-                      <a:endParaRPr sz="2500">
-                        <a:latin typeface="Arial"/>
-                        <a:cs typeface="Arial"/>
-                      </a:endParaRPr>
-                    </a:p>
-                  </a:txBody>
-                  <a:tcPr marL="0" marR="0" marT="0" marB="0"/>
-                </a:tc>
-                <a:tc>
-                  <a:txBody>
-                    <a:bodyPr/>
-                    <a:lstStyle/>
-                    <a:p>
-                      <a:pPr marL="51435">
-                        <a:lnSpc>
-                          <a:spcPts val="710"/>
-                        </a:lnSpc>
-                      </a:pPr>
-                      <a:endParaRPr sz="2500" dirty="0">
-                        <a:latin typeface="Arial"/>
-                        <a:cs typeface="Arial"/>
-                      </a:endParaRPr>
-                    </a:p>
-                  </a:txBody>
-                  <a:tcPr marL="0" marR="0" marT="0" marB="0"/>
-                </a:tc>
-                <a:tc>
-                  <a:txBody>
-                    <a:bodyPr/>
-                    <a:lstStyle/>
-                    <a:p>
-                      <a:pPr algn="ctr">
-                        <a:lnSpc>
-                          <a:spcPts val="710"/>
-                        </a:lnSpc>
-                      </a:pPr>
-                      <a:endParaRPr sz="2500" dirty="0">
-                        <a:latin typeface="Arial"/>
-                        <a:cs typeface="Arial"/>
-                      </a:endParaRPr>
-                    </a:p>
-                  </a:txBody>
-                  <a:tcPr marL="0" marR="0" marT="0" marB="0"/>
-                </a:tc>
-                <a:extLst>
-                  <a:ext uri="{0D108BD9-81ED-4DB2-BD59-A6C34878D82A}">
-                    <a16:rowId xmlns:a16="http://schemas.microsoft.com/office/drawing/2014/main" val="10004"/>
-                  </a:ext>
-                </a:extLst>
-              </a:tr>
-              <a:tr h="2437419">
-                <a:tc>
-                  <a:txBody>
-                    <a:bodyPr/>
-                    <a:lstStyle/>
-                    <a:p>
-                      <a:pPr>
-                        <a:lnSpc>
-                          <a:spcPts val="715"/>
-                        </a:lnSpc>
-                      </a:pPr>
-                      <a:endParaRPr sz="2500">
-                        <a:latin typeface="Tahoma"/>
-                        <a:cs typeface="Tahoma"/>
-                      </a:endParaRPr>
-                    </a:p>
-                  </a:txBody>
-                  <a:tcPr marL="0" marR="0" marT="0" marB="0">
-                    <a:lnB w="9525">
-                      <a:solidFill>
-                        <a:srgbClr val="000000"/>
-                      </a:solidFill>
-                      <a:prstDash val="solid"/>
-                    </a:lnB>
-                  </a:tcPr>
-                </a:tc>
-                <a:tc>
-                  <a:txBody>
-                    <a:bodyPr/>
-                    <a:lstStyle/>
-                    <a:p>
-                      <a:pPr marL="71120">
-                        <a:lnSpc>
-                          <a:spcPts val="715"/>
-                        </a:lnSpc>
-                      </a:pPr>
-                      <a:endParaRPr sz="2500" dirty="0">
-                        <a:latin typeface="Tahoma"/>
-                        <a:cs typeface="Tahoma"/>
-                      </a:endParaRPr>
-                    </a:p>
-                  </a:txBody>
-                  <a:tcPr marL="0" marR="0" marT="0" marB="0">
-                    <a:lnB w="9525">
-                      <a:solidFill>
-                        <a:srgbClr val="000000"/>
-                      </a:solidFill>
-                      <a:prstDash val="solid"/>
-                    </a:lnB>
-                  </a:tcPr>
-                </a:tc>
-                <a:tc>
-                  <a:txBody>
-                    <a:bodyPr/>
-                    <a:lstStyle/>
-                    <a:p>
-                      <a:pPr algn="ctr">
-                        <a:lnSpc>
-                          <a:spcPts val="715"/>
-                        </a:lnSpc>
-                      </a:pPr>
-                      <a:endParaRPr sz="2500">
-                        <a:latin typeface="Arial"/>
-                        <a:cs typeface="Arial"/>
-                      </a:endParaRPr>
-                    </a:p>
-                  </a:txBody>
-                  <a:tcPr marL="0" marR="0" marT="0" marB="0">
-                    <a:lnB w="9525">
-                      <a:solidFill>
-                        <a:srgbClr val="000000"/>
-                      </a:solidFill>
-                      <a:prstDash val="solid"/>
-                    </a:lnB>
-                  </a:tcPr>
-                </a:tc>
-                <a:tc>
-                  <a:txBody>
-                    <a:bodyPr/>
-                    <a:lstStyle/>
-                    <a:p>
-                      <a:pPr marL="71120">
-                        <a:lnSpc>
-                          <a:spcPts val="715"/>
-                        </a:lnSpc>
-                      </a:pPr>
-                      <a:endParaRPr sz="2500">
-                        <a:latin typeface="Tahoma"/>
-                        <a:cs typeface="Tahoma"/>
-                      </a:endParaRPr>
-                    </a:p>
-                  </a:txBody>
-                  <a:tcPr marL="0" marR="0" marT="0" marB="0">
-                    <a:lnB w="9525">
-                      <a:solidFill>
-                        <a:srgbClr val="000000"/>
-                      </a:solidFill>
-                      <a:prstDash val="solid"/>
-                    </a:lnB>
-                  </a:tcPr>
-                </a:tc>
-                <a:tc>
-                  <a:txBody>
-                    <a:bodyPr/>
-                    <a:lstStyle/>
-                    <a:p>
-                      <a:pPr marL="71120">
-                        <a:lnSpc>
-                          <a:spcPts val="715"/>
-                        </a:lnSpc>
-                      </a:pPr>
-                      <a:endParaRPr sz="2500" dirty="0">
-                        <a:latin typeface="Tahoma"/>
-                        <a:cs typeface="Tahoma"/>
-                      </a:endParaRPr>
-                    </a:p>
-                  </a:txBody>
-                  <a:tcPr marL="0" marR="0" marT="0" marB="0">
-                    <a:lnB w="9525">
-                      <a:solidFill>
-                        <a:srgbClr val="000000"/>
-                      </a:solidFill>
-                      <a:prstDash val="solid"/>
-                    </a:lnB>
-                  </a:tcPr>
-                </a:tc>
-                <a:tc>
-                  <a:txBody>
-                    <a:bodyPr/>
-                    <a:lstStyle/>
-                    <a:p>
-                      <a:pPr marL="50800">
-                        <a:lnSpc>
-                          <a:spcPts val="715"/>
-                        </a:lnSpc>
-                      </a:pPr>
-                      <a:endParaRPr sz="2500" dirty="0">
-                        <a:latin typeface="Tahoma"/>
-                        <a:cs typeface="Tahoma"/>
-                      </a:endParaRPr>
-                    </a:p>
-                  </a:txBody>
-                  <a:tcPr marL="0" marR="0" marT="0" marB="0">
-                    <a:lnB w="9525">
-                      <a:solidFill>
-                        <a:srgbClr val="000000"/>
-                      </a:solidFill>
-                      <a:prstDash val="solid"/>
-                    </a:lnB>
-                  </a:tcPr>
-                </a:tc>
-                <a:extLst>
-                  <a:ext uri="{0D108BD9-81ED-4DB2-BD59-A6C34878D82A}">
-                    <a16:rowId xmlns:a16="http://schemas.microsoft.com/office/drawing/2014/main" val="10005"/>
-                  </a:ext>
-                </a:extLst>
-              </a:tr>
-            </a:tbl>
-          </a:graphicData>
-        </a:graphic>
-      </p:graphicFrame>
       <p:sp>
         <p:nvSpPr>
-          <p:cNvPr id="37" name="TextBox 36">
-            <a:extLst>
-              <a:ext uri="{FF2B5EF4-FFF2-40B4-BE49-F238E27FC236}">
-                <a16:creationId xmlns:a16="http://schemas.microsoft.com/office/drawing/2014/main" id="{205E02A1-F422-22C0-D1E4-E16C3649E7D8}"/>
-              </a:ext>
-            </a:extLst>
-          </p:cNvPr>
+          <p:cNvPr id="37" name="TextBox 36"/>
           <p:cNvSpPr txBox="1"/>
           <p:nvPr/>
         </p:nvSpPr>
         <p:spPr>
           <a:xfrm>
-            <a:off x="180407" y="8876709"/>
+            <a:off x="180407" y="8721769"/>
             <a:ext cx="8414790" cy="784830"/>
           </a:xfrm>
           <a:prstGeom prst="rect">
@@ -4539,19 +4057,13 @@
       </p:sp>
       <p:sp>
         <p:nvSpPr>
-          <p:cNvPr id="45" name="TextBox 44">
-            <a:extLst>
-              <a:ext uri="{FF2B5EF4-FFF2-40B4-BE49-F238E27FC236}">
-                <a16:creationId xmlns:a16="http://schemas.microsoft.com/office/drawing/2014/main" id="{B8E30825-635A-01F4-8B29-CBDA17CCF7B6}"/>
-              </a:ext>
-            </a:extLst>
-          </p:cNvPr>
+          <p:cNvPr id="45" name="TextBox 44"/>
           <p:cNvSpPr txBox="1"/>
           <p:nvPr/>
         </p:nvSpPr>
         <p:spPr>
           <a:xfrm>
-            <a:off x="8984404" y="4860103"/>
+            <a:off x="8984404" y="4656268"/>
             <a:ext cx="10201371" cy="707886"/>
           </a:xfrm>
           <a:prstGeom prst="rect">
@@ -4576,28 +4088,29 @@
                   <a:schemeClr val="tx2"/>
                 </a:solidFill>
                 <a:latin typeface="Cambria" panose="02040503050406030204" pitchFamily="18" charset="0"/>
-                <a:cs typeface="Tahoma"/>
+                <a:cs typeface="Tahoma" panose="020B0604030504040204"/>
               </a:rPr>
               <a:t>Data</a:t>
             </a:r>
+            <a:endParaRPr lang="en-US" sz="4000" b="1" spc="-10" dirty="0">
+              <a:solidFill>
+                <a:schemeClr val="tx2"/>
+              </a:solidFill>
+              <a:latin typeface="Cambria" panose="02040503050406030204" pitchFamily="18" charset="0"/>
+              <a:cs typeface="Tahoma" panose="020B0604030504040204"/>
+            </a:endParaRPr>
           </a:p>
         </p:txBody>
       </p:sp>
       <p:sp>
         <p:nvSpPr>
-          <p:cNvPr id="54" name="TextBox 53">
-            <a:extLst>
-              <a:ext uri="{FF2B5EF4-FFF2-40B4-BE49-F238E27FC236}">
-                <a16:creationId xmlns:a16="http://schemas.microsoft.com/office/drawing/2014/main" id="{7F83CD82-FCC9-3F63-E1A2-10A2C1826DD1}"/>
-              </a:ext>
-            </a:extLst>
-          </p:cNvPr>
+          <p:cNvPr id="54" name="TextBox 53"/>
           <p:cNvSpPr txBox="1"/>
           <p:nvPr/>
         </p:nvSpPr>
         <p:spPr>
           <a:xfrm>
-            <a:off x="20889732" y="4783159"/>
+            <a:off x="21147542" y="4813639"/>
             <a:ext cx="17613482" cy="784830"/>
           </a:xfrm>
           <a:prstGeom prst="rect">
@@ -4627,13 +4140,7 @@
       </p:sp>
       <p:sp>
         <p:nvSpPr>
-          <p:cNvPr id="56" name="TextBox 55">
-            <a:extLst>
-              <a:ext uri="{FF2B5EF4-FFF2-40B4-BE49-F238E27FC236}">
-                <a16:creationId xmlns:a16="http://schemas.microsoft.com/office/drawing/2014/main" id="{A8CB6002-92CC-87FF-7D15-0B92ED934DDE}"/>
-              </a:ext>
-            </a:extLst>
-          </p:cNvPr>
+          <p:cNvPr id="56" name="TextBox 55"/>
           <p:cNvSpPr txBox="1"/>
           <p:nvPr/>
         </p:nvSpPr>
@@ -4668,7 +4175,7 @@
                   <a:schemeClr val="bg1"/>
                 </a:solidFill>
                 <a:effectLst/>
-                <a:latin typeface="Georgia" panose="02040502050405020303" pitchFamily="18" charset="0"/>
+                <a:latin typeface="Georgia" panose="02040502050405090303" pitchFamily="18" charset="0"/>
               </a:rPr>
               <a:t>Shuxi</a:t>
             </a:r>
@@ -4678,7 +4185,7 @@
                   <a:schemeClr val="bg1"/>
                 </a:solidFill>
                 <a:effectLst/>
-                <a:latin typeface="Georgia" panose="02040502050405020303" pitchFamily="18" charset="0"/>
+                <a:latin typeface="Georgia" panose="02040502050405090303" pitchFamily="18" charset="0"/>
               </a:rPr>
               <a:t> Wu</a:t>
             </a:r>
@@ -4688,7 +4195,7 @@
                   <a:schemeClr val="bg1"/>
                 </a:solidFill>
                 <a:effectLst/>
-                <a:latin typeface="Georgia" panose="02040502050405020303" pitchFamily="18" charset="0"/>
+                <a:latin typeface="Georgia" panose="02040502050405090303" pitchFamily="18" charset="0"/>
               </a:rPr>
               <a:t>1</a:t>
             </a:r>
@@ -4698,7 +4205,7 @@
                   <a:schemeClr val="bg1"/>
                 </a:solidFill>
                 <a:effectLst/>
-                <a:latin typeface="Georgia" panose="02040502050405020303" pitchFamily="18" charset="0"/>
+                <a:latin typeface="Georgia" panose="02040502050405090303" pitchFamily="18" charset="0"/>
               </a:rPr>
               <a:t>, Vivienne Wang</a:t>
             </a:r>
@@ -4708,7 +4215,7 @@
                   <a:schemeClr val="bg1"/>
                 </a:solidFill>
                 <a:effectLst/>
-                <a:latin typeface="Georgia" panose="02040502050405020303" pitchFamily="18" charset="0"/>
+                <a:latin typeface="Georgia" panose="02040502050405090303" pitchFamily="18" charset="0"/>
               </a:rPr>
               <a:t>1</a:t>
             </a:r>
@@ -4718,7 +4225,7 @@
                   <a:schemeClr val="bg1"/>
                 </a:solidFill>
                 <a:effectLst/>
-                <a:latin typeface="Georgia" panose="02040502050405020303" pitchFamily="18" charset="0"/>
+                <a:latin typeface="Georgia" panose="02040502050405090303" pitchFamily="18" charset="0"/>
               </a:rPr>
               <a:t>, </a:t>
             </a:r>
@@ -4728,7 +4235,7 @@
                   <a:schemeClr val="bg1"/>
                 </a:solidFill>
                 <a:effectLst/>
-                <a:latin typeface="Georgia" panose="02040502050405020303" pitchFamily="18" charset="0"/>
+                <a:latin typeface="Georgia" panose="02040502050405090303" pitchFamily="18" charset="0"/>
               </a:rPr>
               <a:t>Jianyue</a:t>
             </a:r>
@@ -4738,7 +4245,7 @@
                   <a:schemeClr val="bg1"/>
                 </a:solidFill>
                 <a:effectLst/>
-                <a:latin typeface="Georgia" panose="02040502050405020303" pitchFamily="18" charset="0"/>
+                <a:latin typeface="Georgia" panose="02040502050405090303" pitchFamily="18" charset="0"/>
               </a:rPr>
               <a:t> Bai</a:t>
             </a:r>
@@ -4748,7 +4255,7 @@
                   <a:schemeClr val="bg1"/>
                 </a:solidFill>
                 <a:effectLst/>
-                <a:latin typeface="Georgia" panose="02040502050405020303" pitchFamily="18" charset="0"/>
+                <a:latin typeface="Georgia" panose="02040502050405090303" pitchFamily="18" charset="0"/>
               </a:rPr>
               <a:t>1</a:t>
             </a:r>
@@ -4758,7 +4265,7 @@
                   <a:schemeClr val="bg1"/>
                 </a:solidFill>
                 <a:effectLst/>
-                <a:latin typeface="Georgia" panose="02040502050405020303" pitchFamily="18" charset="0"/>
+                <a:latin typeface="Georgia" panose="02040502050405090303" pitchFamily="18" charset="0"/>
               </a:rPr>
               <a:t>, Javier Mencia Ledo</a:t>
             </a:r>
@@ -4768,7 +4275,7 @@
                   <a:schemeClr val="bg1"/>
                 </a:solidFill>
                 <a:effectLst/>
-                <a:latin typeface="Georgia" panose="02040502050405020303" pitchFamily="18" charset="0"/>
+                <a:latin typeface="Georgia" panose="02040502050405090303" pitchFamily="18" charset="0"/>
               </a:rPr>
               <a:t>1</a:t>
             </a:r>
@@ -4795,7 +4302,7 @@
                   <a:schemeClr val="bg1"/>
                 </a:solidFill>
                 <a:effectLst/>
-                <a:latin typeface="Georgia" panose="02040502050405020303" pitchFamily="18" charset="0"/>
+                <a:latin typeface="Georgia" panose="02040502050405090303" pitchFamily="18" charset="0"/>
               </a:rPr>
               <a:t>1</a:t>
             </a:r>
@@ -4805,7 +4312,7 @@
                   <a:schemeClr val="bg1"/>
                 </a:solidFill>
                 <a:effectLst/>
-                <a:latin typeface="Georgia" panose="02040502050405020303" pitchFamily="18" charset="0"/>
+                <a:latin typeface="Georgia" panose="02040502050405090303" pitchFamily="18" charset="0"/>
               </a:rPr>
               <a:t>Dalla Lana School of Public Health, Biostatistics Division</a:t>
             </a:r>
@@ -4819,13 +4326,7 @@
       </p:sp>
       <p:sp>
         <p:nvSpPr>
-          <p:cNvPr id="64" name="TextBox 63">
-            <a:extLst>
-              <a:ext uri="{FF2B5EF4-FFF2-40B4-BE49-F238E27FC236}">
-                <a16:creationId xmlns:a16="http://schemas.microsoft.com/office/drawing/2014/main" id="{F0AC3AC0-4285-D731-FE3F-B3F272DBE280}"/>
-              </a:ext>
-            </a:extLst>
-          </p:cNvPr>
+          <p:cNvPr id="64" name="TextBox 63"/>
           <p:cNvSpPr txBox="1"/>
           <p:nvPr/>
         </p:nvSpPr>
@@ -4867,19 +4368,13 @@
       </p:sp>
       <p:sp>
         <p:nvSpPr>
-          <p:cNvPr id="65" name="TextBox 64">
-            <a:extLst>
-              <a:ext uri="{FF2B5EF4-FFF2-40B4-BE49-F238E27FC236}">
-                <a16:creationId xmlns:a16="http://schemas.microsoft.com/office/drawing/2014/main" id="{A080A3AD-2274-232F-E45A-9764F9E97AE6}"/>
-              </a:ext>
-            </a:extLst>
-          </p:cNvPr>
+          <p:cNvPr id="65" name="TextBox 64"/>
           <p:cNvSpPr txBox="1"/>
           <p:nvPr/>
         </p:nvSpPr>
         <p:spPr>
           <a:xfrm>
-            <a:off x="99504" y="20923621"/>
+            <a:off x="188404" y="17050756"/>
             <a:ext cx="8443444" cy="784830"/>
           </a:xfrm>
           <a:prstGeom prst="rect">
@@ -4915,13 +4410,7 @@
       </p:sp>
       <p:sp>
         <p:nvSpPr>
-          <p:cNvPr id="66" name="TextBox 65">
-            <a:extLst>
-              <a:ext uri="{FF2B5EF4-FFF2-40B4-BE49-F238E27FC236}">
-                <a16:creationId xmlns:a16="http://schemas.microsoft.com/office/drawing/2014/main" id="{CD336477-6C54-CA42-B95C-2C12234DC2DD}"/>
-              </a:ext>
-            </a:extLst>
-          </p:cNvPr>
+          <p:cNvPr id="66" name="TextBox 65"/>
           <p:cNvSpPr txBox="1"/>
           <p:nvPr/>
         </p:nvSpPr>
@@ -4963,20 +4452,14 @@
       </p:sp>
       <p:sp>
         <p:nvSpPr>
-          <p:cNvPr id="67" name="TextBox 66">
-            <a:extLst>
-              <a:ext uri="{FF2B5EF4-FFF2-40B4-BE49-F238E27FC236}">
-                <a16:creationId xmlns:a16="http://schemas.microsoft.com/office/drawing/2014/main" id="{65B782BA-71AC-72B7-81DD-9BD4D1578988}"/>
-              </a:ext>
-            </a:extLst>
-          </p:cNvPr>
+          <p:cNvPr id="67" name="TextBox 66"/>
           <p:cNvSpPr txBox="1"/>
           <p:nvPr/>
         </p:nvSpPr>
         <p:spPr>
           <a:xfrm>
-            <a:off x="20889732" y="24642775"/>
-            <a:ext cx="11876915" cy="784830"/>
+            <a:off x="21136610" y="21459825"/>
+            <a:ext cx="11642090" cy="783590"/>
           </a:xfrm>
           <a:prstGeom prst="rect">
             <a:avLst/>
@@ -5011,13 +4494,7 @@
       </p:sp>
       <p:sp>
         <p:nvSpPr>
-          <p:cNvPr id="83" name="TextBox 82">
-            <a:extLst>
-              <a:ext uri="{FF2B5EF4-FFF2-40B4-BE49-F238E27FC236}">
-                <a16:creationId xmlns:a16="http://schemas.microsoft.com/office/drawing/2014/main" id="{13220A86-0A0D-7413-5C80-23C3719C0946}"/>
-              </a:ext>
-            </a:extLst>
-          </p:cNvPr>
+          <p:cNvPr id="83" name="TextBox 82"/>
           <p:cNvSpPr txBox="1"/>
           <p:nvPr/>
         </p:nvSpPr>
@@ -5059,20 +4536,14 @@
       </p:sp>
       <p:pic>
         <p:nvPicPr>
-          <p:cNvPr id="1028" name="Picture 4" descr="Communications &amp; Branding Resources - Dalla Lana School of Public Health">
-            <a:extLst>
-              <a:ext uri="{FF2B5EF4-FFF2-40B4-BE49-F238E27FC236}">
-                <a16:creationId xmlns:a16="http://schemas.microsoft.com/office/drawing/2014/main" id="{E60F3905-A6CF-40F5-832E-87404562ACF0}"/>
-              </a:ext>
-            </a:extLst>
-          </p:cNvPr>
+          <p:cNvPr id="1028" name="Picture 4" descr="Communications &amp; Branding Resources - Dalla Lana School of Public Health"/>
           <p:cNvPicPr>
             <a:picLocks noChangeAspect="1" noChangeArrowheads="1"/>
           </p:cNvPicPr>
           <p:nvPr/>
         </p:nvPicPr>
         <p:blipFill>
-          <a:blip r:embed="rId2">
+          <a:blip r:embed="rId1">
             <a:extLst>
               <a:ext uri="{28A0092B-C50C-407E-A947-70E740481C1C}">
                 <a14:useLocalDpi xmlns:a14="http://schemas.microsoft.com/office/drawing/2010/main" val="0"/>
@@ -5106,86 +4577,53 @@
       </p:pic>
       <p:graphicFrame>
         <p:nvGraphicFramePr>
-          <p:cNvPr id="86" name="Table 85">
-            <a:extLst>
-              <a:ext uri="{FF2B5EF4-FFF2-40B4-BE49-F238E27FC236}">
-                <a16:creationId xmlns:a16="http://schemas.microsoft.com/office/drawing/2014/main" id="{913C36AB-F790-865B-B715-42C3B126B891}"/>
-              </a:ext>
-            </a:extLst>
-          </p:cNvPr>
+          <p:cNvPr id="86" name="Table 85"/>
           <p:cNvGraphicFramePr>
             <a:graphicFrameLocks noGrp="1"/>
           </p:cNvGraphicFramePr>
-          <p:nvPr>
-            <p:extLst>
-              <p:ext uri="{D42A27DB-BD31-4B8C-83A1-F6EECF244321}">
-                <p14:modId xmlns:p14="http://schemas.microsoft.com/office/powerpoint/2010/main" val="700837492"/>
-              </p:ext>
-            </p:extLst>
-          </p:nvPr>
+          <p:nvPr/>
         </p:nvGraphicFramePr>
         <p:xfrm>
-          <a:off x="8804257" y="5728005"/>
-          <a:ext cx="11966870" cy="13675193"/>
+          <a:off x="8804257" y="5308270"/>
+          <a:ext cx="11966575" cy="12506325"/>
         </p:xfrm>
         <a:graphic>
           <a:graphicData uri="http://schemas.openxmlformats.org/drawingml/2006/table">
             <a:tbl>
               <a:tblPr/>
               <a:tblGrid>
-                <a:gridCol w="3064266">
-                  <a:extLst>
-                    <a:ext uri="{9D8B030D-6E8A-4147-A177-3AD203B41FA5}">
-                      <a16:colId xmlns:a16="http://schemas.microsoft.com/office/drawing/2014/main" val="4094381698"/>
-                    </a:ext>
-                  </a:extLst>
-                </a:gridCol>
-                <a:gridCol w="2225651">
-                  <a:extLst>
-                    <a:ext uri="{9D8B030D-6E8A-4147-A177-3AD203B41FA5}">
-                      <a16:colId xmlns:a16="http://schemas.microsoft.com/office/drawing/2014/main" val="1847911096"/>
-                    </a:ext>
-                  </a:extLst>
-                </a:gridCol>
-                <a:gridCol w="2225651">
-                  <a:extLst>
-                    <a:ext uri="{9D8B030D-6E8A-4147-A177-3AD203B41FA5}">
-                      <a16:colId xmlns:a16="http://schemas.microsoft.com/office/drawing/2014/main" val="3771703843"/>
-                    </a:ext>
-                  </a:extLst>
-                </a:gridCol>
-                <a:gridCol w="2225651">
-                  <a:extLst>
-                    <a:ext uri="{9D8B030D-6E8A-4147-A177-3AD203B41FA5}">
-                      <a16:colId xmlns:a16="http://schemas.microsoft.com/office/drawing/2014/main" val="775947912"/>
-                    </a:ext>
-                  </a:extLst>
-                </a:gridCol>
-                <a:gridCol w="2225651">
-                  <a:extLst>
-                    <a:ext uri="{9D8B030D-6E8A-4147-A177-3AD203B41FA5}">
-                      <a16:colId xmlns:a16="http://schemas.microsoft.com/office/drawing/2014/main" val="2832029413"/>
-                    </a:ext>
-                  </a:extLst>
-                </a:gridCol>
+                <a:gridCol w="3064266"/>
+                <a:gridCol w="2225651"/>
+                <a:gridCol w="2225675"/>
+                <a:gridCol w="2225627"/>
+                <a:gridCol w="2225651"/>
               </a:tblGrid>
-              <a:tr h="1104596">
+              <a:tr h="852805">
                 <a:tc>
                   <a:txBody>
                     <a:bodyPr/>
                     <a:lstStyle/>
                     <a:p>
-                      <a:pPr algn="r" fontAlgn="ctr"/>
-                      <a:r>
-                        <a:rPr lang="en-US" sz="3600" b="1">
+                      <a:pPr algn="ctr" fontAlgn="ctr"/>
+                      <a:r>
+                        <a:rPr lang="en-US" sz="3600" b="0">
                           <a:solidFill>
                             <a:srgbClr val="000000"/>
                           </a:solidFill>
                           <a:effectLst/>
-                          <a:latin typeface="Cambria" panose="02040503050406030204" pitchFamily="18" charset="0"/>
+                          <a:latin typeface="Arial" panose="020B0604020202090204" pitchFamily="34" charset="0"/>
+                          <a:cs typeface="Arial" panose="020B0604020202090204" pitchFamily="34" charset="0"/>
                         </a:rPr>
                         <a:t> </a:t>
                       </a:r>
+                      <a:endParaRPr lang="en-US" sz="3600" b="0">
+                        <a:solidFill>
+                          <a:srgbClr val="000000"/>
+                        </a:solidFill>
+                        <a:effectLst/>
+                        <a:latin typeface="Arial" panose="020B0604020202090204" pitchFamily="34" charset="0"/>
+                        <a:cs typeface="Arial" panose="020B0604020202090204" pitchFamily="34" charset="0"/>
+                      </a:endParaRPr>
                     </a:p>
                   </a:txBody>
                   <a:tcPr marL="10559" marR="10559" marT="5279" marB="5279" anchor="ctr">
@@ -5226,7 +4664,9 @@
                       <a:tailEnd type="none" w="med" len="med"/>
                     </a:lnB>
                     <a:solidFill>
-                      <a:srgbClr val="F4F4F4"/>
+                      <a:schemeClr val="bg2">
+                        <a:lumMod val="90000"/>
+                      </a:schemeClr>
                     </a:solidFill>
                   </a:tcPr>
                 </a:tc>
@@ -5235,17 +4675,26 @@
                     <a:bodyPr/>
                     <a:lstStyle/>
                     <a:p>
-                      <a:pPr algn="r" fontAlgn="ctr"/>
-                      <a:r>
-                        <a:rPr lang="en-US" sz="3600" b="1">
+                      <a:pPr algn="ctr" fontAlgn="ctr"/>
+                      <a:r>
+                        <a:rPr lang="en-US" sz="3600" b="0">
                           <a:solidFill>
                             <a:srgbClr val="000000"/>
                           </a:solidFill>
                           <a:effectLst/>
-                          <a:latin typeface="Cambria" panose="02040503050406030204" pitchFamily="18" charset="0"/>
+                          <a:latin typeface="Arial" panose="020B0604020202090204" pitchFamily="34" charset="0"/>
+                          <a:cs typeface="Arial" panose="020B0604020202090204" pitchFamily="34" charset="0"/>
                         </a:rPr>
                         <a:t>Overall</a:t>
                       </a:r>
+                      <a:endParaRPr lang="en-US" sz="3600" b="0">
+                        <a:solidFill>
+                          <a:srgbClr val="000000"/>
+                        </a:solidFill>
+                        <a:effectLst/>
+                        <a:latin typeface="Arial" panose="020B0604020202090204" pitchFamily="34" charset="0"/>
+                        <a:cs typeface="Arial" panose="020B0604020202090204" pitchFamily="34" charset="0"/>
+                      </a:endParaRPr>
                     </a:p>
                   </a:txBody>
                   <a:tcPr marL="10559" marR="10559" marT="5279" marB="5279" anchor="ctr">
@@ -5286,7 +4735,9 @@
                       <a:tailEnd type="none" w="med" len="med"/>
                     </a:lnB>
                     <a:solidFill>
-                      <a:srgbClr val="F4F4F4"/>
+                      <a:schemeClr val="bg2">
+                        <a:lumMod val="90000"/>
+                      </a:schemeClr>
                     </a:solidFill>
                   </a:tcPr>
                 </a:tc>
@@ -5295,17 +4746,26 @@
                     <a:bodyPr/>
                     <a:lstStyle/>
                     <a:p>
-                      <a:pPr algn="r" fontAlgn="ctr"/>
-                      <a:r>
-                        <a:rPr lang="en-US" sz="3600" b="1" dirty="0">
+                      <a:pPr algn="ctr" fontAlgn="ctr"/>
+                      <a:r>
+                        <a:rPr lang="en-US" sz="3600" b="0" dirty="0">
                           <a:solidFill>
                             <a:srgbClr val="000000"/>
                           </a:solidFill>
                           <a:effectLst/>
-                          <a:latin typeface="Cambria" panose="02040503050406030204" pitchFamily="18" charset="0"/>
+                          <a:latin typeface="Arial" panose="020B0604020202090204" pitchFamily="34" charset="0"/>
+                          <a:cs typeface="Arial" panose="020B0604020202090204" pitchFamily="34" charset="0"/>
                         </a:rPr>
                         <a:t>PD</a:t>
                       </a:r>
+                      <a:endParaRPr lang="en-US" sz="3600" b="0" dirty="0">
+                        <a:solidFill>
+                          <a:srgbClr val="000000"/>
+                        </a:solidFill>
+                        <a:effectLst/>
+                        <a:latin typeface="Arial" panose="020B0604020202090204" pitchFamily="34" charset="0"/>
+                        <a:cs typeface="Arial" panose="020B0604020202090204" pitchFamily="34" charset="0"/>
+                      </a:endParaRPr>
                     </a:p>
                   </a:txBody>
                   <a:tcPr marL="10559" marR="10559" marT="5279" marB="5279" anchor="ctr">
@@ -5346,7 +4806,9 @@
                       <a:tailEnd type="none" w="med" len="med"/>
                     </a:lnB>
                     <a:solidFill>
-                      <a:srgbClr val="F4F4F4"/>
+                      <a:schemeClr val="bg2">
+                        <a:lumMod val="90000"/>
+                      </a:schemeClr>
                     </a:solidFill>
                   </a:tcPr>
                 </a:tc>
@@ -5355,17 +4817,26 @@
                     <a:bodyPr/>
                     <a:lstStyle/>
                     <a:p>
-                      <a:pPr algn="r" fontAlgn="ctr"/>
-                      <a:r>
-                        <a:rPr lang="en-US" sz="3600" b="1" dirty="0">
+                      <a:pPr algn="ctr" fontAlgn="ctr"/>
+                      <a:r>
+                        <a:rPr lang="en-US" sz="3600" b="0" dirty="0">
                           <a:solidFill>
                             <a:srgbClr val="000000"/>
                           </a:solidFill>
                           <a:effectLst/>
-                          <a:latin typeface="Cambria" panose="02040503050406030204" pitchFamily="18" charset="0"/>
+                          <a:latin typeface="Arial" panose="020B0604020202090204" pitchFamily="34" charset="0"/>
+                          <a:cs typeface="Arial" panose="020B0604020202090204" pitchFamily="34" charset="0"/>
                         </a:rPr>
                         <a:t>Healthy control</a:t>
                       </a:r>
+                      <a:endParaRPr lang="en-US" sz="3600" b="0" dirty="0">
+                        <a:solidFill>
+                          <a:srgbClr val="000000"/>
+                        </a:solidFill>
+                        <a:effectLst/>
+                        <a:latin typeface="Arial" panose="020B0604020202090204" pitchFamily="34" charset="0"/>
+                        <a:cs typeface="Arial" panose="020B0604020202090204" pitchFamily="34" charset="0"/>
+                      </a:endParaRPr>
                     </a:p>
                   </a:txBody>
                   <a:tcPr marL="10559" marR="10559" marT="5279" marB="5279" anchor="ctr">
@@ -5406,7 +4877,9 @@
                       <a:tailEnd type="none" w="med" len="med"/>
                     </a:lnB>
                     <a:solidFill>
-                      <a:srgbClr val="F4F4F4"/>
+                      <a:schemeClr val="bg2">
+                        <a:lumMod val="90000"/>
+                      </a:schemeClr>
                     </a:solidFill>
                   </a:tcPr>
                 </a:tc>
@@ -5415,17 +4888,26 @@
                     <a:bodyPr/>
                     <a:lstStyle/>
                     <a:p>
-                      <a:pPr algn="r" fontAlgn="ctr"/>
-                      <a:r>
-                        <a:rPr lang="en-US" sz="3600" b="1" dirty="0">
+                      <a:pPr algn="ctr" fontAlgn="ctr"/>
+                      <a:r>
+                        <a:rPr lang="en-US" sz="3600" b="0" dirty="0">
                           <a:solidFill>
                             <a:srgbClr val="000000"/>
                           </a:solidFill>
                           <a:effectLst/>
-                          <a:latin typeface="Cambria" panose="02040503050406030204" pitchFamily="18" charset="0"/>
+                          <a:latin typeface="Arial" panose="020B0604020202090204" pitchFamily="34" charset="0"/>
+                          <a:cs typeface="Arial" panose="020B0604020202090204" pitchFamily="34" charset="0"/>
                         </a:rPr>
                         <a:t>PD-Plus</a:t>
                       </a:r>
+                      <a:endParaRPr lang="en-US" sz="3600" b="0" dirty="0">
+                        <a:solidFill>
+                          <a:srgbClr val="000000"/>
+                        </a:solidFill>
+                        <a:effectLst/>
+                        <a:latin typeface="Arial" panose="020B0604020202090204" pitchFamily="34" charset="0"/>
+                        <a:cs typeface="Arial" panose="020B0604020202090204" pitchFamily="34" charset="0"/>
+                      </a:endParaRPr>
                     </a:p>
                   </a:txBody>
                   <a:tcPr marL="10559" marR="10559" marT="5279" marB="5279" anchor="ctr">
@@ -5466,33 +4948,39 @@
                       <a:tailEnd type="none" w="med" len="med"/>
                     </a:lnB>
                     <a:solidFill>
-                      <a:srgbClr val="F4F4F4"/>
+                      <a:schemeClr val="bg2">
+                        <a:lumMod val="90000"/>
+                      </a:schemeClr>
                     </a:solidFill>
                   </a:tcPr>
                 </a:tc>
-                <a:extLst>
-                  <a:ext uri="{0D108BD9-81ED-4DB2-BD59-A6C34878D82A}">
-                    <a16:rowId xmlns:a16="http://schemas.microsoft.com/office/drawing/2014/main" val="1972017271"/>
-                  </a:ext>
-                </a:extLst>
               </a:tr>
-              <a:tr h="968441">
+              <a:tr h="612140">
                 <a:tc>
                   <a:txBody>
                     <a:bodyPr/>
                     <a:lstStyle/>
                     <a:p>
-                      <a:pPr algn="r" fontAlgn="ctr"/>
-                      <a:r>
-                        <a:rPr lang="en-US" sz="3200" b="1" dirty="0">
+                      <a:pPr algn="ctr" fontAlgn="ctr"/>
+                      <a:r>
+                        <a:rPr lang="en-US" sz="3200" b="0" dirty="0">
                           <a:solidFill>
                             <a:srgbClr val="000000"/>
                           </a:solidFill>
                           <a:effectLst/>
-                          <a:latin typeface="Cambria" panose="02040503050406030204" pitchFamily="18" charset="0"/>
+                          <a:latin typeface="Arial" panose="020B0604020202090204" pitchFamily="34" charset="0"/>
+                          <a:cs typeface="Arial" panose="020B0604020202090204" pitchFamily="34" charset="0"/>
                         </a:rPr>
                         <a:t>Sample Size (n)</a:t>
                       </a:r>
+                      <a:endParaRPr lang="en-US" sz="3200" b="0" dirty="0">
+                        <a:solidFill>
+                          <a:srgbClr val="000000"/>
+                        </a:solidFill>
+                        <a:effectLst/>
+                        <a:latin typeface="Arial" panose="020B0604020202090204" pitchFamily="34" charset="0"/>
+                        <a:cs typeface="Arial" panose="020B0604020202090204" pitchFamily="34" charset="0"/>
+                      </a:endParaRPr>
                     </a:p>
                   </a:txBody>
                   <a:tcPr marL="10559" marR="10559" marT="5279" marB="5279" anchor="ctr">
@@ -5533,7 +5021,9 @@
                       <a:tailEnd type="none" w="med" len="med"/>
                     </a:lnB>
                     <a:solidFill>
-                      <a:srgbClr val="F4F4F4"/>
+                      <a:schemeClr val="bg2">
+                        <a:lumMod val="90000"/>
+                      </a:schemeClr>
                     </a:solidFill>
                   </a:tcPr>
                 </a:tc>
@@ -5542,13 +5032,20 @@
                     <a:bodyPr/>
                     <a:lstStyle/>
                     <a:p>
-                      <a:r>
-                        <a:rPr lang="en-US" sz="3200" dirty="0">
+                      <a:pPr algn="ctr"/>
+                      <a:r>
+                        <a:rPr lang="en-US" sz="3200" b="0" dirty="0">
                           <a:effectLst/>
-                          <a:latin typeface="Cambria" panose="02040503050406030204" pitchFamily="18" charset="0"/>
+                          <a:latin typeface="Arial" panose="020B0604020202090204" pitchFamily="34" charset="0"/>
+                          <a:cs typeface="Arial" panose="020B0604020202090204" pitchFamily="34" charset="0"/>
                         </a:rPr>
                         <a:t>3541</a:t>
                       </a:r>
+                      <a:endParaRPr lang="en-US" sz="3200" b="0" dirty="0">
+                        <a:effectLst/>
+                        <a:latin typeface="Arial" panose="020B0604020202090204" pitchFamily="34" charset="0"/>
+                        <a:cs typeface="Arial" panose="020B0604020202090204" pitchFamily="34" charset="0"/>
+                      </a:endParaRPr>
                     </a:p>
                   </a:txBody>
                   <a:tcPr marL="10559" marR="10559" marT="10559" marB="10559" anchor="ctr">
@@ -5596,13 +5093,20 @@
                     <a:bodyPr/>
                     <a:lstStyle/>
                     <a:p>
-                      <a:r>
-                        <a:rPr lang="en-US" sz="3200" dirty="0">
+                      <a:pPr algn="ctr"/>
+                      <a:r>
+                        <a:rPr lang="en-US" sz="3200" b="0" dirty="0">
                           <a:effectLst/>
-                          <a:latin typeface="Cambria" panose="02040503050406030204" pitchFamily="18" charset="0"/>
+                          <a:latin typeface="Arial" panose="020B0604020202090204" pitchFamily="34" charset="0"/>
+                          <a:cs typeface="Arial" panose="020B0604020202090204" pitchFamily="34" charset="0"/>
                         </a:rPr>
                         <a:t>2852</a:t>
                       </a:r>
+                      <a:endParaRPr lang="en-US" sz="3200" b="0" dirty="0">
+                        <a:effectLst/>
+                        <a:latin typeface="Arial" panose="020B0604020202090204" pitchFamily="34" charset="0"/>
+                        <a:cs typeface="Arial" panose="020B0604020202090204" pitchFamily="34" charset="0"/>
+                      </a:endParaRPr>
                     </a:p>
                   </a:txBody>
                   <a:tcPr marL="10559" marR="10559" marT="10559" marB="10559" anchor="ctr">
@@ -5650,13 +5154,20 @@
                     <a:bodyPr/>
                     <a:lstStyle/>
                     <a:p>
-                      <a:r>
-                        <a:rPr lang="en-US" sz="3200" dirty="0">
+                      <a:pPr algn="ctr"/>
+                      <a:r>
+                        <a:rPr lang="en-US" sz="3200" b="0" dirty="0">
                           <a:effectLst/>
-                          <a:latin typeface="Cambria" panose="02040503050406030204" pitchFamily="18" charset="0"/>
+                          <a:latin typeface="Arial" panose="020B0604020202090204" pitchFamily="34" charset="0"/>
+                          <a:cs typeface="Arial" panose="020B0604020202090204" pitchFamily="34" charset="0"/>
                         </a:rPr>
                         <a:t>410</a:t>
                       </a:r>
+                      <a:endParaRPr lang="en-US" sz="3200" b="0" dirty="0">
+                        <a:effectLst/>
+                        <a:latin typeface="Arial" panose="020B0604020202090204" pitchFamily="34" charset="0"/>
+                        <a:cs typeface="Arial" panose="020B0604020202090204" pitchFamily="34" charset="0"/>
+                      </a:endParaRPr>
                     </a:p>
                   </a:txBody>
                   <a:tcPr marL="10559" marR="10559" marT="10559" marB="10559" anchor="ctr">
@@ -5704,13 +5215,20 @@
                     <a:bodyPr/>
                     <a:lstStyle/>
                     <a:p>
-                      <a:r>
-                        <a:rPr lang="en-US" sz="3200" dirty="0">
+                      <a:pPr algn="ctr"/>
+                      <a:r>
+                        <a:rPr lang="en-US" sz="3200" b="0" dirty="0">
                           <a:effectLst/>
-                          <a:latin typeface="Cambria" panose="02040503050406030204" pitchFamily="18" charset="0"/>
+                          <a:latin typeface="Arial" panose="020B0604020202090204" pitchFamily="34" charset="0"/>
+                          <a:cs typeface="Arial" panose="020B0604020202090204" pitchFamily="34" charset="0"/>
                         </a:rPr>
                         <a:t>171</a:t>
                       </a:r>
+                      <a:endParaRPr lang="en-US" sz="3200" b="0" dirty="0">
+                        <a:effectLst/>
+                        <a:latin typeface="Arial" panose="020B0604020202090204" pitchFamily="34" charset="0"/>
+                        <a:cs typeface="Arial" panose="020B0604020202090204" pitchFamily="34" charset="0"/>
+                      </a:endParaRPr>
                     </a:p>
                   </a:txBody>
                   <a:tcPr marL="10559" marR="10559" marT="10559" marB="10559" anchor="ctr">
@@ -5753,11 +5271,6 @@
                     <a:noFill/>
                   </a:tcPr>
                 </a:tc>
-                <a:extLst>
-                  <a:ext uri="{0D108BD9-81ED-4DB2-BD59-A6C34878D82A}">
-                    <a16:rowId xmlns:a16="http://schemas.microsoft.com/office/drawing/2014/main" val="486077693"/>
-                  </a:ext>
-                </a:extLst>
               </a:tr>
               <a:tr h="979000">
                 <a:tc>
@@ -5765,17 +5278,26 @@
                     <a:bodyPr/>
                     <a:lstStyle/>
                     <a:p>
-                      <a:pPr algn="r" fontAlgn="ctr"/>
-                      <a:r>
-                        <a:rPr lang="en-US" sz="3200" b="1" dirty="0">
+                      <a:pPr algn="ctr" fontAlgn="ctr"/>
+                      <a:r>
+                        <a:rPr lang="en-US" sz="3200" b="0" dirty="0">
                           <a:solidFill>
                             <a:srgbClr val="000000"/>
                           </a:solidFill>
                           <a:effectLst/>
-                          <a:latin typeface="Cambria" panose="02040503050406030204" pitchFamily="18" charset="0"/>
+                          <a:latin typeface="Arial" panose="020B0604020202090204" pitchFamily="34" charset="0"/>
+                          <a:cs typeface="Arial" panose="020B0604020202090204" pitchFamily="34" charset="0"/>
                         </a:rPr>
                         <a:t>Current Age</a:t>
                       </a:r>
+                      <a:endParaRPr lang="en-US" sz="3200" b="0" dirty="0">
+                        <a:solidFill>
+                          <a:srgbClr val="000000"/>
+                        </a:solidFill>
+                        <a:effectLst/>
+                        <a:latin typeface="Arial" panose="020B0604020202090204" pitchFamily="34" charset="0"/>
+                        <a:cs typeface="Arial" panose="020B0604020202090204" pitchFamily="34" charset="0"/>
+                      </a:endParaRPr>
                     </a:p>
                   </a:txBody>
                   <a:tcPr marL="10559" marR="10559" marT="5279" marB="5279" anchor="ctr">
@@ -5816,7 +5338,9 @@
                       <a:tailEnd type="none" w="med" len="med"/>
                     </a:lnB>
                     <a:solidFill>
-                      <a:srgbClr val="F4F4F4"/>
+                      <a:schemeClr val="bg2">
+                        <a:lumMod val="90000"/>
+                      </a:schemeClr>
                     </a:solidFill>
                   </a:tcPr>
                 </a:tc>
@@ -5825,13 +5349,20 @@
                     <a:bodyPr/>
                     <a:lstStyle/>
                     <a:p>
-                      <a:r>
-                        <a:rPr lang="en-US" sz="3200">
+                      <a:pPr algn="ctr"/>
+                      <a:r>
+                        <a:rPr lang="en-US" sz="3200" b="0">
                           <a:effectLst/>
-                          <a:latin typeface="Cambria" panose="02040503050406030204" pitchFamily="18" charset="0"/>
+                          <a:latin typeface="Arial" panose="020B0604020202090204" pitchFamily="34" charset="0"/>
+                          <a:cs typeface="Arial" panose="020B0604020202090204" pitchFamily="34" charset="0"/>
                         </a:rPr>
                         <a:t>66.20 (10.04)</a:t>
                       </a:r>
+                      <a:endParaRPr lang="en-US" sz="3200" b="0">
+                        <a:effectLst/>
+                        <a:latin typeface="Arial" panose="020B0604020202090204" pitchFamily="34" charset="0"/>
+                        <a:cs typeface="Arial" panose="020B0604020202090204" pitchFamily="34" charset="0"/>
+                      </a:endParaRPr>
                     </a:p>
                   </a:txBody>
                   <a:tcPr marL="10559" marR="10559" marT="10559" marB="10559" anchor="ctr">
@@ -5879,13 +5410,36 @@
                     <a:bodyPr/>
                     <a:lstStyle/>
                     <a:p>
-                      <a:r>
-                        <a:rPr lang="en-US" sz="3200">
+                      <a:pPr algn="ctr"/>
+                      <a:r>
+                        <a:rPr lang="en-US" sz="3200" b="0">
                           <a:effectLst/>
-                          <a:latin typeface="Cambria" panose="02040503050406030204" pitchFamily="18" charset="0"/>
-                        </a:rPr>
-                        <a:t>66.59 (9.59)</a:t>
-                      </a:r>
+                          <a:latin typeface="Arial" panose="020B0604020202090204" pitchFamily="34" charset="0"/>
+                          <a:cs typeface="Arial" panose="020B0604020202090204" pitchFamily="34" charset="0"/>
+                        </a:rPr>
+                        <a:t>66.59 </a:t>
+                      </a:r>
+                      <a:endParaRPr lang="en-US" sz="3200" b="0">
+                        <a:effectLst/>
+                        <a:latin typeface="Arial" panose="020B0604020202090204" pitchFamily="34" charset="0"/>
+                        <a:cs typeface="Arial" panose="020B0604020202090204" pitchFamily="34" charset="0"/>
+                      </a:endParaRPr>
+                    </a:p>
+                    <a:p>
+                      <a:pPr algn="ctr"/>
+                      <a:r>
+                        <a:rPr lang="en-US" sz="3200" b="0">
+                          <a:effectLst/>
+                          <a:latin typeface="Arial" panose="020B0604020202090204" pitchFamily="34" charset="0"/>
+                          <a:cs typeface="Arial" panose="020B0604020202090204" pitchFamily="34" charset="0"/>
+                        </a:rPr>
+                        <a:t>(9.59)</a:t>
+                      </a:r>
+                      <a:endParaRPr lang="en-US" sz="3200" b="0">
+                        <a:effectLst/>
+                        <a:latin typeface="Arial" panose="020B0604020202090204" pitchFamily="34" charset="0"/>
+                        <a:cs typeface="Arial" panose="020B0604020202090204" pitchFamily="34" charset="0"/>
+                      </a:endParaRPr>
                     </a:p>
                   </a:txBody>
                   <a:tcPr marL="10559" marR="10559" marT="10559" marB="10559" anchor="ctr">
@@ -5933,13 +5487,20 @@
                     <a:bodyPr/>
                     <a:lstStyle/>
                     <a:p>
-                      <a:r>
-                        <a:rPr lang="en-US" sz="3200">
+                      <a:pPr algn="ctr"/>
+                      <a:r>
+                        <a:rPr lang="en-US" sz="3200" b="0">
                           <a:effectLst/>
-                          <a:latin typeface="Cambria" panose="02040503050406030204" pitchFamily="18" charset="0"/>
+                          <a:latin typeface="Arial" panose="020B0604020202090204" pitchFamily="34" charset="0"/>
+                          <a:cs typeface="Arial" panose="020B0604020202090204" pitchFamily="34" charset="0"/>
                         </a:rPr>
                         <a:t>62.54 (12.22)</a:t>
                       </a:r>
+                      <a:endParaRPr lang="en-US" sz="3200" b="0">
+                        <a:effectLst/>
+                        <a:latin typeface="Arial" panose="020B0604020202090204" pitchFamily="34" charset="0"/>
+                        <a:cs typeface="Arial" panose="020B0604020202090204" pitchFamily="34" charset="0"/>
+                      </a:endParaRPr>
                     </a:p>
                   </a:txBody>
                   <a:tcPr marL="10559" marR="10559" marT="10559" marB="10559" anchor="ctr">
@@ -5987,13 +5548,36 @@
                     <a:bodyPr/>
                     <a:lstStyle/>
                     <a:p>
-                      <a:r>
-                        <a:rPr lang="en-US" sz="3200">
+                      <a:pPr algn="ctr"/>
+                      <a:r>
+                        <a:rPr lang="en-US" sz="3200" b="0">
                           <a:effectLst/>
-                          <a:latin typeface="Cambria" panose="02040503050406030204" pitchFamily="18" charset="0"/>
-                        </a:rPr>
-                        <a:t>66.64 (11.71)</a:t>
-                      </a:r>
+                          <a:latin typeface="Arial" panose="020B0604020202090204" pitchFamily="34" charset="0"/>
+                          <a:cs typeface="Arial" panose="020B0604020202090204" pitchFamily="34" charset="0"/>
+                        </a:rPr>
+                        <a:t>66.64 </a:t>
+                      </a:r>
+                      <a:endParaRPr lang="en-US" sz="3200" b="0">
+                        <a:effectLst/>
+                        <a:latin typeface="Arial" panose="020B0604020202090204" pitchFamily="34" charset="0"/>
+                        <a:cs typeface="Arial" panose="020B0604020202090204" pitchFamily="34" charset="0"/>
+                      </a:endParaRPr>
+                    </a:p>
+                    <a:p>
+                      <a:pPr algn="ctr"/>
+                      <a:r>
+                        <a:rPr lang="en-US" sz="3200" b="0">
+                          <a:effectLst/>
+                          <a:latin typeface="Arial" panose="020B0604020202090204" pitchFamily="34" charset="0"/>
+                          <a:cs typeface="Arial" panose="020B0604020202090204" pitchFamily="34" charset="0"/>
+                        </a:rPr>
+                        <a:t>(11.71)</a:t>
+                      </a:r>
+                      <a:endParaRPr lang="en-US" sz="3200" b="0">
+                        <a:effectLst/>
+                        <a:latin typeface="Arial" panose="020B0604020202090204" pitchFamily="34" charset="0"/>
+                        <a:cs typeface="Arial" panose="020B0604020202090204" pitchFamily="34" charset="0"/>
+                      </a:endParaRPr>
                     </a:p>
                   </a:txBody>
                   <a:tcPr marL="10559" marR="10559" marT="10559" marB="10559" anchor="ctr">
@@ -6036,11 +5620,6 @@
                     <a:noFill/>
                   </a:tcPr>
                 </a:tc>
-                <a:extLst>
-                  <a:ext uri="{0D108BD9-81ED-4DB2-BD59-A6C34878D82A}">
-                    <a16:rowId xmlns:a16="http://schemas.microsoft.com/office/drawing/2014/main" val="629620280"/>
-                  </a:ext>
-                </a:extLst>
               </a:tr>
               <a:tr h="979000">
                 <a:tc>
@@ -6048,17 +5627,26 @@
                     <a:bodyPr/>
                     <a:lstStyle/>
                     <a:p>
-                      <a:pPr algn="r" fontAlgn="ctr"/>
-                      <a:r>
-                        <a:rPr lang="en-US" sz="3200" b="1" dirty="0">
+                      <a:pPr algn="ctr" fontAlgn="ctr"/>
+                      <a:r>
+                        <a:rPr lang="en-US" sz="3200" b="0" dirty="0">
                           <a:solidFill>
                             <a:srgbClr val="000000"/>
                           </a:solidFill>
                           <a:effectLst/>
-                          <a:latin typeface="Cambria" panose="02040503050406030204" pitchFamily="18" charset="0"/>
+                          <a:latin typeface="Arial" panose="020B0604020202090204" pitchFamily="34" charset="0"/>
+                          <a:cs typeface="Arial" panose="020B0604020202090204" pitchFamily="34" charset="0"/>
                         </a:rPr>
                         <a:t>Number of Males</a:t>
                       </a:r>
+                      <a:endParaRPr lang="en-US" sz="3200" b="0" dirty="0">
+                        <a:solidFill>
+                          <a:srgbClr val="000000"/>
+                        </a:solidFill>
+                        <a:effectLst/>
+                        <a:latin typeface="Arial" panose="020B0604020202090204" pitchFamily="34" charset="0"/>
+                        <a:cs typeface="Arial" panose="020B0604020202090204" pitchFamily="34" charset="0"/>
+                      </a:endParaRPr>
                     </a:p>
                   </a:txBody>
                   <a:tcPr marL="10559" marR="10559" marT="5279" marB="5279" anchor="ctr">
@@ -6099,7 +5687,9 @@
                       <a:tailEnd type="none" w="med" len="med"/>
                     </a:lnB>
                     <a:solidFill>
-                      <a:srgbClr val="F4F4F4"/>
+                      <a:schemeClr val="bg2">
+                        <a:lumMod val="90000"/>
+                      </a:schemeClr>
                     </a:solidFill>
                   </a:tcPr>
                 </a:tc>
@@ -6108,13 +5698,20 @@
                     <a:bodyPr/>
                     <a:lstStyle/>
                     <a:p>
-                      <a:r>
-                        <a:rPr lang="en-US" sz="3200" dirty="0">
+                      <a:pPr algn="ctr"/>
+                      <a:r>
+                        <a:rPr lang="en-US" sz="3200" b="0" dirty="0">
                           <a:effectLst/>
-                          <a:latin typeface="Cambria" panose="02040503050406030204" pitchFamily="18" charset="0"/>
+                          <a:latin typeface="Arial" panose="020B0604020202090204" pitchFamily="34" charset="0"/>
+                          <a:cs typeface="Arial" panose="020B0604020202090204" pitchFamily="34" charset="0"/>
                         </a:rPr>
                         <a:t>1804 (50.9%)</a:t>
                       </a:r>
+                      <a:endParaRPr lang="en-US" sz="3200" b="0" dirty="0">
+                        <a:effectLst/>
+                        <a:latin typeface="Arial" panose="020B0604020202090204" pitchFamily="34" charset="0"/>
+                        <a:cs typeface="Arial" panose="020B0604020202090204" pitchFamily="34" charset="0"/>
+                      </a:endParaRPr>
                     </a:p>
                   </a:txBody>
                   <a:tcPr marL="10559" marR="10559" marT="10559" marB="10559" anchor="ctr">
@@ -6162,13 +5759,20 @@
                     <a:bodyPr/>
                     <a:lstStyle/>
                     <a:p>
-                      <a:r>
-                        <a:rPr lang="en-US" sz="3200" dirty="0">
+                      <a:pPr algn="ctr"/>
+                      <a:r>
+                        <a:rPr lang="en-US" sz="3200" b="0" dirty="0">
                           <a:effectLst/>
-                          <a:latin typeface="Cambria" panose="02040503050406030204" pitchFamily="18" charset="0"/>
+                          <a:latin typeface="Arial" panose="020B0604020202090204" pitchFamily="34" charset="0"/>
+                          <a:cs typeface="Arial" panose="020B0604020202090204" pitchFamily="34" charset="0"/>
                         </a:rPr>
                         <a:t>1612 (56.5%)</a:t>
                       </a:r>
+                      <a:endParaRPr lang="en-US" sz="3200" b="0" dirty="0">
+                        <a:effectLst/>
+                        <a:latin typeface="Arial" panose="020B0604020202090204" pitchFamily="34" charset="0"/>
+                        <a:cs typeface="Arial" panose="020B0604020202090204" pitchFamily="34" charset="0"/>
+                      </a:endParaRPr>
                     </a:p>
                   </a:txBody>
                   <a:tcPr marL="10559" marR="10559" marT="10559" marB="10559" anchor="ctr">
@@ -6216,13 +5820,36 @@
                     <a:bodyPr/>
                     <a:lstStyle/>
                     <a:p>
-                      <a:r>
-                        <a:rPr lang="en-US" sz="3200" dirty="0">
+                      <a:pPr algn="ctr"/>
+                      <a:r>
+                        <a:rPr lang="en-US" sz="3200" b="0" dirty="0">
                           <a:effectLst/>
-                          <a:latin typeface="Cambria" panose="02040503050406030204" pitchFamily="18" charset="0"/>
-                        </a:rPr>
-                        <a:t>181 (44.1%)</a:t>
-                      </a:r>
+                          <a:latin typeface="Arial" panose="020B0604020202090204" pitchFamily="34" charset="0"/>
+                          <a:cs typeface="Arial" panose="020B0604020202090204" pitchFamily="34" charset="0"/>
+                        </a:rPr>
+                        <a:t>181</a:t>
+                      </a:r>
+                      <a:endParaRPr lang="en-US" sz="3200" b="0" dirty="0">
+                        <a:effectLst/>
+                        <a:latin typeface="Arial" panose="020B0604020202090204" pitchFamily="34" charset="0"/>
+                        <a:cs typeface="Arial" panose="020B0604020202090204" pitchFamily="34" charset="0"/>
+                      </a:endParaRPr>
+                    </a:p>
+                    <a:p>
+                      <a:pPr algn="ctr"/>
+                      <a:r>
+                        <a:rPr lang="en-US" sz="3200" b="0" dirty="0">
+                          <a:effectLst/>
+                          <a:latin typeface="Arial" panose="020B0604020202090204" pitchFamily="34" charset="0"/>
+                          <a:cs typeface="Arial" panose="020B0604020202090204" pitchFamily="34" charset="0"/>
+                        </a:rPr>
+                        <a:t>(44.1%)</a:t>
+                      </a:r>
+                      <a:endParaRPr lang="en-US" sz="3200" b="0" dirty="0">
+                        <a:effectLst/>
+                        <a:latin typeface="Arial" panose="020B0604020202090204" pitchFamily="34" charset="0"/>
+                        <a:cs typeface="Arial" panose="020B0604020202090204" pitchFamily="34" charset="0"/>
+                      </a:endParaRPr>
                     </a:p>
                   </a:txBody>
                   <a:tcPr marL="10559" marR="10559" marT="10559" marB="10559" anchor="ctr">
@@ -6270,13 +5897,36 @@
                     <a:bodyPr/>
                     <a:lstStyle/>
                     <a:p>
-                      <a:r>
-                        <a:rPr lang="en-US" sz="3200" dirty="0">
+                      <a:pPr algn="ctr"/>
+                      <a:r>
+                        <a:rPr lang="en-US" sz="3200" b="0" dirty="0">
                           <a:effectLst/>
-                          <a:latin typeface="Cambria" panose="02040503050406030204" pitchFamily="18" charset="0"/>
-                        </a:rPr>
-                        <a:t>78 (45.6%)</a:t>
-                      </a:r>
+                          <a:latin typeface="Arial" panose="020B0604020202090204" pitchFamily="34" charset="0"/>
+                          <a:cs typeface="Arial" panose="020B0604020202090204" pitchFamily="34" charset="0"/>
+                        </a:rPr>
+                        <a:t>78</a:t>
+                      </a:r>
+                      <a:endParaRPr lang="en-US" sz="3200" b="0" dirty="0">
+                        <a:effectLst/>
+                        <a:latin typeface="Arial" panose="020B0604020202090204" pitchFamily="34" charset="0"/>
+                        <a:cs typeface="Arial" panose="020B0604020202090204" pitchFamily="34" charset="0"/>
+                      </a:endParaRPr>
+                    </a:p>
+                    <a:p>
+                      <a:pPr algn="ctr"/>
+                      <a:r>
+                        <a:rPr lang="en-US" sz="3200" b="0" dirty="0">
+                          <a:effectLst/>
+                          <a:latin typeface="Arial" panose="020B0604020202090204" pitchFamily="34" charset="0"/>
+                          <a:cs typeface="Arial" panose="020B0604020202090204" pitchFamily="34" charset="0"/>
+                        </a:rPr>
+                        <a:t>(45.6%)</a:t>
+                      </a:r>
+                      <a:endParaRPr lang="en-US" sz="3200" b="0" dirty="0">
+                        <a:effectLst/>
+                        <a:latin typeface="Arial" panose="020B0604020202090204" pitchFamily="34" charset="0"/>
+                        <a:cs typeface="Arial" panose="020B0604020202090204" pitchFamily="34" charset="0"/>
+                      </a:endParaRPr>
                     </a:p>
                   </a:txBody>
                   <a:tcPr marL="10559" marR="10559" marT="10559" marB="10559" anchor="ctr">
@@ -6319,29 +5969,33 @@
                     <a:noFill/>
                   </a:tcPr>
                 </a:tc>
-                <a:extLst>
-                  <a:ext uri="{0D108BD9-81ED-4DB2-BD59-A6C34878D82A}">
-                    <a16:rowId xmlns:a16="http://schemas.microsoft.com/office/drawing/2014/main" val="4188399457"/>
-                  </a:ext>
-                </a:extLst>
               </a:tr>
-              <a:tr h="1105282">
+              <a:tr h="691515">
                 <a:tc>
                   <a:txBody>
                     <a:bodyPr/>
                     <a:lstStyle/>
                     <a:p>
-                      <a:pPr algn="r" fontAlgn="ctr"/>
-                      <a:r>
-                        <a:rPr lang="en-US" sz="3200" b="1" dirty="0">
+                      <a:pPr algn="ctr" fontAlgn="ctr"/>
+                      <a:r>
+                        <a:rPr lang="en-US" sz="3200" b="0" dirty="0">
                           <a:solidFill>
                             <a:srgbClr val="000000"/>
                           </a:solidFill>
                           <a:effectLst/>
-                          <a:latin typeface="Cambria" panose="02040503050406030204" pitchFamily="18" charset="0"/>
+                          <a:latin typeface="Arial" panose="020B0604020202090204" pitchFamily="34" charset="0"/>
+                          <a:cs typeface="Arial" panose="020B0604020202090204" pitchFamily="34" charset="0"/>
                         </a:rPr>
                         <a:t>Disease Duration</a:t>
                       </a:r>
+                      <a:endParaRPr lang="en-US" sz="3200" b="0" dirty="0">
+                        <a:solidFill>
+                          <a:srgbClr val="000000"/>
+                        </a:solidFill>
+                        <a:effectLst/>
+                        <a:latin typeface="Arial" panose="020B0604020202090204" pitchFamily="34" charset="0"/>
+                        <a:cs typeface="Arial" panose="020B0604020202090204" pitchFamily="34" charset="0"/>
+                      </a:endParaRPr>
                     </a:p>
                   </a:txBody>
                   <a:tcPr marL="10559" marR="10559" marT="5279" marB="5279" anchor="ctr">
@@ -6382,7 +6036,9 @@
                       <a:tailEnd type="none" w="med" len="med"/>
                     </a:lnB>
                     <a:solidFill>
-                      <a:srgbClr val="F4F4F4"/>
+                      <a:schemeClr val="bg2">
+                        <a:lumMod val="90000"/>
+                      </a:schemeClr>
                     </a:solidFill>
                   </a:tcPr>
                 </a:tc>
@@ -6391,13 +6047,36 @@
                     <a:bodyPr/>
                     <a:lstStyle/>
                     <a:p>
-                      <a:r>
-                        <a:rPr lang="en-US" sz="3200" dirty="0">
+                      <a:pPr algn="ctr"/>
+                      <a:r>
+                        <a:rPr lang="en-US" sz="3200" b="0" dirty="0">
                           <a:effectLst/>
-                          <a:latin typeface="Cambria" panose="02040503050406030204" pitchFamily="18" charset="0"/>
-                        </a:rPr>
-                        <a:t>9.64 (6.01)</a:t>
-                      </a:r>
+                          <a:latin typeface="Arial" panose="020B0604020202090204" pitchFamily="34" charset="0"/>
+                          <a:cs typeface="Arial" panose="020B0604020202090204" pitchFamily="34" charset="0"/>
+                        </a:rPr>
+                        <a:t>9.64</a:t>
+                      </a:r>
+                      <a:endParaRPr lang="en-US" sz="3200" b="0" dirty="0">
+                        <a:effectLst/>
+                        <a:latin typeface="Arial" panose="020B0604020202090204" pitchFamily="34" charset="0"/>
+                        <a:cs typeface="Arial" panose="020B0604020202090204" pitchFamily="34" charset="0"/>
+                      </a:endParaRPr>
+                    </a:p>
+                    <a:p>
+                      <a:pPr algn="ctr"/>
+                      <a:r>
+                        <a:rPr lang="en-US" sz="3200" b="0" dirty="0">
+                          <a:effectLst/>
+                          <a:latin typeface="Arial" panose="020B0604020202090204" pitchFamily="34" charset="0"/>
+                          <a:cs typeface="Arial" panose="020B0604020202090204" pitchFamily="34" charset="0"/>
+                        </a:rPr>
+                        <a:t>(6.01)</a:t>
+                      </a:r>
+                      <a:endParaRPr lang="en-US" sz="3200" b="0" dirty="0">
+                        <a:effectLst/>
+                        <a:latin typeface="Arial" panose="020B0604020202090204" pitchFamily="34" charset="0"/>
+                        <a:cs typeface="Arial" panose="020B0604020202090204" pitchFamily="34" charset="0"/>
+                      </a:endParaRPr>
                     </a:p>
                   </a:txBody>
                   <a:tcPr marL="10559" marR="10559" marT="10559" marB="10559" anchor="ctr">
@@ -6445,13 +6124,36 @@
                     <a:bodyPr/>
                     <a:lstStyle/>
                     <a:p>
-                      <a:r>
-                        <a:rPr lang="en-US" sz="3200">
+                      <a:pPr algn="ctr"/>
+                      <a:r>
+                        <a:rPr lang="en-US" sz="3200" b="0">
                           <a:effectLst/>
-                          <a:latin typeface="Cambria" panose="02040503050406030204" pitchFamily="18" charset="0"/>
-                        </a:rPr>
-                        <a:t>9.83 (5.98)</a:t>
-                      </a:r>
+                          <a:latin typeface="Arial" panose="020B0604020202090204" pitchFamily="34" charset="0"/>
+                          <a:cs typeface="Arial" panose="020B0604020202090204" pitchFamily="34" charset="0"/>
+                        </a:rPr>
+                        <a:t>9.83</a:t>
+                      </a:r>
+                      <a:endParaRPr lang="en-US" sz="3200" b="0">
+                        <a:effectLst/>
+                        <a:latin typeface="Arial" panose="020B0604020202090204" pitchFamily="34" charset="0"/>
+                        <a:cs typeface="Arial" panose="020B0604020202090204" pitchFamily="34" charset="0"/>
+                      </a:endParaRPr>
+                    </a:p>
+                    <a:p>
+                      <a:pPr algn="ctr"/>
+                      <a:r>
+                        <a:rPr lang="en-US" sz="3200" b="0">
+                          <a:effectLst/>
+                          <a:latin typeface="Arial" panose="020B0604020202090204" pitchFamily="34" charset="0"/>
+                          <a:cs typeface="Arial" panose="020B0604020202090204" pitchFamily="34" charset="0"/>
+                        </a:rPr>
+                        <a:t>(5.98)</a:t>
+                      </a:r>
+                      <a:endParaRPr lang="en-US" sz="3200" b="0">
+                        <a:effectLst/>
+                        <a:latin typeface="Arial" panose="020B0604020202090204" pitchFamily="34" charset="0"/>
+                        <a:cs typeface="Arial" panose="020B0604020202090204" pitchFamily="34" charset="0"/>
+                      </a:endParaRPr>
                     </a:p>
                   </a:txBody>
                   <a:tcPr marL="10559" marR="10559" marT="10559" marB="10559" anchor="ctr">
@@ -6499,13 +6201,20 @@
                     <a:bodyPr/>
                     <a:lstStyle/>
                     <a:p>
-                      <a:r>
-                        <a:rPr lang="en-US" sz="3200" dirty="0">
+                      <a:pPr algn="ctr"/>
+                      <a:r>
+                        <a:rPr lang="en-US" sz="3200" b="0" dirty="0">
                           <a:effectLst/>
-                          <a:latin typeface="Cambria" panose="02040503050406030204" pitchFamily="18" charset="0"/>
+                          <a:latin typeface="Arial" panose="020B0604020202090204" pitchFamily="34" charset="0"/>
+                          <a:cs typeface="Arial" panose="020B0604020202090204" pitchFamily="34" charset="0"/>
                         </a:rPr>
                         <a:t>---</a:t>
                       </a:r>
+                      <a:endParaRPr lang="en-US" sz="3200" b="0" dirty="0">
+                        <a:effectLst/>
+                        <a:latin typeface="Arial" panose="020B0604020202090204" pitchFamily="34" charset="0"/>
+                        <a:cs typeface="Arial" panose="020B0604020202090204" pitchFamily="34" charset="0"/>
+                      </a:endParaRPr>
                     </a:p>
                   </a:txBody>
                   <a:tcPr marL="10559" marR="10559" marT="10559" marB="10559" anchor="ctr">
@@ -6553,13 +6262,36 @@
                     <a:bodyPr/>
                     <a:lstStyle/>
                     <a:p>
-                      <a:r>
-                        <a:rPr lang="en-US" sz="3200" dirty="0">
+                      <a:pPr algn="ctr"/>
+                      <a:r>
+                        <a:rPr lang="en-US" sz="3200" b="0" dirty="0">
                           <a:effectLst/>
-                          <a:latin typeface="Cambria" panose="02040503050406030204" pitchFamily="18" charset="0"/>
-                        </a:rPr>
-                        <a:t>6.05 (5.50)</a:t>
-                      </a:r>
+                          <a:latin typeface="Arial" panose="020B0604020202090204" pitchFamily="34" charset="0"/>
+                          <a:cs typeface="Arial" panose="020B0604020202090204" pitchFamily="34" charset="0"/>
+                        </a:rPr>
+                        <a:t>6.05</a:t>
+                      </a:r>
+                      <a:endParaRPr lang="en-US" sz="3200" b="0" dirty="0">
+                        <a:effectLst/>
+                        <a:latin typeface="Arial" panose="020B0604020202090204" pitchFamily="34" charset="0"/>
+                        <a:cs typeface="Arial" panose="020B0604020202090204" pitchFamily="34" charset="0"/>
+                      </a:endParaRPr>
+                    </a:p>
+                    <a:p>
+                      <a:pPr algn="ctr"/>
+                      <a:r>
+                        <a:rPr lang="en-US" sz="3200" b="0" dirty="0">
+                          <a:effectLst/>
+                          <a:latin typeface="Arial" panose="020B0604020202090204" pitchFamily="34" charset="0"/>
+                          <a:cs typeface="Arial" panose="020B0604020202090204" pitchFamily="34" charset="0"/>
+                        </a:rPr>
+                        <a:t>(5.50)</a:t>
+                      </a:r>
+                      <a:endParaRPr lang="en-US" sz="3200" b="0" dirty="0">
+                        <a:effectLst/>
+                        <a:latin typeface="Arial" panose="020B0604020202090204" pitchFamily="34" charset="0"/>
+                        <a:cs typeface="Arial" panose="020B0604020202090204" pitchFamily="34" charset="0"/>
+                      </a:endParaRPr>
                     </a:p>
                   </a:txBody>
                   <a:tcPr marL="10559" marR="10559" marT="10559" marB="10559" anchor="ctr">
@@ -6602,11 +6334,6 @@
                     <a:noFill/>
                   </a:tcPr>
                 </a:tc>
-                <a:extLst>
-                  <a:ext uri="{0D108BD9-81ED-4DB2-BD59-A6C34878D82A}">
-                    <a16:rowId xmlns:a16="http://schemas.microsoft.com/office/drawing/2014/main" val="1189675502"/>
-                  </a:ext>
-                </a:extLst>
               </a:tr>
               <a:tr h="842159">
                 <a:tc>
@@ -6614,17 +6341,26 @@
                     <a:bodyPr/>
                     <a:lstStyle/>
                     <a:p>
-                      <a:pPr algn="r" fontAlgn="ctr"/>
-                      <a:r>
-                        <a:rPr lang="en-US" sz="3200" b="1" dirty="0">
+                      <a:pPr algn="ctr" fontAlgn="ctr"/>
+                      <a:r>
+                        <a:rPr lang="en-US" sz="3200" b="0" dirty="0">
                           <a:solidFill>
                             <a:srgbClr val="000000"/>
                           </a:solidFill>
                           <a:effectLst/>
-                          <a:latin typeface="Cambria" panose="02040503050406030204" pitchFamily="18" charset="0"/>
+                          <a:latin typeface="Arial" panose="020B0604020202090204" pitchFamily="34" charset="0"/>
+                          <a:cs typeface="Arial" panose="020B0604020202090204" pitchFamily="34" charset="0"/>
                         </a:rPr>
                         <a:t>MoCA Score</a:t>
                       </a:r>
+                      <a:endParaRPr lang="en-US" sz="3200" b="0" dirty="0">
+                        <a:solidFill>
+                          <a:srgbClr val="000000"/>
+                        </a:solidFill>
+                        <a:effectLst/>
+                        <a:latin typeface="Arial" panose="020B0604020202090204" pitchFamily="34" charset="0"/>
+                        <a:cs typeface="Arial" panose="020B0604020202090204" pitchFamily="34" charset="0"/>
+                      </a:endParaRPr>
                     </a:p>
                   </a:txBody>
                   <a:tcPr marL="10559" marR="10559" marT="5279" marB="5279" anchor="ctr">
@@ -6665,7 +6401,9 @@
                       <a:tailEnd type="none" w="med" len="med"/>
                     </a:lnB>
                     <a:solidFill>
-                      <a:srgbClr val="F4F4F4"/>
+                      <a:schemeClr val="bg2">
+                        <a:lumMod val="90000"/>
+                      </a:schemeClr>
                     </a:solidFill>
                   </a:tcPr>
                 </a:tc>
@@ -6674,13 +6412,36 @@
                     <a:bodyPr/>
                     <a:lstStyle/>
                     <a:p>
-                      <a:r>
-                        <a:rPr lang="en-US" sz="3200">
+                      <a:pPr algn="ctr"/>
+                      <a:r>
+                        <a:rPr lang="en-US" sz="3200" b="0">
                           <a:effectLst/>
-                          <a:latin typeface="Cambria" panose="02040503050406030204" pitchFamily="18" charset="0"/>
-                        </a:rPr>
-                        <a:t>26.70 (2.71)</a:t>
-                      </a:r>
+                          <a:latin typeface="Arial" panose="020B0604020202090204" pitchFamily="34" charset="0"/>
+                          <a:cs typeface="Arial" panose="020B0604020202090204" pitchFamily="34" charset="0"/>
+                        </a:rPr>
+                        <a:t>26.70 </a:t>
+                      </a:r>
+                      <a:endParaRPr lang="en-US" sz="3200" b="0">
+                        <a:effectLst/>
+                        <a:latin typeface="Arial" panose="020B0604020202090204" pitchFamily="34" charset="0"/>
+                        <a:cs typeface="Arial" panose="020B0604020202090204" pitchFamily="34" charset="0"/>
+                      </a:endParaRPr>
+                    </a:p>
+                    <a:p>
+                      <a:pPr algn="ctr"/>
+                      <a:r>
+                        <a:rPr lang="en-US" sz="3200" b="0">
+                          <a:effectLst/>
+                          <a:latin typeface="Arial" panose="020B0604020202090204" pitchFamily="34" charset="0"/>
+                          <a:cs typeface="Arial" panose="020B0604020202090204" pitchFamily="34" charset="0"/>
+                        </a:rPr>
+                        <a:t>(2.71)</a:t>
+                      </a:r>
+                      <a:endParaRPr lang="en-US" sz="3200" b="0">
+                        <a:effectLst/>
+                        <a:latin typeface="Arial" panose="020B0604020202090204" pitchFamily="34" charset="0"/>
+                        <a:cs typeface="Arial" panose="020B0604020202090204" pitchFamily="34" charset="0"/>
+                      </a:endParaRPr>
                     </a:p>
                   </a:txBody>
                   <a:tcPr marL="10559" marR="10559" marT="10559" marB="10559" anchor="ctr">
@@ -6728,13 +6489,36 @@
                     <a:bodyPr/>
                     <a:lstStyle/>
                     <a:p>
-                      <a:r>
-                        <a:rPr lang="en-US" sz="3200">
+                      <a:pPr algn="ctr"/>
+                      <a:r>
+                        <a:rPr lang="en-US" sz="3200" b="0">
                           <a:effectLst/>
-                          <a:latin typeface="Cambria" panose="02040503050406030204" pitchFamily="18" charset="0"/>
-                        </a:rPr>
-                        <a:t>26.58 (2.53)</a:t>
-                      </a:r>
+                          <a:latin typeface="Arial" panose="020B0604020202090204" pitchFamily="34" charset="0"/>
+                          <a:cs typeface="Arial" panose="020B0604020202090204" pitchFamily="34" charset="0"/>
+                        </a:rPr>
+                        <a:t>26.58 </a:t>
+                      </a:r>
+                      <a:endParaRPr lang="en-US" sz="3200" b="0">
+                        <a:effectLst/>
+                        <a:latin typeface="Arial" panose="020B0604020202090204" pitchFamily="34" charset="0"/>
+                        <a:cs typeface="Arial" panose="020B0604020202090204" pitchFamily="34" charset="0"/>
+                      </a:endParaRPr>
+                    </a:p>
+                    <a:p>
+                      <a:pPr algn="ctr"/>
+                      <a:r>
+                        <a:rPr lang="en-US" sz="3200" b="0">
+                          <a:effectLst/>
+                          <a:latin typeface="Arial" panose="020B0604020202090204" pitchFamily="34" charset="0"/>
+                          <a:cs typeface="Arial" panose="020B0604020202090204" pitchFamily="34" charset="0"/>
+                        </a:rPr>
+                        <a:t>(2.53)</a:t>
+                      </a:r>
+                      <a:endParaRPr lang="en-US" sz="3200" b="0">
+                        <a:effectLst/>
+                        <a:latin typeface="Arial" panose="020B0604020202090204" pitchFamily="34" charset="0"/>
+                        <a:cs typeface="Arial" panose="020B0604020202090204" pitchFamily="34" charset="0"/>
+                      </a:endParaRPr>
                     </a:p>
                   </a:txBody>
                   <a:tcPr marL="10559" marR="10559" marT="10559" marB="10559" anchor="ctr">
@@ -6782,13 +6566,36 @@
                     <a:bodyPr/>
                     <a:lstStyle/>
                     <a:p>
-                      <a:r>
-                        <a:rPr lang="en-US" sz="3200">
+                      <a:pPr algn="ctr"/>
+                      <a:r>
+                        <a:rPr lang="en-US" sz="3200" b="0">
                           <a:effectLst/>
-                          <a:latin typeface="Cambria" panose="02040503050406030204" pitchFamily="18" charset="0"/>
-                        </a:rPr>
-                        <a:t>27.78 (3.15)</a:t>
-                      </a:r>
+                          <a:latin typeface="Arial" panose="020B0604020202090204" pitchFamily="34" charset="0"/>
+                          <a:cs typeface="Arial" panose="020B0604020202090204" pitchFamily="34" charset="0"/>
+                        </a:rPr>
+                        <a:t>27.78 </a:t>
+                      </a:r>
+                      <a:endParaRPr lang="en-US" sz="3200" b="0">
+                        <a:effectLst/>
+                        <a:latin typeface="Arial" panose="020B0604020202090204" pitchFamily="34" charset="0"/>
+                        <a:cs typeface="Arial" panose="020B0604020202090204" pitchFamily="34" charset="0"/>
+                      </a:endParaRPr>
+                    </a:p>
+                    <a:p>
+                      <a:pPr algn="ctr"/>
+                      <a:r>
+                        <a:rPr lang="en-US" sz="3200" b="0">
+                          <a:effectLst/>
+                          <a:latin typeface="Arial" panose="020B0604020202090204" pitchFamily="34" charset="0"/>
+                          <a:cs typeface="Arial" panose="020B0604020202090204" pitchFamily="34" charset="0"/>
+                        </a:rPr>
+                        <a:t>(3.15)</a:t>
+                      </a:r>
+                      <a:endParaRPr lang="en-US" sz="3200" b="0">
+                        <a:effectLst/>
+                        <a:latin typeface="Arial" panose="020B0604020202090204" pitchFamily="34" charset="0"/>
+                        <a:cs typeface="Arial" panose="020B0604020202090204" pitchFamily="34" charset="0"/>
+                      </a:endParaRPr>
                     </a:p>
                   </a:txBody>
                   <a:tcPr marL="10559" marR="10559" marT="10559" marB="10559" anchor="ctr">
@@ -6836,13 +6643,36 @@
                     <a:bodyPr/>
                     <a:lstStyle/>
                     <a:p>
-                      <a:r>
-                        <a:rPr lang="en-US" sz="3200">
+                      <a:pPr algn="ctr"/>
+                      <a:r>
+                        <a:rPr lang="en-US" sz="3200" b="0">
                           <a:effectLst/>
-                          <a:latin typeface="Cambria" panose="02040503050406030204" pitchFamily="18" charset="0"/>
-                        </a:rPr>
-                        <a:t>22.00 (nan)</a:t>
-                      </a:r>
+                          <a:latin typeface="Arial" panose="020B0604020202090204" pitchFamily="34" charset="0"/>
+                          <a:cs typeface="Arial" panose="020B0604020202090204" pitchFamily="34" charset="0"/>
+                        </a:rPr>
+                        <a:t>22.00 </a:t>
+                      </a:r>
+                      <a:endParaRPr lang="en-US" sz="3200" b="0">
+                        <a:effectLst/>
+                        <a:latin typeface="Arial" panose="020B0604020202090204" pitchFamily="34" charset="0"/>
+                        <a:cs typeface="Arial" panose="020B0604020202090204" pitchFamily="34" charset="0"/>
+                      </a:endParaRPr>
+                    </a:p>
+                    <a:p>
+                      <a:pPr algn="ctr"/>
+                      <a:r>
+                        <a:rPr lang="en-US" sz="3200" b="0">
+                          <a:effectLst/>
+                          <a:latin typeface="Arial" panose="020B0604020202090204" pitchFamily="34" charset="0"/>
+                          <a:cs typeface="Arial" panose="020B0604020202090204" pitchFamily="34" charset="0"/>
+                        </a:rPr>
+                        <a:t>(nan)</a:t>
+                      </a:r>
+                      <a:endParaRPr lang="en-US" sz="3200" b="0">
+                        <a:effectLst/>
+                        <a:latin typeface="Arial" panose="020B0604020202090204" pitchFamily="34" charset="0"/>
+                        <a:cs typeface="Arial" panose="020B0604020202090204" pitchFamily="34" charset="0"/>
+                      </a:endParaRPr>
                     </a:p>
                   </a:txBody>
                   <a:tcPr marL="10559" marR="10559" marT="10559" marB="10559" anchor="ctr">
@@ -6885,11 +6715,6 @@
                     <a:noFill/>
                   </a:tcPr>
                 </a:tc>
-                <a:extLst>
-                  <a:ext uri="{0D108BD9-81ED-4DB2-BD59-A6C34878D82A}">
-                    <a16:rowId xmlns:a16="http://schemas.microsoft.com/office/drawing/2014/main" val="1668567550"/>
-                  </a:ext>
-                </a:extLst>
               </a:tr>
               <a:tr h="979000">
                 <a:tc>
@@ -6897,17 +6722,26 @@
                     <a:bodyPr/>
                     <a:lstStyle/>
                     <a:p>
-                      <a:pPr algn="r" fontAlgn="ctr"/>
-                      <a:r>
-                        <a:rPr lang="en-US" sz="3200" b="1" dirty="0">
+                      <a:pPr algn="ctr" fontAlgn="ctr"/>
+                      <a:r>
+                        <a:rPr lang="en-US" sz="3200" b="0" dirty="0">
                           <a:solidFill>
                             <a:srgbClr val="000000"/>
                           </a:solidFill>
                           <a:effectLst/>
-                          <a:latin typeface="Cambria" panose="02040503050406030204" pitchFamily="18" charset="0"/>
+                          <a:latin typeface="Arial" panose="020B0604020202090204" pitchFamily="34" charset="0"/>
+                          <a:cs typeface="Arial" panose="020B0604020202090204" pitchFamily="34" charset="0"/>
                         </a:rPr>
                         <a:t>BDI Score</a:t>
                       </a:r>
+                      <a:endParaRPr lang="en-US" sz="3200" b="0" dirty="0">
+                        <a:solidFill>
+                          <a:srgbClr val="000000"/>
+                        </a:solidFill>
+                        <a:effectLst/>
+                        <a:latin typeface="Arial" panose="020B0604020202090204" pitchFamily="34" charset="0"/>
+                        <a:cs typeface="Arial" panose="020B0604020202090204" pitchFamily="34" charset="0"/>
+                      </a:endParaRPr>
                     </a:p>
                   </a:txBody>
                   <a:tcPr marL="10559" marR="10559" marT="5279" marB="5279" anchor="ctr">
@@ -6948,7 +6782,9 @@
                       <a:tailEnd type="none" w="med" len="med"/>
                     </a:lnB>
                     <a:solidFill>
-                      <a:srgbClr val="F4F4F4"/>
+                      <a:schemeClr val="bg2">
+                        <a:lumMod val="90000"/>
+                      </a:schemeClr>
                     </a:solidFill>
                   </a:tcPr>
                 </a:tc>
@@ -6957,13 +6793,36 @@
                     <a:bodyPr/>
                     <a:lstStyle/>
                     <a:p>
-                      <a:r>
-                        <a:rPr lang="en-US" sz="3200" dirty="0">
+                      <a:pPr algn="ctr"/>
+                      <a:r>
+                        <a:rPr lang="en-US" sz="3200" b="0" dirty="0">
                           <a:effectLst/>
-                          <a:latin typeface="Cambria" panose="02040503050406030204" pitchFamily="18" charset="0"/>
-                        </a:rPr>
-                        <a:t>9.65 (7.53)</a:t>
-                      </a:r>
+                          <a:latin typeface="Arial" panose="020B0604020202090204" pitchFamily="34" charset="0"/>
+                          <a:cs typeface="Arial" panose="020B0604020202090204" pitchFamily="34" charset="0"/>
+                        </a:rPr>
+                        <a:t>9.65 </a:t>
+                      </a:r>
+                      <a:endParaRPr lang="en-US" sz="3200" b="0" dirty="0">
+                        <a:effectLst/>
+                        <a:latin typeface="Arial" panose="020B0604020202090204" pitchFamily="34" charset="0"/>
+                        <a:cs typeface="Arial" panose="020B0604020202090204" pitchFamily="34" charset="0"/>
+                      </a:endParaRPr>
+                    </a:p>
+                    <a:p>
+                      <a:pPr algn="ctr"/>
+                      <a:r>
+                        <a:rPr lang="en-US" sz="3200" b="0" dirty="0">
+                          <a:effectLst/>
+                          <a:latin typeface="Arial" panose="020B0604020202090204" pitchFamily="34" charset="0"/>
+                          <a:cs typeface="Arial" panose="020B0604020202090204" pitchFamily="34" charset="0"/>
+                        </a:rPr>
+                        <a:t>(7.53)</a:t>
+                      </a:r>
+                      <a:endParaRPr lang="en-US" sz="3200" b="0" dirty="0">
+                        <a:effectLst/>
+                        <a:latin typeface="Arial" panose="020B0604020202090204" pitchFamily="34" charset="0"/>
+                        <a:cs typeface="Arial" panose="020B0604020202090204" pitchFamily="34" charset="0"/>
+                      </a:endParaRPr>
                     </a:p>
                   </a:txBody>
                   <a:tcPr marL="10559" marR="10559" marT="10559" marB="10559" anchor="ctr">
@@ -7011,13 +6870,36 @@
                     <a:bodyPr/>
                     <a:lstStyle/>
                     <a:p>
-                      <a:r>
-                        <a:rPr lang="en-US" sz="3200" dirty="0">
+                      <a:pPr algn="ctr"/>
+                      <a:r>
+                        <a:rPr lang="en-US" sz="3200" b="0" dirty="0">
                           <a:effectLst/>
-                          <a:latin typeface="Cambria" panose="02040503050406030204" pitchFamily="18" charset="0"/>
-                        </a:rPr>
-                        <a:t>9.66 (7.35)</a:t>
-                      </a:r>
+                          <a:latin typeface="Arial" panose="020B0604020202090204" pitchFamily="34" charset="0"/>
+                          <a:cs typeface="Arial" panose="020B0604020202090204" pitchFamily="34" charset="0"/>
+                        </a:rPr>
+                        <a:t>9.66 </a:t>
+                      </a:r>
+                      <a:endParaRPr lang="en-US" sz="3200" b="0" dirty="0">
+                        <a:effectLst/>
+                        <a:latin typeface="Arial" panose="020B0604020202090204" pitchFamily="34" charset="0"/>
+                        <a:cs typeface="Arial" panose="020B0604020202090204" pitchFamily="34" charset="0"/>
+                      </a:endParaRPr>
+                    </a:p>
+                    <a:p>
+                      <a:pPr algn="ctr"/>
+                      <a:r>
+                        <a:rPr lang="en-US" sz="3200" b="0" dirty="0">
+                          <a:effectLst/>
+                          <a:latin typeface="Arial" panose="020B0604020202090204" pitchFamily="34" charset="0"/>
+                          <a:cs typeface="Arial" panose="020B0604020202090204" pitchFamily="34" charset="0"/>
+                        </a:rPr>
+                        <a:t>(7.35)</a:t>
+                      </a:r>
+                      <a:endParaRPr lang="en-US" sz="3200" b="0" dirty="0">
+                        <a:effectLst/>
+                        <a:latin typeface="Arial" panose="020B0604020202090204" pitchFamily="34" charset="0"/>
+                        <a:cs typeface="Arial" panose="020B0604020202090204" pitchFamily="34" charset="0"/>
+                      </a:endParaRPr>
                     </a:p>
                   </a:txBody>
                   <a:tcPr marL="10559" marR="10559" marT="10559" marB="10559" anchor="ctr">
@@ -7065,13 +6947,36 @@
                     <a:bodyPr/>
                     <a:lstStyle/>
                     <a:p>
-                      <a:r>
-                        <a:rPr lang="en-US" sz="3200">
+                      <a:pPr algn="ctr"/>
+                      <a:r>
+                        <a:rPr lang="en-US" sz="3200" b="0">
                           <a:effectLst/>
-                          <a:latin typeface="Cambria" panose="02040503050406030204" pitchFamily="18" charset="0"/>
-                        </a:rPr>
-                        <a:t>6.24 (5.93)</a:t>
-                      </a:r>
+                          <a:latin typeface="Arial" panose="020B0604020202090204" pitchFamily="34" charset="0"/>
+                          <a:cs typeface="Arial" panose="020B0604020202090204" pitchFamily="34" charset="0"/>
+                        </a:rPr>
+                        <a:t>6.24 </a:t>
+                      </a:r>
+                      <a:endParaRPr lang="en-US" sz="3200" b="0">
+                        <a:effectLst/>
+                        <a:latin typeface="Arial" panose="020B0604020202090204" pitchFamily="34" charset="0"/>
+                        <a:cs typeface="Arial" panose="020B0604020202090204" pitchFamily="34" charset="0"/>
+                      </a:endParaRPr>
+                    </a:p>
+                    <a:p>
+                      <a:pPr algn="ctr"/>
+                      <a:r>
+                        <a:rPr lang="en-US" sz="3200" b="0">
+                          <a:effectLst/>
+                          <a:latin typeface="Arial" panose="020B0604020202090204" pitchFamily="34" charset="0"/>
+                          <a:cs typeface="Arial" panose="020B0604020202090204" pitchFamily="34" charset="0"/>
+                        </a:rPr>
+                        <a:t>(5.93)</a:t>
+                      </a:r>
+                      <a:endParaRPr lang="en-US" sz="3200" b="0">
+                        <a:effectLst/>
+                        <a:latin typeface="Arial" panose="020B0604020202090204" pitchFamily="34" charset="0"/>
+                        <a:cs typeface="Arial" panose="020B0604020202090204" pitchFamily="34" charset="0"/>
+                      </a:endParaRPr>
                     </a:p>
                   </a:txBody>
                   <a:tcPr marL="10559" marR="10559" marT="10559" marB="10559" anchor="ctr">
@@ -7119,13 +7024,20 @@
                     <a:bodyPr/>
                     <a:lstStyle/>
                     <a:p>
-                      <a:r>
-                        <a:rPr lang="en-US" sz="3200">
+                      <a:pPr algn="ctr"/>
+                      <a:r>
+                        <a:rPr lang="en-US" sz="3200" b="0">
                           <a:effectLst/>
-                          <a:latin typeface="Cambria" panose="02040503050406030204" pitchFamily="18" charset="0"/>
+                          <a:latin typeface="Arial" panose="020B0604020202090204" pitchFamily="34" charset="0"/>
+                          <a:cs typeface="Arial" panose="020B0604020202090204" pitchFamily="34" charset="0"/>
                         </a:rPr>
                         <a:t>16.76 (10.45)</a:t>
                       </a:r>
+                      <a:endParaRPr lang="en-US" sz="3200" b="0">
+                        <a:effectLst/>
+                        <a:latin typeface="Arial" panose="020B0604020202090204" pitchFamily="34" charset="0"/>
+                        <a:cs typeface="Arial" panose="020B0604020202090204" pitchFamily="34" charset="0"/>
+                      </a:endParaRPr>
                     </a:p>
                   </a:txBody>
                   <a:tcPr marL="10559" marR="10559" marT="10559" marB="10559" anchor="ctr">
@@ -7168,11 +7080,6 @@
                     <a:noFill/>
                   </a:tcPr>
                 </a:tc>
-                <a:extLst>
-                  <a:ext uri="{0D108BD9-81ED-4DB2-BD59-A6C34878D82A}">
-                    <a16:rowId xmlns:a16="http://schemas.microsoft.com/office/drawing/2014/main" val="627051941"/>
-                  </a:ext>
-                </a:extLst>
               </a:tr>
               <a:tr h="705319">
                 <a:tc>
@@ -7180,17 +7087,26 @@
                     <a:bodyPr/>
                     <a:lstStyle/>
                     <a:p>
-                      <a:pPr algn="r" fontAlgn="ctr"/>
-                      <a:r>
-                        <a:rPr lang="en-US" sz="3200" b="1" dirty="0">
+                      <a:pPr algn="ctr" fontAlgn="ctr"/>
+                      <a:r>
+                        <a:rPr lang="en-US" sz="3200" b="0" dirty="0">
                           <a:solidFill>
                             <a:srgbClr val="000000"/>
                           </a:solidFill>
                           <a:effectLst/>
-                          <a:latin typeface="Cambria" panose="02040503050406030204" pitchFamily="18" charset="0"/>
+                          <a:latin typeface="Arial" panose="020B0604020202090204" pitchFamily="34" charset="0"/>
+                          <a:cs typeface="Arial" panose="020B0604020202090204" pitchFamily="34" charset="0"/>
                         </a:rPr>
                         <a:t>MBI Score</a:t>
                       </a:r>
+                      <a:endParaRPr lang="en-US" sz="3200" b="0" dirty="0">
+                        <a:solidFill>
+                          <a:srgbClr val="000000"/>
+                        </a:solidFill>
+                        <a:effectLst/>
+                        <a:latin typeface="Arial" panose="020B0604020202090204" pitchFamily="34" charset="0"/>
+                        <a:cs typeface="Arial" panose="020B0604020202090204" pitchFamily="34" charset="0"/>
+                      </a:endParaRPr>
                     </a:p>
                   </a:txBody>
                   <a:tcPr marL="10559" marR="10559" marT="5279" marB="5279" anchor="ctr">
@@ -7231,7 +7147,9 @@
                       <a:tailEnd type="none" w="med" len="med"/>
                     </a:lnB>
                     <a:solidFill>
-                      <a:srgbClr val="F4F4F4"/>
+                      <a:schemeClr val="bg2">
+                        <a:lumMod val="90000"/>
+                      </a:schemeClr>
                     </a:solidFill>
                   </a:tcPr>
                 </a:tc>
@@ -7240,13 +7158,36 @@
                     <a:bodyPr/>
                     <a:lstStyle/>
                     <a:p>
-                      <a:r>
-                        <a:rPr lang="en-US" sz="3200">
+                      <a:pPr algn="ctr"/>
+                      <a:r>
+                        <a:rPr lang="en-US" sz="3200" b="0">
                           <a:effectLst/>
-                          <a:latin typeface="Cambria" panose="02040503050406030204" pitchFamily="18" charset="0"/>
-                        </a:rPr>
-                        <a:t>0.94 (4.22)</a:t>
-                      </a:r>
+                          <a:latin typeface="Arial" panose="020B0604020202090204" pitchFamily="34" charset="0"/>
+                          <a:cs typeface="Arial" panose="020B0604020202090204" pitchFamily="34" charset="0"/>
+                        </a:rPr>
+                        <a:t>0 .94 </a:t>
+                      </a:r>
+                      <a:endParaRPr lang="en-US" sz="3200" b="0">
+                        <a:effectLst/>
+                        <a:latin typeface="Arial" panose="020B0604020202090204" pitchFamily="34" charset="0"/>
+                        <a:cs typeface="Arial" panose="020B0604020202090204" pitchFamily="34" charset="0"/>
+                      </a:endParaRPr>
+                    </a:p>
+                    <a:p>
+                      <a:pPr algn="ctr"/>
+                      <a:r>
+                        <a:rPr lang="en-US" sz="3200" b="0">
+                          <a:effectLst/>
+                          <a:latin typeface="Arial" panose="020B0604020202090204" pitchFamily="34" charset="0"/>
+                          <a:cs typeface="Arial" panose="020B0604020202090204" pitchFamily="34" charset="0"/>
+                        </a:rPr>
+                        <a:t>(4.22)</a:t>
+                      </a:r>
+                      <a:endParaRPr lang="en-US" sz="3200" b="0">
+                        <a:effectLst/>
+                        <a:latin typeface="Arial" panose="020B0604020202090204" pitchFamily="34" charset="0"/>
+                        <a:cs typeface="Arial" panose="020B0604020202090204" pitchFamily="34" charset="0"/>
+                      </a:endParaRPr>
                     </a:p>
                   </a:txBody>
                   <a:tcPr marL="10559" marR="10559" marT="10559" marB="10559" anchor="ctr">
@@ -7294,13 +7235,36 @@
                     <a:bodyPr/>
                     <a:lstStyle/>
                     <a:p>
-                      <a:r>
-                        <a:rPr lang="en-US" sz="3200" dirty="0">
+                      <a:pPr algn="ctr"/>
+                      <a:r>
+                        <a:rPr lang="en-US" sz="3200" b="0" dirty="0">
                           <a:effectLst/>
-                          <a:latin typeface="Cambria" panose="02040503050406030204" pitchFamily="18" charset="0"/>
-                        </a:rPr>
-                        <a:t>0.93 (4.09)</a:t>
-                      </a:r>
+                          <a:latin typeface="Arial" panose="020B0604020202090204" pitchFamily="34" charset="0"/>
+                          <a:cs typeface="Arial" panose="020B0604020202090204" pitchFamily="34" charset="0"/>
+                        </a:rPr>
+                        <a:t>0.93 </a:t>
+                      </a:r>
+                      <a:endParaRPr lang="en-US" sz="3200" b="0" dirty="0">
+                        <a:effectLst/>
+                        <a:latin typeface="Arial" panose="020B0604020202090204" pitchFamily="34" charset="0"/>
+                        <a:cs typeface="Arial" panose="020B0604020202090204" pitchFamily="34" charset="0"/>
+                      </a:endParaRPr>
+                    </a:p>
+                    <a:p>
+                      <a:pPr algn="ctr"/>
+                      <a:r>
+                        <a:rPr lang="en-US" sz="3200" b="0" dirty="0">
+                          <a:effectLst/>
+                          <a:latin typeface="Arial" panose="020B0604020202090204" pitchFamily="34" charset="0"/>
+                          <a:cs typeface="Arial" panose="020B0604020202090204" pitchFamily="34" charset="0"/>
+                        </a:rPr>
+                        <a:t>(4.09)</a:t>
+                      </a:r>
+                      <a:endParaRPr lang="en-US" sz="3200" b="0" dirty="0">
+                        <a:effectLst/>
+                        <a:latin typeface="Arial" panose="020B0604020202090204" pitchFamily="34" charset="0"/>
+                        <a:cs typeface="Arial" panose="020B0604020202090204" pitchFamily="34" charset="0"/>
+                      </a:endParaRPr>
                     </a:p>
                   </a:txBody>
                   <a:tcPr marL="10559" marR="10559" marT="10559" marB="10559" anchor="ctr">
@@ -7348,13 +7312,36 @@
                     <a:bodyPr/>
                     <a:lstStyle/>
                     <a:p>
-                      <a:r>
-                        <a:rPr lang="en-US" sz="3200" dirty="0">
+                      <a:pPr algn="ctr"/>
+                      <a:r>
+                        <a:rPr lang="en-US" sz="3200" b="0" dirty="0">
                           <a:effectLst/>
-                          <a:latin typeface="Cambria" panose="02040503050406030204" pitchFamily="18" charset="0"/>
-                        </a:rPr>
-                        <a:t>0.33 (2.01)</a:t>
-                      </a:r>
+                          <a:latin typeface="Arial" panose="020B0604020202090204" pitchFamily="34" charset="0"/>
+                          <a:cs typeface="Arial" panose="020B0604020202090204" pitchFamily="34" charset="0"/>
+                        </a:rPr>
+                        <a:t>0.33 </a:t>
+                      </a:r>
+                      <a:endParaRPr lang="en-US" sz="3200" b="0" dirty="0">
+                        <a:effectLst/>
+                        <a:latin typeface="Arial" panose="020B0604020202090204" pitchFamily="34" charset="0"/>
+                        <a:cs typeface="Arial" panose="020B0604020202090204" pitchFamily="34" charset="0"/>
+                      </a:endParaRPr>
+                    </a:p>
+                    <a:p>
+                      <a:pPr algn="ctr"/>
+                      <a:r>
+                        <a:rPr lang="en-US" sz="3200" b="0" dirty="0">
+                          <a:effectLst/>
+                          <a:latin typeface="Arial" panose="020B0604020202090204" pitchFamily="34" charset="0"/>
+                          <a:cs typeface="Arial" panose="020B0604020202090204" pitchFamily="34" charset="0"/>
+                        </a:rPr>
+                        <a:t>(2.01)</a:t>
+                      </a:r>
+                      <a:endParaRPr lang="en-US" sz="3200" b="0" dirty="0">
+                        <a:effectLst/>
+                        <a:latin typeface="Arial" panose="020B0604020202090204" pitchFamily="34" charset="0"/>
+                        <a:cs typeface="Arial" panose="020B0604020202090204" pitchFamily="34" charset="0"/>
+                      </a:endParaRPr>
                     </a:p>
                   </a:txBody>
                   <a:tcPr marL="10559" marR="10559" marT="10559" marB="10559" anchor="ctr">
@@ -7402,13 +7389,36 @@
                     <a:bodyPr/>
                     <a:lstStyle/>
                     <a:p>
-                      <a:r>
-                        <a:rPr lang="en-US" sz="3200">
+                      <a:pPr algn="ctr"/>
+                      <a:r>
+                        <a:rPr lang="en-US" sz="3200" b="0">
                           <a:effectLst/>
-                          <a:latin typeface="Cambria" panose="02040503050406030204" pitchFamily="18" charset="0"/>
-                        </a:rPr>
-                        <a:t>3.24 (8.62)</a:t>
-                      </a:r>
+                          <a:latin typeface="Arial" panose="020B0604020202090204" pitchFamily="34" charset="0"/>
+                          <a:cs typeface="Arial" panose="020B0604020202090204" pitchFamily="34" charset="0"/>
+                        </a:rPr>
+                        <a:t>3.24 (</a:t>
+                      </a:r>
+                      <a:endParaRPr lang="en-US" sz="3200" b="0">
+                        <a:effectLst/>
+                        <a:latin typeface="Arial" panose="020B0604020202090204" pitchFamily="34" charset="0"/>
+                        <a:cs typeface="Arial" panose="020B0604020202090204" pitchFamily="34" charset="0"/>
+                      </a:endParaRPr>
+                    </a:p>
+                    <a:p>
+                      <a:pPr algn="ctr"/>
+                      <a:r>
+                        <a:rPr lang="en-US" sz="3200" b="0">
+                          <a:effectLst/>
+                          <a:latin typeface="Arial" panose="020B0604020202090204" pitchFamily="34" charset="0"/>
+                          <a:cs typeface="Arial" panose="020B0604020202090204" pitchFamily="34" charset="0"/>
+                        </a:rPr>
+                        <a:t>8.62)</a:t>
+                      </a:r>
+                      <a:endParaRPr lang="en-US" sz="3200" b="0">
+                        <a:effectLst/>
+                        <a:latin typeface="Arial" panose="020B0604020202090204" pitchFamily="34" charset="0"/>
+                        <a:cs typeface="Arial" panose="020B0604020202090204" pitchFamily="34" charset="0"/>
+                      </a:endParaRPr>
                     </a:p>
                   </a:txBody>
                   <a:tcPr marL="10559" marR="10559" marT="10559" marB="10559" anchor="ctr">
@@ -7451,29 +7461,33 @@
                     <a:noFill/>
                   </a:tcPr>
                 </a:tc>
-                <a:extLst>
-                  <a:ext uri="{0D108BD9-81ED-4DB2-BD59-A6C34878D82A}">
-                    <a16:rowId xmlns:a16="http://schemas.microsoft.com/office/drawing/2014/main" val="2104066010"/>
-                  </a:ext>
-                </a:extLst>
               </a:tr>
-              <a:tr h="705319">
+              <a:tr h="807085">
                 <a:tc>
                   <a:txBody>
                     <a:bodyPr/>
                     <a:lstStyle/>
                     <a:p>
-                      <a:pPr algn="r" fontAlgn="ctr"/>
-                      <a:r>
-                        <a:rPr lang="en-US" sz="3200" b="1" dirty="0">
+                      <a:pPr algn="ctr" fontAlgn="ctr"/>
+                      <a:r>
+                        <a:rPr lang="en-US" sz="3200" b="0" dirty="0">
                           <a:solidFill>
                             <a:srgbClr val="000000"/>
                           </a:solidFill>
                           <a:effectLst/>
-                          <a:latin typeface="Cambria" panose="02040503050406030204" pitchFamily="18" charset="0"/>
+                          <a:latin typeface="Arial" panose="020B0604020202090204" pitchFamily="34" charset="0"/>
+                          <a:cs typeface="Arial" panose="020B0604020202090204" pitchFamily="34" charset="0"/>
                         </a:rPr>
                         <a:t>EHI Score</a:t>
                       </a:r>
+                      <a:endParaRPr lang="en-US" sz="3200" b="0" dirty="0">
+                        <a:solidFill>
+                          <a:srgbClr val="000000"/>
+                        </a:solidFill>
+                        <a:effectLst/>
+                        <a:latin typeface="Arial" panose="020B0604020202090204" pitchFamily="34" charset="0"/>
+                        <a:cs typeface="Arial" panose="020B0604020202090204" pitchFamily="34" charset="0"/>
+                      </a:endParaRPr>
                     </a:p>
                   </a:txBody>
                   <a:tcPr marL="10559" marR="10559" marT="5279" marB="5279" anchor="ctr">
@@ -7514,7 +7528,9 @@
                       <a:tailEnd type="none" w="med" len="med"/>
                     </a:lnB>
                     <a:solidFill>
-                      <a:srgbClr val="F4F4F4"/>
+                      <a:schemeClr val="bg2">
+                        <a:lumMod val="90000"/>
+                      </a:schemeClr>
                     </a:solidFill>
                   </a:tcPr>
                 </a:tc>
@@ -7523,13 +7539,20 @@
                     <a:bodyPr/>
                     <a:lstStyle/>
                     <a:p>
-                      <a:r>
-                        <a:rPr lang="en-US" sz="3200">
+                      <a:pPr algn="ctr"/>
+                      <a:r>
+                        <a:rPr lang="en-US" sz="3200" b="0">
                           <a:effectLst/>
-                          <a:latin typeface="Cambria" panose="02040503050406030204" pitchFamily="18" charset="0"/>
+                          <a:latin typeface="Arial" panose="020B0604020202090204" pitchFamily="34" charset="0"/>
+                          <a:cs typeface="Arial" panose="020B0604020202090204" pitchFamily="34" charset="0"/>
                         </a:rPr>
                         <a:t>0.71 (0.46)</a:t>
                       </a:r>
+                      <a:endParaRPr lang="en-US" sz="3200" b="0">
+                        <a:effectLst/>
+                        <a:latin typeface="Arial" panose="020B0604020202090204" pitchFamily="34" charset="0"/>
+                        <a:cs typeface="Arial" panose="020B0604020202090204" pitchFamily="34" charset="0"/>
+                      </a:endParaRPr>
                     </a:p>
                   </a:txBody>
                   <a:tcPr marL="10559" marR="10559" marT="10559" marB="10559" anchor="ctr">
@@ -7577,13 +7600,20 @@
                     <a:bodyPr/>
                     <a:lstStyle/>
                     <a:p>
-                      <a:r>
-                        <a:rPr lang="en-US" sz="3200" dirty="0">
+                      <a:pPr algn="ctr"/>
+                      <a:r>
+                        <a:rPr lang="en-US" sz="3200" b="0" dirty="0">
                           <a:effectLst/>
-                          <a:latin typeface="Cambria" panose="02040503050406030204" pitchFamily="18" charset="0"/>
+                          <a:latin typeface="Arial" panose="020B0604020202090204" pitchFamily="34" charset="0"/>
+                          <a:cs typeface="Arial" panose="020B0604020202090204" pitchFamily="34" charset="0"/>
                         </a:rPr>
                         <a:t>0.72 (0.44)</a:t>
                       </a:r>
+                      <a:endParaRPr lang="en-US" sz="3200" b="0" dirty="0">
+                        <a:effectLst/>
+                        <a:latin typeface="Arial" panose="020B0604020202090204" pitchFamily="34" charset="0"/>
+                        <a:cs typeface="Arial" panose="020B0604020202090204" pitchFamily="34" charset="0"/>
+                      </a:endParaRPr>
                     </a:p>
                   </a:txBody>
                   <a:tcPr marL="10559" marR="10559" marT="10559" marB="10559" anchor="ctr">
@@ -7631,13 +7661,20 @@
                     <a:bodyPr/>
                     <a:lstStyle/>
                     <a:p>
-                      <a:r>
-                        <a:rPr lang="en-US" sz="3200" dirty="0">
+                      <a:pPr algn="ctr"/>
+                      <a:r>
+                        <a:rPr lang="en-US" sz="3200" b="0" dirty="0">
                           <a:effectLst/>
-                          <a:latin typeface="Cambria" panose="02040503050406030204" pitchFamily="18" charset="0"/>
+                          <a:latin typeface="Arial" panose="020B0604020202090204" pitchFamily="34" charset="0"/>
+                          <a:cs typeface="Arial" panose="020B0604020202090204" pitchFamily="34" charset="0"/>
                         </a:rPr>
                         <a:t>0.66 (0.56)</a:t>
                       </a:r>
+                      <a:endParaRPr lang="en-US" sz="3200" b="0" dirty="0">
+                        <a:effectLst/>
+                        <a:latin typeface="Arial" panose="020B0604020202090204" pitchFamily="34" charset="0"/>
+                        <a:cs typeface="Arial" panose="020B0604020202090204" pitchFamily="34" charset="0"/>
+                      </a:endParaRPr>
                     </a:p>
                   </a:txBody>
                   <a:tcPr marL="10559" marR="10559" marT="10559" marB="10559" anchor="ctr">
@@ -7685,13 +7722,20 @@
                     <a:bodyPr/>
                     <a:lstStyle/>
                     <a:p>
-                      <a:r>
-                        <a:rPr lang="en-US" sz="3200" dirty="0">
+                      <a:pPr algn="ctr"/>
+                      <a:r>
+                        <a:rPr lang="en-US" sz="3200" b="0" dirty="0">
                           <a:effectLst/>
-                          <a:latin typeface="Cambria" panose="02040503050406030204" pitchFamily="18" charset="0"/>
+                          <a:latin typeface="Arial" panose="020B0604020202090204" pitchFamily="34" charset="0"/>
+                          <a:cs typeface="Arial" panose="020B0604020202090204" pitchFamily="34" charset="0"/>
                         </a:rPr>
                         <a:t>0.72 (0.50)</a:t>
                       </a:r>
+                      <a:endParaRPr lang="en-US" sz="3200" b="0" dirty="0">
+                        <a:effectLst/>
+                        <a:latin typeface="Arial" panose="020B0604020202090204" pitchFamily="34" charset="0"/>
+                        <a:cs typeface="Arial" panose="020B0604020202090204" pitchFamily="34" charset="0"/>
+                      </a:endParaRPr>
                     </a:p>
                   </a:txBody>
                   <a:tcPr marL="10559" marR="10559" marT="10559" marB="10559" anchor="ctr">
@@ -7734,29 +7778,33 @@
                     <a:noFill/>
                   </a:tcPr>
                 </a:tc>
-                <a:extLst>
-                  <a:ext uri="{0D108BD9-81ED-4DB2-BD59-A6C34878D82A}">
-                    <a16:rowId xmlns:a16="http://schemas.microsoft.com/office/drawing/2014/main" val="91321582"/>
-                  </a:ext>
-                </a:extLst>
               </a:tr>
-              <a:tr h="1515803">
+              <a:tr h="1007110">
                 <a:tc>
                   <a:txBody>
                     <a:bodyPr/>
                     <a:lstStyle/>
                     <a:p>
-                      <a:pPr algn="r" fontAlgn="ctr"/>
-                      <a:r>
-                        <a:rPr lang="en-US" sz="3200" b="1" dirty="0">
+                      <a:pPr algn="ctr" fontAlgn="ctr"/>
+                      <a:r>
+                        <a:rPr lang="en-US" sz="3200" b="0" dirty="0">
                           <a:solidFill>
                             <a:srgbClr val="000000"/>
                           </a:solidFill>
                           <a:effectLst/>
-                          <a:latin typeface="Cambria" panose="02040503050406030204" pitchFamily="18" charset="0"/>
+                          <a:latin typeface="Arial" panose="020B0604020202090204" pitchFamily="34" charset="0"/>
+                          <a:cs typeface="Arial" panose="020B0604020202090204" pitchFamily="34" charset="0"/>
                         </a:rPr>
                         <a:t>Loss of Smell</a:t>
                       </a:r>
+                      <a:endParaRPr lang="en-US" sz="3200" b="0" dirty="0">
+                        <a:solidFill>
+                          <a:srgbClr val="000000"/>
+                        </a:solidFill>
+                        <a:effectLst/>
+                        <a:latin typeface="Arial" panose="020B0604020202090204" pitchFamily="34" charset="0"/>
+                        <a:cs typeface="Arial" panose="020B0604020202090204" pitchFamily="34" charset="0"/>
+                      </a:endParaRPr>
                     </a:p>
                   </a:txBody>
                   <a:tcPr marL="10559" marR="10559" marT="5279" marB="5279" anchor="ctr">
@@ -7797,7 +7845,9 @@
                       <a:tailEnd type="none" w="med" len="med"/>
                     </a:lnB>
                     <a:solidFill>
-                      <a:srgbClr val="F4F4F4"/>
+                      <a:schemeClr val="bg2">
+                        <a:lumMod val="90000"/>
+                      </a:schemeClr>
                     </a:solidFill>
                   </a:tcPr>
                 </a:tc>
@@ -7806,13 +7856,20 @@
                     <a:bodyPr/>
                     <a:lstStyle/>
                     <a:p>
-                      <a:r>
-                        <a:rPr lang="en-US" sz="3200" dirty="0">
+                      <a:pPr algn="ctr"/>
+                      <a:r>
+                        <a:rPr lang="en-US" sz="3200" b="0" dirty="0">
                           <a:effectLst/>
-                          <a:latin typeface="Cambria" panose="02040503050406030204" pitchFamily="18" charset="0"/>
+                          <a:latin typeface="Arial" panose="020B0604020202090204" pitchFamily="34" charset="0"/>
+                          <a:cs typeface="Arial" panose="020B0604020202090204" pitchFamily="34" charset="0"/>
                         </a:rPr>
                         <a:t>2537 (72.6%)</a:t>
                       </a:r>
+                      <a:endParaRPr lang="en-US" sz="3200" b="0" dirty="0">
+                        <a:effectLst/>
+                        <a:latin typeface="Arial" panose="020B0604020202090204" pitchFamily="34" charset="0"/>
+                        <a:cs typeface="Arial" panose="020B0604020202090204" pitchFamily="34" charset="0"/>
+                      </a:endParaRPr>
                     </a:p>
                   </a:txBody>
                   <a:tcPr marL="10559" marR="10559" marT="10559" marB="10559" anchor="ctr">
@@ -7860,13 +7917,20 @@
                     <a:bodyPr/>
                     <a:lstStyle/>
                     <a:p>
-                      <a:r>
-                        <a:rPr lang="en-US" sz="3200" dirty="0">
+                      <a:pPr algn="ctr"/>
+                      <a:r>
+                        <a:rPr lang="en-US" sz="3200" b="0" dirty="0">
                           <a:effectLst/>
-                          <a:latin typeface="Cambria" panose="02040503050406030204" pitchFamily="18" charset="0"/>
+                          <a:latin typeface="Arial" panose="020B0604020202090204" pitchFamily="34" charset="0"/>
+                          <a:cs typeface="Arial" panose="020B0604020202090204" pitchFamily="34" charset="0"/>
                         </a:rPr>
                         <a:t>2090 (73.3%)</a:t>
                       </a:r>
+                      <a:endParaRPr lang="en-US" sz="3200" b="0" dirty="0">
+                        <a:effectLst/>
+                        <a:latin typeface="Arial" panose="020B0604020202090204" pitchFamily="34" charset="0"/>
+                        <a:cs typeface="Arial" panose="020B0604020202090204" pitchFamily="34" charset="0"/>
+                      </a:endParaRPr>
                     </a:p>
                   </a:txBody>
                   <a:tcPr marL="10559" marR="10559" marT="10559" marB="10559" anchor="ctr">
@@ -7914,13 +7978,20 @@
                     <a:bodyPr/>
                     <a:lstStyle/>
                     <a:p>
-                      <a:r>
-                        <a:rPr lang="en-US" sz="3200" dirty="0">
+                      <a:pPr algn="ctr"/>
+                      <a:r>
+                        <a:rPr lang="en-US" sz="3200" b="0" dirty="0">
                           <a:effectLst/>
-                          <a:latin typeface="Cambria" panose="02040503050406030204" pitchFamily="18" charset="0"/>
+                          <a:latin typeface="Arial" panose="020B0604020202090204" pitchFamily="34" charset="0"/>
+                          <a:cs typeface="Arial" panose="020B0604020202090204" pitchFamily="34" charset="0"/>
                         </a:rPr>
                         <a:t>240 (58.5%)</a:t>
                       </a:r>
+                      <a:endParaRPr lang="en-US" sz="3200" b="0" dirty="0">
+                        <a:effectLst/>
+                        <a:latin typeface="Arial" panose="020B0604020202090204" pitchFamily="34" charset="0"/>
+                        <a:cs typeface="Arial" panose="020B0604020202090204" pitchFamily="34" charset="0"/>
+                      </a:endParaRPr>
                     </a:p>
                   </a:txBody>
                   <a:tcPr marL="10559" marR="10559" marT="10559" marB="10559" anchor="ctr">
@@ -7968,13 +8039,36 @@
                     <a:bodyPr/>
                     <a:lstStyle/>
                     <a:p>
-                      <a:r>
-                        <a:rPr lang="en-US" sz="3200" dirty="0">
+                      <a:pPr algn="ctr"/>
+                      <a:r>
+                        <a:rPr lang="en-US" sz="3200" b="0" dirty="0">
                           <a:effectLst/>
-                          <a:latin typeface="Cambria" panose="02040503050406030204" pitchFamily="18" charset="0"/>
-                        </a:rPr>
-                        <a:t>101 (59.1%)</a:t>
-                      </a:r>
+                          <a:latin typeface="Arial" panose="020B0604020202090204" pitchFamily="34" charset="0"/>
+                          <a:cs typeface="Arial" panose="020B0604020202090204" pitchFamily="34" charset="0"/>
+                        </a:rPr>
+                        <a:t>101 </a:t>
+                      </a:r>
+                      <a:endParaRPr lang="en-US" sz="3200" b="0" dirty="0">
+                        <a:effectLst/>
+                        <a:latin typeface="Arial" panose="020B0604020202090204" pitchFamily="34" charset="0"/>
+                        <a:cs typeface="Arial" panose="020B0604020202090204" pitchFamily="34" charset="0"/>
+                      </a:endParaRPr>
+                    </a:p>
+                    <a:p>
+                      <a:pPr algn="ctr"/>
+                      <a:r>
+                        <a:rPr lang="en-US" sz="3200" b="0" dirty="0">
+                          <a:effectLst/>
+                          <a:latin typeface="Arial" panose="020B0604020202090204" pitchFamily="34" charset="0"/>
+                          <a:cs typeface="Arial" panose="020B0604020202090204" pitchFamily="34" charset="0"/>
+                        </a:rPr>
+                        <a:t>(59.1%)</a:t>
+                      </a:r>
+                      <a:endParaRPr lang="en-US" sz="3200" b="0" dirty="0">
+                        <a:effectLst/>
+                        <a:latin typeface="Arial" panose="020B0604020202090204" pitchFamily="34" charset="0"/>
+                        <a:cs typeface="Arial" panose="020B0604020202090204" pitchFamily="34" charset="0"/>
+                      </a:endParaRPr>
                     </a:p>
                   </a:txBody>
                   <a:tcPr marL="10559" marR="10559" marT="10559" marB="10559" anchor="ctr">
@@ -8017,29 +8111,33 @@
                     <a:noFill/>
                   </a:tcPr>
                 </a:tc>
-                <a:extLst>
-                  <a:ext uri="{0D108BD9-81ED-4DB2-BD59-A6C34878D82A}">
-                    <a16:rowId xmlns:a16="http://schemas.microsoft.com/office/drawing/2014/main" val="338824190"/>
-                  </a:ext>
-                </a:extLst>
               </a:tr>
-              <a:tr h="1114513">
+              <a:tr h="793115">
                 <a:tc>
                   <a:txBody>
                     <a:bodyPr/>
                     <a:lstStyle/>
                     <a:p>
-                      <a:pPr algn="r" fontAlgn="ctr"/>
-                      <a:r>
-                        <a:rPr lang="en-US" sz="3200" b="1" dirty="0">
+                      <a:pPr algn="ctr" fontAlgn="ctr"/>
+                      <a:r>
+                        <a:rPr lang="en-US" sz="3200" b="0" dirty="0">
                           <a:solidFill>
                             <a:srgbClr val="000000"/>
                           </a:solidFill>
                           <a:effectLst/>
-                          <a:latin typeface="Cambria" panose="02040503050406030204" pitchFamily="18" charset="0"/>
+                          <a:latin typeface="Arial" panose="020B0604020202090204" pitchFamily="34" charset="0"/>
+                          <a:cs typeface="Arial" panose="020B0604020202090204" pitchFamily="34" charset="0"/>
                         </a:rPr>
                         <a:t>Right Hand Dominant</a:t>
                       </a:r>
+                      <a:endParaRPr lang="en-US" sz="3200" b="0" dirty="0">
+                        <a:solidFill>
+                          <a:srgbClr val="000000"/>
+                        </a:solidFill>
+                        <a:effectLst/>
+                        <a:latin typeface="Arial" panose="020B0604020202090204" pitchFamily="34" charset="0"/>
+                        <a:cs typeface="Arial" panose="020B0604020202090204" pitchFamily="34" charset="0"/>
+                      </a:endParaRPr>
                     </a:p>
                   </a:txBody>
                   <a:tcPr marL="10559" marR="10559" marT="5279" marB="5279" anchor="ctr">
@@ -8080,7 +8178,9 @@
                       <a:tailEnd type="none" w="med" len="med"/>
                     </a:lnB>
                     <a:solidFill>
-                      <a:srgbClr val="F4F4F4"/>
+                      <a:schemeClr val="bg2">
+                        <a:lumMod val="90000"/>
+                      </a:schemeClr>
                     </a:solidFill>
                   </a:tcPr>
                 </a:tc>
@@ -8089,13 +8189,20 @@
                     <a:bodyPr/>
                     <a:lstStyle/>
                     <a:p>
-                      <a:r>
-                        <a:rPr lang="en-US" sz="3200">
+                      <a:pPr algn="ctr"/>
+                      <a:r>
+                        <a:rPr lang="en-US" sz="3200" b="0">
                           <a:effectLst/>
-                          <a:latin typeface="Cambria" panose="02040503050406030204" pitchFamily="18" charset="0"/>
+                          <a:latin typeface="Arial" panose="020B0604020202090204" pitchFamily="34" charset="0"/>
+                          <a:cs typeface="Arial" panose="020B0604020202090204" pitchFamily="34" charset="0"/>
                         </a:rPr>
                         <a:t>1888 (53.3%)</a:t>
                       </a:r>
+                      <a:endParaRPr lang="en-US" sz="3200" b="0">
+                        <a:effectLst/>
+                        <a:latin typeface="Arial" panose="020B0604020202090204" pitchFamily="34" charset="0"/>
+                        <a:cs typeface="Arial" panose="020B0604020202090204" pitchFamily="34" charset="0"/>
+                      </a:endParaRPr>
                     </a:p>
                   </a:txBody>
                   <a:tcPr marL="10559" marR="10559" marT="10559" marB="10559" anchor="ctr">
@@ -8143,13 +8250,20 @@
                     <a:bodyPr/>
                     <a:lstStyle/>
                     <a:p>
-                      <a:r>
-                        <a:rPr lang="en-US" sz="3200">
+                      <a:pPr algn="ctr"/>
+                      <a:r>
+                        <a:rPr lang="en-US" sz="3200" b="0">
                           <a:effectLst/>
-                          <a:latin typeface="Cambria" panose="02040503050406030204" pitchFamily="18" charset="0"/>
+                          <a:latin typeface="Arial" panose="020B0604020202090204" pitchFamily="34" charset="0"/>
+                          <a:cs typeface="Arial" panose="020B0604020202090204" pitchFamily="34" charset="0"/>
                         </a:rPr>
                         <a:t>1765 (61.9%)</a:t>
                       </a:r>
+                      <a:endParaRPr lang="en-US" sz="3200" b="0">
+                        <a:effectLst/>
+                        <a:latin typeface="Arial" panose="020B0604020202090204" pitchFamily="34" charset="0"/>
+                        <a:cs typeface="Arial" panose="020B0604020202090204" pitchFamily="34" charset="0"/>
+                      </a:endParaRPr>
                     </a:p>
                   </a:txBody>
                   <a:tcPr marL="10559" marR="10559" marT="10559" marB="10559" anchor="ctr">
@@ -8197,13 +8311,36 @@
                     <a:bodyPr/>
                     <a:lstStyle/>
                     <a:p>
-                      <a:r>
-                        <a:rPr lang="en-US" sz="3200">
+                      <a:pPr algn="ctr"/>
+                      <a:r>
+                        <a:rPr lang="en-US" sz="3200" b="0">
                           <a:effectLst/>
-                          <a:latin typeface="Cambria" panose="02040503050406030204" pitchFamily="18" charset="0"/>
-                        </a:rPr>
-                        <a:t>20 (4.9%)</a:t>
-                      </a:r>
+                          <a:latin typeface="Arial" panose="020B0604020202090204" pitchFamily="34" charset="0"/>
+                          <a:cs typeface="Arial" panose="020B0604020202090204" pitchFamily="34" charset="0"/>
+                        </a:rPr>
+                        <a:t>20 </a:t>
+                      </a:r>
+                      <a:endParaRPr lang="en-US" sz="3200" b="0">
+                        <a:effectLst/>
+                        <a:latin typeface="Arial" panose="020B0604020202090204" pitchFamily="34" charset="0"/>
+                        <a:cs typeface="Arial" panose="020B0604020202090204" pitchFamily="34" charset="0"/>
+                      </a:endParaRPr>
+                    </a:p>
+                    <a:p>
+                      <a:pPr algn="ctr"/>
+                      <a:r>
+                        <a:rPr lang="en-US" sz="3200" b="0">
+                          <a:effectLst/>
+                          <a:latin typeface="Arial" panose="020B0604020202090204" pitchFamily="34" charset="0"/>
+                          <a:cs typeface="Arial" panose="020B0604020202090204" pitchFamily="34" charset="0"/>
+                        </a:rPr>
+                        <a:t>(4.9%)</a:t>
+                      </a:r>
+                      <a:endParaRPr lang="en-US" sz="3200" b="0">
+                        <a:effectLst/>
+                        <a:latin typeface="Arial" panose="020B0604020202090204" pitchFamily="34" charset="0"/>
+                        <a:cs typeface="Arial" panose="020B0604020202090204" pitchFamily="34" charset="0"/>
+                      </a:endParaRPr>
                     </a:p>
                   </a:txBody>
                   <a:tcPr marL="10559" marR="10559" marT="10559" marB="10559" anchor="ctr">
@@ -8251,13 +8388,36 @@
                     <a:bodyPr/>
                     <a:lstStyle/>
                     <a:p>
-                      <a:r>
-                        <a:rPr lang="en-US" sz="3200" dirty="0">
+                      <a:pPr algn="ctr"/>
+                      <a:r>
+                        <a:rPr lang="en-US" sz="3200" b="0" dirty="0">
                           <a:effectLst/>
-                          <a:latin typeface="Cambria" panose="02040503050406030204" pitchFamily="18" charset="0"/>
-                        </a:rPr>
-                        <a:t>102 (59.6%)</a:t>
-                      </a:r>
+                          <a:latin typeface="Arial" panose="020B0604020202090204" pitchFamily="34" charset="0"/>
+                          <a:cs typeface="Arial" panose="020B0604020202090204" pitchFamily="34" charset="0"/>
+                        </a:rPr>
+                        <a:t>102 </a:t>
+                      </a:r>
+                      <a:endParaRPr lang="en-US" sz="3200" b="0" dirty="0">
+                        <a:effectLst/>
+                        <a:latin typeface="Arial" panose="020B0604020202090204" pitchFamily="34" charset="0"/>
+                        <a:cs typeface="Arial" panose="020B0604020202090204" pitchFamily="34" charset="0"/>
+                      </a:endParaRPr>
+                    </a:p>
+                    <a:p>
+                      <a:pPr algn="ctr"/>
+                      <a:r>
+                        <a:rPr lang="en-US" sz="3200" b="0" dirty="0">
+                          <a:effectLst/>
+                          <a:latin typeface="Arial" panose="020B0604020202090204" pitchFamily="34" charset="0"/>
+                          <a:cs typeface="Arial" panose="020B0604020202090204" pitchFamily="34" charset="0"/>
+                        </a:rPr>
+                        <a:t>(59.6%)</a:t>
+                      </a:r>
+                      <a:endParaRPr lang="en-US" sz="3200" b="0" dirty="0">
+                        <a:effectLst/>
+                        <a:latin typeface="Arial" panose="020B0604020202090204" pitchFamily="34" charset="0"/>
+                        <a:cs typeface="Arial" panose="020B0604020202090204" pitchFamily="34" charset="0"/>
+                      </a:endParaRPr>
                     </a:p>
                   </a:txBody>
                   <a:tcPr marL="10559" marR="10559" marT="10559" marB="10559" anchor="ctr">
@@ -8300,29 +8460,33 @@
                     <a:noFill/>
                   </a:tcPr>
                 </a:tc>
-                <a:extLst>
-                  <a:ext uri="{0D108BD9-81ED-4DB2-BD59-A6C34878D82A}">
-                    <a16:rowId xmlns:a16="http://schemas.microsoft.com/office/drawing/2014/main" val="668067186"/>
-                  </a:ext>
-                </a:extLst>
               </a:tr>
-              <a:tr h="1105282">
+              <a:tr h="589915">
                 <a:tc>
                   <a:txBody>
                     <a:bodyPr/>
                     <a:lstStyle/>
                     <a:p>
-                      <a:pPr algn="r" fontAlgn="ctr"/>
-                      <a:r>
-                        <a:rPr lang="en-US" sz="3200" b="1" dirty="0">
+                      <a:pPr algn="ctr" fontAlgn="ctr"/>
+                      <a:r>
+                        <a:rPr lang="en-US" sz="3200" b="0" dirty="0">
                           <a:solidFill>
                             <a:srgbClr val="000000"/>
                           </a:solidFill>
                           <a:effectLst/>
-                          <a:latin typeface="Cambria" panose="02040503050406030204" pitchFamily="18" charset="0"/>
+                          <a:latin typeface="Arial" panose="020B0604020202090204" pitchFamily="34" charset="0"/>
+                          <a:cs typeface="Arial" panose="020B0604020202090204" pitchFamily="34" charset="0"/>
                         </a:rPr>
                         <a:t>Regular Exercise</a:t>
                       </a:r>
+                      <a:endParaRPr lang="en-US" sz="3200" b="0" dirty="0">
+                        <a:solidFill>
+                          <a:srgbClr val="000000"/>
+                        </a:solidFill>
+                        <a:effectLst/>
+                        <a:latin typeface="Arial" panose="020B0604020202090204" pitchFamily="34" charset="0"/>
+                        <a:cs typeface="Arial" panose="020B0604020202090204" pitchFamily="34" charset="0"/>
+                      </a:endParaRPr>
                     </a:p>
                   </a:txBody>
                   <a:tcPr marL="10559" marR="10559" marT="5279" marB="5279" anchor="ctr">
@@ -8363,7 +8527,9 @@
                       <a:tailEnd type="none" w="med" len="med"/>
                     </a:lnB>
                     <a:solidFill>
-                      <a:srgbClr val="F4F4F4"/>
+                      <a:schemeClr val="bg2">
+                        <a:lumMod val="90000"/>
+                      </a:schemeClr>
                     </a:solidFill>
                   </a:tcPr>
                 </a:tc>
@@ -8372,13 +8538,20 @@
                     <a:bodyPr/>
                     <a:lstStyle/>
                     <a:p>
-                      <a:r>
-                        <a:rPr lang="en-US" sz="3200" dirty="0">
+                      <a:pPr algn="ctr"/>
+                      <a:r>
+                        <a:rPr lang="en-US" sz="3200" b="0" dirty="0">
                           <a:effectLst/>
-                          <a:latin typeface="Cambria" panose="02040503050406030204" pitchFamily="18" charset="0"/>
+                          <a:latin typeface="Arial" panose="020B0604020202090204" pitchFamily="34" charset="0"/>
+                          <a:cs typeface="Arial" panose="020B0604020202090204" pitchFamily="34" charset="0"/>
                         </a:rPr>
                         <a:t>1795 (50.7%)</a:t>
                       </a:r>
+                      <a:endParaRPr lang="en-US" sz="3200" b="0" dirty="0">
+                        <a:effectLst/>
+                        <a:latin typeface="Arial" panose="020B0604020202090204" pitchFamily="34" charset="0"/>
+                        <a:cs typeface="Arial" panose="020B0604020202090204" pitchFamily="34" charset="0"/>
+                      </a:endParaRPr>
                     </a:p>
                   </a:txBody>
                   <a:tcPr marL="10559" marR="10559" marT="10559" marB="10559" anchor="ctr">
@@ -8426,13 +8599,20 @@
                     <a:bodyPr/>
                     <a:lstStyle/>
                     <a:p>
-                      <a:r>
-                        <a:rPr lang="en-US" sz="3200" dirty="0">
+                      <a:pPr algn="ctr"/>
+                      <a:r>
+                        <a:rPr lang="en-US" sz="3200" b="0" dirty="0">
                           <a:effectLst/>
-                          <a:latin typeface="Cambria" panose="02040503050406030204" pitchFamily="18" charset="0"/>
+                          <a:latin typeface="Arial" panose="020B0604020202090204" pitchFamily="34" charset="0"/>
+                          <a:cs typeface="Arial" panose="020B0604020202090204" pitchFamily="34" charset="0"/>
                         </a:rPr>
                         <a:t>1555 (54.5%)</a:t>
                       </a:r>
+                      <a:endParaRPr lang="en-US" sz="3200" b="0" dirty="0">
+                        <a:effectLst/>
+                        <a:latin typeface="Arial" panose="020B0604020202090204" pitchFamily="34" charset="0"/>
+                        <a:cs typeface="Arial" panose="020B0604020202090204" pitchFamily="34" charset="0"/>
+                      </a:endParaRPr>
                     </a:p>
                   </a:txBody>
                   <a:tcPr marL="10559" marR="10559" marT="10559" marB="10559" anchor="ctr">
@@ -8480,13 +8660,36 @@
                     <a:bodyPr/>
                     <a:lstStyle/>
                     <a:p>
-                      <a:r>
-                        <a:rPr lang="en-US" sz="3200" dirty="0">
+                      <a:pPr algn="ctr"/>
+                      <a:r>
+                        <a:rPr lang="en-US" sz="3200" b="0" dirty="0">
                           <a:effectLst/>
-                          <a:latin typeface="Cambria" panose="02040503050406030204" pitchFamily="18" charset="0"/>
-                        </a:rPr>
-                        <a:t>162 (39.5%)</a:t>
-                      </a:r>
+                          <a:latin typeface="Arial" panose="020B0604020202090204" pitchFamily="34" charset="0"/>
+                          <a:cs typeface="Arial" panose="020B0604020202090204" pitchFamily="34" charset="0"/>
+                        </a:rPr>
+                        <a:t>162 </a:t>
+                      </a:r>
+                      <a:endParaRPr lang="en-US" sz="3200" b="0" dirty="0">
+                        <a:effectLst/>
+                        <a:latin typeface="Arial" panose="020B0604020202090204" pitchFamily="34" charset="0"/>
+                        <a:cs typeface="Arial" panose="020B0604020202090204" pitchFamily="34" charset="0"/>
+                      </a:endParaRPr>
+                    </a:p>
+                    <a:p>
+                      <a:pPr algn="ctr"/>
+                      <a:r>
+                        <a:rPr lang="en-US" sz="3200" b="0" dirty="0">
+                          <a:effectLst/>
+                          <a:latin typeface="Arial" panose="020B0604020202090204" pitchFamily="34" charset="0"/>
+                          <a:cs typeface="Arial" panose="020B0604020202090204" pitchFamily="34" charset="0"/>
+                        </a:rPr>
+                        <a:t>(39.5%)</a:t>
+                      </a:r>
+                      <a:endParaRPr lang="en-US" sz="3200" b="0" dirty="0">
+                        <a:effectLst/>
+                        <a:latin typeface="Arial" panose="020B0604020202090204" pitchFamily="34" charset="0"/>
+                        <a:cs typeface="Arial" panose="020B0604020202090204" pitchFamily="34" charset="0"/>
+                      </a:endParaRPr>
                     </a:p>
                   </a:txBody>
                   <a:tcPr marL="10559" marR="10559" marT="10559" marB="10559" anchor="ctr">
@@ -8534,13 +8737,36 @@
                     <a:bodyPr/>
                     <a:lstStyle/>
                     <a:p>
-                      <a:r>
-                        <a:rPr lang="en-US" sz="3200" dirty="0">
+                      <a:pPr algn="ctr"/>
+                      <a:r>
+                        <a:rPr lang="en-US" sz="3200" b="0" dirty="0">
                           <a:effectLst/>
-                          <a:latin typeface="Cambria" panose="02040503050406030204" pitchFamily="18" charset="0"/>
-                        </a:rPr>
-                        <a:t>72 (42.1%)</a:t>
-                      </a:r>
+                          <a:latin typeface="Arial" panose="020B0604020202090204" pitchFamily="34" charset="0"/>
+                          <a:cs typeface="Arial" panose="020B0604020202090204" pitchFamily="34" charset="0"/>
+                        </a:rPr>
+                        <a:t>72 </a:t>
+                      </a:r>
+                      <a:endParaRPr lang="en-US" sz="3200" b="0" dirty="0">
+                        <a:effectLst/>
+                        <a:latin typeface="Arial" panose="020B0604020202090204" pitchFamily="34" charset="0"/>
+                        <a:cs typeface="Arial" panose="020B0604020202090204" pitchFamily="34" charset="0"/>
+                      </a:endParaRPr>
+                    </a:p>
+                    <a:p>
+                      <a:pPr algn="ctr"/>
+                      <a:r>
+                        <a:rPr lang="en-US" sz="3200" b="0" dirty="0">
+                          <a:effectLst/>
+                          <a:latin typeface="Arial" panose="020B0604020202090204" pitchFamily="34" charset="0"/>
+                          <a:cs typeface="Arial" panose="020B0604020202090204" pitchFamily="34" charset="0"/>
+                        </a:rPr>
+                        <a:t>42.1%)</a:t>
+                      </a:r>
+                      <a:endParaRPr lang="en-US" sz="3200" b="0" dirty="0">
+                        <a:effectLst/>
+                        <a:latin typeface="Arial" panose="020B0604020202090204" pitchFamily="34" charset="0"/>
+                        <a:cs typeface="Arial" panose="020B0604020202090204" pitchFamily="34" charset="0"/>
+                      </a:endParaRPr>
                     </a:p>
                   </a:txBody>
                   <a:tcPr marL="10559" marR="10559" marT="10559" marB="10559" anchor="ctr">
@@ -8583,29 +8809,33 @@
                     <a:noFill/>
                   </a:tcPr>
                 </a:tc>
-                <a:extLst>
-                  <a:ext uri="{0D108BD9-81ED-4DB2-BD59-A6C34878D82A}">
-                    <a16:rowId xmlns:a16="http://schemas.microsoft.com/office/drawing/2014/main" val="1293256907"/>
-                  </a:ext>
-                </a:extLst>
               </a:tr>
-              <a:tr h="1515803">
+              <a:tr h="955675">
                 <a:tc>
                   <a:txBody>
                     <a:bodyPr/>
                     <a:lstStyle/>
                     <a:p>
-                      <a:pPr algn="r" fontAlgn="ctr"/>
-                      <a:r>
-                        <a:rPr lang="en-US" sz="3200" b="1" dirty="0">
+                      <a:pPr algn="ctr" fontAlgn="ctr"/>
+                      <a:r>
+                        <a:rPr lang="en-US" sz="3200" b="0" dirty="0">
                           <a:solidFill>
                             <a:srgbClr val="000000"/>
                           </a:solidFill>
                           <a:effectLst/>
-                          <a:latin typeface="Cambria" panose="02040503050406030204" pitchFamily="18" charset="0"/>
+                          <a:latin typeface="Arial" panose="020B0604020202090204" pitchFamily="34" charset="0"/>
+                          <a:cs typeface="Arial" panose="020B0604020202090204" pitchFamily="34" charset="0"/>
                         </a:rPr>
                         <a:t>Coffee Drinker</a:t>
                       </a:r>
+                      <a:endParaRPr lang="en-US" sz="3200" b="0" dirty="0">
+                        <a:solidFill>
+                          <a:srgbClr val="000000"/>
+                        </a:solidFill>
+                        <a:effectLst/>
+                        <a:latin typeface="Arial" panose="020B0604020202090204" pitchFamily="34" charset="0"/>
+                        <a:cs typeface="Arial" panose="020B0604020202090204" pitchFamily="34" charset="0"/>
+                      </a:endParaRPr>
                     </a:p>
                   </a:txBody>
                   <a:tcPr marL="10559" marR="10559" marT="5279" marB="5279" anchor="ctr">
@@ -8646,7 +8876,9 @@
                       <a:tailEnd type="none" w="med" len="med"/>
                     </a:lnB>
                     <a:solidFill>
-                      <a:srgbClr val="F4F4F4"/>
+                      <a:schemeClr val="bg2">
+                        <a:lumMod val="90000"/>
+                      </a:schemeClr>
                     </a:solidFill>
                   </a:tcPr>
                 </a:tc>
@@ -8655,13 +8887,20 @@
                     <a:bodyPr/>
                     <a:lstStyle/>
                     <a:p>
-                      <a:r>
-                        <a:rPr lang="en-US" sz="3200">
+                      <a:pPr algn="ctr"/>
+                      <a:r>
+                        <a:rPr lang="en-US" sz="3200" b="0">
                           <a:effectLst/>
-                          <a:latin typeface="Cambria" panose="02040503050406030204" pitchFamily="18" charset="0"/>
+                          <a:latin typeface="Arial" panose="020B0604020202090204" pitchFamily="34" charset="0"/>
+                          <a:cs typeface="Arial" panose="020B0604020202090204" pitchFamily="34" charset="0"/>
                         </a:rPr>
                         <a:t>1735 (49.0%)</a:t>
                       </a:r>
+                      <a:endParaRPr lang="en-US" sz="3200" b="0">
+                        <a:effectLst/>
+                        <a:latin typeface="Arial" panose="020B0604020202090204" pitchFamily="34" charset="0"/>
+                        <a:cs typeface="Arial" panose="020B0604020202090204" pitchFamily="34" charset="0"/>
+                      </a:endParaRPr>
                     </a:p>
                   </a:txBody>
                   <a:tcPr marL="10559" marR="10559" marT="10559" marB="10559" anchor="ctr">
@@ -8709,13 +8948,20 @@
                     <a:bodyPr/>
                     <a:lstStyle/>
                     <a:p>
-                      <a:r>
-                        <a:rPr lang="en-US" sz="3200">
+                      <a:pPr algn="ctr"/>
+                      <a:r>
+                        <a:rPr lang="en-US" sz="3200" b="0">
                           <a:effectLst/>
-                          <a:latin typeface="Cambria" panose="02040503050406030204" pitchFamily="18" charset="0"/>
+                          <a:latin typeface="Arial" panose="020B0604020202090204" pitchFamily="34" charset="0"/>
+                          <a:cs typeface="Arial" panose="020B0604020202090204" pitchFamily="34" charset="0"/>
                         </a:rPr>
                         <a:t>1480 (51.9%)</a:t>
                       </a:r>
+                      <a:endParaRPr lang="en-US" sz="3200" b="0">
+                        <a:effectLst/>
+                        <a:latin typeface="Arial" panose="020B0604020202090204" pitchFamily="34" charset="0"/>
+                        <a:cs typeface="Arial" panose="020B0604020202090204" pitchFamily="34" charset="0"/>
+                      </a:endParaRPr>
                     </a:p>
                   </a:txBody>
                   <a:tcPr marL="10559" marR="10559" marT="10559" marB="10559" anchor="ctr">
@@ -8763,13 +9009,36 @@
                     <a:bodyPr/>
                     <a:lstStyle/>
                     <a:p>
-                      <a:r>
-                        <a:rPr lang="en-US" sz="3200">
+                      <a:pPr algn="ctr"/>
+                      <a:r>
+                        <a:rPr lang="en-US" sz="3200" b="0">
                           <a:effectLst/>
-                          <a:latin typeface="Cambria" panose="02040503050406030204" pitchFamily="18" charset="0"/>
-                        </a:rPr>
-                        <a:t>160 (39.0%)</a:t>
-                      </a:r>
+                          <a:latin typeface="Arial" panose="020B0604020202090204" pitchFamily="34" charset="0"/>
+                          <a:cs typeface="Arial" panose="020B0604020202090204" pitchFamily="34" charset="0"/>
+                        </a:rPr>
+                        <a:t>160 </a:t>
+                      </a:r>
+                      <a:endParaRPr lang="en-US" sz="3200" b="0">
+                        <a:effectLst/>
+                        <a:latin typeface="Arial" panose="020B0604020202090204" pitchFamily="34" charset="0"/>
+                        <a:cs typeface="Arial" panose="020B0604020202090204" pitchFamily="34" charset="0"/>
+                      </a:endParaRPr>
+                    </a:p>
+                    <a:p>
+                      <a:pPr algn="ctr"/>
+                      <a:r>
+                        <a:rPr lang="en-US" sz="3200" b="0">
+                          <a:effectLst/>
+                          <a:latin typeface="Arial" panose="020B0604020202090204" pitchFamily="34" charset="0"/>
+                          <a:cs typeface="Arial" panose="020B0604020202090204" pitchFamily="34" charset="0"/>
+                        </a:rPr>
+                        <a:t>(39.0%)</a:t>
+                      </a:r>
+                      <a:endParaRPr lang="en-US" sz="3200" b="0">
+                        <a:effectLst/>
+                        <a:latin typeface="Arial" panose="020B0604020202090204" pitchFamily="34" charset="0"/>
+                        <a:cs typeface="Arial" panose="020B0604020202090204" pitchFamily="34" charset="0"/>
+                      </a:endParaRPr>
                     </a:p>
                   </a:txBody>
                   <a:tcPr marL="10559" marR="10559" marT="10559" marB="10559" anchor="ctr">
@@ -8817,13 +9086,36 @@
                     <a:bodyPr/>
                     <a:lstStyle/>
                     <a:p>
-                      <a:r>
-                        <a:rPr lang="en-US" sz="3200" dirty="0">
+                      <a:pPr algn="ctr"/>
+                      <a:r>
+                        <a:rPr lang="en-US" sz="3200" b="0" dirty="0">
                           <a:effectLst/>
-                          <a:latin typeface="Cambria" panose="02040503050406030204" pitchFamily="18" charset="0"/>
-                        </a:rPr>
-                        <a:t>90 (52.6%)</a:t>
-                      </a:r>
+                          <a:latin typeface="Arial" panose="020B0604020202090204" pitchFamily="34" charset="0"/>
+                          <a:cs typeface="Arial" panose="020B0604020202090204" pitchFamily="34" charset="0"/>
+                        </a:rPr>
+                        <a:t>90 </a:t>
+                      </a:r>
+                      <a:endParaRPr lang="en-US" sz="3200" b="0" dirty="0">
+                        <a:effectLst/>
+                        <a:latin typeface="Arial" panose="020B0604020202090204" pitchFamily="34" charset="0"/>
+                        <a:cs typeface="Arial" panose="020B0604020202090204" pitchFamily="34" charset="0"/>
+                      </a:endParaRPr>
+                    </a:p>
+                    <a:p>
+                      <a:pPr algn="ctr"/>
+                      <a:r>
+                        <a:rPr lang="en-US" sz="3200" b="0" dirty="0">
+                          <a:effectLst/>
+                          <a:latin typeface="Arial" panose="020B0604020202090204" pitchFamily="34" charset="0"/>
+                          <a:cs typeface="Arial" panose="020B0604020202090204" pitchFamily="34" charset="0"/>
+                        </a:rPr>
+                        <a:t>(52.6%)</a:t>
+                      </a:r>
+                      <a:endParaRPr lang="en-US" sz="3200" b="0" dirty="0">
+                        <a:effectLst/>
+                        <a:latin typeface="Arial" panose="020B0604020202090204" pitchFamily="34" charset="0"/>
+                        <a:cs typeface="Arial" panose="020B0604020202090204" pitchFamily="34" charset="0"/>
+                      </a:endParaRPr>
                     </a:p>
                   </a:txBody>
                   <a:tcPr marL="10559" marR="10559" marT="10559" marB="10559" anchor="ctr">
@@ -8866,11 +9158,6 @@
                     <a:noFill/>
                   </a:tcPr>
                 </a:tc>
-                <a:extLst>
-                  <a:ext uri="{0D108BD9-81ED-4DB2-BD59-A6C34878D82A}">
-                    <a16:rowId xmlns:a16="http://schemas.microsoft.com/office/drawing/2014/main" val="3210427101"/>
-                  </a:ext>
-                </a:extLst>
               </a:tr>
             </a:tbl>
           </a:graphicData>
@@ -8878,13 +9165,7 @@
       </p:graphicFrame>
       <p:sp>
         <p:nvSpPr>
-          <p:cNvPr id="87" name="Rectangle 5">
-            <a:extLst>
-              <a:ext uri="{FF2B5EF4-FFF2-40B4-BE49-F238E27FC236}">
-                <a16:creationId xmlns:a16="http://schemas.microsoft.com/office/drawing/2014/main" id="{17343BF4-91F3-1764-1A69-25CA4891C27A}"/>
-              </a:ext>
-            </a:extLst>
-          </p:cNvPr>
+          <p:cNvPr id="87" name="Rectangle 5"/>
           <p:cNvSpPr>
             <a:spLocks noChangeArrowheads="1"/>
           </p:cNvSpPr>
@@ -8934,9 +9215,6 @@
         </p:spPr>
         <p:txBody>
           <a:bodyPr vert="horz" wrap="square" lIns="91440" tIns="45720" rIns="91440" bIns="45720" numCol="1" anchor="ctr" anchorCtr="0" compatLnSpc="1">
-            <a:prstTxWarp prst="textNoShape">
-              <a:avLst/>
-            </a:prstTxWarp>
             <a:spAutoFit/>
           </a:bodyPr>
           <a:lstStyle/>
@@ -8955,7 +9233,6 @@
               <a:buSzTx/>
               <a:buFontTx/>
               <a:buNone/>
-              <a:tabLst/>
             </a:pPr>
             <a:br>
               <a:rPr kumimoji="0" lang="en-US" altLang="en-US" sz="1800" b="0" i="0" u="none" strike="noStrike" cap="none" normalizeH="0" baseline="0">
@@ -8966,7 +9243,7 @@
                   <a:schemeClr val="tx1"/>
                 </a:solidFill>
                 <a:effectLst/>
-                <a:latin typeface="Arial" panose="020B0604020202020204" pitchFamily="34" charset="0"/>
+                <a:latin typeface="Arial" panose="020B0604020202090204" pitchFamily="34" charset="0"/>
               </a:rPr>
             </a:br>
             <a:endParaRPr kumimoji="0" lang="en-US" altLang="en-US" sz="1800" b="0" i="0" u="none" strike="noStrike" cap="none" normalizeH="0" baseline="0">
@@ -8977,75 +9254,21 @@
                 <a:schemeClr val="tx1"/>
               </a:solidFill>
               <a:effectLst/>
-              <a:latin typeface="Arial" panose="020B0604020202020204" pitchFamily="34" charset="0"/>
+              <a:latin typeface="Arial" panose="020B0604020202090204" pitchFamily="34" charset="0"/>
             </a:endParaRPr>
           </a:p>
         </p:txBody>
       </p:sp>
       <p:sp>
         <p:nvSpPr>
-          <p:cNvPr id="88" name="TextBox 87">
-            <a:extLst>
-              <a:ext uri="{FF2B5EF4-FFF2-40B4-BE49-F238E27FC236}">
-                <a16:creationId xmlns:a16="http://schemas.microsoft.com/office/drawing/2014/main" id="{800242B9-5919-FD19-5086-C257ACA8AC9D}"/>
-              </a:ext>
-            </a:extLst>
-          </p:cNvPr>
+          <p:cNvPr id="89" name="TextBox 88"/>
           <p:cNvSpPr txBox="1"/>
           <p:nvPr/>
         </p:nvSpPr>
         <p:spPr>
           <a:xfrm>
-            <a:off x="99504" y="17754733"/>
-            <a:ext cx="8443444" cy="784830"/>
-          </a:xfrm>
-          <a:prstGeom prst="rect">
-            <a:avLst/>
-          </a:prstGeom>
-          <a:solidFill>
-            <a:schemeClr val="tx2"/>
-          </a:solidFill>
-        </p:spPr>
-        <p:txBody>
-          <a:bodyPr wrap="square">
-            <a:spAutoFit/>
-          </a:bodyPr>
-          <a:lstStyle/>
-          <a:p>
-            <a:r>
-              <a:rPr lang="en-US" sz="4500" b="1" spc="-112" dirty="0">
-                <a:solidFill>
-                  <a:schemeClr val="bg1"/>
-                </a:solidFill>
-                <a:latin typeface="Century Gothic" panose="020B0502020202020204" pitchFamily="34" charset="0"/>
-                <a:cs typeface="Segoe UI" panose="020B0502040204020203" pitchFamily="34" charset="0"/>
-              </a:rPr>
-              <a:t>Measures</a:t>
-            </a:r>
-            <a:endParaRPr lang="en-US" sz="4500" dirty="0">
-              <a:solidFill>
-                <a:schemeClr val="bg1"/>
-              </a:solidFill>
-            </a:endParaRPr>
-          </a:p>
-        </p:txBody>
-      </p:sp>
-      <p:sp>
-        <p:nvSpPr>
-          <p:cNvPr id="89" name="TextBox 88">
-            <a:extLst>
-              <a:ext uri="{FF2B5EF4-FFF2-40B4-BE49-F238E27FC236}">
-                <a16:creationId xmlns:a16="http://schemas.microsoft.com/office/drawing/2014/main" id="{4E5D93F4-1FF8-C9BB-316B-436004596A35}"/>
-              </a:ext>
-            </a:extLst>
-          </p:cNvPr>
-          <p:cNvSpPr txBox="1"/>
-          <p:nvPr/>
-        </p:nvSpPr>
-        <p:spPr>
-          <a:xfrm>
-            <a:off x="20889732" y="14771692"/>
-            <a:ext cx="17613482" cy="784830"/>
+            <a:off x="20710662" y="17540927"/>
+            <a:ext cx="17613482" cy="783590"/>
           </a:xfrm>
           <a:prstGeom prst="rect">
             <a:avLst/>
@@ -9066,7 +9289,7 @@
                 <a:latin typeface="Century Gothic" panose="020B0502020202020204" pitchFamily="34" charset="0"/>
                 <a:cs typeface="Segoe UI" panose="020B0502040204020203" pitchFamily="34" charset="0"/>
               </a:rPr>
-              <a:t>Risk Drivers of Predictions</a:t>
+              <a:t>3. Risk Drivers of Predictions</a:t>
             </a:r>
             <a:endParaRPr lang="en-US" sz="4500" dirty="0"/>
           </a:p>
@@ -9074,20 +9297,14 @@
       </p:sp>
       <p:sp>
         <p:nvSpPr>
-          <p:cNvPr id="90" name="TextBox 89">
-            <a:extLst>
-              <a:ext uri="{FF2B5EF4-FFF2-40B4-BE49-F238E27FC236}">
-                <a16:creationId xmlns:a16="http://schemas.microsoft.com/office/drawing/2014/main" id="{DB094DC2-D6CB-BB9E-BF96-CB596A963E10}"/>
-              </a:ext>
-            </a:extLst>
-          </p:cNvPr>
+          <p:cNvPr id="90" name="TextBox 89"/>
           <p:cNvSpPr txBox="1"/>
           <p:nvPr/>
         </p:nvSpPr>
         <p:spPr>
           <a:xfrm>
-            <a:off x="99504" y="13745067"/>
-            <a:ext cx="8443444" cy="4108817"/>
+            <a:off x="133159" y="13630767"/>
+            <a:ext cx="8443444" cy="3397250"/>
           </a:xfrm>
           <a:prstGeom prst="rect">
             <a:avLst/>
@@ -9111,15 +9328,22 @@
               <a:buAutoNum type="arabicPeriod"/>
             </a:pPr>
             <a:r>
-              <a:rPr lang="en-US" sz="3200" spc="-20" dirty="0">
+              <a:rPr lang="en-US" sz="3000" spc="-20" dirty="0">
                 <a:solidFill>
                   <a:schemeClr val="tx1"/>
                 </a:solidFill>
-                <a:latin typeface="Cambria" panose="02040503050406030204" pitchFamily="18" charset="0"/>
-                <a:cs typeface="Tahoma"/>
+                <a:latin typeface="Times New Roman" panose="02020503050405090304" charset="0"/>
+                <a:cs typeface="Times New Roman" panose="02020503050405090304" charset="0"/>
               </a:rPr>
               <a:t>Evaluate and compare the efficacy of various models in differentiating healthy controls from PD cases.</a:t>
             </a:r>
+            <a:endParaRPr lang="en-US" sz="3000" spc="-20" dirty="0">
+              <a:solidFill>
+                <a:schemeClr val="tx1"/>
+              </a:solidFill>
+              <a:latin typeface="Times New Roman" panose="02020503050405090304" charset="0"/>
+              <a:cs typeface="Times New Roman" panose="02020503050405090304" charset="0"/>
+            </a:endParaRPr>
           </a:p>
           <a:p>
             <a:pPr marL="527050" marR="102235" indent="-514350">
@@ -9133,15 +9357,22 @@
               <a:buAutoNum type="arabicPeriod"/>
             </a:pPr>
             <a:r>
-              <a:rPr lang="en-US" sz="3200" spc="-20" dirty="0">
+              <a:rPr lang="en-US" sz="3000" spc="-20" dirty="0">
                 <a:solidFill>
                   <a:schemeClr val="tx1"/>
                 </a:solidFill>
-                <a:latin typeface="Cambria" panose="02040503050406030204" pitchFamily="18" charset="0"/>
-                <a:cs typeface="Tahoma"/>
+                <a:latin typeface="Times New Roman" panose="02020503050405090304" charset="0"/>
+                <a:cs typeface="Times New Roman" panose="02020503050405090304" charset="0"/>
               </a:rPr>
               <a:t>Deploy the optimal model to further categorize PD cases into PD and PD-plus subgroups.</a:t>
             </a:r>
+            <a:endParaRPr lang="en-US" sz="3000" spc="-20" dirty="0">
+              <a:solidFill>
+                <a:schemeClr val="tx1"/>
+              </a:solidFill>
+              <a:latin typeface="Times New Roman" panose="02020503050405090304" charset="0"/>
+              <a:cs typeface="Times New Roman" panose="02020503050405090304" charset="0"/>
+            </a:endParaRPr>
           </a:p>
           <a:p>
             <a:pPr marL="527050" marR="102235" indent="-514350">
@@ -9155,28 +9386,2426 @@
               <a:buAutoNum type="arabicPeriod"/>
             </a:pPr>
             <a:r>
-              <a:rPr lang="en-US" sz="3200" spc="-20" dirty="0">
+              <a:rPr lang="en-US" sz="3000" spc="-20" dirty="0">
                 <a:solidFill>
                   <a:schemeClr val="tx1"/>
                 </a:solidFill>
-                <a:latin typeface="Cambria" panose="02040503050406030204" pitchFamily="18" charset="0"/>
-                <a:cs typeface="Tahoma"/>
+                <a:latin typeface="Times New Roman" panose="02020503050405090304" charset="0"/>
+                <a:cs typeface="Times New Roman" panose="02020503050405090304" charset="0"/>
               </a:rPr>
               <a:t>Interpret individual predictions and identify key risk drivers through SHAP analysis.</a:t>
             </a:r>
-            <a:endParaRPr lang="en-US" sz="3200" spc="-20" dirty="0">
-              <a:latin typeface="Cambria" panose="02040503050406030204" pitchFamily="18" charset="0"/>
-              <a:cs typeface="Tahoma"/>
+            <a:endParaRPr lang="en-US" sz="3000" spc="-20" dirty="0">
+              <a:latin typeface="Times New Roman" panose="02020503050405090304" charset="0"/>
+              <a:cs typeface="Times New Roman" panose="02020503050405090304" charset="0"/>
             </a:endParaRPr>
+          </a:p>
+        </p:txBody>
+      </p:sp>
+      <p:sp>
+        <p:nvSpPr>
+          <p:cNvPr id="7" name="文本框 6"/>
+          <p:cNvSpPr txBox="1"/>
+          <p:nvPr/>
+        </p:nvSpPr>
+        <p:spPr>
+          <a:xfrm>
+            <a:off x="205105" y="4612640"/>
+            <a:ext cx="8480425" cy="4109085"/>
+          </a:xfrm>
+          <a:prstGeom prst="rect">
+            <a:avLst/>
+          </a:prstGeom>
+          <a:noFill/>
+        </p:spPr>
+        <p:txBody>
+          <a:bodyPr wrap="square" rtlCol="0">
+            <a:noAutofit/>
+          </a:bodyPr>
+          <a:p>
+            <a:r>
+              <a:rPr lang="en-US" altLang="zh-CN" sz="3200">
+                <a:latin typeface="Times New Roman" panose="02020503050405090304" charset="0"/>
+                <a:cs typeface="Times New Roman" panose="02020503050405090304" charset="0"/>
+              </a:rPr>
+              <a:t>Parkinson's disease (PD) and atypical parkinsonism (PD-plus) are clinically difficult to distinguish. Using C-OPN data (n = 3,433), we applied a two-stage classification approach — first separating healthy controls from parkinsonism cases, then distinguishing PD from PD-plus — comparing five machine learning models via 5-fold cross-validation.</a:t>
+            </a:r>
+            <a:endParaRPr lang="en-US" altLang="zh-CN" sz="3200">
+              <a:latin typeface="Times New Roman" panose="02020503050405090304" charset="0"/>
+              <a:cs typeface="Times New Roman" panose="02020503050405090304" charset="0"/>
+            </a:endParaRPr>
+          </a:p>
+        </p:txBody>
+      </p:sp>
+      <p:sp>
+        <p:nvSpPr>
+          <p:cNvPr id="8" name="文本框 7"/>
+          <p:cNvSpPr txBox="1"/>
+          <p:nvPr/>
+        </p:nvSpPr>
+        <p:spPr>
+          <a:xfrm>
+            <a:off x="133350" y="9514840"/>
+            <a:ext cx="8282305" cy="3322955"/>
+          </a:xfrm>
+          <a:prstGeom prst="rect">
+            <a:avLst/>
+          </a:prstGeom>
+          <a:noFill/>
+        </p:spPr>
+        <p:txBody>
+          <a:bodyPr wrap="square" rtlCol="0">
+            <a:spAutoFit/>
+          </a:bodyPr>
+          <a:p>
+            <a:pPr marL="285750" indent="-285750">
+              <a:buFont typeface="Arial" panose="020B0604020202090204" pitchFamily="34" charset="0"/>
+              <a:buChar char="•"/>
+            </a:pPr>
+            <a:r>
+              <a:rPr lang="en-US" altLang="zh-CN" sz="3000">
+                <a:latin typeface="Times New Roman" panose="02020503050405090304" charset="0"/>
+                <a:cs typeface="Times New Roman" panose="02020503050405090304" charset="0"/>
+              </a:rPr>
+              <a:t>PD is the 2nd most common neurodegenerative disorder, affecting 110,000+ Canadians.</a:t>
+            </a:r>
+            <a:endParaRPr lang="en-US" altLang="zh-CN" sz="3000">
+              <a:latin typeface="Times New Roman" panose="02020503050405090304" charset="0"/>
+              <a:cs typeface="Times New Roman" panose="02020503050405090304" charset="0"/>
+            </a:endParaRPr>
+          </a:p>
+          <a:p>
+            <a:pPr marL="285750" indent="-285750">
+              <a:buFont typeface="Arial" panose="020B0604020202090204" pitchFamily="34" charset="0"/>
+              <a:buChar char="•"/>
+            </a:pPr>
+            <a:r>
+              <a:rPr lang="en-US" altLang="zh-CN" sz="3000">
+                <a:latin typeface="Times New Roman" panose="02020503050405090304" charset="0"/>
+                <a:cs typeface="Times New Roman" panose="02020503050405090304" charset="0"/>
+              </a:rPr>
+              <a:t>PD-PLus (PSP,MSA, CSB, DLB) shares motor features with PD but progresses faster and responds poorly to levodopa</a:t>
+            </a:r>
+            <a:endParaRPr lang="en-US" altLang="zh-CN" sz="3000">
+              <a:latin typeface="Times New Roman" panose="02020503050405090304" charset="0"/>
+              <a:cs typeface="Times New Roman" panose="02020503050405090304" charset="0"/>
+            </a:endParaRPr>
+          </a:p>
+          <a:p>
+            <a:pPr marL="285750" indent="-285750">
+              <a:buFont typeface="Arial" panose="020B0604020202090204" pitchFamily="34" charset="0"/>
+              <a:buChar char="•"/>
+            </a:pPr>
+            <a:r>
+              <a:rPr lang="en-US" altLang="zh-CN" sz="3000">
+                <a:latin typeface="Times New Roman" panose="02020503050405090304" charset="0"/>
+                <a:cs typeface="Times New Roman" panose="02020503050405090304" charset="0"/>
+              </a:rPr>
+              <a:t>No Reliable Clinical tool existes to distinguish PD and PD-Plus at scale. </a:t>
+            </a:r>
+            <a:endParaRPr lang="en-US" altLang="zh-CN" sz="3000">
+              <a:latin typeface="Times New Roman" panose="02020503050405090304" charset="0"/>
+              <a:cs typeface="Times New Roman" panose="02020503050405090304" charset="0"/>
+            </a:endParaRPr>
+          </a:p>
+        </p:txBody>
+      </p:sp>
+      <p:graphicFrame>
+        <p:nvGraphicFramePr>
+          <p:cNvPr id="13" name="表格 12"/>
+          <p:cNvGraphicFramePr/>
+          <p:nvPr/>
+        </p:nvGraphicFramePr>
+        <p:xfrm>
+          <a:off x="8542655" y="18618835"/>
+          <a:ext cx="12593955" cy="5436235"/>
+        </p:xfrm>
+        <a:graphic>
+          <a:graphicData uri="http://schemas.openxmlformats.org/drawingml/2006/table">
+            <a:tbl>
+              <a:tblPr firstRow="1" bandRow="1">
+                <a:tableStyleId>{9D7B26C5-4107-4FEC-AEDC-1716B250A1EF}</a:tableStyleId>
+              </a:tblPr>
+              <a:tblGrid>
+                <a:gridCol w="2552065"/>
+                <a:gridCol w="1553845"/>
+                <a:gridCol w="1934845"/>
+                <a:gridCol w="1946275"/>
+                <a:gridCol w="1402715"/>
+                <a:gridCol w="1388110"/>
+                <a:gridCol w="1816100"/>
+              </a:tblGrid>
+              <a:tr h="518160">
+                <a:tc>
+                  <a:txBody>
+                    <a:bodyPr/>
+                    <a:p>
+                      <a:pPr algn="ctr">
+                        <a:buNone/>
+                      </a:pPr>
+                      <a:r>
+                        <a:rPr lang="en-US" altLang="zh-CN" sz="2800"/>
+                        <a:t> Model</a:t>
+                      </a:r>
+                      <a:endParaRPr lang="en-US" altLang="zh-CN" sz="2800"/>
+                    </a:p>
+                  </a:txBody>
+                  <a:tcPr/>
+                </a:tc>
+                <a:tc>
+                  <a:txBody>
+                    <a:bodyPr/>
+                    <a:p>
+                      <a:pPr algn="ctr">
+                        <a:buNone/>
+                      </a:pPr>
+                      <a:r>
+                        <a:rPr lang="en-US" altLang="zh-CN" sz="2800"/>
+                        <a:t>C-</a:t>
+                      </a:r>
+                      <a:r>
+                        <a:rPr lang="en-US" altLang="zh-CN" sz="2800"/>
+                        <a:t>index</a:t>
+                      </a:r>
+                      <a:endParaRPr lang="en-US" altLang="zh-CN" sz="2800"/>
+                    </a:p>
+                  </a:txBody>
+                  <a:tcPr/>
+                </a:tc>
+                <a:tc>
+                  <a:txBody>
+                    <a:bodyPr/>
+                    <a:p>
+                      <a:pPr algn="ctr">
+                        <a:buNone/>
+                      </a:pPr>
+                      <a:r>
+                        <a:rPr lang="en-US" altLang="zh-CN" sz="2800"/>
+                        <a:t>Sensitivity</a:t>
+                      </a:r>
+                      <a:endParaRPr lang="en-US" altLang="zh-CN" sz="2800"/>
+                    </a:p>
+                  </a:txBody>
+                  <a:tcPr/>
+                </a:tc>
+                <a:tc>
+                  <a:txBody>
+                    <a:bodyPr/>
+                    <a:p>
+                      <a:pPr algn="ctr">
+                        <a:buNone/>
+                      </a:pPr>
+                      <a:r>
+                        <a:rPr lang="en-US" altLang="zh-CN" sz="2800"/>
+                        <a:t>Specificity</a:t>
+                      </a:r>
+                      <a:endParaRPr lang="en-US" altLang="zh-CN" sz="2800"/>
+                    </a:p>
+                  </a:txBody>
+                  <a:tcPr/>
+                </a:tc>
+                <a:tc>
+                  <a:txBody>
+                    <a:bodyPr/>
+                    <a:p>
+                      <a:pPr algn="ctr">
+                        <a:buNone/>
+                      </a:pPr>
+                      <a:r>
+                        <a:rPr lang="en-US" altLang="zh-CN" sz="2800"/>
+                        <a:t>PPV</a:t>
+                      </a:r>
+                      <a:endParaRPr lang="en-US" altLang="zh-CN" sz="2800"/>
+                    </a:p>
+                  </a:txBody>
+                  <a:tcPr/>
+                </a:tc>
+                <a:tc>
+                  <a:txBody>
+                    <a:bodyPr/>
+                    <a:p>
+                      <a:pPr algn="ctr">
+                        <a:buNone/>
+                      </a:pPr>
+                      <a:r>
+                        <a:rPr lang="en-US" altLang="zh-CN" sz="2800"/>
+                        <a:t>NPV</a:t>
+                      </a:r>
+                      <a:endParaRPr lang="en-US" altLang="zh-CN" sz="2800"/>
+                    </a:p>
+                  </a:txBody>
+                  <a:tcPr/>
+                </a:tc>
+                <a:tc>
+                  <a:txBody>
+                    <a:bodyPr/>
+                    <a:p>
+                      <a:pPr algn="ctr">
+                        <a:buNone/>
+                      </a:pPr>
+                      <a:r>
+                        <a:rPr lang="en-US" altLang="zh-CN" sz="2800"/>
+                        <a:t>F1-Score</a:t>
+                      </a:r>
+                      <a:endParaRPr lang="en-US" altLang="zh-CN" sz="2800"/>
+                    </a:p>
+                  </a:txBody>
+                  <a:tcPr/>
+                </a:tc>
+              </a:tr>
+              <a:tr h="1224280">
+                <a:tc>
+                  <a:txBody>
+                    <a:bodyPr/>
+                    <a:p>
+                      <a:pPr algn="ctr">
+                        <a:buNone/>
+                      </a:pPr>
+                      <a:r>
+                        <a:rPr lang="en-US" altLang="zh-CN" sz="3600"/>
+                        <a:t>Logistic </a:t>
+                      </a:r>
+                      <a:endParaRPr lang="en-US" altLang="zh-CN" sz="3600"/>
+                    </a:p>
+                    <a:p>
+                      <a:pPr algn="ctr">
+                        <a:buNone/>
+                      </a:pPr>
+                      <a:r>
+                        <a:rPr lang="en-US" altLang="zh-CN" sz="3600"/>
+                        <a:t>Regression</a:t>
+                      </a:r>
+                      <a:endParaRPr lang="en-US" altLang="zh-CN" sz="3600"/>
+                    </a:p>
+                  </a:txBody>
+                  <a:tcPr/>
+                </a:tc>
+                <a:tc>
+                  <a:txBody>
+                    <a:bodyPr/>
+                    <a:p>
+                      <a:pPr algn="ctr">
+                        <a:buNone/>
+                      </a:pPr>
+                      <a:r>
+                        <a:rPr lang="en-US" altLang="zh-CN" sz="3600"/>
+                        <a:t>0.908</a:t>
+                      </a:r>
+                      <a:endParaRPr lang="en-US" altLang="zh-CN" sz="3600"/>
+                    </a:p>
+                    <a:p>
+                      <a:pPr algn="ctr">
+                        <a:buNone/>
+                      </a:pPr>
+                      <a:endParaRPr lang="en-US" altLang="zh-CN" sz="3600"/>
+                    </a:p>
+                  </a:txBody>
+                  <a:tcPr/>
+                </a:tc>
+                <a:tc>
+                  <a:txBody>
+                    <a:bodyPr/>
+                    <a:p>
+                      <a:pPr algn="ctr">
+                        <a:buNone/>
+                      </a:pPr>
+                      <a:r>
+                        <a:rPr lang="en-US" altLang="zh-CN" sz="3600"/>
+                        <a:t>0.805</a:t>
+                      </a:r>
+                      <a:endParaRPr lang="en-US" altLang="zh-CN" sz="3600"/>
+                    </a:p>
+                    <a:p>
+                      <a:pPr algn="ctr">
+                        <a:buNone/>
+                      </a:pPr>
+                      <a:endParaRPr lang="en-US" altLang="zh-CN" sz="3600"/>
+                    </a:p>
+                  </a:txBody>
+                  <a:tcPr/>
+                </a:tc>
+                <a:tc>
+                  <a:txBody>
+                    <a:bodyPr/>
+                    <a:p>
+                      <a:pPr algn="ctr">
+                        <a:buNone/>
+                      </a:pPr>
+                      <a:r>
+                        <a:rPr lang="en-US" altLang="zh-CN" sz="3600"/>
+                        <a:t>0.854</a:t>
+                      </a:r>
+                      <a:endParaRPr lang="en-US" altLang="zh-CN" sz="3600"/>
+                    </a:p>
+                    <a:p>
+                      <a:pPr algn="ctr">
+                        <a:buNone/>
+                      </a:pPr>
+                      <a:endParaRPr lang="en-US" altLang="zh-CN" sz="3600"/>
+                    </a:p>
+                  </a:txBody>
+                  <a:tcPr/>
+                </a:tc>
+                <a:tc>
+                  <a:txBody>
+                    <a:bodyPr/>
+                    <a:p>
+                      <a:pPr algn="ctr">
+                        <a:buNone/>
+                      </a:pPr>
+                      <a:r>
+                        <a:rPr lang="en-US" altLang="zh-CN" sz="3600"/>
+                        <a:t>0.976</a:t>
+                      </a:r>
+                      <a:endParaRPr lang="en-US" altLang="zh-CN" sz="3600"/>
+                    </a:p>
+                    <a:p>
+                      <a:pPr algn="ctr">
+                        <a:buNone/>
+                      </a:pPr>
+                      <a:endParaRPr lang="en-US" altLang="zh-CN" sz="3600"/>
+                    </a:p>
+                  </a:txBody>
+                  <a:tcPr/>
+                </a:tc>
+                <a:tc>
+                  <a:txBody>
+                    <a:bodyPr/>
+                    <a:p>
+                      <a:pPr algn="ctr">
+                        <a:buNone/>
+                      </a:pPr>
+                      <a:r>
+                        <a:rPr lang="en-US" altLang="zh-CN" sz="3600"/>
+                        <a:t>0.372</a:t>
+                      </a:r>
+                      <a:endParaRPr lang="en-US" altLang="zh-CN" sz="3600"/>
+                    </a:p>
+                  </a:txBody>
+                  <a:tcPr/>
+                </a:tc>
+                <a:tc>
+                  <a:txBody>
+                    <a:bodyPr/>
+                    <a:p>
+                      <a:pPr algn="ctr">
+                        <a:buNone/>
+                      </a:pPr>
+                      <a:r>
+                        <a:rPr lang="en-US" altLang="zh-CN" sz="3600"/>
+                        <a:t>0.882</a:t>
+                      </a:r>
+                      <a:endParaRPr lang="en-US" altLang="zh-CN" sz="3600"/>
+                    </a:p>
+                  </a:txBody>
+                  <a:tcPr/>
+                </a:tc>
+              </a:tr>
+              <a:tr h="381000">
+                <a:tc>
+                  <a:txBody>
+                    <a:bodyPr/>
+                    <a:p>
+                      <a:pPr algn="ctr">
+                        <a:buNone/>
+                      </a:pPr>
+                      <a:r>
+                        <a:rPr lang="en-US" altLang="zh-CN" sz="3600"/>
+                        <a:t>Random </a:t>
+                      </a:r>
+                      <a:endParaRPr lang="en-US" altLang="zh-CN" sz="3600"/>
+                    </a:p>
+                    <a:p>
+                      <a:pPr algn="ctr">
+                        <a:buNone/>
+                      </a:pPr>
+                      <a:r>
+                        <a:rPr lang="en-US" altLang="zh-CN" sz="3600"/>
+                        <a:t>Forest</a:t>
+                      </a:r>
+                      <a:endParaRPr lang="en-US" altLang="zh-CN" sz="3600"/>
+                    </a:p>
+                  </a:txBody>
+                  <a:tcPr/>
+                </a:tc>
+                <a:tc>
+                  <a:txBody>
+                    <a:bodyPr/>
+                    <a:p>
+                      <a:pPr algn="ctr">
+                        <a:buNone/>
+                      </a:pPr>
+                      <a:r>
+                        <a:rPr lang="en-US" altLang="zh-CN" sz="3600"/>
+                        <a:t>0.912</a:t>
+                      </a:r>
+                      <a:endParaRPr lang="en-US" altLang="zh-CN" sz="3600"/>
+                    </a:p>
+                  </a:txBody>
+                  <a:tcPr/>
+                </a:tc>
+                <a:tc>
+                  <a:txBody>
+                    <a:bodyPr/>
+                    <a:p>
+                      <a:pPr algn="ctr">
+                        <a:buNone/>
+                      </a:pPr>
+                      <a:r>
+                        <a:rPr lang="en-US" altLang="zh-CN" sz="3600"/>
+                        <a:t>0.817</a:t>
+                      </a:r>
+                      <a:endParaRPr lang="en-US" altLang="zh-CN" sz="3600"/>
+                    </a:p>
+                    <a:p>
+                      <a:pPr algn="ctr">
+                        <a:buNone/>
+                      </a:pPr>
+                      <a:endParaRPr lang="en-US" altLang="zh-CN" sz="3600"/>
+                    </a:p>
+                  </a:txBody>
+                  <a:tcPr/>
+                </a:tc>
+                <a:tc>
+                  <a:txBody>
+                    <a:bodyPr/>
+                    <a:p>
+                      <a:pPr algn="ctr">
+                        <a:buNone/>
+                      </a:pPr>
+                      <a:r>
+                        <a:rPr lang="en-US" altLang="zh-CN" sz="3600"/>
+                        <a:t>0.854</a:t>
+                      </a:r>
+                      <a:endParaRPr lang="en-US" altLang="zh-CN" sz="3600"/>
+                    </a:p>
+                    <a:p>
+                      <a:pPr algn="ctr">
+                        <a:buNone/>
+                      </a:pPr>
+                      <a:endParaRPr lang="en-US" altLang="zh-CN" sz="3600"/>
+                    </a:p>
+                  </a:txBody>
+                  <a:tcPr/>
+                </a:tc>
+                <a:tc>
+                  <a:txBody>
+                    <a:bodyPr/>
+                    <a:p>
+                      <a:pPr algn="ctr">
+                        <a:buNone/>
+                      </a:pPr>
+                      <a:r>
+                        <a:rPr lang="en-US" altLang="zh-CN" sz="3600"/>
+                        <a:t>0.976</a:t>
+                      </a:r>
+                      <a:endParaRPr lang="en-US" altLang="zh-CN" sz="3600"/>
+                    </a:p>
+                  </a:txBody>
+                  <a:tcPr/>
+                </a:tc>
+                <a:tc>
+                  <a:txBody>
+                    <a:bodyPr/>
+                    <a:p>
+                      <a:pPr algn="ctr">
+                        <a:buNone/>
+                      </a:pPr>
+                      <a:r>
+                        <a:rPr lang="en-US" altLang="zh-CN" sz="3600"/>
+                        <a:t>0.387</a:t>
+                      </a:r>
+                      <a:endParaRPr lang="en-US" altLang="zh-CN" sz="3600"/>
+                    </a:p>
+                  </a:txBody>
+                  <a:tcPr/>
+                </a:tc>
+                <a:tc>
+                  <a:txBody>
+                    <a:bodyPr/>
+                    <a:p>
+                      <a:pPr algn="ctr">
+                        <a:buNone/>
+                      </a:pPr>
+                      <a:r>
+                        <a:rPr lang="en-US" altLang="zh-CN" sz="3600"/>
+                        <a:t>0.889</a:t>
+                      </a:r>
+                      <a:endParaRPr lang="en-US" altLang="zh-CN" sz="3600"/>
+                    </a:p>
+                  </a:txBody>
+                  <a:tcPr/>
+                </a:tc>
+              </a:tr>
+              <a:tr h="381000">
+                <a:tc>
+                  <a:txBody>
+                    <a:bodyPr/>
+                    <a:p>
+                      <a:pPr algn="ctr">
+                        <a:buNone/>
+                      </a:pPr>
+                      <a:r>
+                        <a:rPr lang="en-US" altLang="zh-CN" sz="3600"/>
+                        <a:t>SVM</a:t>
+                      </a:r>
+                      <a:endParaRPr lang="en-US" altLang="zh-CN" sz="3600"/>
+                    </a:p>
+                  </a:txBody>
+                  <a:tcPr/>
+                </a:tc>
+                <a:tc>
+                  <a:txBody>
+                    <a:bodyPr/>
+                    <a:p>
+                      <a:pPr algn="ctr">
+                        <a:buNone/>
+                      </a:pPr>
+                      <a:r>
+                        <a:rPr lang="en-US" altLang="zh-CN" sz="3600"/>
+                        <a:t>0.873</a:t>
+                      </a:r>
+                      <a:endParaRPr lang="en-US" altLang="zh-CN" sz="3600"/>
+                    </a:p>
+                  </a:txBody>
+                  <a:tcPr/>
+                </a:tc>
+                <a:tc>
+                  <a:txBody>
+                    <a:bodyPr/>
+                    <a:p>
+                      <a:pPr algn="ctr">
+                        <a:buNone/>
+                      </a:pPr>
+                      <a:r>
+                        <a:rPr lang="en-US" altLang="zh-CN" sz="3600"/>
+                        <a:t>0.676</a:t>
+                      </a:r>
+                      <a:endParaRPr lang="en-US" altLang="zh-CN" sz="3600"/>
+                    </a:p>
+                  </a:txBody>
+                  <a:tcPr/>
+                </a:tc>
+                <a:tc>
+                  <a:txBody>
+                    <a:bodyPr/>
+                    <a:p>
+                      <a:pPr algn="ctr">
+                        <a:buNone/>
+                      </a:pPr>
+                      <a:r>
+                        <a:rPr lang="en-US" altLang="zh-CN" sz="3600"/>
+                        <a:t>0.988</a:t>
+                      </a:r>
+                      <a:endParaRPr lang="en-US" altLang="zh-CN" sz="3600"/>
+                    </a:p>
+                  </a:txBody>
+                  <a:tcPr/>
+                </a:tc>
+                <a:tc>
+                  <a:txBody>
+                    <a:bodyPr/>
+                    <a:p>
+                      <a:pPr algn="ctr">
+                        <a:buNone/>
+                      </a:pPr>
+                      <a:r>
+                        <a:rPr lang="en-US" altLang="zh-CN" sz="3600"/>
+                        <a:t>0.988</a:t>
+                      </a:r>
+                      <a:endParaRPr lang="en-US" altLang="zh-CN" sz="3600"/>
+                    </a:p>
+                  </a:txBody>
+                  <a:tcPr/>
+                </a:tc>
+                <a:tc>
+                  <a:txBody>
+                    <a:bodyPr/>
+                    <a:p>
+                      <a:pPr algn="ctr">
+                        <a:buNone/>
+                      </a:pPr>
+                      <a:r>
+                        <a:rPr lang="en-US" altLang="zh-CN" sz="3600"/>
+                        <a:t>0.292</a:t>
+                      </a:r>
+                      <a:endParaRPr lang="en-US" altLang="zh-CN" sz="3600"/>
+                    </a:p>
+                  </a:txBody>
+                  <a:tcPr/>
+                </a:tc>
+                <a:tc>
+                  <a:txBody>
+                    <a:bodyPr/>
+                    <a:p>
+                      <a:pPr algn="ctr">
+                        <a:buNone/>
+                      </a:pPr>
+                      <a:r>
+                        <a:rPr lang="en-US" altLang="zh-CN" sz="3600"/>
+                        <a:t>0.806</a:t>
+                      </a:r>
+                      <a:endParaRPr lang="en-US" altLang="zh-CN" sz="3600"/>
+                    </a:p>
+                  </a:txBody>
+                  <a:tcPr/>
+                </a:tc>
+              </a:tr>
+              <a:tr h="381000">
+                <a:tc>
+                  <a:txBody>
+                    <a:bodyPr/>
+                    <a:p>
+                      <a:pPr algn="ctr">
+                        <a:buNone/>
+                      </a:pPr>
+                      <a:r>
+                        <a:rPr lang="en-US" altLang="zh-CN" sz="3600"/>
+                        <a:t>Gradiant</a:t>
+                      </a:r>
+                      <a:endParaRPr lang="en-US" altLang="zh-CN" sz="3600"/>
+                    </a:p>
+                    <a:p>
+                      <a:pPr algn="ctr">
+                        <a:buNone/>
+                      </a:pPr>
+                      <a:r>
+                        <a:rPr lang="en-US" altLang="zh-CN" sz="3600"/>
+                        <a:t>Boosting</a:t>
+                      </a:r>
+                      <a:endParaRPr lang="en-US" altLang="zh-CN" sz="3600"/>
+                    </a:p>
+                  </a:txBody>
+                  <a:tcPr/>
+                </a:tc>
+                <a:tc>
+                  <a:txBody>
+                    <a:bodyPr/>
+                    <a:p>
+                      <a:pPr algn="ctr">
+                        <a:buNone/>
+                      </a:pPr>
+                      <a:r>
+                        <a:rPr lang="en-US" altLang="zh-CN" sz="3600"/>
+                        <a:t>0.908</a:t>
+                      </a:r>
+                      <a:endParaRPr lang="en-US" altLang="zh-CN" sz="3600"/>
+                    </a:p>
+                    <a:p>
+                      <a:pPr algn="ctr">
+                        <a:buNone/>
+                      </a:pPr>
+                      <a:endParaRPr lang="en-US" altLang="zh-CN" sz="3600"/>
+                    </a:p>
+                  </a:txBody>
+                  <a:tcPr/>
+                </a:tc>
+                <a:tc>
+                  <a:txBody>
+                    <a:bodyPr/>
+                    <a:p>
+                      <a:pPr algn="ctr">
+                        <a:buNone/>
+                      </a:pPr>
+                      <a:r>
+                        <a:rPr lang="en-US" altLang="zh-CN" sz="3600"/>
+                        <a:t>0.817</a:t>
+                      </a:r>
+                      <a:endParaRPr lang="en-US" altLang="zh-CN" sz="3600"/>
+                    </a:p>
+                    <a:p>
+                      <a:pPr algn="ctr">
+                        <a:buNone/>
+                      </a:pPr>
+                      <a:endParaRPr lang="en-US" altLang="zh-CN" sz="3600"/>
+                    </a:p>
+                  </a:txBody>
+                  <a:tcPr/>
+                </a:tc>
+                <a:tc>
+                  <a:txBody>
+                    <a:bodyPr/>
+                    <a:p>
+                      <a:pPr algn="ctr">
+                        <a:buNone/>
+                      </a:pPr>
+                      <a:r>
+                        <a:rPr lang="en-US" altLang="zh-CN" sz="3600"/>
+                        <a:t>0.841</a:t>
+                      </a:r>
+                      <a:endParaRPr lang="en-US" altLang="zh-CN" sz="3600"/>
+                    </a:p>
+                    <a:p>
+                      <a:pPr algn="ctr">
+                        <a:buNone/>
+                      </a:pPr>
+                      <a:endParaRPr lang="en-US" altLang="zh-CN" sz="3600"/>
+                    </a:p>
+                  </a:txBody>
+                  <a:tcPr/>
+                </a:tc>
+                <a:tc>
+                  <a:txBody>
+                    <a:bodyPr/>
+                    <a:p>
+                      <a:pPr algn="ctr">
+                        <a:buNone/>
+                      </a:pPr>
+                      <a:r>
+                        <a:rPr lang="en-US" altLang="zh-CN" sz="3600"/>
+                        <a:t>0.974</a:t>
+                      </a:r>
+                      <a:endParaRPr lang="en-US" altLang="zh-CN" sz="3600"/>
+                    </a:p>
+                  </a:txBody>
+                  <a:tcPr/>
+                </a:tc>
+                <a:tc>
+                  <a:txBody>
+                    <a:bodyPr/>
+                    <a:p>
+                      <a:pPr algn="ctr">
+                        <a:buNone/>
+                      </a:pPr>
+                      <a:r>
+                        <a:rPr lang="en-US" altLang="zh-CN" sz="3600"/>
+                        <a:t>0.383</a:t>
+                      </a:r>
+                      <a:endParaRPr lang="en-US" altLang="zh-CN" sz="3600"/>
+                    </a:p>
+                  </a:txBody>
+                  <a:tcPr/>
+                </a:tc>
+                <a:tc>
+                  <a:txBody>
+                    <a:bodyPr/>
+                    <a:p>
+                      <a:pPr algn="ctr">
+                        <a:buNone/>
+                      </a:pPr>
+                      <a:r>
+                        <a:rPr lang="en-US" altLang="zh-CN" sz="3600"/>
+                        <a:t>0.888</a:t>
+                      </a:r>
+                      <a:endParaRPr lang="en-US" altLang="zh-CN" sz="3600"/>
+                    </a:p>
+                  </a:txBody>
+                  <a:tcPr/>
+                </a:tc>
+              </a:tr>
+              <a:tr h="676275">
+                <a:tc>
+                  <a:txBody>
+                    <a:bodyPr/>
+                    <a:p>
+                      <a:pPr algn="ctr">
+                        <a:buNone/>
+                      </a:pPr>
+                      <a:r>
+                        <a:rPr lang="en-US" altLang="zh-CN" sz="3600"/>
+                        <a:t>KNN</a:t>
+                      </a:r>
+                      <a:endParaRPr lang="en-US" altLang="zh-CN" sz="3600"/>
+                    </a:p>
+                  </a:txBody>
+                  <a:tcPr/>
+                </a:tc>
+                <a:tc>
+                  <a:txBody>
+                    <a:bodyPr/>
+                    <a:p>
+                      <a:pPr algn="ctr">
+                        <a:buNone/>
+                      </a:pPr>
+                      <a:r>
+                        <a:rPr lang="en-US" altLang="zh-CN" sz="3600"/>
+                        <a:t>0.858</a:t>
+                      </a:r>
+                      <a:endParaRPr lang="en-US" altLang="zh-CN" sz="3600"/>
+                    </a:p>
+                  </a:txBody>
+                  <a:tcPr/>
+                </a:tc>
+                <a:tc>
+                  <a:txBody>
+                    <a:bodyPr/>
+                    <a:p>
+                      <a:pPr algn="ctr">
+                        <a:buNone/>
+                      </a:pPr>
+                      <a:r>
+                        <a:rPr lang="en-US" altLang="zh-CN" sz="3600"/>
+                        <a:t>0.944</a:t>
+                      </a:r>
+                      <a:endParaRPr lang="en-US" altLang="zh-CN" sz="3600"/>
+                    </a:p>
+                  </a:txBody>
+                  <a:tcPr/>
+                </a:tc>
+                <a:tc>
+                  <a:txBody>
+                    <a:bodyPr/>
+                    <a:p>
+                      <a:pPr algn="ctr">
+                        <a:buNone/>
+                      </a:pPr>
+                      <a:r>
+                        <a:rPr lang="en-US" altLang="zh-CN" sz="3600"/>
+                        <a:t>0.439</a:t>
+                      </a:r>
+                      <a:endParaRPr lang="en-US" altLang="zh-CN" sz="3600"/>
+                    </a:p>
+                  </a:txBody>
+                  <a:tcPr/>
+                </a:tc>
+                <a:tc>
+                  <a:txBody>
+                    <a:bodyPr/>
+                    <a:p>
+                      <a:pPr algn="ctr">
+                        <a:buNone/>
+                      </a:pPr>
+                      <a:r>
+                        <a:rPr lang="en-US" altLang="zh-CN" sz="3600"/>
+                        <a:t>0.925</a:t>
+                      </a:r>
+                      <a:endParaRPr lang="en-US" altLang="zh-CN" sz="3600"/>
+                    </a:p>
+                  </a:txBody>
+                  <a:tcPr/>
+                </a:tc>
+                <a:tc>
+                  <a:txBody>
+                    <a:bodyPr/>
+                    <a:p>
+                      <a:pPr algn="ctr">
+                        <a:buNone/>
+                      </a:pPr>
+                      <a:r>
+                        <a:rPr lang="en-US" altLang="zh-CN" sz="3600"/>
+                        <a:t>0.514</a:t>
+                      </a:r>
+                      <a:endParaRPr lang="en-US" altLang="zh-CN" sz="3600"/>
+                    </a:p>
+                  </a:txBody>
+                  <a:tcPr/>
+                </a:tc>
+                <a:tc>
+                  <a:txBody>
+                    <a:bodyPr/>
+                    <a:p>
+                      <a:pPr algn="ctr">
+                        <a:buNone/>
+                      </a:pPr>
+                      <a:r>
+                        <a:rPr lang="en-US" altLang="zh-CN" sz="3600"/>
+                        <a:t>0.935</a:t>
+                      </a:r>
+                      <a:endParaRPr lang="en-US" altLang="zh-CN" sz="3600"/>
+                    </a:p>
+                  </a:txBody>
+                  <a:tcPr/>
+                </a:tc>
+              </a:tr>
+            </a:tbl>
+          </a:graphicData>
+        </a:graphic>
+      </p:graphicFrame>
+      <p:pic>
+        <p:nvPicPr>
+          <p:cNvPr id="4" name="图片 3" descr="截屏2026-04-11 15.27.09"/>
+          <p:cNvPicPr>
+            <a:picLocks noChangeAspect="1"/>
+          </p:cNvPicPr>
+          <p:nvPr/>
+        </p:nvPicPr>
+        <p:blipFill>
+          <a:blip r:embed="rId2"/>
+          <a:stretch>
+            <a:fillRect/>
+          </a:stretch>
+        </p:blipFill>
+        <p:spPr>
+          <a:xfrm>
+            <a:off x="8201025" y="24859615"/>
+            <a:ext cx="12569825" cy="7889240"/>
+          </a:xfrm>
+          <a:prstGeom prst="rect">
+            <a:avLst/>
+          </a:prstGeom>
+        </p:spPr>
+      </p:pic>
+      <p:sp>
+        <p:nvSpPr>
+          <p:cNvPr id="6" name="文本框 5"/>
+          <p:cNvSpPr txBox="1"/>
+          <p:nvPr/>
+        </p:nvSpPr>
+        <p:spPr>
+          <a:xfrm>
+            <a:off x="8659495" y="24213185"/>
+            <a:ext cx="12051030" cy="645160"/>
+          </a:xfrm>
+          <a:prstGeom prst="rect">
+            <a:avLst/>
+          </a:prstGeom>
+          <a:noFill/>
+        </p:spPr>
+        <p:txBody>
+          <a:bodyPr wrap="square" rtlCol="0">
+            <a:spAutoFit/>
+          </a:bodyPr>
+          <a:p>
+            <a:r>
+              <a:rPr lang="en-US" altLang="zh-CN" sz="3600">
+                <a:solidFill>
+                  <a:schemeClr val="tx2"/>
+                </a:solidFill>
+                <a:latin typeface="Arial" panose="020B0604020202090204" pitchFamily="34" charset="0"/>
+                <a:cs typeface="Arial" panose="020B0604020202090204" pitchFamily="34" charset="0"/>
+              </a:rPr>
+              <a:t>Confusion matrices: Healthy Controls vs. Parkinsonism</a:t>
+            </a:r>
+            <a:r>
+              <a:rPr lang="en-US" altLang="zh-CN"/>
+              <a:t>.</a:t>
+            </a:r>
+            <a:endParaRPr lang="zh-CN" altLang="en-US"/>
+          </a:p>
+        </p:txBody>
+      </p:sp>
+      <p:graphicFrame>
+        <p:nvGraphicFramePr>
+          <p:cNvPr id="15" name="表格 14"/>
+          <p:cNvGraphicFramePr/>
+          <p:nvPr/>
+        </p:nvGraphicFramePr>
+        <p:xfrm>
+          <a:off x="20710525" y="5598160"/>
+          <a:ext cx="12204065" cy="5131435"/>
+        </p:xfrm>
+        <a:graphic>
+          <a:graphicData uri="http://schemas.openxmlformats.org/drawingml/2006/table">
+            <a:tbl>
+              <a:tblPr firstRow="1" bandRow="1">
+                <a:tableStyleId>{9D7B26C5-4107-4FEC-AEDC-1716B250A1EF}</a:tableStyleId>
+              </a:tblPr>
+              <a:tblGrid>
+                <a:gridCol w="2240280"/>
+                <a:gridCol w="1553845"/>
+                <a:gridCol w="1934845"/>
+                <a:gridCol w="2024380"/>
+                <a:gridCol w="1207770"/>
+                <a:gridCol w="1387475"/>
+                <a:gridCol w="1855470"/>
+              </a:tblGrid>
+              <a:tr h="518160">
+                <a:tc>
+                  <a:txBody>
+                    <a:bodyPr/>
+                    <a:p>
+                      <a:pPr algn="ctr">
+                        <a:buNone/>
+                      </a:pPr>
+                      <a:r>
+                        <a:rPr lang="en-US" altLang="zh-CN" sz="2800"/>
+                        <a:t> Model</a:t>
+                      </a:r>
+                      <a:endParaRPr lang="en-US" altLang="zh-CN" sz="2800"/>
+                    </a:p>
+                  </a:txBody>
+                  <a:tcPr/>
+                </a:tc>
+                <a:tc>
+                  <a:txBody>
+                    <a:bodyPr/>
+                    <a:p>
+                      <a:pPr algn="ctr">
+                        <a:buNone/>
+                      </a:pPr>
+                      <a:r>
+                        <a:rPr lang="en-US" altLang="zh-CN" sz="2800"/>
+                        <a:t>C-</a:t>
+                      </a:r>
+                      <a:r>
+                        <a:rPr lang="en-US" altLang="zh-CN" sz="2800"/>
+                        <a:t>index</a:t>
+                      </a:r>
+                      <a:endParaRPr lang="en-US" altLang="zh-CN" sz="2800"/>
+                    </a:p>
+                  </a:txBody>
+                  <a:tcPr/>
+                </a:tc>
+                <a:tc>
+                  <a:txBody>
+                    <a:bodyPr/>
+                    <a:p>
+                      <a:pPr algn="ctr">
+                        <a:buNone/>
+                      </a:pPr>
+                      <a:r>
+                        <a:rPr lang="en-US" altLang="zh-CN" sz="2800"/>
+                        <a:t>Sensitivity</a:t>
+                      </a:r>
+                      <a:endParaRPr lang="en-US" altLang="zh-CN" sz="2800"/>
+                    </a:p>
+                  </a:txBody>
+                  <a:tcPr/>
+                </a:tc>
+                <a:tc>
+                  <a:txBody>
+                    <a:bodyPr/>
+                    <a:p>
+                      <a:pPr algn="ctr">
+                        <a:buNone/>
+                      </a:pPr>
+                      <a:r>
+                        <a:rPr lang="en-US" altLang="zh-CN" sz="2800"/>
+                        <a:t>Specificity</a:t>
+                      </a:r>
+                      <a:endParaRPr lang="en-US" altLang="zh-CN" sz="2800"/>
+                    </a:p>
+                  </a:txBody>
+                  <a:tcPr/>
+                </a:tc>
+                <a:tc>
+                  <a:txBody>
+                    <a:bodyPr/>
+                    <a:p>
+                      <a:pPr algn="ctr">
+                        <a:buNone/>
+                      </a:pPr>
+                      <a:r>
+                        <a:rPr lang="en-US" altLang="zh-CN" sz="2800"/>
+                        <a:t>PPV</a:t>
+                      </a:r>
+                      <a:endParaRPr lang="en-US" altLang="zh-CN" sz="2800"/>
+                    </a:p>
+                  </a:txBody>
+                  <a:tcPr/>
+                </a:tc>
+                <a:tc>
+                  <a:txBody>
+                    <a:bodyPr/>
+                    <a:p>
+                      <a:pPr algn="ctr">
+                        <a:buNone/>
+                      </a:pPr>
+                      <a:r>
+                        <a:rPr lang="en-US" altLang="zh-CN" sz="2800"/>
+                        <a:t>NPV</a:t>
+                      </a:r>
+                      <a:endParaRPr lang="en-US" altLang="zh-CN" sz="2800"/>
+                    </a:p>
+                  </a:txBody>
+                  <a:tcPr/>
+                </a:tc>
+                <a:tc>
+                  <a:txBody>
+                    <a:bodyPr/>
+                    <a:p>
+                      <a:pPr algn="ctr">
+                        <a:buNone/>
+                      </a:pPr>
+                      <a:r>
+                        <a:rPr lang="en-US" altLang="zh-CN" sz="2800"/>
+                        <a:t>F1-Score</a:t>
+                      </a:r>
+                      <a:endParaRPr lang="en-US" altLang="zh-CN" sz="2800"/>
+                    </a:p>
+                  </a:txBody>
+                  <a:tcPr/>
+                </a:tc>
+              </a:tr>
+              <a:tr h="1224280">
+                <a:tc>
+                  <a:txBody>
+                    <a:bodyPr/>
+                    <a:p>
+                      <a:pPr algn="ctr">
+                        <a:buNone/>
+                      </a:pPr>
+                      <a:r>
+                        <a:rPr lang="en-US" altLang="zh-CN" sz="3200">
+                          <a:latin typeface="Arial" panose="020B0604020202090204" pitchFamily="34" charset="0"/>
+                          <a:cs typeface="Arial" panose="020B0604020202090204" pitchFamily="34" charset="0"/>
+                        </a:rPr>
+                        <a:t>Logistic </a:t>
+                      </a:r>
+                      <a:endParaRPr lang="en-US" altLang="zh-CN" sz="3200">
+                        <a:latin typeface="Arial" panose="020B0604020202090204" pitchFamily="34" charset="0"/>
+                        <a:cs typeface="Arial" panose="020B0604020202090204" pitchFamily="34" charset="0"/>
+                      </a:endParaRPr>
+                    </a:p>
+                    <a:p>
+                      <a:pPr algn="ctr">
+                        <a:buNone/>
+                      </a:pPr>
+                      <a:r>
+                        <a:rPr lang="en-US" altLang="zh-CN" sz="3200">
+                          <a:latin typeface="Arial" panose="020B0604020202090204" pitchFamily="34" charset="0"/>
+                          <a:cs typeface="Arial" panose="020B0604020202090204" pitchFamily="34" charset="0"/>
+                        </a:rPr>
+                        <a:t>Regression</a:t>
+                      </a:r>
+                      <a:endParaRPr lang="en-US" altLang="zh-CN" sz="3200">
+                        <a:latin typeface="Arial" panose="020B0604020202090204" pitchFamily="34" charset="0"/>
+                        <a:cs typeface="Arial" panose="020B0604020202090204" pitchFamily="34" charset="0"/>
+                      </a:endParaRPr>
+                    </a:p>
+                  </a:txBody>
+                  <a:tcPr/>
+                </a:tc>
+                <a:tc>
+                  <a:txBody>
+                    <a:bodyPr/>
+                    <a:p>
+                      <a:pPr algn="ctr">
+                        <a:buNone/>
+                      </a:pPr>
+                      <a:r>
+                        <a:rPr lang="en-US" altLang="zh-CN" sz="3200">
+                          <a:latin typeface="Arial" panose="020B0604020202090204" pitchFamily="34" charset="0"/>
+                          <a:cs typeface="Arial" panose="020B0604020202090204" pitchFamily="34" charset="0"/>
+                        </a:rPr>
+                        <a:t>0.616</a:t>
+                      </a:r>
+                      <a:endParaRPr lang="en-US" altLang="zh-CN" sz="3200">
+                        <a:latin typeface="Arial" panose="020B0604020202090204" pitchFamily="34" charset="0"/>
+                        <a:cs typeface="Arial" panose="020B0604020202090204" pitchFamily="34" charset="0"/>
+                      </a:endParaRPr>
+                    </a:p>
+                    <a:p>
+                      <a:pPr algn="ctr">
+                        <a:buNone/>
+                      </a:pPr>
+                      <a:endParaRPr lang="en-US" altLang="zh-CN" sz="3200">
+                        <a:latin typeface="Arial" panose="020B0604020202090204" pitchFamily="34" charset="0"/>
+                        <a:cs typeface="Arial" panose="020B0604020202090204" pitchFamily="34" charset="0"/>
+                      </a:endParaRPr>
+                    </a:p>
+                  </a:txBody>
+                  <a:tcPr/>
+                </a:tc>
+                <a:tc>
+                  <a:txBody>
+                    <a:bodyPr/>
+                    <a:p>
+                      <a:pPr algn="ctr">
+                        <a:buNone/>
+                      </a:pPr>
+                      <a:r>
+                        <a:rPr lang="en-US" altLang="zh-CN" sz="3200">
+                          <a:latin typeface="Arial" panose="020B0604020202090204" pitchFamily="34" charset="0"/>
+                          <a:cs typeface="Arial" panose="020B0604020202090204" pitchFamily="34" charset="0"/>
+                        </a:rPr>
+                        <a:t>0.500</a:t>
+                      </a:r>
+                      <a:endParaRPr lang="en-US" altLang="zh-CN" sz="3200">
+                        <a:latin typeface="Arial" panose="020B0604020202090204" pitchFamily="34" charset="0"/>
+                        <a:cs typeface="Arial" panose="020B0604020202090204" pitchFamily="34" charset="0"/>
+                      </a:endParaRPr>
+                    </a:p>
+                    <a:p>
+                      <a:pPr algn="ctr">
+                        <a:buNone/>
+                      </a:pPr>
+                      <a:endParaRPr lang="en-US" altLang="zh-CN" sz="3200">
+                        <a:latin typeface="Arial" panose="020B0604020202090204" pitchFamily="34" charset="0"/>
+                        <a:cs typeface="Arial" panose="020B0604020202090204" pitchFamily="34" charset="0"/>
+                      </a:endParaRPr>
+                    </a:p>
+                  </a:txBody>
+                  <a:tcPr/>
+                </a:tc>
+                <a:tc>
+                  <a:txBody>
+                    <a:bodyPr/>
+                    <a:p>
+                      <a:pPr algn="ctr">
+                        <a:buNone/>
+                      </a:pPr>
+                      <a:r>
+                        <a:rPr lang="en-US" altLang="zh-CN" sz="3200">
+                          <a:latin typeface="Arial" panose="020B0604020202090204" pitchFamily="34" charset="0"/>
+                          <a:cs typeface="Arial" panose="020B0604020202090204" pitchFamily="34" charset="0"/>
+                        </a:rPr>
+                        <a:t>0.643</a:t>
+                      </a:r>
+                      <a:endParaRPr lang="en-US" altLang="zh-CN" sz="3200">
+                        <a:latin typeface="Arial" panose="020B0604020202090204" pitchFamily="34" charset="0"/>
+                        <a:cs typeface="Arial" panose="020B0604020202090204" pitchFamily="34" charset="0"/>
+                      </a:endParaRPr>
+                    </a:p>
+                    <a:p>
+                      <a:pPr algn="ctr">
+                        <a:buNone/>
+                      </a:pPr>
+                      <a:endParaRPr lang="en-US" altLang="zh-CN" sz="3200">
+                        <a:latin typeface="Arial" panose="020B0604020202090204" pitchFamily="34" charset="0"/>
+                        <a:cs typeface="Arial" panose="020B0604020202090204" pitchFamily="34" charset="0"/>
+                      </a:endParaRPr>
+                    </a:p>
+                  </a:txBody>
+                  <a:tcPr/>
+                </a:tc>
+                <a:tc>
+                  <a:txBody>
+                    <a:bodyPr/>
+                    <a:p>
+                      <a:pPr algn="ctr">
+                        <a:buNone/>
+                      </a:pPr>
+                      <a:r>
+                        <a:rPr lang="en-US" altLang="zh-CN" sz="3200">
+                          <a:latin typeface="Arial" panose="020B0604020202090204" pitchFamily="34" charset="0"/>
+                          <a:cs typeface="Arial" panose="020B0604020202090204" pitchFamily="34" charset="0"/>
+                        </a:rPr>
+                        <a:t>0.077</a:t>
+                      </a:r>
+                      <a:endParaRPr lang="en-US" altLang="zh-CN" sz="3200">
+                        <a:latin typeface="Arial" panose="020B0604020202090204" pitchFamily="34" charset="0"/>
+                        <a:cs typeface="Arial" panose="020B0604020202090204" pitchFamily="34" charset="0"/>
+                      </a:endParaRPr>
+                    </a:p>
+                    <a:p>
+                      <a:pPr algn="ctr">
+                        <a:buNone/>
+                      </a:pPr>
+                      <a:endParaRPr lang="en-US" altLang="zh-CN" sz="3200">
+                        <a:latin typeface="Arial" panose="020B0604020202090204" pitchFamily="34" charset="0"/>
+                        <a:cs typeface="Arial" panose="020B0604020202090204" pitchFamily="34" charset="0"/>
+                      </a:endParaRPr>
+                    </a:p>
+                  </a:txBody>
+                  <a:tcPr/>
+                </a:tc>
+                <a:tc>
+                  <a:txBody>
+                    <a:bodyPr/>
+                    <a:p>
+                      <a:pPr algn="ctr">
+                        <a:buNone/>
+                      </a:pPr>
+                      <a:r>
+                        <a:rPr lang="en-US" altLang="zh-CN" sz="3200">
+                          <a:latin typeface="Arial" panose="020B0604020202090204" pitchFamily="34" charset="0"/>
+                          <a:cs typeface="Arial" panose="020B0604020202090204" pitchFamily="34" charset="0"/>
+                        </a:rPr>
+                        <a:t>0.372</a:t>
+                      </a:r>
+                      <a:endParaRPr lang="en-US" altLang="zh-CN" sz="3200">
+                        <a:latin typeface="Arial" panose="020B0604020202090204" pitchFamily="34" charset="0"/>
+                        <a:cs typeface="Arial" panose="020B0604020202090204" pitchFamily="34" charset="0"/>
+                      </a:endParaRPr>
+                    </a:p>
+                  </a:txBody>
+                  <a:tcPr/>
+                </a:tc>
+                <a:tc>
+                  <a:txBody>
+                    <a:bodyPr/>
+                    <a:p>
+                      <a:pPr algn="ctr">
+                        <a:buNone/>
+                      </a:pPr>
+                      <a:r>
+                        <a:rPr lang="en-US" altLang="zh-CN" sz="3200">
+                          <a:latin typeface="Arial" panose="020B0604020202090204" pitchFamily="34" charset="0"/>
+                          <a:cs typeface="Arial" panose="020B0604020202090204" pitchFamily="34" charset="0"/>
+                        </a:rPr>
+                        <a:t>0.133</a:t>
+                      </a:r>
+                      <a:endParaRPr lang="en-US" altLang="zh-CN" sz="3200">
+                        <a:latin typeface="Arial" panose="020B0604020202090204" pitchFamily="34" charset="0"/>
+                        <a:cs typeface="Arial" panose="020B0604020202090204" pitchFamily="34" charset="0"/>
+                      </a:endParaRPr>
+                    </a:p>
+                  </a:txBody>
+                  <a:tcPr/>
+                </a:tc>
+              </a:tr>
+              <a:tr h="381000">
+                <a:tc>
+                  <a:txBody>
+                    <a:bodyPr/>
+                    <a:p>
+                      <a:pPr algn="ctr">
+                        <a:buNone/>
+                      </a:pPr>
+                      <a:r>
+                        <a:rPr lang="en-US" altLang="zh-CN" sz="3200">
+                          <a:latin typeface="Arial" panose="020B0604020202090204" pitchFamily="34" charset="0"/>
+                          <a:cs typeface="Arial" panose="020B0604020202090204" pitchFamily="34" charset="0"/>
+                        </a:rPr>
+                        <a:t>Random </a:t>
+                      </a:r>
+                      <a:endParaRPr lang="en-US" altLang="zh-CN" sz="3200">
+                        <a:latin typeface="Arial" panose="020B0604020202090204" pitchFamily="34" charset="0"/>
+                        <a:cs typeface="Arial" panose="020B0604020202090204" pitchFamily="34" charset="0"/>
+                      </a:endParaRPr>
+                    </a:p>
+                    <a:p>
+                      <a:pPr algn="ctr">
+                        <a:buNone/>
+                      </a:pPr>
+                      <a:r>
+                        <a:rPr lang="en-US" altLang="zh-CN" sz="3200">
+                          <a:latin typeface="Arial" panose="020B0604020202090204" pitchFamily="34" charset="0"/>
+                          <a:cs typeface="Arial" panose="020B0604020202090204" pitchFamily="34" charset="0"/>
+                        </a:rPr>
+                        <a:t>Forest</a:t>
+                      </a:r>
+                      <a:endParaRPr lang="en-US" altLang="zh-CN" sz="3200">
+                        <a:latin typeface="Arial" panose="020B0604020202090204" pitchFamily="34" charset="0"/>
+                        <a:cs typeface="Arial" panose="020B0604020202090204" pitchFamily="34" charset="0"/>
+                      </a:endParaRPr>
+                    </a:p>
+                  </a:txBody>
+                  <a:tcPr/>
+                </a:tc>
+                <a:tc>
+                  <a:txBody>
+                    <a:bodyPr/>
+                    <a:p>
+                      <a:pPr algn="ctr">
+                        <a:buNone/>
+                      </a:pPr>
+                      <a:r>
+                        <a:rPr lang="en-US" altLang="zh-CN" sz="3200">
+                          <a:latin typeface="Arial" panose="020B0604020202090204" pitchFamily="34" charset="0"/>
+                          <a:cs typeface="Arial" panose="020B0604020202090204" pitchFamily="34" charset="0"/>
+                        </a:rPr>
+                        <a:t>0.633</a:t>
+                      </a:r>
+                      <a:endParaRPr lang="en-US" altLang="zh-CN" sz="3200">
+                        <a:latin typeface="Arial" panose="020B0604020202090204" pitchFamily="34" charset="0"/>
+                        <a:cs typeface="Arial" panose="020B0604020202090204" pitchFamily="34" charset="0"/>
+                      </a:endParaRPr>
+                    </a:p>
+                  </a:txBody>
+                  <a:tcPr/>
+                </a:tc>
+                <a:tc>
+                  <a:txBody>
+                    <a:bodyPr/>
+                    <a:p>
+                      <a:pPr algn="ctr">
+                        <a:buNone/>
+                      </a:pPr>
+                      <a:r>
+                        <a:rPr lang="en-US" altLang="zh-CN" sz="3200">
+                          <a:latin typeface="Arial" panose="020B0604020202090204" pitchFamily="34" charset="0"/>
+                          <a:cs typeface="Arial" panose="020B0604020202090204" pitchFamily="34" charset="0"/>
+                        </a:rPr>
+                        <a:t>0.441</a:t>
+                      </a:r>
+                      <a:endParaRPr lang="en-US" altLang="zh-CN" sz="3200">
+                        <a:latin typeface="Arial" panose="020B0604020202090204" pitchFamily="34" charset="0"/>
+                        <a:cs typeface="Arial" panose="020B0604020202090204" pitchFamily="34" charset="0"/>
+                      </a:endParaRPr>
+                    </a:p>
+                    <a:p>
+                      <a:pPr algn="ctr">
+                        <a:buNone/>
+                      </a:pPr>
+                      <a:endParaRPr lang="en-US" altLang="zh-CN" sz="3200">
+                        <a:latin typeface="Arial" panose="020B0604020202090204" pitchFamily="34" charset="0"/>
+                        <a:cs typeface="Arial" panose="020B0604020202090204" pitchFamily="34" charset="0"/>
+                      </a:endParaRPr>
+                    </a:p>
+                  </a:txBody>
+                  <a:tcPr/>
+                </a:tc>
+                <a:tc>
+                  <a:txBody>
+                    <a:bodyPr/>
+                    <a:p>
+                      <a:pPr algn="ctr">
+                        <a:buNone/>
+                      </a:pPr>
+                      <a:r>
+                        <a:rPr lang="en-US" altLang="zh-CN" sz="3200">
+                          <a:latin typeface="Arial" panose="020B0604020202090204" pitchFamily="34" charset="0"/>
+                          <a:cs typeface="Arial" panose="020B0604020202090204" pitchFamily="34" charset="0"/>
+                        </a:rPr>
+                        <a:t>0.743</a:t>
+                      </a:r>
+                      <a:endParaRPr lang="en-US" altLang="zh-CN" sz="3200">
+                        <a:latin typeface="Arial" panose="020B0604020202090204" pitchFamily="34" charset="0"/>
+                        <a:cs typeface="Arial" panose="020B0604020202090204" pitchFamily="34" charset="0"/>
+                      </a:endParaRPr>
+                    </a:p>
+                    <a:p>
+                      <a:pPr algn="ctr">
+                        <a:buNone/>
+                      </a:pPr>
+                      <a:endParaRPr lang="en-US" altLang="zh-CN" sz="3200">
+                        <a:latin typeface="Arial" panose="020B0604020202090204" pitchFamily="34" charset="0"/>
+                        <a:cs typeface="Arial" panose="020B0604020202090204" pitchFamily="34" charset="0"/>
+                      </a:endParaRPr>
+                    </a:p>
+                  </a:txBody>
+                  <a:tcPr/>
+                </a:tc>
+                <a:tc>
+                  <a:txBody>
+                    <a:bodyPr/>
+                    <a:p>
+                      <a:pPr algn="ctr">
+                        <a:buNone/>
+                      </a:pPr>
+                      <a:r>
+                        <a:rPr lang="en-US" altLang="zh-CN" sz="3200">
+                          <a:latin typeface="Arial" panose="020B0604020202090204" pitchFamily="34" charset="0"/>
+                          <a:cs typeface="Arial" panose="020B0604020202090204" pitchFamily="34" charset="0"/>
+                        </a:rPr>
+                        <a:t>0.093</a:t>
+                      </a:r>
+                      <a:endParaRPr lang="en-US" altLang="zh-CN" sz="3200">
+                        <a:latin typeface="Arial" panose="020B0604020202090204" pitchFamily="34" charset="0"/>
+                        <a:cs typeface="Arial" panose="020B0604020202090204" pitchFamily="34" charset="0"/>
+                      </a:endParaRPr>
+                    </a:p>
+                  </a:txBody>
+                  <a:tcPr/>
+                </a:tc>
+                <a:tc>
+                  <a:txBody>
+                    <a:bodyPr/>
+                    <a:p>
+                      <a:pPr algn="ctr">
+                        <a:buNone/>
+                      </a:pPr>
+                      <a:r>
+                        <a:rPr lang="en-US" altLang="zh-CN" sz="3200">
+                          <a:latin typeface="Arial" panose="020B0604020202090204" pitchFamily="34" charset="0"/>
+                          <a:cs typeface="Arial" panose="020B0604020202090204" pitchFamily="34" charset="0"/>
+                        </a:rPr>
+                        <a:t>0.387</a:t>
+                      </a:r>
+                      <a:endParaRPr lang="en-US" altLang="zh-CN" sz="3200">
+                        <a:latin typeface="Arial" panose="020B0604020202090204" pitchFamily="34" charset="0"/>
+                        <a:cs typeface="Arial" panose="020B0604020202090204" pitchFamily="34" charset="0"/>
+                      </a:endParaRPr>
+                    </a:p>
+                  </a:txBody>
+                  <a:tcPr/>
+                </a:tc>
+                <a:tc>
+                  <a:txBody>
+                    <a:bodyPr/>
+                    <a:p>
+                      <a:pPr algn="ctr">
+                        <a:buNone/>
+                      </a:pPr>
+                      <a:r>
+                        <a:rPr lang="en-US" altLang="zh-CN" sz="3200">
+                          <a:latin typeface="Arial" panose="020B0604020202090204" pitchFamily="34" charset="0"/>
+                          <a:cs typeface="Arial" panose="020B0604020202090204" pitchFamily="34" charset="0"/>
+                        </a:rPr>
+                        <a:t>0.153</a:t>
+                      </a:r>
+                      <a:endParaRPr lang="en-US" altLang="zh-CN" sz="3200">
+                        <a:latin typeface="Arial" panose="020B0604020202090204" pitchFamily="34" charset="0"/>
+                        <a:cs typeface="Arial" panose="020B0604020202090204" pitchFamily="34" charset="0"/>
+                      </a:endParaRPr>
+                    </a:p>
+                  </a:txBody>
+                  <a:tcPr/>
+                </a:tc>
+              </a:tr>
+              <a:tr h="381000">
+                <a:tc>
+                  <a:txBody>
+                    <a:bodyPr/>
+                    <a:p>
+                      <a:pPr algn="ctr">
+                        <a:buNone/>
+                      </a:pPr>
+                      <a:r>
+                        <a:rPr lang="en-US" altLang="zh-CN" sz="3200">
+                          <a:latin typeface="Arial" panose="020B0604020202090204" pitchFamily="34" charset="0"/>
+                          <a:cs typeface="Arial" panose="020B0604020202090204" pitchFamily="34" charset="0"/>
+                        </a:rPr>
+                        <a:t>SVM</a:t>
+                      </a:r>
+                      <a:endParaRPr lang="en-US" altLang="zh-CN" sz="3200">
+                        <a:latin typeface="Arial" panose="020B0604020202090204" pitchFamily="34" charset="0"/>
+                        <a:cs typeface="Arial" panose="020B0604020202090204" pitchFamily="34" charset="0"/>
+                      </a:endParaRPr>
+                    </a:p>
+                  </a:txBody>
+                  <a:tcPr/>
+                </a:tc>
+                <a:tc>
+                  <a:txBody>
+                    <a:bodyPr/>
+                    <a:p>
+                      <a:pPr algn="ctr">
+                        <a:buNone/>
+                      </a:pPr>
+                      <a:r>
+                        <a:rPr lang="en-US" altLang="zh-CN" sz="3200">
+                          <a:latin typeface="Arial" panose="020B0604020202090204" pitchFamily="34" charset="0"/>
+                          <a:cs typeface="Arial" panose="020B0604020202090204" pitchFamily="34" charset="0"/>
+                        </a:rPr>
+                        <a:t>0.638</a:t>
+                      </a:r>
+                      <a:endParaRPr lang="en-US" altLang="zh-CN" sz="3200">
+                        <a:latin typeface="Arial" panose="020B0604020202090204" pitchFamily="34" charset="0"/>
+                        <a:cs typeface="Arial" panose="020B0604020202090204" pitchFamily="34" charset="0"/>
+                      </a:endParaRPr>
+                    </a:p>
+                  </a:txBody>
+                  <a:tcPr/>
+                </a:tc>
+                <a:tc>
+                  <a:txBody>
+                    <a:bodyPr/>
+                    <a:p>
+                      <a:pPr algn="ctr">
+                        <a:buNone/>
+                      </a:pPr>
+                      <a:r>
+                        <a:rPr lang="en-US" altLang="zh-CN" sz="3200">
+                          <a:latin typeface="Arial" panose="020B0604020202090204" pitchFamily="34" charset="0"/>
+                          <a:cs typeface="Arial" panose="020B0604020202090204" pitchFamily="34" charset="0"/>
+                        </a:rPr>
+                        <a:t>0.618</a:t>
+                      </a:r>
+                      <a:endParaRPr lang="en-US" altLang="zh-CN" sz="3200">
+                        <a:latin typeface="Arial" panose="020B0604020202090204" pitchFamily="34" charset="0"/>
+                        <a:cs typeface="Arial" panose="020B0604020202090204" pitchFamily="34" charset="0"/>
+                      </a:endParaRPr>
+                    </a:p>
+                  </a:txBody>
+                  <a:tcPr/>
+                </a:tc>
+                <a:tc>
+                  <a:txBody>
+                    <a:bodyPr/>
+                    <a:p>
+                      <a:pPr algn="ctr">
+                        <a:buNone/>
+                      </a:pPr>
+                      <a:r>
+                        <a:rPr lang="en-US" altLang="zh-CN" sz="3200">
+                          <a:latin typeface="Arial" panose="020B0604020202090204" pitchFamily="34" charset="0"/>
+                          <a:cs typeface="Arial" panose="020B0604020202090204" pitchFamily="34" charset="0"/>
+                        </a:rPr>
+                        <a:t>0.539</a:t>
+                      </a:r>
+                      <a:endParaRPr lang="en-US" altLang="zh-CN" sz="3200">
+                        <a:latin typeface="Arial" panose="020B0604020202090204" pitchFamily="34" charset="0"/>
+                        <a:cs typeface="Arial" panose="020B0604020202090204" pitchFamily="34" charset="0"/>
+                      </a:endParaRPr>
+                    </a:p>
+                  </a:txBody>
+                  <a:tcPr/>
+                </a:tc>
+                <a:tc>
+                  <a:txBody>
+                    <a:bodyPr/>
+                    <a:p>
+                      <a:pPr algn="ctr">
+                        <a:buNone/>
+                      </a:pPr>
+                      <a:r>
+                        <a:rPr lang="en-US" altLang="zh-CN" sz="3200">
+                          <a:latin typeface="Arial" panose="020B0604020202090204" pitchFamily="34" charset="0"/>
+                          <a:cs typeface="Arial" panose="020B0604020202090204" pitchFamily="34" charset="0"/>
+                        </a:rPr>
+                        <a:t>0.074</a:t>
+                      </a:r>
+                      <a:endParaRPr lang="en-US" altLang="zh-CN" sz="3200">
+                        <a:latin typeface="Arial" panose="020B0604020202090204" pitchFamily="34" charset="0"/>
+                        <a:cs typeface="Arial" panose="020B0604020202090204" pitchFamily="34" charset="0"/>
+                      </a:endParaRPr>
+                    </a:p>
+                  </a:txBody>
+                  <a:tcPr/>
+                </a:tc>
+                <a:tc>
+                  <a:txBody>
+                    <a:bodyPr/>
+                    <a:p>
+                      <a:pPr algn="ctr">
+                        <a:buNone/>
+                      </a:pPr>
+                      <a:r>
+                        <a:rPr lang="en-US" altLang="zh-CN" sz="3200">
+                          <a:latin typeface="Arial" panose="020B0604020202090204" pitchFamily="34" charset="0"/>
+                          <a:cs typeface="Arial" panose="020B0604020202090204" pitchFamily="34" charset="0"/>
+                        </a:rPr>
+                        <a:t>0.292</a:t>
+                      </a:r>
+                      <a:endParaRPr lang="en-US" altLang="zh-CN" sz="3200">
+                        <a:latin typeface="Arial" panose="020B0604020202090204" pitchFamily="34" charset="0"/>
+                        <a:cs typeface="Arial" panose="020B0604020202090204" pitchFamily="34" charset="0"/>
+                      </a:endParaRPr>
+                    </a:p>
+                  </a:txBody>
+                  <a:tcPr/>
+                </a:tc>
+                <a:tc>
+                  <a:txBody>
+                    <a:bodyPr/>
+                    <a:p>
+                      <a:pPr algn="ctr">
+                        <a:buNone/>
+                      </a:pPr>
+                      <a:r>
+                        <a:rPr lang="en-US" altLang="zh-CN" sz="3200">
+                          <a:latin typeface="Arial" panose="020B0604020202090204" pitchFamily="34" charset="0"/>
+                          <a:cs typeface="Arial" panose="020B0604020202090204" pitchFamily="34" charset="0"/>
+                        </a:rPr>
+                        <a:t>0.132</a:t>
+                      </a:r>
+                      <a:endParaRPr lang="en-US" altLang="zh-CN" sz="3200">
+                        <a:latin typeface="Arial" panose="020B0604020202090204" pitchFamily="34" charset="0"/>
+                        <a:cs typeface="Arial" panose="020B0604020202090204" pitchFamily="34" charset="0"/>
+                      </a:endParaRPr>
+                    </a:p>
+                  </a:txBody>
+                  <a:tcPr/>
+                </a:tc>
+              </a:tr>
+              <a:tr h="381000">
+                <a:tc>
+                  <a:txBody>
+                    <a:bodyPr/>
+                    <a:p>
+                      <a:pPr algn="ctr">
+                        <a:buNone/>
+                      </a:pPr>
+                      <a:r>
+                        <a:rPr lang="en-US" altLang="zh-CN" sz="3200">
+                          <a:latin typeface="Arial" panose="020B0604020202090204" pitchFamily="34" charset="0"/>
+                          <a:cs typeface="Arial" panose="020B0604020202090204" pitchFamily="34" charset="0"/>
+                        </a:rPr>
+                        <a:t>Gradiant</a:t>
+                      </a:r>
+                      <a:endParaRPr lang="en-US" altLang="zh-CN" sz="3200">
+                        <a:latin typeface="Arial" panose="020B0604020202090204" pitchFamily="34" charset="0"/>
+                        <a:cs typeface="Arial" panose="020B0604020202090204" pitchFamily="34" charset="0"/>
+                      </a:endParaRPr>
+                    </a:p>
+                    <a:p>
+                      <a:pPr algn="ctr">
+                        <a:buNone/>
+                      </a:pPr>
+                      <a:r>
+                        <a:rPr lang="en-US" altLang="zh-CN" sz="3200">
+                          <a:latin typeface="Arial" panose="020B0604020202090204" pitchFamily="34" charset="0"/>
+                          <a:cs typeface="Arial" panose="020B0604020202090204" pitchFamily="34" charset="0"/>
+                        </a:rPr>
+                        <a:t>Boosting</a:t>
+                      </a:r>
+                      <a:endParaRPr lang="en-US" altLang="zh-CN" sz="3200">
+                        <a:latin typeface="Arial" panose="020B0604020202090204" pitchFamily="34" charset="0"/>
+                        <a:cs typeface="Arial" panose="020B0604020202090204" pitchFamily="34" charset="0"/>
+                      </a:endParaRPr>
+                    </a:p>
+                  </a:txBody>
+                  <a:tcPr/>
+                </a:tc>
+                <a:tc>
+                  <a:txBody>
+                    <a:bodyPr/>
+                    <a:p>
+                      <a:pPr algn="ctr">
+                        <a:buNone/>
+                      </a:pPr>
+                      <a:r>
+                        <a:rPr lang="en-US" altLang="zh-CN" sz="3200">
+                          <a:latin typeface="Arial" panose="020B0604020202090204" pitchFamily="34" charset="0"/>
+                          <a:cs typeface="Arial" panose="020B0604020202090204" pitchFamily="34" charset="0"/>
+                        </a:rPr>
+                        <a:t>0.570</a:t>
+                      </a:r>
+                      <a:endParaRPr lang="en-US" altLang="zh-CN" sz="3200">
+                        <a:latin typeface="Arial" panose="020B0604020202090204" pitchFamily="34" charset="0"/>
+                        <a:cs typeface="Arial" panose="020B0604020202090204" pitchFamily="34" charset="0"/>
+                      </a:endParaRPr>
+                    </a:p>
+                    <a:p>
+                      <a:pPr algn="ctr">
+                        <a:buNone/>
+                      </a:pPr>
+                      <a:endParaRPr lang="en-US" altLang="zh-CN" sz="3200">
+                        <a:latin typeface="Arial" panose="020B0604020202090204" pitchFamily="34" charset="0"/>
+                        <a:cs typeface="Arial" panose="020B0604020202090204" pitchFamily="34" charset="0"/>
+                      </a:endParaRPr>
+                    </a:p>
+                  </a:txBody>
+                  <a:tcPr/>
+                </a:tc>
+                <a:tc>
+                  <a:txBody>
+                    <a:bodyPr/>
+                    <a:p>
+                      <a:pPr algn="ctr">
+                        <a:buNone/>
+                      </a:pPr>
+                      <a:r>
+                        <a:rPr lang="en-US" altLang="zh-CN" sz="3200">
+                          <a:latin typeface="Arial" panose="020B0604020202090204" pitchFamily="34" charset="0"/>
+                          <a:cs typeface="Arial" panose="020B0604020202090204" pitchFamily="34" charset="0"/>
+                        </a:rPr>
+                        <a:t>0.324</a:t>
+                      </a:r>
+                      <a:endParaRPr lang="en-US" altLang="zh-CN" sz="3200">
+                        <a:latin typeface="Arial" panose="020B0604020202090204" pitchFamily="34" charset="0"/>
+                        <a:cs typeface="Arial" panose="020B0604020202090204" pitchFamily="34" charset="0"/>
+                      </a:endParaRPr>
+                    </a:p>
+                    <a:p>
+                      <a:pPr algn="ctr">
+                        <a:buNone/>
+                      </a:pPr>
+                      <a:endParaRPr lang="en-US" altLang="zh-CN" sz="3200">
+                        <a:latin typeface="Arial" panose="020B0604020202090204" pitchFamily="34" charset="0"/>
+                        <a:cs typeface="Arial" panose="020B0604020202090204" pitchFamily="34" charset="0"/>
+                      </a:endParaRPr>
+                    </a:p>
+                  </a:txBody>
+                  <a:tcPr/>
+                </a:tc>
+                <a:tc>
+                  <a:txBody>
+                    <a:bodyPr/>
+                    <a:p>
+                      <a:pPr algn="ctr">
+                        <a:buNone/>
+                      </a:pPr>
+                      <a:r>
+                        <a:rPr lang="en-US" altLang="zh-CN" sz="3200">
+                          <a:latin typeface="Arial" panose="020B0604020202090204" pitchFamily="34" charset="0"/>
+                          <a:cs typeface="Arial" panose="020B0604020202090204" pitchFamily="34" charset="0"/>
+                        </a:rPr>
+                        <a:t>0.746</a:t>
+                      </a:r>
+                      <a:endParaRPr lang="en-US" altLang="zh-CN" sz="3200">
+                        <a:latin typeface="Arial" panose="020B0604020202090204" pitchFamily="34" charset="0"/>
+                        <a:cs typeface="Arial" panose="020B0604020202090204" pitchFamily="34" charset="0"/>
+                      </a:endParaRPr>
+                    </a:p>
+                    <a:p>
+                      <a:pPr algn="ctr">
+                        <a:buNone/>
+                      </a:pPr>
+                      <a:endParaRPr lang="en-US" altLang="zh-CN" sz="3200">
+                        <a:latin typeface="Arial" panose="020B0604020202090204" pitchFamily="34" charset="0"/>
+                        <a:cs typeface="Arial" panose="020B0604020202090204" pitchFamily="34" charset="0"/>
+                      </a:endParaRPr>
+                    </a:p>
+                  </a:txBody>
+                  <a:tcPr/>
+                </a:tc>
+                <a:tc>
+                  <a:txBody>
+                    <a:bodyPr/>
+                    <a:p>
+                      <a:pPr algn="ctr">
+                        <a:buNone/>
+                      </a:pPr>
+                      <a:r>
+                        <a:rPr lang="en-US" altLang="zh-CN" sz="3200">
+                          <a:latin typeface="Arial" panose="020B0604020202090204" pitchFamily="34" charset="0"/>
+                          <a:cs typeface="Arial" panose="020B0604020202090204" pitchFamily="34" charset="0"/>
+                        </a:rPr>
+                        <a:t>0.071</a:t>
+                      </a:r>
+                      <a:endParaRPr lang="en-US" altLang="zh-CN" sz="3200">
+                        <a:latin typeface="Arial" panose="020B0604020202090204" pitchFamily="34" charset="0"/>
+                        <a:cs typeface="Arial" panose="020B0604020202090204" pitchFamily="34" charset="0"/>
+                      </a:endParaRPr>
+                    </a:p>
+                  </a:txBody>
+                  <a:tcPr/>
+                </a:tc>
+                <a:tc>
+                  <a:txBody>
+                    <a:bodyPr/>
+                    <a:p>
+                      <a:pPr algn="ctr">
+                        <a:buNone/>
+                      </a:pPr>
+                      <a:r>
+                        <a:rPr lang="en-US" altLang="zh-CN" sz="3200">
+                          <a:latin typeface="Arial" panose="020B0604020202090204" pitchFamily="34" charset="0"/>
+                          <a:cs typeface="Arial" panose="020B0604020202090204" pitchFamily="34" charset="0"/>
+                        </a:rPr>
+                        <a:t>0.383</a:t>
+                      </a:r>
+                      <a:endParaRPr lang="en-US" altLang="zh-CN" sz="3200">
+                        <a:latin typeface="Arial" panose="020B0604020202090204" pitchFamily="34" charset="0"/>
+                        <a:cs typeface="Arial" panose="020B0604020202090204" pitchFamily="34" charset="0"/>
+                      </a:endParaRPr>
+                    </a:p>
+                  </a:txBody>
+                  <a:tcPr/>
+                </a:tc>
+                <a:tc>
+                  <a:txBody>
+                    <a:bodyPr/>
+                    <a:p>
+                      <a:pPr algn="ctr">
+                        <a:buNone/>
+                      </a:pPr>
+                      <a:r>
+                        <a:rPr lang="en-US" altLang="zh-CN" sz="3200">
+                          <a:latin typeface="Arial" panose="020B0604020202090204" pitchFamily="34" charset="0"/>
+                          <a:cs typeface="Arial" panose="020B0604020202090204" pitchFamily="34" charset="0"/>
+                        </a:rPr>
+                        <a:t>0.116</a:t>
+                      </a:r>
+                      <a:endParaRPr lang="en-US" altLang="zh-CN" sz="3200">
+                        <a:latin typeface="Arial" panose="020B0604020202090204" pitchFamily="34" charset="0"/>
+                        <a:cs typeface="Arial" panose="020B0604020202090204" pitchFamily="34" charset="0"/>
+                      </a:endParaRPr>
+                    </a:p>
+                  </a:txBody>
+                  <a:tcPr/>
+                </a:tc>
+              </a:tr>
+              <a:tr h="676275">
+                <a:tc>
+                  <a:txBody>
+                    <a:bodyPr/>
+                    <a:p>
+                      <a:pPr algn="ctr">
+                        <a:buNone/>
+                      </a:pPr>
+                      <a:r>
+                        <a:rPr lang="en-US" altLang="zh-CN" sz="3200">
+                          <a:latin typeface="Arial" panose="020B0604020202090204" pitchFamily="34" charset="0"/>
+                          <a:cs typeface="Arial" panose="020B0604020202090204" pitchFamily="34" charset="0"/>
+                        </a:rPr>
+                        <a:t>KNN</a:t>
+                      </a:r>
+                      <a:endParaRPr lang="en-US" altLang="zh-CN" sz="3200">
+                        <a:latin typeface="Arial" panose="020B0604020202090204" pitchFamily="34" charset="0"/>
+                        <a:cs typeface="Arial" panose="020B0604020202090204" pitchFamily="34" charset="0"/>
+                      </a:endParaRPr>
+                    </a:p>
+                  </a:txBody>
+                  <a:tcPr/>
+                </a:tc>
+                <a:tc>
+                  <a:txBody>
+                    <a:bodyPr/>
+                    <a:p>
+                      <a:pPr algn="ctr">
+                        <a:buNone/>
+                      </a:pPr>
+                      <a:r>
+                        <a:rPr lang="en-US" altLang="zh-CN" sz="3200">
+                          <a:latin typeface="Arial" panose="020B0604020202090204" pitchFamily="34" charset="0"/>
+                          <a:cs typeface="Arial" panose="020B0604020202090204" pitchFamily="34" charset="0"/>
+                        </a:rPr>
+                        <a:t>0.517</a:t>
+                      </a:r>
+                      <a:endParaRPr lang="en-US" altLang="zh-CN" sz="3200">
+                        <a:latin typeface="Arial" panose="020B0604020202090204" pitchFamily="34" charset="0"/>
+                        <a:cs typeface="Arial" panose="020B0604020202090204" pitchFamily="34" charset="0"/>
+                      </a:endParaRPr>
+                    </a:p>
+                  </a:txBody>
+                  <a:tcPr/>
+                </a:tc>
+                <a:tc>
+                  <a:txBody>
+                    <a:bodyPr/>
+                    <a:p>
+                      <a:pPr algn="ctr">
+                        <a:buNone/>
+                      </a:pPr>
+                      <a:r>
+                        <a:rPr lang="en-US" altLang="zh-CN" sz="3200">
+                          <a:latin typeface="Arial" panose="020B0604020202090204" pitchFamily="34" charset="0"/>
+                          <a:cs typeface="Arial" panose="020B0604020202090204" pitchFamily="34" charset="0"/>
+                        </a:rPr>
+                        <a:t>0.088</a:t>
+                      </a:r>
+                      <a:endParaRPr lang="en-US" altLang="zh-CN" sz="3200">
+                        <a:latin typeface="Arial" panose="020B0604020202090204" pitchFamily="34" charset="0"/>
+                        <a:cs typeface="Arial" panose="020B0604020202090204" pitchFamily="34" charset="0"/>
+                      </a:endParaRPr>
+                    </a:p>
+                  </a:txBody>
+                  <a:tcPr/>
+                </a:tc>
+                <a:tc>
+                  <a:txBody>
+                    <a:bodyPr/>
+                    <a:p>
+                      <a:pPr algn="ctr">
+                        <a:buNone/>
+                      </a:pPr>
+                      <a:r>
+                        <a:rPr lang="en-US" altLang="zh-CN" sz="3200">
+                          <a:latin typeface="Arial" panose="020B0604020202090204" pitchFamily="34" charset="0"/>
+                          <a:cs typeface="Arial" panose="020B0604020202090204" pitchFamily="34" charset="0"/>
+                        </a:rPr>
+                        <a:t>0.869</a:t>
+                      </a:r>
+                      <a:endParaRPr lang="en-US" altLang="zh-CN" sz="3200">
+                        <a:latin typeface="Arial" panose="020B0604020202090204" pitchFamily="34" charset="0"/>
+                        <a:cs typeface="Arial" panose="020B0604020202090204" pitchFamily="34" charset="0"/>
+                      </a:endParaRPr>
+                    </a:p>
+                  </a:txBody>
+                  <a:tcPr/>
+                </a:tc>
+                <a:tc>
+                  <a:txBody>
+                    <a:bodyPr/>
+                    <a:p>
+                      <a:pPr algn="ctr">
+                        <a:buNone/>
+                      </a:pPr>
+                      <a:r>
+                        <a:rPr lang="en-US" altLang="zh-CN" sz="3200">
+                          <a:latin typeface="Arial" panose="020B0604020202090204" pitchFamily="34" charset="0"/>
+                          <a:cs typeface="Arial" panose="020B0604020202090204" pitchFamily="34" charset="0"/>
+                        </a:rPr>
+                        <a:t>0.038</a:t>
+                      </a:r>
+                      <a:endParaRPr lang="en-US" altLang="zh-CN" sz="3200">
+                        <a:latin typeface="Arial" panose="020B0604020202090204" pitchFamily="34" charset="0"/>
+                        <a:cs typeface="Arial" panose="020B0604020202090204" pitchFamily="34" charset="0"/>
+                      </a:endParaRPr>
+                    </a:p>
+                  </a:txBody>
+                  <a:tcPr/>
+                </a:tc>
+                <a:tc>
+                  <a:txBody>
+                    <a:bodyPr/>
+                    <a:p>
+                      <a:pPr algn="ctr">
+                        <a:buNone/>
+                      </a:pPr>
+                      <a:r>
+                        <a:rPr lang="en-US" altLang="zh-CN" sz="3200">
+                          <a:latin typeface="Arial" panose="020B0604020202090204" pitchFamily="34" charset="0"/>
+                          <a:cs typeface="Arial" panose="020B0604020202090204" pitchFamily="34" charset="0"/>
+                        </a:rPr>
+                        <a:t>0.514</a:t>
+                      </a:r>
+                      <a:endParaRPr lang="en-US" altLang="zh-CN" sz="3200">
+                        <a:latin typeface="Arial" panose="020B0604020202090204" pitchFamily="34" charset="0"/>
+                        <a:cs typeface="Arial" panose="020B0604020202090204" pitchFamily="34" charset="0"/>
+                      </a:endParaRPr>
+                    </a:p>
+                  </a:txBody>
+                  <a:tcPr/>
+                </a:tc>
+                <a:tc>
+                  <a:txBody>
+                    <a:bodyPr/>
+                    <a:p>
+                      <a:pPr algn="ctr">
+                        <a:buNone/>
+                      </a:pPr>
+                      <a:r>
+                        <a:rPr lang="en-US" altLang="zh-CN" sz="3200">
+                          <a:latin typeface="Arial" panose="020B0604020202090204" pitchFamily="34" charset="0"/>
+                          <a:cs typeface="Arial" panose="020B0604020202090204" pitchFamily="34" charset="0"/>
+                        </a:rPr>
+                        <a:t>0.054</a:t>
+                      </a:r>
+                      <a:endParaRPr lang="en-US" altLang="zh-CN" sz="3200">
+                        <a:latin typeface="Arial" panose="020B0604020202090204" pitchFamily="34" charset="0"/>
+                        <a:cs typeface="Arial" panose="020B0604020202090204" pitchFamily="34" charset="0"/>
+                      </a:endParaRPr>
+                    </a:p>
+                  </a:txBody>
+                  <a:tcPr/>
+                </a:tc>
+              </a:tr>
+            </a:tbl>
+          </a:graphicData>
+        </a:graphic>
+      </p:graphicFrame>
+      <p:pic>
+        <p:nvPicPr>
+          <p:cNvPr id="16" name="图片 15" descr="截屏2026-04-11 16.34.53"/>
+          <p:cNvPicPr>
+            <a:picLocks noChangeAspect="1"/>
+          </p:cNvPicPr>
+          <p:nvPr/>
+        </p:nvPicPr>
+        <p:blipFill>
+          <a:blip r:embed="rId3"/>
+          <a:stretch>
+            <a:fillRect/>
+          </a:stretch>
+        </p:blipFill>
+        <p:spPr>
+          <a:xfrm>
+            <a:off x="20807045" y="11461115"/>
+            <a:ext cx="11878945" cy="6116320"/>
+          </a:xfrm>
+          <a:prstGeom prst="rect">
+            <a:avLst/>
+          </a:prstGeom>
+        </p:spPr>
+      </p:pic>
+      <p:sp>
+        <p:nvSpPr>
+          <p:cNvPr id="20" name="文本框 19"/>
+          <p:cNvSpPr txBox="1"/>
+          <p:nvPr/>
+        </p:nvSpPr>
+        <p:spPr>
+          <a:xfrm>
+            <a:off x="20710525" y="10728960"/>
+            <a:ext cx="11782425" cy="645160"/>
+          </a:xfrm>
+          <a:prstGeom prst="rect">
+            <a:avLst/>
+          </a:prstGeom>
+          <a:noFill/>
+        </p:spPr>
+        <p:txBody>
+          <a:bodyPr wrap="square" rtlCol="0">
+            <a:spAutoFit/>
+          </a:bodyPr>
+          <a:p>
+            <a:r>
+              <a:rPr lang="en-US" altLang="zh-CN" sz="3600">
+                <a:solidFill>
+                  <a:schemeClr val="tx2"/>
+                </a:solidFill>
+                <a:latin typeface="Arial" panose="020B0604020202090204" pitchFamily="34" charset="0"/>
+                <a:cs typeface="Arial" panose="020B0604020202090204" pitchFamily="34" charset="0"/>
+                <a:sym typeface="+mn-ea"/>
+              </a:rPr>
+              <a:t>Confusion matrices: Healthy Controls vs. Parkinsonism</a:t>
+            </a:r>
+            <a:endParaRPr lang="zh-CN" altLang="en-US" sz="3600"/>
+          </a:p>
+        </p:txBody>
+      </p:sp>
+      <p:sp>
+        <p:nvSpPr>
+          <p:cNvPr id="21" name="文本框 20"/>
+          <p:cNvSpPr txBox="1"/>
+          <p:nvPr/>
+        </p:nvSpPr>
+        <p:spPr>
+          <a:xfrm>
+            <a:off x="21226780" y="18214975"/>
+            <a:ext cx="4977765" cy="3415030"/>
+          </a:xfrm>
+          <a:prstGeom prst="rect">
+            <a:avLst/>
+          </a:prstGeom>
+          <a:noFill/>
+        </p:spPr>
+        <p:txBody>
+          <a:bodyPr wrap="square" rtlCol="0">
+            <a:spAutoFit/>
+          </a:bodyPr>
+          <a:p>
+            <a:r>
+              <a:rPr lang="en-US" altLang="zh-CN" sz="3600" b="1">
+                <a:latin typeface="Arial" panose="020B0604020202090204" pitchFamily="34" charset="0"/>
+                <a:cs typeface="Arial" panose="020B0604020202090204" pitchFamily="34" charset="0"/>
+              </a:rPr>
+              <a:t>Stage 1&amp;2: </a:t>
+            </a:r>
+            <a:endParaRPr lang="en-US" altLang="zh-CN" sz="3600" b="1">
+              <a:latin typeface="Arial" panose="020B0604020202090204" pitchFamily="34" charset="0"/>
+              <a:cs typeface="Arial" panose="020B0604020202090204" pitchFamily="34" charset="0"/>
+            </a:endParaRPr>
+          </a:p>
+          <a:p>
+            <a:pPr marL="285750" indent="-285750">
+              <a:buFont typeface="Arial" panose="020B0604020202090204" pitchFamily="34" charset="0"/>
+              <a:buChar char="•"/>
+            </a:pPr>
+            <a:r>
+              <a:rPr lang="en-US" altLang="zh-CN" sz="3600" b="1">
+                <a:latin typeface="Arial" panose="020B0604020202090204" pitchFamily="34" charset="0"/>
+                <a:cs typeface="Arial" panose="020B0604020202090204" pitchFamily="34" charset="0"/>
+              </a:rPr>
+              <a:t>Symptom </a:t>
+            </a:r>
+            <a:r>
+              <a:rPr lang="en-US" altLang="zh-CN" sz="3600" b="1">
+                <a:latin typeface="Arial" panose="020B0604020202090204" pitchFamily="34" charset="0"/>
+                <a:cs typeface="Arial" panose="020B0604020202090204" pitchFamily="34" charset="0"/>
+              </a:rPr>
+              <a:t>Lateraity</a:t>
+            </a:r>
+            <a:endParaRPr lang="en-US" altLang="zh-CN" sz="3600" b="1">
+              <a:latin typeface="Arial" panose="020B0604020202090204" pitchFamily="34" charset="0"/>
+              <a:cs typeface="Arial" panose="020B0604020202090204" pitchFamily="34" charset="0"/>
+            </a:endParaRPr>
+          </a:p>
+          <a:p>
+            <a:pPr marL="285750" indent="-285750">
+              <a:buFont typeface="Arial" panose="020B0604020202090204" pitchFamily="34" charset="0"/>
+              <a:buChar char="•"/>
+            </a:pPr>
+            <a:r>
+              <a:rPr lang="en-US" altLang="zh-CN" sz="3600" b="1">
+                <a:latin typeface="Arial" panose="020B0604020202090204" pitchFamily="34" charset="0"/>
+                <a:cs typeface="Arial" panose="020B0604020202090204" pitchFamily="34" charset="0"/>
+              </a:rPr>
+              <a:t>Loss of Smell</a:t>
+            </a:r>
+            <a:endParaRPr lang="en-US" altLang="zh-CN" sz="3600" b="1">
+              <a:latin typeface="Arial" panose="020B0604020202090204" pitchFamily="34" charset="0"/>
+              <a:cs typeface="Arial" panose="020B0604020202090204" pitchFamily="34" charset="0"/>
+            </a:endParaRPr>
+          </a:p>
+          <a:p>
+            <a:pPr marL="285750" indent="-285750">
+              <a:buFont typeface="Arial" panose="020B0604020202090204" pitchFamily="34" charset="0"/>
+              <a:buChar char="•"/>
+            </a:pPr>
+            <a:r>
+              <a:rPr lang="en-US" altLang="zh-CN" sz="3600" b="1">
+                <a:latin typeface="Arial" panose="020B0604020202090204" pitchFamily="34" charset="0"/>
+                <a:cs typeface="Arial" panose="020B0604020202090204" pitchFamily="34" charset="0"/>
+              </a:rPr>
+              <a:t>Gender</a:t>
+            </a:r>
+            <a:endParaRPr lang="en-US" altLang="zh-CN" sz="3600" b="1">
+              <a:latin typeface="Arial" panose="020B0604020202090204" pitchFamily="34" charset="0"/>
+              <a:cs typeface="Arial" panose="020B0604020202090204" pitchFamily="34" charset="0"/>
+            </a:endParaRPr>
+          </a:p>
+          <a:p>
+            <a:pPr marL="285750" indent="-285750">
+              <a:buFont typeface="Arial" panose="020B0604020202090204" pitchFamily="34" charset="0"/>
+              <a:buChar char="•"/>
+            </a:pPr>
+            <a:r>
+              <a:rPr lang="en-US" altLang="zh-CN" sz="3600" b="1">
+                <a:latin typeface="Arial" panose="020B0604020202090204" pitchFamily="34" charset="0"/>
+                <a:cs typeface="Arial" panose="020B0604020202090204" pitchFamily="34" charset="0"/>
+              </a:rPr>
+              <a:t>Age at Visit</a:t>
+            </a:r>
+            <a:endParaRPr lang="en-US" altLang="zh-CN" sz="3600" b="1">
+              <a:latin typeface="Arial" panose="020B0604020202090204" pitchFamily="34" charset="0"/>
+              <a:cs typeface="Arial" panose="020B0604020202090204" pitchFamily="34" charset="0"/>
+            </a:endParaRPr>
+          </a:p>
+          <a:p>
+            <a:pPr marL="285750" indent="-285750">
+              <a:buFont typeface="Arial" panose="020B0604020202090204" pitchFamily="34" charset="0"/>
+              <a:buChar char="•"/>
+            </a:pPr>
+            <a:endParaRPr lang="en-US" altLang="zh-CN"/>
+          </a:p>
+          <a:p>
+            <a:pPr marL="285750" indent="-285750">
+              <a:buFont typeface="Arial" panose="020B0604020202090204" pitchFamily="34" charset="0"/>
+              <a:buChar char="•"/>
+            </a:pPr>
+            <a:endParaRPr lang="en-US" altLang="zh-CN"/>
+          </a:p>
+        </p:txBody>
+      </p:sp>
+      <p:sp>
+        <p:nvSpPr>
+          <p:cNvPr id="27" name="文本框 26"/>
+          <p:cNvSpPr txBox="1"/>
+          <p:nvPr/>
+        </p:nvSpPr>
+        <p:spPr>
+          <a:xfrm>
+            <a:off x="25793700" y="18108295"/>
+            <a:ext cx="6891655" cy="2820670"/>
+          </a:xfrm>
+          <a:prstGeom prst="rect">
+            <a:avLst/>
+          </a:prstGeom>
+          <a:noFill/>
+        </p:spPr>
+        <p:txBody>
+          <a:bodyPr wrap="square" rtlCol="0">
+            <a:noAutofit/>
+          </a:bodyPr>
+          <a:p>
+            <a:r>
+              <a:rPr lang="en-US" altLang="zh-CN" sz="2400">
+                <a:solidFill>
+                  <a:schemeClr val="tx1"/>
+                </a:solidFill>
+              </a:rPr>
+              <a:t>SHAP analysis (Gradient Boosting model) identified </a:t>
+            </a:r>
+            <a:r>
+              <a:rPr lang="en-US" altLang="zh-CN" sz="2400" b="1">
+                <a:solidFill>
+                  <a:schemeClr val="tx1"/>
+                </a:solidFill>
+              </a:rPr>
+              <a:t>four </a:t>
+            </a:r>
+            <a:r>
+              <a:rPr lang="en-US" altLang="zh-CN" sz="2400">
+                <a:solidFill>
+                  <a:schemeClr val="tx1"/>
+                </a:solidFill>
+              </a:rPr>
+              <a:t>key predictors consistent across both classification stages. </a:t>
+            </a:r>
+            <a:r>
+              <a:rPr lang="en-US" altLang="zh-CN" sz="2400" b="1">
+                <a:solidFill>
+                  <a:schemeClr val="tx1"/>
+                </a:solidFill>
+              </a:rPr>
+              <a:t>Symptom laterality</a:t>
+            </a:r>
+            <a:r>
+              <a:rPr lang="en-US" altLang="zh-CN" sz="2400">
+                <a:solidFill>
+                  <a:schemeClr val="tx1"/>
+                </a:solidFill>
+              </a:rPr>
+              <a:t> dominates Stage 1, reflecting its role as a hallmark of parkinsonism. </a:t>
+            </a:r>
+            <a:r>
+              <a:rPr lang="en-US" altLang="zh-CN" sz="2400" b="1">
+                <a:solidFill>
+                  <a:schemeClr val="tx1"/>
+                </a:solidFill>
+              </a:rPr>
+              <a:t>Loss of smell </a:t>
+            </a:r>
+            <a:r>
+              <a:rPr lang="en-US" altLang="zh-CN" sz="2400">
+                <a:solidFill>
+                  <a:schemeClr val="tx1"/>
+                </a:solidFill>
+              </a:rPr>
+              <a:t>becomes the primary discriminating signal in Stage 2, as it is more pronounced in PD than PD-plus. </a:t>
+            </a:r>
+            <a:r>
+              <a:rPr lang="en-US" altLang="zh-CN" sz="2400" b="1">
+                <a:solidFill>
+                  <a:schemeClr val="tx1"/>
+                </a:solidFill>
+              </a:rPr>
+              <a:t>Gender</a:t>
+            </a:r>
+            <a:r>
+              <a:rPr lang="en-US" altLang="zh-CN" sz="2400">
+                <a:solidFill>
+                  <a:schemeClr val="tx1"/>
+                </a:solidFill>
+              </a:rPr>
+              <a:t> and </a:t>
+            </a:r>
+            <a:r>
+              <a:rPr lang="en-US" altLang="zh-CN" sz="2400" b="1">
+                <a:solidFill>
+                  <a:schemeClr val="tx1"/>
+                </a:solidFill>
+              </a:rPr>
+              <a:t>Age</a:t>
+            </a:r>
+            <a:r>
+              <a:rPr lang="en-US" altLang="zh-CN" sz="2400">
+                <a:solidFill>
+                  <a:schemeClr val="tx1"/>
+                </a:solidFill>
+              </a:rPr>
+              <a:t> contribute。 consistently across both stages.</a:t>
+            </a:r>
+            <a:endParaRPr lang="en-US" altLang="zh-CN" sz="2400">
+              <a:solidFill>
+                <a:schemeClr val="tx1"/>
+              </a:solidFill>
+            </a:endParaRPr>
+          </a:p>
+        </p:txBody>
+      </p:sp>
+      <p:sp>
+        <p:nvSpPr>
+          <p:cNvPr id="28" name="文本框 27"/>
+          <p:cNvSpPr txBox="1"/>
+          <p:nvPr/>
+        </p:nvSpPr>
+        <p:spPr>
+          <a:xfrm>
+            <a:off x="21161375" y="22329775"/>
+            <a:ext cx="11419840" cy="1508760"/>
+          </a:xfrm>
+          <a:prstGeom prst="rect">
+            <a:avLst/>
+          </a:prstGeom>
+          <a:noFill/>
+        </p:spPr>
+        <p:txBody>
+          <a:bodyPr wrap="square" rtlCol="0">
+            <a:noAutofit/>
+          </a:bodyPr>
+          <a:p>
+            <a:pPr marL="571500" indent="-571500">
+              <a:buFont typeface="Arial" panose="020B0604020202090204" pitchFamily="34" charset="0"/>
+              <a:buChar char="•"/>
+            </a:pPr>
+            <a:r>
+              <a:rPr lang="en-US" altLang="zh-CN" sz="3600"/>
+              <a:t>Stage 1 (Healthy vs. Parkinsonism) achieved strong classification performance across all five models (AUC up to 0.91), demonstrating that routine clinical variables can reliably distinguish parkinsonism from healthy controls.</a:t>
+            </a:r>
+            <a:endParaRPr lang="en-US" altLang="zh-CN" sz="3600"/>
+          </a:p>
+          <a:p>
+            <a:pPr marL="571500" indent="-571500">
+              <a:buFont typeface="Arial" panose="020B0604020202090204" pitchFamily="34" charset="0"/>
+              <a:buChar char="•"/>
+            </a:pPr>
+            <a:r>
+              <a:rPr lang="en-US" altLang="zh-CN" sz="3600"/>
+              <a:t>Stage 2 (PD vs. PD-Plus) remained challenging for all models, with a best sensitivity of 0.618 (SVM), primarily driven by severe class imbalance in the PD-plus group (4.6% of sample).</a:t>
+            </a:r>
+            <a:endParaRPr lang="en-US" altLang="zh-CN" sz="3600"/>
+          </a:p>
+          <a:p>
+            <a:pPr marL="571500" indent="-571500">
+              <a:buFont typeface="Arial" panose="020B0604020202090204" pitchFamily="34" charset="0"/>
+              <a:buChar char="•"/>
+            </a:pPr>
+            <a:r>
+              <a:rPr lang="en-US" altLang="zh-CN" sz="3600"/>
+              <a:t>Logistic Regression was selected as the final recommended model, offering competitive performance (Stage 1 AUC = 0.91, C-index = 0.908; Stage 2 AUC = 0.62, C-index = 0.616) and </a:t>
+            </a:r>
+            <a:r>
+              <a:rPr lang="en-US" altLang="zh-CN" sz="3600"/>
+              <a:t>great implementation feasibility makes it the most suitable choice for real-world deployment.</a:t>
+            </a:r>
+            <a:endParaRPr lang="en-US" altLang="zh-CN" sz="3600"/>
+          </a:p>
+          <a:p>
+            <a:pPr marL="571500" indent="-571500">
+              <a:buFont typeface="Arial" panose="020B0604020202090204" pitchFamily="34" charset="0"/>
+              <a:buChar char="•"/>
+            </a:pPr>
+            <a:r>
+              <a:rPr lang="en-US" altLang="zh-CN" sz="3600"/>
+              <a:t>Future work should incorporate larger PD-plus cohorts, longitudinal biomarkers </a:t>
+            </a:r>
+            <a:r>
+              <a:rPr lang="en-US" altLang="zh-CN" sz="3600"/>
+              <a:t>and site-based external validation to improve differential diagnosis。</a:t>
+            </a:r>
+            <a:endParaRPr lang="en-US" altLang="zh-CN" sz="3600"/>
           </a:p>
         </p:txBody>
       </p:sp>
     </p:spTree>
-    <p:extLst>
-      <p:ext uri="{BB962C8B-B14F-4D97-AF65-F5344CB8AC3E}">
-        <p14:creationId xmlns:p14="http://schemas.microsoft.com/office/powerpoint/2010/main" val="2149601489"/>
-      </p:ext>
-    </p:extLst>
   </p:cSld>
   <p:clrMapOvr>
     <a:masterClrMapping/>
@@ -9227,7 +11856,7 @@
     </a:clrScheme>
     <a:fontScheme name="Office Theme">
       <a:majorFont>
-        <a:latin typeface="Aptos Display" panose="02110004020202020204"/>
+        <a:latin typeface="Aptos Display"/>
         <a:ea typeface=""/>
         <a:cs typeface=""/>
         <a:font script="Jpan" typeface="游ゴシック Light"/>
@@ -9260,26 +11889,9 @@
         <a:font script="Viet" typeface="Times New Roman"/>
         <a:font script="Uigh" typeface="Microsoft Uighur"/>
         <a:font script="Geor" typeface="Sylfaen"/>
-        <a:font script="Armn" typeface="Arial"/>
-        <a:font script="Bugi" typeface="Leelawadee UI"/>
-        <a:font script="Bopo" typeface="Microsoft JhengHei"/>
-        <a:font script="Java" typeface="Javanese Text"/>
-        <a:font script="Lisu" typeface="Segoe UI"/>
-        <a:font script="Mymr" typeface="Myanmar Text"/>
-        <a:font script="Nkoo" typeface="Ebrima"/>
-        <a:font script="Olck" typeface="Nirmala UI"/>
-        <a:font script="Osma" typeface="Ebrima"/>
-        <a:font script="Phag" typeface="Phagspa"/>
-        <a:font script="Syrn" typeface="Estrangelo Edessa"/>
-        <a:font script="Syrj" typeface="Estrangelo Edessa"/>
-        <a:font script="Syre" typeface="Estrangelo Edessa"/>
-        <a:font script="Sora" typeface="Nirmala UI"/>
-        <a:font script="Tale" typeface="Microsoft Tai Le"/>
-        <a:font script="Talu" typeface="Microsoft New Tai Lue"/>
-        <a:font script="Tfng" typeface="Ebrima"/>
       </a:majorFont>
       <a:minorFont>
-        <a:latin typeface="Aptos" panose="02110004020202020204"/>
+        <a:latin typeface="Aptos"/>
         <a:ea typeface=""/>
         <a:cs typeface=""/>
         <a:font script="Jpan" typeface="游ゴシック"/>
@@ -9312,23 +11924,6 @@
         <a:font script="Viet" typeface="Arial"/>
         <a:font script="Uigh" typeface="Microsoft Uighur"/>
         <a:font script="Geor" typeface="Sylfaen"/>
-        <a:font script="Armn" typeface="Arial"/>
-        <a:font script="Bugi" typeface="Leelawadee UI"/>
-        <a:font script="Bopo" typeface="Microsoft JhengHei"/>
-        <a:font script="Java" typeface="Javanese Text"/>
-        <a:font script="Lisu" typeface="Segoe UI"/>
-        <a:font script="Mymr" typeface="Myanmar Text"/>
-        <a:font script="Nkoo" typeface="Ebrima"/>
-        <a:font script="Olck" typeface="Nirmala UI"/>
-        <a:font script="Osma" typeface="Ebrima"/>
-        <a:font script="Phag" typeface="Phagspa"/>
-        <a:font script="Syrn" typeface="Estrangelo Edessa"/>
-        <a:font script="Syrj" typeface="Estrangelo Edessa"/>
-        <a:font script="Syre" typeface="Estrangelo Edessa"/>
-        <a:font script="Sora" typeface="Nirmala UI"/>
-        <a:font script="Tale" typeface="Microsoft Tai Le"/>
-        <a:font script="Talu" typeface="Microsoft New Tai Lue"/>
-        <a:font script="Tfng" typeface="Ebrima"/>
       </a:minorFont>
     </a:fontScheme>
     <a:fmtScheme name="Office Theme">
@@ -9490,10 +12085,268 @@
       </a:style>
     </a:lnDef>
   </a:objectDefaults>
-  <a:extraClrSchemeLst/>
   <a:extLst>
     <a:ext uri="{05A4C25C-085E-4340-85A3-A5531E510DB2}">
-      <thm15:themeFamily xmlns:thm15="http://schemas.microsoft.com/office/thememl/2012/main" name="Office Theme" id="{2E142A2C-CD16-42D6-873A-C26D2A0506FA}" vid="{1BDDFF52-6CD6-40A5-AB3C-68EB2F1E4D0A}"/>
+      <thm15:themeFamily xmlns:thm15="http://schemas.microsoft.com/office/thememl/2012/main" name="Office Theme" id="{62F939B6-93AF-4DB8-9C6B-D6C7DFDC589F}" vid="{4A3C46E8-61CC-4603-A589-7422A47A8E4A}"/>
+    </a:ext>
+  </a:extLst>
+</a:theme>
+</file>
+
+<file path=ppt/theme/theme2.xml><?xml version="1.0" encoding="utf-8"?>
+<a:theme xmlns:a="http://schemas.openxmlformats.org/drawingml/2006/main" name="Office 主题">
+  <a:themeElements>
+    <a:clrScheme name="Office">
+      <a:dk1>
+        <a:sysClr val="windowText" lastClr="000000"/>
+      </a:dk1>
+      <a:lt1>
+        <a:sysClr val="window" lastClr="FFFFFF"/>
+      </a:lt1>
+      <a:dk2>
+        <a:srgbClr val="44546A"/>
+      </a:dk2>
+      <a:lt2>
+        <a:srgbClr val="E7E6E6"/>
+      </a:lt2>
+      <a:accent1>
+        <a:srgbClr val="5B9BD5"/>
+      </a:accent1>
+      <a:accent2>
+        <a:srgbClr val="ED7D31"/>
+      </a:accent2>
+      <a:accent3>
+        <a:srgbClr val="A5A5A5"/>
+      </a:accent3>
+      <a:accent4>
+        <a:srgbClr val="FFC000"/>
+      </a:accent4>
+      <a:accent5>
+        <a:srgbClr val="4472C4"/>
+      </a:accent5>
+      <a:accent6>
+        <a:srgbClr val="70AD47"/>
+      </a:accent6>
+      <a:hlink>
+        <a:srgbClr val="0563C1"/>
+      </a:hlink>
+      <a:folHlink>
+        <a:srgbClr val="954F72"/>
+      </a:folHlink>
+    </a:clrScheme>
+    <a:fontScheme name="Office">
+      <a:majorFont>
+        <a:latin typeface="Calibri Light"/>
+        <a:ea typeface=""/>
+        <a:cs typeface=""/>
+        <a:font script="Jpan" typeface="ＭＳ Ｐゴシック"/>
+        <a:font script="Hang" typeface="맑은 고딕"/>
+        <a:font script="Hans" typeface="宋体"/>
+        <a:font script="Hant" typeface="新細明體"/>
+        <a:font script="Arab" typeface="Times New Roman"/>
+        <a:font script="Hebr" typeface="Times New Roman"/>
+        <a:font script="Thai" typeface="Angsana New"/>
+        <a:font script="Ethi" typeface="Nyala"/>
+        <a:font script="Beng" typeface="Vrinda"/>
+        <a:font script="Gujr" typeface="Shruti"/>
+        <a:font script="Khmr" typeface="MoolBoran"/>
+        <a:font script="Knda" typeface="Tunga"/>
+        <a:font script="Guru" typeface="Raavi"/>
+        <a:font script="Cans" typeface="Euphemia"/>
+        <a:font script="Cher" typeface="Plantagenet Cherokee"/>
+        <a:font script="Yiii" typeface="Microsoft Yi Baiti"/>
+        <a:font script="Tibt" typeface="Microsoft Himalaya"/>
+        <a:font script="Thaa" typeface="MV Boli"/>
+        <a:font script="Deva" typeface="Mangal"/>
+        <a:font script="Telu" typeface="Gautami"/>
+        <a:font script="Taml" typeface="Latha"/>
+        <a:font script="Syrc" typeface="Estrangelo Edessa"/>
+        <a:font script="Orya" typeface="Kalinga"/>
+        <a:font script="Mlym" typeface="Kartika"/>
+        <a:font script="Laoo" typeface="DokChampa"/>
+        <a:font script="Sinh" typeface="Iskoola Pota"/>
+        <a:font script="Mong" typeface="Mongolian Baiti"/>
+        <a:font script="Viet" typeface="Times New Roman"/>
+        <a:font script="Uigh" typeface="Microsoft Uighur"/>
+        <a:font script="Geor" typeface="Sylfaen"/>
+      </a:majorFont>
+      <a:minorFont>
+        <a:latin typeface="Calibri"/>
+        <a:ea typeface=""/>
+        <a:cs typeface=""/>
+        <a:font script="Jpan" typeface="ＭＳ Ｐゴシック"/>
+        <a:font script="Hang" typeface="맑은 고딕"/>
+        <a:font script="Hans" typeface="宋体"/>
+        <a:font script="Hant" typeface="新細明體"/>
+        <a:font script="Arab" typeface="Arial"/>
+        <a:font script="Hebr" typeface="Arial"/>
+        <a:font script="Thai" typeface="Cordia New"/>
+        <a:font script="Ethi" typeface="Nyala"/>
+        <a:font script="Beng" typeface="Vrinda"/>
+        <a:font script="Gujr" typeface="Shruti"/>
+        <a:font script="Khmr" typeface="DaunPenh"/>
+        <a:font script="Knda" typeface="Tunga"/>
+        <a:font script="Guru" typeface="Raavi"/>
+        <a:font script="Cans" typeface="Euphemia"/>
+        <a:font script="Cher" typeface="Plantagenet Cherokee"/>
+        <a:font script="Yiii" typeface="Microsoft Yi Baiti"/>
+        <a:font script="Tibt" typeface="Microsoft Himalaya"/>
+        <a:font script="Thaa" typeface="MV Boli"/>
+        <a:font script="Deva" typeface="Mangal"/>
+        <a:font script="Telu" typeface="Gautami"/>
+        <a:font script="Taml" typeface="Latha"/>
+        <a:font script="Syrc" typeface="Estrangelo Edessa"/>
+        <a:font script="Orya" typeface="Kalinga"/>
+        <a:font script="Mlym" typeface="Kartika"/>
+        <a:font script="Laoo" typeface="DokChampa"/>
+        <a:font script="Sinh" typeface="Iskoola Pota"/>
+        <a:font script="Mong" typeface="Mongolian Baiti"/>
+        <a:font script="Viet" typeface="Arial"/>
+        <a:font script="Uigh" typeface="Microsoft Uighur"/>
+        <a:font script="Geor" typeface="Sylfaen"/>
+      </a:minorFont>
+    </a:fontScheme>
+    <a:fmtScheme name="Office">
+      <a:fillStyleLst>
+        <a:solidFill>
+          <a:schemeClr val="phClr"/>
+        </a:solidFill>
+        <a:gradFill rotWithShape="1">
+          <a:gsLst>
+            <a:gs pos="0">
+              <a:schemeClr val="phClr">
+                <a:lumMod val="110000"/>
+                <a:satMod val="105000"/>
+                <a:tint val="67000"/>
+              </a:schemeClr>
+            </a:gs>
+            <a:gs pos="50000">
+              <a:schemeClr val="phClr">
+                <a:lumMod val="105000"/>
+                <a:satMod val="103000"/>
+                <a:tint val="73000"/>
+              </a:schemeClr>
+            </a:gs>
+            <a:gs pos="100000">
+              <a:schemeClr val="phClr">
+                <a:lumMod val="105000"/>
+                <a:satMod val="109000"/>
+                <a:tint val="81000"/>
+              </a:schemeClr>
+            </a:gs>
+          </a:gsLst>
+          <a:lin ang="5400000" scaled="0"/>
+        </a:gradFill>
+        <a:gradFill rotWithShape="1">
+          <a:gsLst>
+            <a:gs pos="0">
+              <a:schemeClr val="phClr">
+                <a:satMod val="103000"/>
+                <a:lumMod val="102000"/>
+                <a:tint val="94000"/>
+              </a:schemeClr>
+            </a:gs>
+            <a:gs pos="50000">
+              <a:schemeClr val="phClr">
+                <a:satMod val="110000"/>
+                <a:lumMod val="100000"/>
+                <a:shade val="100000"/>
+              </a:schemeClr>
+            </a:gs>
+            <a:gs pos="100000">
+              <a:schemeClr val="phClr">
+                <a:lumMod val="99000"/>
+                <a:satMod val="120000"/>
+                <a:shade val="78000"/>
+              </a:schemeClr>
+            </a:gs>
+          </a:gsLst>
+          <a:lin ang="5400000" scaled="0"/>
+        </a:gradFill>
+      </a:fillStyleLst>
+      <a:lnStyleLst>
+        <a:ln w="6350" cap="flat" cmpd="sng" algn="ctr">
+          <a:solidFill>
+            <a:schemeClr val="phClr"/>
+          </a:solidFill>
+          <a:prstDash val="solid"/>
+          <a:miter lim="800000"/>
+        </a:ln>
+        <a:ln w="12700" cap="flat" cmpd="sng" algn="ctr">
+          <a:solidFill>
+            <a:schemeClr val="phClr"/>
+          </a:solidFill>
+          <a:prstDash val="solid"/>
+          <a:miter lim="800000"/>
+        </a:ln>
+        <a:ln w="19050" cap="flat" cmpd="sng" algn="ctr">
+          <a:solidFill>
+            <a:schemeClr val="phClr"/>
+          </a:solidFill>
+          <a:prstDash val="solid"/>
+          <a:miter lim="800000"/>
+        </a:ln>
+      </a:lnStyleLst>
+      <a:effectStyleLst>
+        <a:effectStyle>
+          <a:effectLst/>
+        </a:effectStyle>
+        <a:effectStyle>
+          <a:effectLst/>
+        </a:effectStyle>
+        <a:effectStyle>
+          <a:effectLst>
+            <a:outerShdw blurRad="57150" dist="19050" dir="5400000" algn="ctr" rotWithShape="0">
+              <a:srgbClr val="000000">
+                <a:alpha val="63000"/>
+              </a:srgbClr>
+            </a:outerShdw>
+          </a:effectLst>
+        </a:effectStyle>
+      </a:effectStyleLst>
+      <a:bgFillStyleLst>
+        <a:solidFill>
+          <a:schemeClr val="phClr"/>
+        </a:solidFill>
+        <a:solidFill>
+          <a:schemeClr val="phClr">
+            <a:tint val="95000"/>
+            <a:satMod val="170000"/>
+          </a:schemeClr>
+        </a:solidFill>
+        <a:gradFill rotWithShape="1">
+          <a:gsLst>
+            <a:gs pos="0">
+              <a:schemeClr val="phClr">
+                <a:tint val="93000"/>
+                <a:satMod val="150000"/>
+                <a:shade val="98000"/>
+                <a:lumMod val="102000"/>
+              </a:schemeClr>
+            </a:gs>
+            <a:gs pos="50000">
+              <a:schemeClr val="phClr">
+                <a:tint val="98000"/>
+                <a:satMod val="130000"/>
+                <a:shade val="90000"/>
+                <a:lumMod val="103000"/>
+              </a:schemeClr>
+            </a:gs>
+            <a:gs pos="100000">
+              <a:schemeClr val="phClr">
+                <a:shade val="63000"/>
+                <a:satMod val="120000"/>
+              </a:schemeClr>
+            </a:gs>
+          </a:gsLst>
+          <a:lin ang="5400000" scaled="0"/>
+        </a:gradFill>
+      </a:bgFillStyleLst>
+    </a:fmtScheme>
+  </a:themeElements>
+  <a:extLst>
+    <a:ext uri="{05A4C25C-085E-4340-85A3-A5531E510DB2}">
+      <thm15:themeFamily xmlns:thm15="http://schemas.microsoft.com/office/thememl/2012/main" name="Office Theme" id="{62F939B6-93AF-4DB8-9C6B-D6C7DFDC589F}" vid="{4A3C46E8-61CC-4603-A589-7422A47A8E4A}"/>
     </a:ext>
   </a:extLst>
 </a:theme>
